--- a/Programacion II/Clases/Clase 13 - Control de excepciones/Presentacion.pptx
+++ b/Programacion II/Clases/Clase 13 - Control de excepciones/Presentacion.pptx
@@ -18,6 +18,13 @@
     <p:sldId id="266" r:id="rId17"/>
     <p:sldId id="267" r:id="rId18"/>
     <p:sldId id="268" r:id="rId19"/>
+    <p:sldId id="269" r:id="rId20"/>
+    <p:sldId id="270" r:id="rId21"/>
+    <p:sldId id="271" r:id="rId22"/>
+    <p:sldId id="272" r:id="rId23"/>
+    <p:sldId id="273" r:id="rId24"/>
+    <p:sldId id="274" r:id="rId25"/>
+    <p:sldId id="275" r:id="rId26"/>
   </p:sldIdLst>
   <p:sldSz cx="12191695" cy="6858000" type="screen4x3"/>
   <p:notesSz cx="6858000" cy="9144000"/>
@@ -3618,154 +3625,21 @@
                 </a:solidFill>
                 <a:latin typeface="Calibri"/>
               </a:rPr>
-              <a:t>Antes de entregar — autochequeo</a:t>
-            </a:r>
-          </a:p>
-        </p:txBody>
-      </p:sp>
-      <p:sp>
-        <p:nvSpPr>
-          <p:cNvPr id="5" name="Rounded Rectangle 4"/>
-          <p:cNvSpPr/>
-          <p:nvPr/>
-        </p:nvSpPr>
-        <p:spPr>
-          <a:xfrm>
-            <a:off x="457200" y="1261872"/>
-            <a:ext cx="11277295" cy="566928"/>
-          </a:xfrm>
-          <a:prstGeom prst="roundRect">
-            <a:avLst>
-              <a:gd name="adj" fmla="val 12000"/>
-            </a:avLst>
-          </a:prstGeom>
-          <a:solidFill>
-            <a:srgbClr val="F2F2F2"/>
-          </a:solidFill>
-          <a:ln>
-            <a:noFill/>
-          </a:ln>
-        </p:spPr>
-        <p:style>
-          <a:lnRef idx="1">
-            <a:schemeClr val="accent1"/>
-          </a:lnRef>
-          <a:fillRef idx="3">
-            <a:schemeClr val="accent1"/>
-          </a:fillRef>
-          <a:effectRef idx="2">
-            <a:schemeClr val="accent1"/>
-          </a:effectRef>
-          <a:fontRef idx="minor">
-            <a:schemeClr val="lt1"/>
-          </a:fontRef>
-        </p:style>
-        <p:txBody>
-          <a:bodyPr rtlCol="0" anchor="ctr"/>
-          <a:lstStyle/>
-          <a:p>
-            <a:pPr algn="ctr"/>
-          </a:p>
-        </p:txBody>
-      </p:sp>
-      <p:sp>
-        <p:nvSpPr>
-          <p:cNvPr id="6" name="Rectangle 5"/>
-          <p:cNvSpPr/>
-          <p:nvPr/>
-        </p:nvSpPr>
-        <p:spPr>
-          <a:xfrm>
-            <a:off x="640080" y="1408175"/>
-            <a:ext cx="274320" cy="274320"/>
-          </a:xfrm>
-          <a:prstGeom prst="rect">
-            <a:avLst/>
-          </a:prstGeom>
-          <a:solidFill>
-            <a:srgbClr val="FFFFFF"/>
-          </a:solidFill>
-          <a:ln>
-            <a:solidFill>
-              <a:srgbClr val="333333"/>
-            </a:solidFill>
-          </a:ln>
-        </p:spPr>
-        <p:style>
-          <a:lnRef idx="1">
-            <a:schemeClr val="accent1"/>
-          </a:lnRef>
-          <a:fillRef idx="3">
-            <a:schemeClr val="accent1"/>
-          </a:fillRef>
-          <a:effectRef idx="2">
-            <a:schemeClr val="accent1"/>
-          </a:effectRef>
-          <a:fontRef idx="minor">
-            <a:schemeClr val="lt1"/>
-          </a:fontRef>
-        </p:style>
-        <p:txBody>
-          <a:bodyPr rtlCol="0" anchor="ctr"/>
-          <a:lstStyle/>
-          <a:p>
-            <a:pPr algn="ctr"/>
-          </a:p>
-        </p:txBody>
-      </p:sp>
-      <p:sp>
-        <p:nvSpPr>
-          <p:cNvPr id="7" name="Rectangle 6"/>
-          <p:cNvSpPr/>
-          <p:nvPr/>
-        </p:nvSpPr>
-        <p:spPr>
-          <a:xfrm>
-            <a:off x="640080" y="1408175"/>
-            <a:ext cx="73152" cy="274320"/>
-          </a:xfrm>
-          <a:prstGeom prst="rect">
-            <a:avLst/>
-          </a:prstGeom>
-          <a:solidFill>
-            <a:srgbClr val="269CCB"/>
-          </a:solidFill>
-          <a:ln>
-            <a:noFill/>
-          </a:ln>
-        </p:spPr>
-        <p:style>
-          <a:lnRef idx="1">
-            <a:schemeClr val="accent1"/>
-          </a:lnRef>
-          <a:fillRef idx="3">
-            <a:schemeClr val="accent1"/>
-          </a:fillRef>
-          <a:effectRef idx="2">
-            <a:schemeClr val="accent1"/>
-          </a:effectRef>
-          <a:fontRef idx="minor">
-            <a:schemeClr val="lt1"/>
-          </a:fontRef>
-        </p:style>
-        <p:txBody>
-          <a:bodyPr rtlCol="0" anchor="ctr"/>
-          <a:lstStyle/>
-          <a:p>
-            <a:pPr algn="ctr"/>
-          </a:p>
-        </p:txBody>
-      </p:sp>
-      <p:sp>
-        <p:nvSpPr>
-          <p:cNvPr id="8" name="TextBox 7"/>
+              <a:t>Throw y throws se parecen en el nombre y hacen cosas opuestas, y esa... (2/2)</a:t>
+            </a:r>
+          </a:p>
+        </p:txBody>
+      </p:sp>
+      <p:sp>
+        <p:nvSpPr>
+          <p:cNvPr id="5" name="TextBox 4"/>
           <p:cNvSpPr txBox="1"/>
           <p:nvPr/>
         </p:nvSpPr>
         <p:spPr>
           <a:xfrm>
-            <a:off x="1097280" y="1353312"/>
-            <a:ext cx="10362895" cy="402336"/>
+            <a:off x="457200" y="1170432"/>
+            <a:ext cx="11277295" cy="5230368"/>
           </a:xfrm>
           <a:prstGeom prst="rect">
             <a:avLst/>
@@ -3773,354 +3647,63 @@
           <a:noFill/>
         </p:spPr>
         <p:txBody>
-          <a:bodyPr wrap="square" anchor="ctr"/>
-          <a:lstStyle/>
-          <a:p>
-            <a:r>
-              <a:rPr sz="1500" b="0" i="0">
+          <a:bodyPr wrap="square">
+            <a:spAutoFit/>
+          </a:bodyPr>
+          <a:lstStyle/>
+          <a:p>
+            <a:pPr>
+              <a:spcAft>
+                <a:spcPts val="800"/>
+              </a:spcAft>
+            </a:pPr>
+            <a:r>
+              <a:rPr sz="2000" b="0" i="0">
                 <a:solidFill>
                   <a:srgbClr val="333333"/>
                 </a:solidFill>
                 <a:latin typeface="Calibri"/>
               </a:rPr>
-              <a:t>Si borro el archivo datos/mascotas.csv y ejecuto la aplicacion, ¿arranca con lista vacia y un aviso, o se cierra?</a:t>
-            </a:r>
-          </a:p>
-        </p:txBody>
-      </p:sp>
-      <p:sp>
-        <p:nvSpPr>
-          <p:cNvPr id="9" name="Rounded Rectangle 8"/>
-          <p:cNvSpPr/>
-          <p:nvPr/>
-        </p:nvSpPr>
-        <p:spPr>
-          <a:xfrm>
-            <a:off x="457200" y="1938528"/>
-            <a:ext cx="11277295" cy="566928"/>
-          </a:xfrm>
-          <a:prstGeom prst="roundRect">
-            <a:avLst>
-              <a:gd name="adj" fmla="val 12000"/>
-            </a:avLst>
-          </a:prstGeom>
-          <a:solidFill>
-            <a:srgbClr val="F2F2F2"/>
-          </a:solidFill>
-          <a:ln>
-            <a:noFill/>
-          </a:ln>
-        </p:spPr>
-        <p:style>
-          <a:lnRef idx="1">
-            <a:schemeClr val="accent1"/>
-          </a:lnRef>
-          <a:fillRef idx="3">
-            <a:schemeClr val="accent1"/>
-          </a:fillRef>
-          <a:effectRef idx="2">
-            <a:schemeClr val="accent1"/>
-          </a:effectRef>
-          <a:fontRef idx="minor">
-            <a:schemeClr val="lt1"/>
-          </a:fontRef>
-        </p:style>
-        <p:txBody>
-          <a:bodyPr rtlCol="0" anchor="ctr"/>
-          <a:lstStyle/>
-          <a:p>
-            <a:pPr algn="ctr"/>
-          </a:p>
-        </p:txBody>
-      </p:sp>
-      <p:sp>
-        <p:nvSpPr>
-          <p:cNvPr id="10" name="Rectangle 9"/>
-          <p:cNvSpPr/>
-          <p:nvPr/>
-        </p:nvSpPr>
-        <p:spPr>
-          <a:xfrm>
-            <a:off x="640080" y="2084832"/>
-            <a:ext cx="274320" cy="274320"/>
-          </a:xfrm>
-          <a:prstGeom prst="rect">
-            <a:avLst/>
-          </a:prstGeom>
-          <a:solidFill>
-            <a:srgbClr val="FFFFFF"/>
-          </a:solidFill>
-          <a:ln>
-            <a:solidFill>
-              <a:srgbClr val="333333"/>
-            </a:solidFill>
-          </a:ln>
-        </p:spPr>
-        <p:style>
-          <a:lnRef idx="1">
-            <a:schemeClr val="accent1"/>
-          </a:lnRef>
-          <a:fillRef idx="3">
-            <a:schemeClr val="accent1"/>
-          </a:fillRef>
-          <a:effectRef idx="2">
-            <a:schemeClr val="accent1"/>
-          </a:effectRef>
-          <a:fontRef idx="minor">
-            <a:schemeClr val="lt1"/>
-          </a:fontRef>
-        </p:style>
-        <p:txBody>
-          <a:bodyPr rtlCol="0" anchor="ctr"/>
-          <a:lstStyle/>
-          <a:p>
-            <a:pPr algn="ctr"/>
-          </a:p>
-        </p:txBody>
-      </p:sp>
-      <p:sp>
-        <p:nvSpPr>
-          <p:cNvPr id="11" name="Rectangle 10"/>
-          <p:cNvSpPr/>
-          <p:nvPr/>
-        </p:nvSpPr>
-        <p:spPr>
-          <a:xfrm>
-            <a:off x="640080" y="2084832"/>
-            <a:ext cx="73152" cy="274320"/>
-          </a:xfrm>
-          <a:prstGeom prst="rect">
-            <a:avLst/>
-          </a:prstGeom>
-          <a:solidFill>
-            <a:srgbClr val="269CCB"/>
-          </a:solidFill>
-          <a:ln>
-            <a:noFill/>
-          </a:ln>
-        </p:spPr>
-        <p:style>
-          <a:lnRef idx="1">
-            <a:schemeClr val="accent1"/>
-          </a:lnRef>
-          <a:fillRef idx="3">
-            <a:schemeClr val="accent1"/>
-          </a:fillRef>
-          <a:effectRef idx="2">
-            <a:schemeClr val="accent1"/>
-          </a:effectRef>
-          <a:fontRef idx="minor">
-            <a:schemeClr val="lt1"/>
-          </a:fontRef>
-        </p:style>
-        <p:txBody>
-          <a:bodyPr rtlCol="0" anchor="ctr"/>
-          <a:lstStyle/>
-          <a:p>
-            <a:pPr algn="ctr"/>
-          </a:p>
-        </p:txBody>
-      </p:sp>
-      <p:sp>
-        <p:nvSpPr>
-          <p:cNvPr id="12" name="TextBox 11"/>
-          <p:cNvSpPr txBox="1"/>
-          <p:nvPr/>
-        </p:nvSpPr>
-        <p:spPr>
-          <a:xfrm>
-            <a:off x="1097280" y="2029968"/>
-            <a:ext cx="10362895" cy="402336"/>
-          </a:xfrm>
-          <a:prstGeom prst="rect">
-            <a:avLst/>
-          </a:prstGeom>
-          <a:noFill/>
-        </p:spPr>
-        <p:txBody>
-          <a:bodyPr wrap="square" anchor="ctr"/>
-          <a:lstStyle/>
-          <a:p>
-            <a:r>
-              <a:rPr sz="1500" b="0" i="0">
+              <a:t>–   Porque no saben si hay una ventana, una consola o un servidor al otro lado; la capa de interfaz (el JFrame o el menu de consola) CAPTURA y traduce ese error a un JOptionPane que el usuario entiende.</a:t>
+            </a:r>
+          </a:p>
+          <a:p>
+            <a:pPr>
+              <a:spcAft>
+                <a:spcPts val="800"/>
+              </a:spcAft>
+            </a:pPr>
+            <a:r>
+              <a:rPr sz="2000" b="0" i="0">
                 <a:solidFill>
                   <a:srgbClr val="333333"/>
                 </a:solidFill>
                 <a:latin typeface="Calibri"/>
               </a:rPr>
-              <a:t>¿En que capa esta el mensaje que ve el usuario: dentro de la clase Mascota o dentro del formulario? ¿Que pasaria si manana cambio Swing por consola?</a:t>
-            </a:r>
-          </a:p>
-        </p:txBody>
-      </p:sp>
-      <p:sp>
-        <p:nvSpPr>
-          <p:cNvPr id="13" name="Rounded Rectangle 12"/>
-          <p:cNvSpPr/>
-          <p:nvPr/>
-        </p:nvSpPr>
-        <p:spPr>
-          <a:xfrm>
-            <a:off x="457200" y="2615184"/>
-            <a:ext cx="11277295" cy="566928"/>
-          </a:xfrm>
-          <a:prstGeom prst="roundRect">
-            <a:avLst>
-              <a:gd name="adj" fmla="val 12000"/>
-            </a:avLst>
-          </a:prstGeom>
-          <a:solidFill>
-            <a:srgbClr val="F2F2F2"/>
-          </a:solidFill>
-          <a:ln>
-            <a:noFill/>
-          </a:ln>
-        </p:spPr>
-        <p:style>
-          <a:lnRef idx="1">
-            <a:schemeClr val="accent1"/>
-          </a:lnRef>
-          <a:fillRef idx="3">
-            <a:schemeClr val="accent1"/>
-          </a:fillRef>
-          <a:effectRef idx="2">
-            <a:schemeClr val="accent1"/>
-          </a:effectRef>
-          <a:fontRef idx="minor">
-            <a:schemeClr val="lt1"/>
-          </a:fontRef>
-        </p:style>
-        <p:txBody>
-          <a:bodyPr rtlCol="0" anchor="ctr"/>
-          <a:lstStyle/>
-          <a:p>
-            <a:pPr algn="ctr"/>
-          </a:p>
-        </p:txBody>
-      </p:sp>
-      <p:sp>
-        <p:nvSpPr>
-          <p:cNvPr id="14" name="Rectangle 13"/>
-          <p:cNvSpPr/>
-          <p:nvPr/>
-        </p:nvSpPr>
-        <p:spPr>
-          <a:xfrm>
-            <a:off x="640080" y="2761488"/>
-            <a:ext cx="274320" cy="274320"/>
-          </a:xfrm>
-          <a:prstGeom prst="rect">
-            <a:avLst/>
-          </a:prstGeom>
-          <a:solidFill>
-            <a:srgbClr val="FFFFFF"/>
-          </a:solidFill>
-          <a:ln>
-            <a:solidFill>
-              <a:srgbClr val="333333"/>
-            </a:solidFill>
-          </a:ln>
-        </p:spPr>
-        <p:style>
-          <a:lnRef idx="1">
-            <a:schemeClr val="accent1"/>
-          </a:lnRef>
-          <a:fillRef idx="3">
-            <a:schemeClr val="accent1"/>
-          </a:fillRef>
-          <a:effectRef idx="2">
-            <a:schemeClr val="accent1"/>
-          </a:effectRef>
-          <a:fontRef idx="minor">
-            <a:schemeClr val="lt1"/>
-          </a:fontRef>
-        </p:style>
-        <p:txBody>
-          <a:bodyPr rtlCol="0" anchor="ctr"/>
-          <a:lstStyle/>
-          <a:p>
-            <a:pPr algn="ctr"/>
-          </a:p>
-        </p:txBody>
-      </p:sp>
-      <p:sp>
-        <p:nvSpPr>
-          <p:cNvPr id="15" name="Rectangle 14"/>
-          <p:cNvSpPr/>
-          <p:nvPr/>
-        </p:nvSpPr>
-        <p:spPr>
-          <a:xfrm>
-            <a:off x="640080" y="2761488"/>
-            <a:ext cx="73152" cy="274320"/>
-          </a:xfrm>
-          <a:prstGeom prst="rect">
-            <a:avLst/>
-          </a:prstGeom>
-          <a:solidFill>
-            <a:srgbClr val="269CCB"/>
-          </a:solidFill>
-          <a:ln>
-            <a:noFill/>
-          </a:ln>
-        </p:spPr>
-        <p:style>
-          <a:lnRef idx="1">
-            <a:schemeClr val="accent1"/>
-          </a:lnRef>
-          <a:fillRef idx="3">
-            <a:schemeClr val="accent1"/>
-          </a:fillRef>
-          <a:effectRef idx="2">
-            <a:schemeClr val="accent1"/>
-          </a:effectRef>
-          <a:fontRef idx="minor">
-            <a:schemeClr val="lt1"/>
-          </a:fontRef>
-        </p:style>
-        <p:txBody>
-          <a:bodyPr rtlCol="0" anchor="ctr"/>
-          <a:lstStyle/>
-          <a:p>
-            <a:pPr algn="ctr"/>
-          </a:p>
-        </p:txBody>
-      </p:sp>
-      <p:sp>
-        <p:nvSpPr>
-          <p:cNvPr id="16" name="TextBox 15"/>
-          <p:cNvSpPr txBox="1"/>
-          <p:nvPr/>
-        </p:nvSpPr>
-        <p:spPr>
-          <a:xfrm>
-            <a:off x="1097280" y="2706624"/>
-            <a:ext cx="10362895" cy="402336"/>
-          </a:xfrm>
-          <a:prstGeom prst="rect">
-            <a:avLst/>
-          </a:prstGeom>
-          <a:noFill/>
-        </p:spPr>
-        <p:txBody>
-          <a:bodyPr wrap="square" anchor="ctr"/>
-          <a:lstStyle/>
-          <a:p>
-            <a:r>
-              <a:rPr sz="1500" b="0" i="0">
+              <a:t>–   Crear una excepcion propia vale la pena por dos motivos: como DatoInvalidoException extiende Exception queda checked, es decir que el compilador no deja que nadie llame a setEdad sin hacerse cargo del error</a:t>
+            </a:r>
+          </a:p>
+          <a:p>
+            <a:pPr>
+              <a:spcAft>
+                <a:spcPts val="800"/>
+              </a:spcAft>
+            </a:pPr>
+            <a:r>
+              <a:rPr sz="2000" b="0" i="0">
                 <a:solidFill>
                   <a:srgbClr val="333333"/>
                 </a:solidFill>
                 <a:latin typeface="Calibri"/>
               </a:rPr>
-              <a:t>¿Cuantos catch de mi proyecto no tienen ni una linea adentro, y que haria el sistema si esa falla ocurriera de verdad?</a:t>
-            </a:r>
-          </a:p>
-        </p:txBody>
-      </p:sp>
-      <p:sp>
-        <p:nvSpPr>
-          <p:cNvPr id="17" name="TextBox 16"/>
+              <a:t>–   Y ademas el mensaje ya viene escrito en lenguaje de la clinica y no en lenguaje de la maquina: el usuario lee 'La edad debe ser un numero entero' y no 'For input string: tres'.</a:t>
+            </a:r>
+          </a:p>
+        </p:txBody>
+      </p:sp>
+      <p:sp>
+        <p:nvSpPr>
+          <p:cNvPr id="6" name="TextBox 5"/>
           <p:cNvSpPr txBox="1"/>
           <p:nvPr/>
         </p:nvSpPr>
@@ -4294,7 +3877,7 @@
                 </a:solidFill>
                 <a:latin typeface="Calibri"/>
               </a:rPr>
-              <a:t>Criterios de exito / entregable</a:t>
+              <a:t>El catch vacio, ese catch (Exception e) { } que aparece cuando VS Code...</a:t>
             </a:r>
           </a:p>
         </p:txBody>
@@ -4333,25 +3916,7 @@
                 </a:solidFill>
                 <a:latin typeface="Calibri"/>
               </a:rPr>
-              <a:t>–   </a:t>
-            </a:r>
-            <a:r>
-              <a:rPr sz="2000" b="1" i="0">
-                <a:solidFill>
-                  <a:srgbClr val="333333"/>
-                </a:solidFill>
-                <a:latin typeface="Calibri"/>
-              </a:rPr>
-              <a:t>Entregable:</a:t>
-            </a:r>
-            <a:r>
-              <a:rPr sz="2000" b="0" i="0">
-                <a:solidFill>
-                  <a:srgbClr val="333333"/>
-                </a:solidFill>
-                <a:latin typeface="Calibri"/>
-              </a:rPr>
-              <a:t> Clase DatoInvalidoException mas los setters validados de Mascota y la carga del CSV con try-with-resources, con evidencia de cinco pruebas de entrada (cuatro malas y una valida), subido a la plataforma del curso.</a:t>
+              <a:t>–   El catch vacio, ese catch (Exception e) { } que aparece cuando VS Code ofrece en la bombilla 'Surround with try/catch' y el estudiante borra el contenido para que no moleste, es el error mas caro del curso.</a:t>
             </a:r>
           </a:p>
           <a:p>
@@ -4367,25 +3932,7 @@
                 </a:solidFill>
                 <a:latin typeface="Calibri"/>
               </a:rPr>
-              <a:t>–   </a:t>
-            </a:r>
-            <a:r>
-              <a:rPr sz="2000" b="1" i="0">
-                <a:solidFill>
-                  <a:srgbClr val="333333"/>
-                </a:solidFill>
-                <a:latin typeface="Calibri"/>
-              </a:rPr>
-              <a:t>Exito:</a:t>
-            </a:r>
-            <a:r>
-              <a:rPr sz="2000" b="0" i="0">
-                <a:solidFill>
-                  <a:srgbClr val="333333"/>
-                </a:solidFill>
-                <a:latin typeface="Calibri"/>
-              </a:rPr>
-              <a:t> Existe la clase DatoInvalidoException que extiende Exception y todos sus mensajes estan escritos en lenguaje de la clinica, no en lenguaje tecnico.</a:t>
+              <a:t>–   Silencia la falla pero no la arregla: el objeto queda a medio construir, la mascota nunca se agrego a la lista</a:t>
             </a:r>
           </a:p>
           <a:p>
@@ -4401,25 +3948,7 @@
                 </a:solidFill>
                 <a:latin typeface="Calibri"/>
               </a:rPr>
-              <a:t>–   </a:t>
-            </a:r>
-            <a:r>
-              <a:rPr sz="2000" b="1" i="0">
-                <a:solidFill>
-                  <a:srgbClr val="333333"/>
-                </a:solidFill>
-                <a:latin typeface="Calibri"/>
-              </a:rPr>
-              <a:t>Exito:</a:t>
-            </a:r>
-            <a:r>
-              <a:rPr sz="2000" b="0" i="0">
-                <a:solidFill>
-                  <a:srgbClr val="333333"/>
-                </a:solidFill>
-                <a:latin typeface="Calibri"/>
-              </a:rPr>
-              <a:t> Con las cinco entradas de prueba (vacio, texto, negativo, fuera de rango y valida) la aplicacion nunca se cierra ni muestra stack trace al usuario, y solo la ultima agrega la mascota.</a:t>
+              <a:t>–   El usuario cree que guardo y el error reaparece tres pantallas mas adelante como un NullPointerException que no tiene nada que ver con la causa real.</a:t>
             </a:r>
           </a:p>
           <a:p>
@@ -4435,25 +3964,7 @@
                 </a:solidFill>
                 <a:latin typeface="Calibri"/>
               </a:rPr>
-              <a:t>–   </a:t>
-            </a:r>
-            <a:r>
-              <a:rPr sz="2000" b="1" i="0">
-                <a:solidFill>
-                  <a:srgbClr val="333333"/>
-                </a:solidFill>
-                <a:latin typeface="Calibri"/>
-              </a:rPr>
-              <a:t>Exito:</a:t>
-            </a:r>
-            <a:r>
-              <a:rPr sz="2000" b="0" i="0">
-                <a:solidFill>
-                  <a:srgbClr val="333333"/>
-                </a:solidFill>
-                <a:latin typeface="Calibri"/>
-              </a:rPr>
-              <a:t> La lectura del CSV usa try-with-resources, distingue FileNotFoundException de IOException y omite unicamente las lineas malas, conservando las buenas.</a:t>
+              <a:t>–   Manejar una excepcion significa hacer al menos una de cuatro cosas: informarle al usuario en su idioma, registrar el problema para poder repararlo despues</a:t>
             </a:r>
           </a:p>
           <a:p>
@@ -4469,25 +3980,7 @@
                 </a:solidFill>
                 <a:latin typeface="Calibri"/>
               </a:rPr>
-              <a:t>–   </a:t>
-            </a:r>
-            <a:r>
-              <a:rPr sz="2000" b="1" i="0">
-                <a:solidFill>
-                  <a:srgbClr val="333333"/>
-                </a:solidFill>
-                <a:latin typeface="Calibri"/>
-              </a:rPr>
-              <a:t>Exito:</a:t>
-            </a:r>
-            <a:r>
-              <a:rPr sz="2000" b="0" i="0">
-                <a:solidFill>
-                  <a:srgbClr val="333333"/>
-                </a:solidFill>
-                <a:latin typeface="Calibri"/>
-              </a:rPr>
-              <a:t> No queda ningun catch vacio en el proyecto: cada catch informa, registra o asume un valor por defecto documentado con un comentario.</a:t>
+              <a:t>–   Asumir un valor por defecto que este documentado, o relanzar la excepcion envuelta en otra con mas contexto.</a:t>
             </a:r>
           </a:p>
           <a:p>
@@ -4503,25 +3996,23 @@
                 </a:solidFill>
                 <a:latin typeface="Calibri"/>
               </a:rPr>
-              <a:t>–   </a:t>
-            </a:r>
-            <a:r>
-              <a:rPr sz="2000" b="1" i="0">
+              <a:t>–   Ojo: e.printStackTrace() tampoco es manejar, es apenas dejar una nota en una consola que el usuario final nunca ve.</a:t>
+            </a:r>
+          </a:p>
+          <a:p>
+            <a:pPr>
+              <a:spcAft>
+                <a:spcPts val="800"/>
+              </a:spcAft>
+            </a:pPr>
+            <a:r>
+              <a:rPr sz="2000" b="0" i="0">
                 <a:solidFill>
                   <a:srgbClr val="333333"/>
                 </a:solidFill>
                 <a:latin typeface="Calibri"/>
               </a:rPr>
-              <a:t>Entrega en la plataforma del curso</a:t>
-            </a:r>
-            <a:r>
-              <a:rPr sz="2000" b="0" i="0">
-                <a:solidFill>
-                  <a:srgbClr val="333333"/>
-                </a:solidFill>
-                <a:latin typeface="Calibri"/>
-              </a:rPr>
-              <a:t> — en la fecha que indique el docente.</a:t>
+              <a:t>–   Y la mejor excepcion es la que no ocurre: validar antes de convertir (revisar null, aplicar trim, verificar isEmpty y comprobar el rango) evita el 80 por ciento de los try-catch de VetCare y hace que el codigo se lea como las reglas del negocio.</a:t>
             </a:r>
           </a:p>
         </p:txBody>
@@ -4702,7 +4193,7 @@
                 </a:solidFill>
                 <a:latin typeface="Calibri"/>
               </a:rPr>
-              <a:t>Para el PI esta semana</a:t>
+              <a:t>Validar la edad sin que VetCare se caiga</a:t>
             </a:r>
           </a:p>
         </p:txBody>
@@ -4716,7 +4207,7 @@
         <p:spPr>
           <a:xfrm>
             <a:off x="457200" y="1261872"/>
-            <a:ext cx="11277295" cy="1051560"/>
+            <a:ext cx="11277295" cy="4773168"/>
           </a:xfrm>
           <a:prstGeom prst="roundRect">
             <a:avLst>
@@ -4724,7 +4215,7 @@
             </a:avLst>
           </a:prstGeom>
           <a:solidFill>
-            <a:srgbClr val="E8F4FA"/>
+            <a:srgbClr val="1E2A38"/>
           </a:solidFill>
           <a:ln>
             <a:noFill/>
@@ -4761,13 +4252,13 @@
         <p:spPr>
           <a:xfrm>
             <a:off x="457200" y="1261872"/>
-            <a:ext cx="128016" cy="1051560"/>
+            <a:ext cx="11277295" cy="320040"/>
           </a:xfrm>
           <a:prstGeom prst="rect">
             <a:avLst/>
           </a:prstGeom>
           <a:solidFill>
-            <a:srgbClr val="269CCB"/>
+            <a:srgbClr val="095292"/>
           </a:solidFill>
           <a:ln>
             <a:noFill/>
@@ -4803,8 +4294,40 @@
         </p:nvSpPr>
         <p:spPr>
           <a:xfrm>
-            <a:off x="777240" y="1399031"/>
-            <a:ext cx="10774375" cy="822959"/>
+            <a:off x="685800" y="1307592"/>
+            <a:ext cx="10820095" cy="256032"/>
+          </a:xfrm>
+          <a:prstGeom prst="rect">
+            <a:avLst/>
+          </a:prstGeom>
+          <a:noFill/>
+        </p:spPr>
+        <p:txBody>
+          <a:bodyPr wrap="square" anchor="ctr"/>
+          <a:lstStyle/>
+          <a:p>
+            <a:r>
+              <a:rPr sz="1000" b="1" i="0">
+                <a:solidFill>
+                  <a:srgbClr val="269CCB"/>
+                </a:solidFill>
+                <a:latin typeface="Calibri"/>
+              </a:rPr>
+              <a:t>● ● ●</a:t>
+            </a:r>
+          </a:p>
+        </p:txBody>
+      </p:sp>
+      <p:sp>
+        <p:nvSpPr>
+          <p:cNvPr id="8" name="TextBox 7"/>
+          <p:cNvSpPr txBox="1"/>
+          <p:nvPr/>
+        </p:nvSpPr>
+        <p:spPr>
+          <a:xfrm>
+            <a:off x="777240" y="1719072"/>
+            <a:ext cx="10637215" cy="4133087"/>
           </a:xfrm>
           <a:prstGeom prst="rect">
             <a:avLst/>
@@ -4817,132 +4340,257 @@
           </a:bodyPr>
           <a:lstStyle/>
           <a:p>
-            <a:r>
-              <a:rPr sz="1200" b="1" i="0">
-                <a:solidFill>
-                  <a:srgbClr val="269CCB"/>
-                </a:solidFill>
-                <a:latin typeface="Calibri"/>
-              </a:rPr>
-              <a:t>Info</a:t>
-            </a:r>
-          </a:p>
-          <a:p>
             <a:pPr>
-              <a:spcBef>
+              <a:spcAft>
                 <a:spcPts val="400"/>
-              </a:spcBef>
+              </a:spcAft>
             </a:pPr>
             <a:r>
               <a:rPr sz="1400" b="0" i="0">
                 <a:solidFill>
-                  <a:srgbClr val="333333"/>
-                </a:solidFill>
-                <a:latin typeface="Calibri"/>
-              </a:rPr>
-              <a:t>Hito: El registro de mascotas de VetCare valida edad, peso e ID y avisa con un mensaje claro en lugar de cerrarse.</a:t>
-            </a:r>
-          </a:p>
-        </p:txBody>
-      </p:sp>
-      <p:sp>
-        <p:nvSpPr>
-          <p:cNvPr id="8" name="Rounded Rectangle 7"/>
-          <p:cNvSpPr/>
-          <p:nvPr/>
-        </p:nvSpPr>
-        <p:spPr>
-          <a:xfrm>
-            <a:off x="457200" y="2478024"/>
-            <a:ext cx="11277295" cy="1051560"/>
-          </a:xfrm>
-          <a:prstGeom prst="roundRect">
-            <a:avLst>
-              <a:gd name="adj" fmla="val 12000"/>
-            </a:avLst>
-          </a:prstGeom>
-          <a:solidFill>
-            <a:srgbClr val="FFF8E1"/>
-          </a:solidFill>
-          <a:ln>
-            <a:noFill/>
-          </a:ln>
-        </p:spPr>
-        <p:style>
-          <a:lnRef idx="1">
-            <a:schemeClr val="accent1"/>
-          </a:lnRef>
-          <a:fillRef idx="3">
-            <a:schemeClr val="accent1"/>
-          </a:fillRef>
-          <a:effectRef idx="2">
-            <a:schemeClr val="accent1"/>
-          </a:effectRef>
-          <a:fontRef idx="minor">
-            <a:schemeClr val="lt1"/>
-          </a:fontRef>
-        </p:style>
-        <p:txBody>
-          <a:bodyPr rtlCol="0" anchor="ctr"/>
-          <a:lstStyle/>
-          <a:p>
-            <a:pPr algn="ctr"/>
-          </a:p>
-        </p:txBody>
-      </p:sp>
-      <p:sp>
-        <p:nvSpPr>
-          <p:cNvPr id="9" name="Rectangle 8"/>
-          <p:cNvSpPr/>
-          <p:nvPr/>
-        </p:nvSpPr>
-        <p:spPr>
-          <a:xfrm>
-            <a:off x="457200" y="2478024"/>
-            <a:ext cx="128016" cy="1051560"/>
-          </a:xfrm>
-          <a:prstGeom prst="rect">
-            <a:avLst/>
-          </a:prstGeom>
-          <a:solidFill>
-            <a:srgbClr val="FFD000"/>
-          </a:solidFill>
-          <a:ln>
-            <a:noFill/>
-          </a:ln>
-        </p:spPr>
-        <p:style>
-          <a:lnRef idx="1">
-            <a:schemeClr val="accent1"/>
-          </a:lnRef>
-          <a:fillRef idx="3">
-            <a:schemeClr val="accent1"/>
-          </a:fillRef>
-          <a:effectRef idx="2">
-            <a:schemeClr val="accent1"/>
-          </a:effectRef>
-          <a:fontRef idx="minor">
-            <a:schemeClr val="lt1"/>
-          </a:fontRef>
-        </p:style>
-        <p:txBody>
-          <a:bodyPr rtlCol="0" anchor="ctr"/>
-          <a:lstStyle/>
-          <a:p>
-            <a:pPr algn="ctr"/>
-          </a:p>
-        </p:txBody>
-      </p:sp>
-      <p:sp>
-        <p:nvSpPr>
-          <p:cNvPr id="10" name="TextBox 9"/>
+                  <a:srgbClr val="FFFFFF"/>
+                </a:solidFill>
+                <a:latin typeface="Calibri"/>
+              </a:rPr>
+              <a:t>public void setEdad(String texto) throws DatoInvalidoException {   // el dominio LANZA, no muestra ventanas</a:t>
+            </a:r>
+          </a:p>
+          <a:p>
+            <a:pPr>
+              <a:spcAft>
+                <a:spcPts val="400"/>
+              </a:spcAft>
+            </a:pPr>
+            <a:r>
+              <a:rPr sz="1400" b="0" i="0">
+                <a:solidFill>
+                  <a:srgbClr val="FFFFFF"/>
+                </a:solidFill>
+                <a:latin typeface="Calibri"/>
+              </a:rPr>
+              <a:t>    if (texto == null || texto.trim().isEmpty()) {</a:t>
+            </a:r>
+          </a:p>
+          <a:p>
+            <a:pPr>
+              <a:spcAft>
+                <a:spcPts val="400"/>
+              </a:spcAft>
+            </a:pPr>
+            <a:r>
+              <a:rPr sz="1400" b="0" i="0">
+                <a:solidFill>
+                  <a:srgbClr val="FFFFFF"/>
+                </a:solidFill>
+                <a:latin typeface="Calibri"/>
+              </a:rPr>
+              <a:t>        throw new DatoInvalidoException("La edad no puede quedar vacia.");   // validar ANTES de convertir</a:t>
+            </a:r>
+          </a:p>
+          <a:p>
+            <a:pPr>
+              <a:spcAft>
+                <a:spcPts val="400"/>
+              </a:spcAft>
+            </a:pPr>
+            <a:r>
+              <a:rPr sz="1400" b="0" i="0">
+                <a:solidFill>
+                  <a:srgbClr val="FFFFFF"/>
+                </a:solidFill>
+                <a:latin typeface="Calibri"/>
+              </a:rPr>
+              <a:t>    }</a:t>
+            </a:r>
+          </a:p>
+          <a:p>
+            <a:pPr>
+              <a:spcAft>
+                <a:spcPts val="400"/>
+              </a:spcAft>
+            </a:pPr>
+            <a:r>
+              <a:rPr sz="1400" b="0" i="0">
+                <a:solidFill>
+                  <a:srgbClr val="FFFFFF"/>
+                </a:solidFill>
+                <a:latin typeface="Calibri"/>
+              </a:rPr>
+              <a:t>    int valor;</a:t>
+            </a:r>
+          </a:p>
+          <a:p>
+            <a:pPr>
+              <a:spcAft>
+                <a:spcPts val="400"/>
+              </a:spcAft>
+            </a:pPr>
+            <a:r>
+              <a:rPr sz="1400" b="0" i="0">
+                <a:solidFill>
+                  <a:srgbClr val="FFFFFF"/>
+                </a:solidFill>
+                <a:latin typeface="Calibri"/>
+              </a:rPr>
+              <a:t>    try {</a:t>
+            </a:r>
+          </a:p>
+          <a:p>
+            <a:pPr>
+              <a:spcAft>
+                <a:spcPts val="400"/>
+              </a:spcAft>
+            </a:pPr>
+            <a:r>
+              <a:rPr sz="1400" b="0" i="0">
+                <a:solidFill>
+                  <a:srgbClr val="FFFFFF"/>
+                </a:solidFill>
+                <a:latin typeface="Calibri"/>
+              </a:rPr>
+              <a:t>        valor = Integer.parseInt(texto.trim());        // aqui nace NumberFormatException (unchecked)</a:t>
+            </a:r>
+          </a:p>
+          <a:p>
+            <a:pPr>
+              <a:spcAft>
+                <a:spcPts val="400"/>
+              </a:spcAft>
+            </a:pPr>
+            <a:r>
+              <a:rPr sz="1400" b="0" i="0">
+                <a:solidFill>
+                  <a:srgbClr val="FFFFFF"/>
+                </a:solidFill>
+                <a:latin typeface="Calibri"/>
+              </a:rPr>
+              <a:t>    } catch (NumberFormatException e) {</a:t>
+            </a:r>
+          </a:p>
+          <a:p>
+            <a:pPr>
+              <a:spcAft>
+                <a:spcPts val="400"/>
+              </a:spcAft>
+            </a:pPr>
+            <a:r>
+              <a:rPr sz="1400" b="0" i="0">
+                <a:solidFill>
+                  <a:srgbClr val="FFFFFF"/>
+                </a:solidFill>
+                <a:latin typeface="Calibri"/>
+              </a:rPr>
+              <a:t>        throw new DatoInvalidoException("La edad debe ser un numero entero. Escribieron: " + texto);</a:t>
+            </a:r>
+          </a:p>
+          <a:p>
+            <a:pPr>
+              <a:spcAft>
+                <a:spcPts val="400"/>
+              </a:spcAft>
+            </a:pPr>
+            <a:r>
+              <a:rPr sz="1400" b="0" i="0">
+                <a:solidFill>
+                  <a:srgbClr val="FFFFFF"/>
+                </a:solidFill>
+                <a:latin typeface="Calibri"/>
+              </a:rPr>
+              <a:t>    }</a:t>
+            </a:r>
+          </a:p>
+          <a:p>
+            <a:pPr>
+              <a:spcAft>
+                <a:spcPts val="400"/>
+              </a:spcAft>
+            </a:pPr>
+            <a:r>
+              <a:rPr sz="1400" b="0" i="0">
+                <a:solidFill>
+                  <a:srgbClr val="FFFFFF"/>
+                </a:solidFill>
+                <a:latin typeface="Calibri"/>
+              </a:rPr>
+              <a:t>    if (valor &lt; 0 || valor &gt; 30) {                     // regla del negocio, no del lenguaje</a:t>
+            </a:r>
+          </a:p>
+          <a:p>
+            <a:pPr>
+              <a:spcAft>
+                <a:spcPts val="400"/>
+              </a:spcAft>
+            </a:pPr>
+            <a:r>
+              <a:rPr sz="1400" b="0" i="0">
+                <a:solidFill>
+                  <a:srgbClr val="FFFFFF"/>
+                </a:solidFill>
+                <a:latin typeface="Calibri"/>
+              </a:rPr>
+              <a:t>        throw new DatoInvalidoException("Edad fuera de rango (0-30 anios). Recibi: " + valor);</a:t>
+            </a:r>
+          </a:p>
+          <a:p>
+            <a:pPr>
+              <a:spcAft>
+                <a:spcPts val="400"/>
+              </a:spcAft>
+            </a:pPr>
+            <a:r>
+              <a:rPr sz="1400" b="0" i="0">
+                <a:solidFill>
+                  <a:srgbClr val="FFFFFF"/>
+                </a:solidFill>
+                <a:latin typeface="Calibri"/>
+              </a:rPr>
+              <a:t>    }</a:t>
+            </a:r>
+          </a:p>
+          <a:p>
+            <a:pPr>
+              <a:spcAft>
+                <a:spcPts val="400"/>
+              </a:spcAft>
+            </a:pPr>
+            <a:r>
+              <a:rPr sz="1400" b="0" i="0">
+                <a:solidFill>
+                  <a:srgbClr val="FFFFFF"/>
+                </a:solidFill>
+                <a:latin typeface="Calibri"/>
+              </a:rPr>
+              <a:t>    this.edad = valor;   // solo se asigna cuando el dato paso las tres validaciones</a:t>
+            </a:r>
+          </a:p>
+          <a:p>
+            <a:pPr>
+              <a:spcAft>
+                <a:spcPts val="400"/>
+              </a:spcAft>
+            </a:pPr>
+            <a:r>
+              <a:rPr sz="1400" b="0" i="0">
+                <a:solidFill>
+                  <a:srgbClr val="FFFFFF"/>
+                </a:solidFill>
+                <a:latin typeface="Calibri"/>
+              </a:rPr>
+              <a:t>}</a:t>
+            </a:r>
+          </a:p>
+        </p:txBody>
+      </p:sp>
+      <p:sp>
+        <p:nvSpPr>
+          <p:cNvPr id="9" name="TextBox 8"/>
           <p:cNvSpPr txBox="1"/>
           <p:nvPr/>
         </p:nvSpPr>
         <p:spPr>
           <a:xfrm>
-            <a:off x="777240" y="2615184"/>
-            <a:ext cx="10774375" cy="822959"/>
+            <a:off x="457200" y="6080760"/>
+            <a:ext cx="11277295" cy="320040"/>
           </a:xfrm>
           <a:prstGeom prst="rect">
             <a:avLst/>
@@ -4955,175 +4603,22 @@
           </a:bodyPr>
           <a:lstStyle/>
           <a:p>
-            <a:r>
-              <a:rPr sz="1200" b="1" i="0">
-                <a:solidFill>
-                  <a:srgbClr val="FFD000"/>
-                </a:solidFill>
-                <a:latin typeface="Calibri"/>
-              </a:rPr>
-              <a:t>Aclaración</a:t>
-            </a:r>
-          </a:p>
-          <a:p>
-            <a:pPr>
-              <a:spcBef>
-                <a:spcPts val="400"/>
-              </a:spcBef>
-            </a:pPr>
-            <a:r>
-              <a:rPr sz="1400" b="0" i="0">
-                <a:solidFill>
-                  <a:srgbClr val="333333"/>
-                </a:solidFill>
-                <a:latin typeface="Calibri"/>
-              </a:rPr>
-              <a:t>Enunciado completo: Clases/Proyecto Integrador/ (VetCare).</a:t>
-            </a:r>
-          </a:p>
-        </p:txBody>
-      </p:sp>
-      <p:sp>
-        <p:nvSpPr>
-          <p:cNvPr id="11" name="Rounded Rectangle 10"/>
-          <p:cNvSpPr/>
-          <p:nvPr/>
-        </p:nvSpPr>
-        <p:spPr>
-          <a:xfrm>
-            <a:off x="457200" y="3694176"/>
-            <a:ext cx="11277295" cy="1051560"/>
-          </a:xfrm>
-          <a:prstGeom prst="roundRect">
-            <a:avLst>
-              <a:gd name="adj" fmla="val 12000"/>
-            </a:avLst>
-          </a:prstGeom>
-          <a:solidFill>
-            <a:srgbClr val="FBE4E4"/>
-          </a:solidFill>
-          <a:ln>
-            <a:noFill/>
-          </a:ln>
-        </p:spPr>
-        <p:style>
-          <a:lnRef idx="1">
-            <a:schemeClr val="accent1"/>
-          </a:lnRef>
-          <a:fillRef idx="3">
-            <a:schemeClr val="accent1"/>
-          </a:fillRef>
-          <a:effectRef idx="2">
-            <a:schemeClr val="accent1"/>
-          </a:effectRef>
-          <a:fontRef idx="minor">
-            <a:schemeClr val="lt1"/>
-          </a:fontRef>
-        </p:style>
-        <p:txBody>
-          <a:bodyPr rtlCol="0" anchor="ctr"/>
-          <a:lstStyle/>
-          <a:p>
             <a:pPr algn="ctr"/>
-          </a:p>
-        </p:txBody>
-      </p:sp>
-      <p:sp>
-        <p:nvSpPr>
-          <p:cNvPr id="12" name="Rectangle 11"/>
-          <p:cNvSpPr/>
-          <p:nvPr/>
-        </p:nvSpPr>
-        <p:spPr>
-          <a:xfrm>
-            <a:off x="457200" y="3694176"/>
-            <a:ext cx="128016" cy="1051560"/>
-          </a:xfrm>
-          <a:prstGeom prst="rect">
-            <a:avLst/>
-          </a:prstGeom>
-          <a:solidFill>
-            <a:srgbClr val="A02030"/>
-          </a:solidFill>
-          <a:ln>
-            <a:noFill/>
-          </a:ln>
-        </p:spPr>
-        <p:style>
-          <a:lnRef idx="1">
-            <a:schemeClr val="accent1"/>
-          </a:lnRef>
-          <a:fillRef idx="3">
-            <a:schemeClr val="accent1"/>
-          </a:fillRef>
-          <a:effectRef idx="2">
-            <a:schemeClr val="accent1"/>
-          </a:effectRef>
-          <a:fontRef idx="minor">
-            <a:schemeClr val="lt1"/>
-          </a:fontRef>
-        </p:style>
-        <p:txBody>
-          <a:bodyPr rtlCol="0" anchor="ctr"/>
-          <a:lstStyle/>
-          <a:p>
-            <a:pPr algn="ctr"/>
-          </a:p>
-        </p:txBody>
-      </p:sp>
-      <p:sp>
-        <p:nvSpPr>
-          <p:cNvPr id="13" name="TextBox 12"/>
-          <p:cNvSpPr txBox="1"/>
-          <p:nvPr/>
-        </p:nvSpPr>
-        <p:spPr>
-          <a:xfrm>
-            <a:off x="777240" y="3831336"/>
-            <a:ext cx="10774375" cy="822959"/>
-          </a:xfrm>
-          <a:prstGeom prst="rect">
-            <a:avLst/>
-          </a:prstGeom>
-          <a:noFill/>
-        </p:spPr>
-        <p:txBody>
-          <a:bodyPr wrap="square">
-            <a:spAutoFit/>
-          </a:bodyPr>
-          <a:lstStyle/>
-          <a:p>
-            <a:r>
-              <a:rPr sz="1200" b="1" i="0">
-                <a:solidFill>
-                  <a:srgbClr val="A02030"/>
-                </a:solidFill>
-                <a:latin typeface="Calibri"/>
-              </a:rPr>
-              <a:t>Atención</a:t>
-            </a:r>
-          </a:p>
-          <a:p>
-            <a:pPr>
-              <a:spcBef>
-                <a:spcPts val="400"/>
-              </a:spcBef>
-            </a:pPr>
-            <a:r>
-              <a:rPr sz="1400" b="0" i="0">
-                <a:solidFill>
-                  <a:srgbClr val="333333"/>
-                </a:solidFill>
-                <a:latin typeface="Calibri"/>
-              </a:rPr>
-              <a:t>Entrega del taller, si el docente lo asigna · en la fecha que indique el docente.</a:t>
-            </a:r>
-          </a:p>
-        </p:txBody>
-      </p:sp>
-      <p:sp>
-        <p:nvSpPr>
-          <p:cNvPr id="14" name="TextBox 13"/>
+            <a:r>
+              <a:rPr sz="1200" b="0" i="1">
+                <a:solidFill>
+                  <a:srgbClr val="666666"/>
+                </a:solidFill>
+                <a:latin typeface="Calibri"/>
+              </a:rPr>
+              <a:t>El objeto valida y lanza; la ventana captura y traduce: asi el mismo codigo sirve en Swing, en consola o en un servidor.</a:t>
+            </a:r>
+          </a:p>
+        </p:txBody>
+      </p:sp>
+      <p:sp>
+        <p:nvSpPr>
+          <p:cNvPr id="10" name="TextBox 9"/>
           <p:cNvSpPr txBox="1"/>
           <p:nvPr/>
         </p:nvSpPr>
@@ -5191,7 +4686,1983 @@
         <p:spPr>
           <a:xfrm>
             <a:off x="0" y="0"/>
-            <a:ext cx="12191695" cy="164592"/>
+            <a:ext cx="12191695" cy="960120"/>
+          </a:xfrm>
+          <a:prstGeom prst="rect">
+            <a:avLst/>
+          </a:prstGeom>
+          <a:solidFill>
+            <a:srgbClr val="095292"/>
+          </a:solidFill>
+          <a:ln>
+            <a:noFill/>
+          </a:ln>
+        </p:spPr>
+        <p:style>
+          <a:lnRef idx="1">
+            <a:schemeClr val="accent1"/>
+          </a:lnRef>
+          <a:fillRef idx="3">
+            <a:schemeClr val="accent1"/>
+          </a:fillRef>
+          <a:effectRef idx="2">
+            <a:schemeClr val="accent1"/>
+          </a:effectRef>
+          <a:fontRef idx="minor">
+            <a:schemeClr val="lt1"/>
+          </a:fontRef>
+        </p:style>
+        <p:txBody>
+          <a:bodyPr rtlCol="0" anchor="ctr"/>
+          <a:lstStyle/>
+          <a:p>
+            <a:pPr algn="ctr"/>
+          </a:p>
+        </p:txBody>
+      </p:sp>
+      <p:sp>
+        <p:nvSpPr>
+          <p:cNvPr id="3" name="Rectangle 2"/>
+          <p:cNvSpPr/>
+          <p:nvPr/>
+        </p:nvSpPr>
+        <p:spPr>
+          <a:xfrm>
+            <a:off x="0" y="960120"/>
+            <a:ext cx="12191695" cy="41148"/>
+          </a:xfrm>
+          <a:prstGeom prst="rect">
+            <a:avLst/>
+          </a:prstGeom>
+          <a:solidFill>
+            <a:srgbClr val="FFD000"/>
+          </a:solidFill>
+          <a:ln>
+            <a:noFill/>
+          </a:ln>
+        </p:spPr>
+        <p:style>
+          <a:lnRef idx="1">
+            <a:schemeClr val="accent1"/>
+          </a:lnRef>
+          <a:fillRef idx="3">
+            <a:schemeClr val="accent1"/>
+          </a:fillRef>
+          <a:effectRef idx="2">
+            <a:schemeClr val="accent1"/>
+          </a:effectRef>
+          <a:fontRef idx="minor">
+            <a:schemeClr val="lt1"/>
+          </a:fontRef>
+        </p:style>
+        <p:txBody>
+          <a:bodyPr rtlCol="0" anchor="ctr"/>
+          <a:lstStyle/>
+          <a:p>
+            <a:pPr algn="ctr"/>
+          </a:p>
+        </p:txBody>
+      </p:sp>
+      <p:sp>
+        <p:nvSpPr>
+          <p:cNvPr id="4" name="TextBox 3"/>
+          <p:cNvSpPr txBox="1"/>
+          <p:nvPr/>
+        </p:nvSpPr>
+        <p:spPr>
+          <a:xfrm>
+            <a:off x="457200" y="164592"/>
+            <a:ext cx="11277295" cy="502920"/>
+          </a:xfrm>
+          <a:prstGeom prst="rect">
+            <a:avLst/>
+          </a:prstGeom>
+          <a:noFill/>
+        </p:spPr>
+        <p:txBody>
+          <a:bodyPr wrap="square">
+            <a:spAutoFit/>
+          </a:bodyPr>
+          <a:lstStyle/>
+          <a:p>
+            <a:r>
+              <a:rPr sz="2600" b="1" i="0">
+                <a:solidFill>
+                  <a:srgbClr val="FFFFFF"/>
+                </a:solidFill>
+                <a:latin typeface="Calibri"/>
+              </a:rPr>
+              <a:t>Demo del dia</a:t>
+            </a:r>
+          </a:p>
+        </p:txBody>
+      </p:sp>
+      <p:sp>
+        <p:nvSpPr>
+          <p:cNvPr id="5" name="TextBox 4"/>
+          <p:cNvSpPr txBox="1"/>
+          <p:nvPr/>
+        </p:nvSpPr>
+        <p:spPr>
+          <a:xfrm>
+            <a:off x="457200" y="1170432"/>
+            <a:ext cx="11277295" cy="5230368"/>
+          </a:xfrm>
+          <a:prstGeom prst="rect">
+            <a:avLst/>
+          </a:prstGeom>
+          <a:noFill/>
+        </p:spPr>
+        <p:txBody>
+          <a:bodyPr wrap="square">
+            <a:spAutoFit/>
+          </a:bodyPr>
+          <a:lstStyle/>
+          <a:p>
+            <a:pPr>
+              <a:spcAft>
+                <a:spcPts val="800"/>
+              </a:spcAft>
+            </a:pPr>
+            <a:r>
+              <a:rPr sz="2000" b="0" i="0">
+                <a:solidFill>
+                  <a:srgbClr val="333333"/>
+                </a:solidFill>
+                <a:latin typeface="Calibri"/>
+              </a:rPr>
+              <a:t>–   </a:t>
+            </a:r>
+            <a:r>
+              <a:rPr sz="2000" b="1" i="0">
+                <a:solidFill>
+                  <a:srgbClr val="333333"/>
+                </a:solidFill>
+                <a:latin typeface="Calibri"/>
+              </a:rPr>
+              <a:t>Herramienta:</a:t>
+            </a:r>
+            <a:r>
+              <a:rPr sz="2000" b="0" i="0">
+                <a:solidFill>
+                  <a:srgbClr val="333333"/>
+                </a:solidFill>
+                <a:latin typeface="Calibri"/>
+              </a:rPr>
+              <a:t> Visual Studio Code (Java)</a:t>
+            </a:r>
+          </a:p>
+          <a:p>
+            <a:pPr>
+              <a:spcAft>
+                <a:spcPts val="800"/>
+              </a:spcAft>
+            </a:pPr>
+            <a:r>
+              <a:rPr sz="2000" b="0" i="0">
+                <a:solidFill>
+                  <a:srgbClr val="333333"/>
+                </a:solidFill>
+                <a:latin typeface="Calibri"/>
+              </a:rPr>
+              <a:t>–   </a:t>
+            </a:r>
+            <a:r>
+              <a:rPr sz="2000" b="1" i="0">
+                <a:solidFill>
+                  <a:srgbClr val="333333"/>
+                </a:solidFill>
+                <a:latin typeface="Calibri"/>
+              </a:rPr>
+              <a:t>Demo:</a:t>
+            </a:r>
+            <a:r>
+              <a:rPr sz="2000" b="0" i="0">
+                <a:solidFill>
+                  <a:srgbClr val="333333"/>
+                </a:solidFill>
+                <a:latin typeface="Calibri"/>
+              </a:rPr>
+              <a:t> El docente escribe 'tres' en el campo edad, muestra la aplicacion reventando con el stack trace rojo, y en vivo la envuelve en try-catch hasta que responde con un aviso amable.</a:t>
+            </a:r>
+          </a:p>
+          <a:p>
+            <a:pPr>
+              <a:spcAft>
+                <a:spcPts val="800"/>
+              </a:spcAft>
+            </a:pPr>
+            <a:r>
+              <a:rPr sz="2000" b="0" i="0">
+                <a:solidFill>
+                  <a:srgbClr val="333333"/>
+                </a:solidFill>
+                <a:latin typeface="Calibri"/>
+              </a:rPr>
+              <a:t>–   Mismo dominio VetCare — no otro ejemplo.</a:t>
+            </a:r>
+          </a:p>
+        </p:txBody>
+      </p:sp>
+      <p:sp>
+        <p:nvSpPr>
+          <p:cNvPr id="6" name="TextBox 5"/>
+          <p:cNvSpPr txBox="1"/>
+          <p:nvPr/>
+        </p:nvSpPr>
+        <p:spPr>
+          <a:xfrm>
+            <a:off x="11185855" y="6473952"/>
+            <a:ext cx="640080" cy="274320"/>
+          </a:xfrm>
+          <a:prstGeom prst="rect">
+            <a:avLst/>
+          </a:prstGeom>
+          <a:noFill/>
+        </p:spPr>
+        <p:txBody>
+          <a:bodyPr wrap="square">
+            <a:spAutoFit/>
+          </a:bodyPr>
+          <a:lstStyle/>
+          <a:p>
+            <a:pPr algn="r"/>
+            <a:r>
+              <a:rPr sz="1100" b="0" i="0">
+                <a:solidFill>
+                  <a:srgbClr val="666666"/>
+                </a:solidFill>
+                <a:latin typeface="Calibri"/>
+              </a:rPr>
+              <a:t>13</a:t>
+            </a:r>
+          </a:p>
+        </p:txBody>
+      </p:sp>
+    </p:spTree>
+  </p:cSld>
+  <p:clrMapOvr>
+    <a:masterClrMapping/>
+  </p:clrMapOvr>
+</p:sld>
+</file>
+
+<file path=ppt/slides/slide14.xml><?xml version="1.0" encoding="utf-8"?>
+<p:sld xmlns:a="http://schemas.openxmlformats.org/drawingml/2006/main" xmlns:p="http://schemas.openxmlformats.org/presentationml/2006/main" xmlns:r="http://schemas.openxmlformats.org/officeDocument/2006/relationships">
+  <p:cSld>
+    <p:bg>
+      <p:bgPr>
+        <a:solidFill>
+          <a:srgbClr val="FFFFFF"/>
+        </a:solidFill>
+        <a:effectLst/>
+      </p:bgPr>
+    </p:bg>
+    <p:spTree>
+      <p:nvGrpSpPr>
+        <p:cNvPr id="1" name=""/>
+        <p:cNvGrpSpPr/>
+        <p:nvPr/>
+      </p:nvGrpSpPr>
+      <p:grpSpPr/>
+      <p:sp>
+        <p:nvSpPr>
+          <p:cNvPr id="2" name="Rectangle 1"/>
+          <p:cNvSpPr/>
+          <p:nvPr/>
+        </p:nvSpPr>
+        <p:spPr>
+          <a:xfrm>
+            <a:off x="0" y="0"/>
+            <a:ext cx="12191695" cy="960120"/>
+          </a:xfrm>
+          <a:prstGeom prst="rect">
+            <a:avLst/>
+          </a:prstGeom>
+          <a:solidFill>
+            <a:srgbClr val="095292"/>
+          </a:solidFill>
+          <a:ln>
+            <a:noFill/>
+          </a:ln>
+        </p:spPr>
+        <p:style>
+          <a:lnRef idx="1">
+            <a:schemeClr val="accent1"/>
+          </a:lnRef>
+          <a:fillRef idx="3">
+            <a:schemeClr val="accent1"/>
+          </a:fillRef>
+          <a:effectRef idx="2">
+            <a:schemeClr val="accent1"/>
+          </a:effectRef>
+          <a:fontRef idx="minor">
+            <a:schemeClr val="lt1"/>
+          </a:fontRef>
+        </p:style>
+        <p:txBody>
+          <a:bodyPr rtlCol="0" anchor="ctr"/>
+          <a:lstStyle/>
+          <a:p>
+            <a:pPr algn="ctr"/>
+          </a:p>
+        </p:txBody>
+      </p:sp>
+      <p:sp>
+        <p:nvSpPr>
+          <p:cNvPr id="3" name="Rectangle 2"/>
+          <p:cNvSpPr/>
+          <p:nvPr/>
+        </p:nvSpPr>
+        <p:spPr>
+          <a:xfrm>
+            <a:off x="0" y="960120"/>
+            <a:ext cx="12191695" cy="41148"/>
+          </a:xfrm>
+          <a:prstGeom prst="rect">
+            <a:avLst/>
+          </a:prstGeom>
+          <a:solidFill>
+            <a:srgbClr val="FFD000"/>
+          </a:solidFill>
+          <a:ln>
+            <a:noFill/>
+          </a:ln>
+        </p:spPr>
+        <p:style>
+          <a:lnRef idx="1">
+            <a:schemeClr val="accent1"/>
+          </a:lnRef>
+          <a:fillRef idx="3">
+            <a:schemeClr val="accent1"/>
+          </a:fillRef>
+          <a:effectRef idx="2">
+            <a:schemeClr val="accent1"/>
+          </a:effectRef>
+          <a:fontRef idx="minor">
+            <a:schemeClr val="lt1"/>
+          </a:fontRef>
+        </p:style>
+        <p:txBody>
+          <a:bodyPr rtlCol="0" anchor="ctr"/>
+          <a:lstStyle/>
+          <a:p>
+            <a:pPr algn="ctr"/>
+          </a:p>
+        </p:txBody>
+      </p:sp>
+      <p:sp>
+        <p:nvSpPr>
+          <p:cNvPr id="4" name="TextBox 3"/>
+          <p:cNvSpPr txBox="1"/>
+          <p:nvPr/>
+        </p:nvSpPr>
+        <p:spPr>
+          <a:xfrm>
+            <a:off x="457200" y="164592"/>
+            <a:ext cx="11277295" cy="502920"/>
+          </a:xfrm>
+          <a:prstGeom prst="rect">
+            <a:avLst/>
+          </a:prstGeom>
+          <a:noFill/>
+        </p:spPr>
+        <p:txBody>
+          <a:bodyPr wrap="square">
+            <a:spAutoFit/>
+          </a:bodyPr>
+          <a:lstStyle/>
+          <a:p>
+            <a:r>
+              <a:rPr sz="2600" b="1" i="0">
+                <a:solidFill>
+                  <a:srgbClr val="FFFFFF"/>
+                </a:solidFill>
+                <a:latin typeface="Calibri"/>
+              </a:rPr>
+              <a:t>Taller PI — por que importa</a:t>
+            </a:r>
+          </a:p>
+        </p:txBody>
+      </p:sp>
+      <p:sp>
+        <p:nvSpPr>
+          <p:cNvPr id="5" name="TextBox 4"/>
+          <p:cNvSpPr txBox="1"/>
+          <p:nvPr/>
+        </p:nvSpPr>
+        <p:spPr>
+          <a:xfrm>
+            <a:off x="457200" y="1170432"/>
+            <a:ext cx="11277295" cy="5230368"/>
+          </a:xfrm>
+          <a:prstGeom prst="rect">
+            <a:avLst/>
+          </a:prstGeom>
+          <a:noFill/>
+        </p:spPr>
+        <p:txBody>
+          <a:bodyPr wrap="square">
+            <a:spAutoFit/>
+          </a:bodyPr>
+          <a:lstStyle/>
+          <a:p>
+            <a:pPr>
+              <a:spcAft>
+                <a:spcPts val="800"/>
+              </a:spcAft>
+            </a:pPr>
+            <a:r>
+              <a:rPr sz="2000" b="0" i="0">
+                <a:solidFill>
+                  <a:srgbClr val="333333"/>
+                </a:solidFill>
+                <a:latin typeface="Calibri"/>
+              </a:rPr>
+              <a:t>–   </a:t>
+            </a:r>
+            <a:r>
+              <a:rPr sz="2000" b="1" i="0">
+                <a:solidFill>
+                  <a:srgbClr val="333333"/>
+                </a:solidFill>
+                <a:latin typeface="Calibri"/>
+              </a:rPr>
+              <a:t>Por que importa al PI:</a:t>
+            </a:r>
+            <a:r>
+              <a:rPr sz="2000" b="0" i="0">
+                <a:solidFill>
+                  <a:srgbClr val="333333"/>
+                </a:solidFill>
+                <a:latin typeface="Calibri"/>
+              </a:rPr>
+              <a:t> el requisito tecnico del Proyecto Integrador exige manejo de errores con try-catch, y el jurado lo comprueba de la forma mas simple: escribe basura en un campo y mira si la aplicacion aguanta.</a:t>
+            </a:r>
+          </a:p>
+          <a:p>
+            <a:pPr>
+              <a:spcAft>
+                <a:spcPts val="800"/>
+              </a:spcAft>
+            </a:pPr>
+            <a:r>
+              <a:rPr sz="2000" b="0" i="0">
+                <a:solidFill>
+                  <a:srgbClr val="333333"/>
+                </a:solidFill>
+                <a:latin typeface="Calibri"/>
+              </a:rPr>
+              <a:t>–   VetCare ya tiene clases, colecciones, ventanas y archivos; lo unico que falta para que sea usable por la secretaria de Huellitas es que un dato mal escrito no borre el trabajo de toda la manana.</a:t>
+            </a:r>
+          </a:p>
+          <a:p>
+            <a:pPr>
+              <a:spcAft>
+                <a:spcPts val="800"/>
+              </a:spcAft>
+            </a:pPr>
+            <a:r>
+              <a:rPr sz="2000" b="0" i="0">
+                <a:solidFill>
+                  <a:srgbClr val="333333"/>
+                </a:solidFill>
+                <a:latin typeface="Calibri"/>
+              </a:rPr>
+              <a:t>–   Todo lo que blindemos hoy es lo que permitira, en la clase 14, hacer una demo en vivo tranquila: hasta se puede provocar el error a proposito para mostrar la validacion como una fortaleza.</a:t>
+            </a:r>
+          </a:p>
+        </p:txBody>
+      </p:sp>
+      <p:sp>
+        <p:nvSpPr>
+          <p:cNvPr id="6" name="TextBox 5"/>
+          <p:cNvSpPr txBox="1"/>
+          <p:nvPr/>
+        </p:nvSpPr>
+        <p:spPr>
+          <a:xfrm>
+            <a:off x="11185855" y="6473952"/>
+            <a:ext cx="640080" cy="274320"/>
+          </a:xfrm>
+          <a:prstGeom prst="rect">
+            <a:avLst/>
+          </a:prstGeom>
+          <a:noFill/>
+        </p:spPr>
+        <p:txBody>
+          <a:bodyPr wrap="square">
+            <a:spAutoFit/>
+          </a:bodyPr>
+          <a:lstStyle/>
+          <a:p>
+            <a:pPr algn="r"/>
+            <a:r>
+              <a:rPr sz="1100" b="0" i="0">
+                <a:solidFill>
+                  <a:srgbClr val="666666"/>
+                </a:solidFill>
+                <a:latin typeface="Calibri"/>
+              </a:rPr>
+              <a:t>14</a:t>
+            </a:r>
+          </a:p>
+        </p:txBody>
+      </p:sp>
+    </p:spTree>
+  </p:cSld>
+  <p:clrMapOvr>
+    <a:masterClrMapping/>
+  </p:clrMapOvr>
+</p:sld>
+</file>
+
+<file path=ppt/slides/slide15.xml><?xml version="1.0" encoding="utf-8"?>
+<p:sld xmlns:a="http://schemas.openxmlformats.org/drawingml/2006/main" xmlns:p="http://schemas.openxmlformats.org/presentationml/2006/main" xmlns:r="http://schemas.openxmlformats.org/officeDocument/2006/relationships">
+  <p:cSld>
+    <p:bg>
+      <p:bgPr>
+        <a:solidFill>
+          <a:srgbClr val="FFFFFF"/>
+        </a:solidFill>
+        <a:effectLst/>
+      </p:bgPr>
+    </p:bg>
+    <p:spTree>
+      <p:nvGrpSpPr>
+        <p:cNvPr id="1" name=""/>
+        <p:cNvGrpSpPr/>
+        <p:nvPr/>
+      </p:nvGrpSpPr>
+      <p:grpSpPr/>
+      <p:sp>
+        <p:nvSpPr>
+          <p:cNvPr id="2" name="Rectangle 1"/>
+          <p:cNvSpPr/>
+          <p:nvPr/>
+        </p:nvSpPr>
+        <p:spPr>
+          <a:xfrm>
+            <a:off x="0" y="0"/>
+            <a:ext cx="12191695" cy="960120"/>
+          </a:xfrm>
+          <a:prstGeom prst="rect">
+            <a:avLst/>
+          </a:prstGeom>
+          <a:solidFill>
+            <a:srgbClr val="095292"/>
+          </a:solidFill>
+          <a:ln>
+            <a:noFill/>
+          </a:ln>
+        </p:spPr>
+        <p:style>
+          <a:lnRef idx="1">
+            <a:schemeClr val="accent1"/>
+          </a:lnRef>
+          <a:fillRef idx="3">
+            <a:schemeClr val="accent1"/>
+          </a:fillRef>
+          <a:effectRef idx="2">
+            <a:schemeClr val="accent1"/>
+          </a:effectRef>
+          <a:fontRef idx="minor">
+            <a:schemeClr val="lt1"/>
+          </a:fontRef>
+        </p:style>
+        <p:txBody>
+          <a:bodyPr rtlCol="0" anchor="ctr"/>
+          <a:lstStyle/>
+          <a:p>
+            <a:pPr algn="ctr"/>
+          </a:p>
+        </p:txBody>
+      </p:sp>
+      <p:sp>
+        <p:nvSpPr>
+          <p:cNvPr id="3" name="Rectangle 2"/>
+          <p:cNvSpPr/>
+          <p:nvPr/>
+        </p:nvSpPr>
+        <p:spPr>
+          <a:xfrm>
+            <a:off x="0" y="960120"/>
+            <a:ext cx="12191695" cy="41148"/>
+          </a:xfrm>
+          <a:prstGeom prst="rect">
+            <a:avLst/>
+          </a:prstGeom>
+          <a:solidFill>
+            <a:srgbClr val="FFD000"/>
+          </a:solidFill>
+          <a:ln>
+            <a:noFill/>
+          </a:ln>
+        </p:spPr>
+        <p:style>
+          <a:lnRef idx="1">
+            <a:schemeClr val="accent1"/>
+          </a:lnRef>
+          <a:fillRef idx="3">
+            <a:schemeClr val="accent1"/>
+          </a:fillRef>
+          <a:effectRef idx="2">
+            <a:schemeClr val="accent1"/>
+          </a:effectRef>
+          <a:fontRef idx="minor">
+            <a:schemeClr val="lt1"/>
+          </a:fontRef>
+        </p:style>
+        <p:txBody>
+          <a:bodyPr rtlCol="0" anchor="ctr"/>
+          <a:lstStyle/>
+          <a:p>
+            <a:pPr algn="ctr"/>
+          </a:p>
+        </p:txBody>
+      </p:sp>
+      <p:sp>
+        <p:nvSpPr>
+          <p:cNvPr id="4" name="TextBox 3"/>
+          <p:cNvSpPr txBox="1"/>
+          <p:nvPr/>
+        </p:nvSpPr>
+        <p:spPr>
+          <a:xfrm>
+            <a:off x="457200" y="164592"/>
+            <a:ext cx="11277295" cy="502920"/>
+          </a:xfrm>
+          <a:prstGeom prst="rect">
+            <a:avLst/>
+          </a:prstGeom>
+          <a:noFill/>
+        </p:spPr>
+        <p:txBody>
+          <a:bodyPr wrap="square">
+            <a:spAutoFit/>
+          </a:bodyPr>
+          <a:lstStyle/>
+          <a:p>
+            <a:r>
+              <a:rPr sz="2600" b="1" i="0">
+                <a:solidFill>
+                  <a:srgbClr val="FFFFFF"/>
+                </a:solidFill>
+                <a:latin typeface="Calibri"/>
+              </a:rPr>
+              <a:t>Taller PI — punto de partida</a:t>
+            </a:r>
+          </a:p>
+        </p:txBody>
+      </p:sp>
+      <p:sp>
+        <p:nvSpPr>
+          <p:cNvPr id="5" name="TextBox 4"/>
+          <p:cNvSpPr txBox="1"/>
+          <p:nvPr/>
+        </p:nvSpPr>
+        <p:spPr>
+          <a:xfrm>
+            <a:off x="457200" y="1170432"/>
+            <a:ext cx="11277295" cy="5230368"/>
+          </a:xfrm>
+          <a:prstGeom prst="rect">
+            <a:avLst/>
+          </a:prstGeom>
+          <a:noFill/>
+        </p:spPr>
+        <p:txBody>
+          <a:bodyPr wrap="square">
+            <a:spAutoFit/>
+          </a:bodyPr>
+          <a:lstStyle/>
+          <a:p>
+            <a:pPr>
+              <a:spcAft>
+                <a:spcPts val="800"/>
+              </a:spcAft>
+            </a:pPr>
+            <a:r>
+              <a:rPr sz="2000" b="0" i="0">
+                <a:solidFill>
+                  <a:srgbClr val="333333"/>
+                </a:solidFill>
+                <a:latin typeface="Calibri"/>
+              </a:rPr>
+              <a:t>–   El proyecto VetCare ya trae las clases Dueno, Mascota y Cita, un ArrayList&lt;Mascota&gt; cargado en memoria y el archivo datos/mascotas.csv con seis registros separados por punto y coma.</a:t>
+            </a:r>
+          </a:p>
+          <a:p>
+            <a:pPr>
+              <a:spcAft>
+                <a:spcPts val="800"/>
+              </a:spcAft>
+            </a:pPr>
+            <a:r>
+              <a:rPr sz="2000" b="0" i="0">
+                <a:solidFill>
+                  <a:srgbClr val="333333"/>
+                </a:solidFill>
+                <a:latin typeface="Calibri"/>
+              </a:rPr>
+              <a:t>–   El formulario de registro toma el texto del campo edad y hace Integer.parseInt directo, sin validar nada; hoy la aplicacion se cae con cualquier letra o campo vacio.</a:t>
+            </a:r>
+          </a:p>
+          <a:p>
+            <a:pPr>
+              <a:spcAft>
+                <a:spcPts val="800"/>
+              </a:spcAft>
+            </a:pPr>
+            <a:r>
+              <a:rPr sz="2000" b="0" i="0">
+                <a:solidFill>
+                  <a:srgbClr val="333333"/>
+                </a:solidFill>
+                <a:latin typeface="Calibri"/>
+              </a:rPr>
+              <a:t>–   En la carpeta datos hay tambien un archivo mascotas_danado.csv con una linea incompleta y una edad escrita como 'dos', para probar la carga tolerante a errores.</a:t>
+            </a:r>
+          </a:p>
+        </p:txBody>
+      </p:sp>
+      <p:sp>
+        <p:nvSpPr>
+          <p:cNvPr id="6" name="TextBox 5"/>
+          <p:cNvSpPr txBox="1"/>
+          <p:nvPr/>
+        </p:nvSpPr>
+        <p:spPr>
+          <a:xfrm>
+            <a:off x="11185855" y="6473952"/>
+            <a:ext cx="640080" cy="274320"/>
+          </a:xfrm>
+          <a:prstGeom prst="rect">
+            <a:avLst/>
+          </a:prstGeom>
+          <a:noFill/>
+        </p:spPr>
+        <p:txBody>
+          <a:bodyPr wrap="square">
+            <a:spAutoFit/>
+          </a:bodyPr>
+          <a:lstStyle/>
+          <a:p>
+            <a:pPr algn="r"/>
+            <a:r>
+              <a:rPr sz="1100" b="0" i="0">
+                <a:solidFill>
+                  <a:srgbClr val="666666"/>
+                </a:solidFill>
+                <a:latin typeface="Calibri"/>
+              </a:rPr>
+              <a:t>15</a:t>
+            </a:r>
+          </a:p>
+        </p:txBody>
+      </p:sp>
+    </p:spTree>
+  </p:cSld>
+  <p:clrMapOvr>
+    <a:masterClrMapping/>
+  </p:clrMapOvr>
+</p:sld>
+</file>
+
+<file path=ppt/slides/slide16.xml><?xml version="1.0" encoding="utf-8"?>
+<p:sld xmlns:a="http://schemas.openxmlformats.org/drawingml/2006/main" xmlns:p="http://schemas.openxmlformats.org/presentationml/2006/main" xmlns:r="http://schemas.openxmlformats.org/officeDocument/2006/relationships">
+  <p:cSld>
+    <p:bg>
+      <p:bgPr>
+        <a:solidFill>
+          <a:srgbClr val="FFFFFF"/>
+        </a:solidFill>
+        <a:effectLst/>
+      </p:bgPr>
+    </p:bg>
+    <p:spTree>
+      <p:nvGrpSpPr>
+        <p:cNvPr id="1" name=""/>
+        <p:cNvGrpSpPr/>
+        <p:nvPr/>
+      </p:nvGrpSpPr>
+      <p:grpSpPr/>
+      <p:sp>
+        <p:nvSpPr>
+          <p:cNvPr id="2" name="Rectangle 1"/>
+          <p:cNvSpPr/>
+          <p:nvPr/>
+        </p:nvSpPr>
+        <p:spPr>
+          <a:xfrm>
+            <a:off x="0" y="0"/>
+            <a:ext cx="12191695" cy="960120"/>
+          </a:xfrm>
+          <a:prstGeom prst="rect">
+            <a:avLst/>
+          </a:prstGeom>
+          <a:solidFill>
+            <a:srgbClr val="095292"/>
+          </a:solidFill>
+          <a:ln>
+            <a:noFill/>
+          </a:ln>
+        </p:spPr>
+        <p:style>
+          <a:lnRef idx="1">
+            <a:schemeClr val="accent1"/>
+          </a:lnRef>
+          <a:fillRef idx="3">
+            <a:schemeClr val="accent1"/>
+          </a:fillRef>
+          <a:effectRef idx="2">
+            <a:schemeClr val="accent1"/>
+          </a:effectRef>
+          <a:fontRef idx="minor">
+            <a:schemeClr val="lt1"/>
+          </a:fontRef>
+        </p:style>
+        <p:txBody>
+          <a:bodyPr rtlCol="0" anchor="ctr"/>
+          <a:lstStyle/>
+          <a:p>
+            <a:pPr algn="ctr"/>
+          </a:p>
+        </p:txBody>
+      </p:sp>
+      <p:sp>
+        <p:nvSpPr>
+          <p:cNvPr id="3" name="Rectangle 2"/>
+          <p:cNvSpPr/>
+          <p:nvPr/>
+        </p:nvSpPr>
+        <p:spPr>
+          <a:xfrm>
+            <a:off x="0" y="960120"/>
+            <a:ext cx="12191695" cy="41148"/>
+          </a:xfrm>
+          <a:prstGeom prst="rect">
+            <a:avLst/>
+          </a:prstGeom>
+          <a:solidFill>
+            <a:srgbClr val="FFD000"/>
+          </a:solidFill>
+          <a:ln>
+            <a:noFill/>
+          </a:ln>
+        </p:spPr>
+        <p:style>
+          <a:lnRef idx="1">
+            <a:schemeClr val="accent1"/>
+          </a:lnRef>
+          <a:fillRef idx="3">
+            <a:schemeClr val="accent1"/>
+          </a:fillRef>
+          <a:effectRef idx="2">
+            <a:schemeClr val="accent1"/>
+          </a:effectRef>
+          <a:fontRef idx="minor">
+            <a:schemeClr val="lt1"/>
+          </a:fontRef>
+        </p:style>
+        <p:txBody>
+          <a:bodyPr rtlCol="0" anchor="ctr"/>
+          <a:lstStyle/>
+          <a:p>
+            <a:pPr algn="ctr"/>
+          </a:p>
+        </p:txBody>
+      </p:sp>
+      <p:sp>
+        <p:nvSpPr>
+          <p:cNvPr id="4" name="TextBox 3"/>
+          <p:cNvSpPr txBox="1"/>
+          <p:nvPr/>
+        </p:nvSpPr>
+        <p:spPr>
+          <a:xfrm>
+            <a:off x="457200" y="164592"/>
+            <a:ext cx="11277295" cy="502920"/>
+          </a:xfrm>
+          <a:prstGeom prst="rect">
+            <a:avLst/>
+          </a:prstGeom>
+          <a:noFill/>
+        </p:spPr>
+        <p:txBody>
+          <a:bodyPr wrap="square">
+            <a:spAutoFit/>
+          </a:bodyPr>
+          <a:lstStyle/>
+          <a:p>
+            <a:r>
+              <a:rPr sz="2600" b="1" i="0">
+                <a:solidFill>
+                  <a:srgbClr val="FFFFFF"/>
+                </a:solidFill>
+                <a:latin typeface="Calibri"/>
+              </a:rPr>
+              <a:t>Taller PI — pasos guiados</a:t>
+            </a:r>
+          </a:p>
+        </p:txBody>
+      </p:sp>
+      <p:sp>
+        <p:nvSpPr>
+          <p:cNvPr id="5" name="Rounded Rectangle 4"/>
+          <p:cNvSpPr/>
+          <p:nvPr/>
+        </p:nvSpPr>
+        <p:spPr>
+          <a:xfrm>
+            <a:off x="457200" y="1234440"/>
+            <a:ext cx="11277295" cy="950976"/>
+          </a:xfrm>
+          <a:prstGeom prst="roundRect">
+            <a:avLst>
+              <a:gd name="adj" fmla="val 12000"/>
+            </a:avLst>
+          </a:prstGeom>
+          <a:solidFill>
+            <a:srgbClr val="F2F2F2"/>
+          </a:solidFill>
+          <a:ln>
+            <a:noFill/>
+          </a:ln>
+        </p:spPr>
+        <p:style>
+          <a:lnRef idx="1">
+            <a:schemeClr val="accent1"/>
+          </a:lnRef>
+          <a:fillRef idx="3">
+            <a:schemeClr val="accent1"/>
+          </a:fillRef>
+          <a:effectRef idx="2">
+            <a:schemeClr val="accent1"/>
+          </a:effectRef>
+          <a:fontRef idx="minor">
+            <a:schemeClr val="lt1"/>
+          </a:fontRef>
+        </p:style>
+        <p:txBody>
+          <a:bodyPr rtlCol="0" anchor="ctr"/>
+          <a:lstStyle/>
+          <a:p>
+            <a:pPr algn="ctr"/>
+          </a:p>
+        </p:txBody>
+      </p:sp>
+      <p:sp>
+        <p:nvSpPr>
+          <p:cNvPr id="6" name="Rounded Rectangle 5"/>
+          <p:cNvSpPr/>
+          <p:nvPr/>
+        </p:nvSpPr>
+        <p:spPr>
+          <a:xfrm>
+            <a:off x="594360" y="1490472"/>
+            <a:ext cx="438912" cy="438912"/>
+          </a:xfrm>
+          <a:prstGeom prst="roundRect">
+            <a:avLst>
+              <a:gd name="adj" fmla="val 12000"/>
+            </a:avLst>
+          </a:prstGeom>
+          <a:solidFill>
+            <a:srgbClr val="095292"/>
+          </a:solidFill>
+          <a:ln>
+            <a:noFill/>
+          </a:ln>
+        </p:spPr>
+        <p:style>
+          <a:lnRef idx="1">
+            <a:schemeClr val="accent1"/>
+          </a:lnRef>
+          <a:fillRef idx="3">
+            <a:schemeClr val="accent1"/>
+          </a:fillRef>
+          <a:effectRef idx="2">
+            <a:schemeClr val="accent1"/>
+          </a:effectRef>
+          <a:fontRef idx="minor">
+            <a:schemeClr val="lt1"/>
+          </a:fontRef>
+        </p:style>
+        <p:txBody>
+          <a:bodyPr rtlCol="0" anchor="ctr"/>
+          <a:lstStyle/>
+          <a:p>
+            <a:pPr algn="ctr"/>
+          </a:p>
+        </p:txBody>
+      </p:sp>
+      <p:sp>
+        <p:nvSpPr>
+          <p:cNvPr id="7" name="TextBox 6"/>
+          <p:cNvSpPr txBox="1"/>
+          <p:nvPr/>
+        </p:nvSpPr>
+        <p:spPr>
+          <a:xfrm>
+            <a:off x="594360" y="1490472"/>
+            <a:ext cx="438912" cy="438912"/>
+          </a:xfrm>
+          <a:prstGeom prst="rect">
+            <a:avLst/>
+          </a:prstGeom>
+          <a:noFill/>
+        </p:spPr>
+        <p:txBody>
+          <a:bodyPr wrap="square" anchor="ctr"/>
+          <a:lstStyle/>
+          <a:p>
+            <a:pPr algn="ctr"/>
+            <a:r>
+              <a:rPr sz="1600" b="1" i="0">
+                <a:solidFill>
+                  <a:srgbClr val="FFFFFF"/>
+                </a:solidFill>
+                <a:latin typeface="Calibri"/>
+              </a:rPr>
+              <a:t>1</a:t>
+            </a:r>
+          </a:p>
+        </p:txBody>
+      </p:sp>
+      <p:sp>
+        <p:nvSpPr>
+          <p:cNvPr id="8" name="TextBox 7"/>
+          <p:cNvSpPr txBox="1"/>
+          <p:nvPr/>
+        </p:nvSpPr>
+        <p:spPr>
+          <a:xfrm>
+            <a:off x="1188720" y="1325880"/>
+            <a:ext cx="10271455" cy="786384"/>
+          </a:xfrm>
+          <a:prstGeom prst="rect">
+            <a:avLst/>
+          </a:prstGeom>
+          <a:noFill/>
+        </p:spPr>
+        <p:txBody>
+          <a:bodyPr wrap="square" anchor="ctr"/>
+          <a:lstStyle/>
+          <a:p>
+            <a:r>
+              <a:rPr sz="1500" b="1" i="0">
+                <a:solidFill>
+                  <a:srgbClr val="095292"/>
+                </a:solidFill>
+                <a:latin typeface="Calibri"/>
+              </a:rPr>
+              <a:t>Paso 1. Abra el proyecto VetCare en VS Code, cree el paquete vetcare.excepciones y dentro la clase DatoInvalidoException que extienda Exception con un constructor que reciba el mensaje; compile y verifique que no hay errores.</a:t>
+            </a:r>
+          </a:p>
+        </p:txBody>
+      </p:sp>
+      <p:sp>
+        <p:nvSpPr>
+          <p:cNvPr id="9" name="Rounded Rectangle 8"/>
+          <p:cNvSpPr/>
+          <p:nvPr/>
+        </p:nvSpPr>
+        <p:spPr>
+          <a:xfrm>
+            <a:off x="457200" y="2276856"/>
+            <a:ext cx="11277295" cy="950976"/>
+          </a:xfrm>
+          <a:prstGeom prst="roundRect">
+            <a:avLst>
+              <a:gd name="adj" fmla="val 12000"/>
+            </a:avLst>
+          </a:prstGeom>
+          <a:solidFill>
+            <a:srgbClr val="E8F4FA"/>
+          </a:solidFill>
+          <a:ln>
+            <a:noFill/>
+          </a:ln>
+        </p:spPr>
+        <p:style>
+          <a:lnRef idx="1">
+            <a:schemeClr val="accent1"/>
+          </a:lnRef>
+          <a:fillRef idx="3">
+            <a:schemeClr val="accent1"/>
+          </a:fillRef>
+          <a:effectRef idx="2">
+            <a:schemeClr val="accent1"/>
+          </a:effectRef>
+          <a:fontRef idx="minor">
+            <a:schemeClr val="lt1"/>
+          </a:fontRef>
+        </p:style>
+        <p:txBody>
+          <a:bodyPr rtlCol="0" anchor="ctr"/>
+          <a:lstStyle/>
+          <a:p>
+            <a:pPr algn="ctr"/>
+          </a:p>
+        </p:txBody>
+      </p:sp>
+      <p:sp>
+        <p:nvSpPr>
+          <p:cNvPr id="10" name="Rounded Rectangle 9"/>
+          <p:cNvSpPr/>
+          <p:nvPr/>
+        </p:nvSpPr>
+        <p:spPr>
+          <a:xfrm>
+            <a:off x="594360" y="2532888"/>
+            <a:ext cx="438912" cy="438912"/>
+          </a:xfrm>
+          <a:prstGeom prst="roundRect">
+            <a:avLst>
+              <a:gd name="adj" fmla="val 12000"/>
+            </a:avLst>
+          </a:prstGeom>
+          <a:solidFill>
+            <a:srgbClr val="095292"/>
+          </a:solidFill>
+          <a:ln>
+            <a:noFill/>
+          </a:ln>
+        </p:spPr>
+        <p:style>
+          <a:lnRef idx="1">
+            <a:schemeClr val="accent1"/>
+          </a:lnRef>
+          <a:fillRef idx="3">
+            <a:schemeClr val="accent1"/>
+          </a:fillRef>
+          <a:effectRef idx="2">
+            <a:schemeClr val="accent1"/>
+          </a:effectRef>
+          <a:fontRef idx="minor">
+            <a:schemeClr val="lt1"/>
+          </a:fontRef>
+        </p:style>
+        <p:txBody>
+          <a:bodyPr rtlCol="0" anchor="ctr"/>
+          <a:lstStyle/>
+          <a:p>
+            <a:pPr algn="ctr"/>
+          </a:p>
+        </p:txBody>
+      </p:sp>
+      <p:sp>
+        <p:nvSpPr>
+          <p:cNvPr id="11" name="TextBox 10"/>
+          <p:cNvSpPr txBox="1"/>
+          <p:nvPr/>
+        </p:nvSpPr>
+        <p:spPr>
+          <a:xfrm>
+            <a:off x="594360" y="2532888"/>
+            <a:ext cx="438912" cy="438912"/>
+          </a:xfrm>
+          <a:prstGeom prst="rect">
+            <a:avLst/>
+          </a:prstGeom>
+          <a:noFill/>
+        </p:spPr>
+        <p:txBody>
+          <a:bodyPr wrap="square" anchor="ctr"/>
+          <a:lstStyle/>
+          <a:p>
+            <a:pPr algn="ctr"/>
+            <a:r>
+              <a:rPr sz="1600" b="1" i="0">
+                <a:solidFill>
+                  <a:srgbClr val="FFFFFF"/>
+                </a:solidFill>
+                <a:latin typeface="Calibri"/>
+              </a:rPr>
+              <a:t>2</a:t>
+            </a:r>
+          </a:p>
+        </p:txBody>
+      </p:sp>
+      <p:sp>
+        <p:nvSpPr>
+          <p:cNvPr id="12" name="TextBox 11"/>
+          <p:cNvSpPr txBox="1"/>
+          <p:nvPr/>
+        </p:nvSpPr>
+        <p:spPr>
+          <a:xfrm>
+            <a:off x="1188720" y="2368296"/>
+            <a:ext cx="10271455" cy="786384"/>
+          </a:xfrm>
+          <a:prstGeom prst="rect">
+            <a:avLst/>
+          </a:prstGeom>
+          <a:noFill/>
+        </p:spPr>
+        <p:txBody>
+          <a:bodyPr wrap="square" anchor="ctr"/>
+          <a:lstStyle/>
+          <a:p>
+            <a:r>
+              <a:rPr sz="1400" b="1" i="0">
+                <a:solidFill>
+                  <a:srgbClr val="095292"/>
+                </a:solidFill>
+                <a:latin typeface="Calibri"/>
+              </a:rPr>
+              <a:t>Paso 2. En la clase Mascota reemplace setEdad(int) por setEdad(String texto) throws DatoInvalidoException: rechace vacio, convierta con Integer.parseInt dentro de un try, atrape NumberFormatException y relance DatoInvalidoException con un mensaje de la clinica, y valide el rango 0 a 30; repita la idea en setPeso con Double.parseDouble y rango 0.1 a 120.</a:t>
+            </a:r>
+          </a:p>
+        </p:txBody>
+      </p:sp>
+      <p:sp>
+        <p:nvSpPr>
+          <p:cNvPr id="13" name="Rounded Rectangle 12"/>
+          <p:cNvSpPr/>
+          <p:nvPr/>
+        </p:nvSpPr>
+        <p:spPr>
+          <a:xfrm>
+            <a:off x="457200" y="3319272"/>
+            <a:ext cx="11277295" cy="950976"/>
+          </a:xfrm>
+          <a:prstGeom prst="roundRect">
+            <a:avLst>
+              <a:gd name="adj" fmla="val 12000"/>
+            </a:avLst>
+          </a:prstGeom>
+          <a:solidFill>
+            <a:srgbClr val="F2F2F2"/>
+          </a:solidFill>
+          <a:ln>
+            <a:noFill/>
+          </a:ln>
+        </p:spPr>
+        <p:style>
+          <a:lnRef idx="1">
+            <a:schemeClr val="accent1"/>
+          </a:lnRef>
+          <a:fillRef idx="3">
+            <a:schemeClr val="accent1"/>
+          </a:fillRef>
+          <a:effectRef idx="2">
+            <a:schemeClr val="accent1"/>
+          </a:effectRef>
+          <a:fontRef idx="minor">
+            <a:schemeClr val="lt1"/>
+          </a:fontRef>
+        </p:style>
+        <p:txBody>
+          <a:bodyPr rtlCol="0" anchor="ctr"/>
+          <a:lstStyle/>
+          <a:p>
+            <a:pPr algn="ctr"/>
+          </a:p>
+        </p:txBody>
+      </p:sp>
+      <p:sp>
+        <p:nvSpPr>
+          <p:cNvPr id="14" name="Rounded Rectangle 13"/>
+          <p:cNvSpPr/>
+          <p:nvPr/>
+        </p:nvSpPr>
+        <p:spPr>
+          <a:xfrm>
+            <a:off x="594360" y="3575304"/>
+            <a:ext cx="438912" cy="438912"/>
+          </a:xfrm>
+          <a:prstGeom prst="roundRect">
+            <a:avLst>
+              <a:gd name="adj" fmla="val 12000"/>
+            </a:avLst>
+          </a:prstGeom>
+          <a:solidFill>
+            <a:srgbClr val="095292"/>
+          </a:solidFill>
+          <a:ln>
+            <a:noFill/>
+          </a:ln>
+        </p:spPr>
+        <p:style>
+          <a:lnRef idx="1">
+            <a:schemeClr val="accent1"/>
+          </a:lnRef>
+          <a:fillRef idx="3">
+            <a:schemeClr val="accent1"/>
+          </a:fillRef>
+          <a:effectRef idx="2">
+            <a:schemeClr val="accent1"/>
+          </a:effectRef>
+          <a:fontRef idx="minor">
+            <a:schemeClr val="lt1"/>
+          </a:fontRef>
+        </p:style>
+        <p:txBody>
+          <a:bodyPr rtlCol="0" anchor="ctr"/>
+          <a:lstStyle/>
+          <a:p>
+            <a:pPr algn="ctr"/>
+          </a:p>
+        </p:txBody>
+      </p:sp>
+      <p:sp>
+        <p:nvSpPr>
+          <p:cNvPr id="15" name="TextBox 14"/>
+          <p:cNvSpPr txBox="1"/>
+          <p:nvPr/>
+        </p:nvSpPr>
+        <p:spPr>
+          <a:xfrm>
+            <a:off x="594360" y="3575304"/>
+            <a:ext cx="438912" cy="438912"/>
+          </a:xfrm>
+          <a:prstGeom prst="rect">
+            <a:avLst/>
+          </a:prstGeom>
+          <a:noFill/>
+        </p:spPr>
+        <p:txBody>
+          <a:bodyPr wrap="square" anchor="ctr"/>
+          <a:lstStyle/>
+          <a:p>
+            <a:pPr algn="ctr"/>
+            <a:r>
+              <a:rPr sz="1600" b="1" i="0">
+                <a:solidFill>
+                  <a:srgbClr val="FFFFFF"/>
+                </a:solidFill>
+                <a:latin typeface="Calibri"/>
+              </a:rPr>
+              <a:t>3</a:t>
+            </a:r>
+          </a:p>
+        </p:txBody>
+      </p:sp>
+      <p:sp>
+        <p:nvSpPr>
+          <p:cNvPr id="16" name="TextBox 15"/>
+          <p:cNvSpPr txBox="1"/>
+          <p:nvPr/>
+        </p:nvSpPr>
+        <p:spPr>
+          <a:xfrm>
+            <a:off x="1188720" y="3410712"/>
+            <a:ext cx="10271455" cy="786384"/>
+          </a:xfrm>
+          <a:prstGeom prst="rect">
+            <a:avLst/>
+          </a:prstGeom>
+          <a:noFill/>
+        </p:spPr>
+        <p:txBody>
+          <a:bodyPr wrap="square" anchor="ctr"/>
+          <a:lstStyle/>
+          <a:p>
+            <a:r>
+              <a:rPr sz="1400" b="1" i="0">
+                <a:solidFill>
+                  <a:srgbClr val="095292"/>
+                </a:solidFill>
+                <a:latin typeface="Calibri"/>
+              </a:rPr>
+              <a:t>Paso 3. En el formulario de registro (JFrame o menu de consola) envuelva las llamadas a los setters en un try-catch que muestre JOptionPane.showMessageDialog con e.getMessage(), devuelva el foco al campo culpable con requestFocus() y NO agregue la mascota a la lista cuando hubo error.</a:t>
+            </a:r>
+          </a:p>
+        </p:txBody>
+      </p:sp>
+      <p:sp>
+        <p:nvSpPr>
+          <p:cNvPr id="17" name="Rounded Rectangle 16"/>
+          <p:cNvSpPr/>
+          <p:nvPr/>
+        </p:nvSpPr>
+        <p:spPr>
+          <a:xfrm>
+            <a:off x="457200" y="4361688"/>
+            <a:ext cx="11277295" cy="950976"/>
+          </a:xfrm>
+          <a:prstGeom prst="roundRect">
+            <a:avLst>
+              <a:gd name="adj" fmla="val 12000"/>
+            </a:avLst>
+          </a:prstGeom>
+          <a:solidFill>
+            <a:srgbClr val="E8F4FA"/>
+          </a:solidFill>
+          <a:ln>
+            <a:noFill/>
+          </a:ln>
+        </p:spPr>
+        <p:style>
+          <a:lnRef idx="1">
+            <a:schemeClr val="accent1"/>
+          </a:lnRef>
+          <a:fillRef idx="3">
+            <a:schemeClr val="accent1"/>
+          </a:fillRef>
+          <a:effectRef idx="2">
+            <a:schemeClr val="accent1"/>
+          </a:effectRef>
+          <a:fontRef idx="minor">
+            <a:schemeClr val="lt1"/>
+          </a:fontRef>
+        </p:style>
+        <p:txBody>
+          <a:bodyPr rtlCol="0" anchor="ctr"/>
+          <a:lstStyle/>
+          <a:p>
+            <a:pPr algn="ctr"/>
+          </a:p>
+        </p:txBody>
+      </p:sp>
+      <p:sp>
+        <p:nvSpPr>
+          <p:cNvPr id="18" name="Rounded Rectangle 17"/>
+          <p:cNvSpPr/>
+          <p:nvPr/>
+        </p:nvSpPr>
+        <p:spPr>
+          <a:xfrm>
+            <a:off x="594360" y="4617720"/>
+            <a:ext cx="438912" cy="438912"/>
+          </a:xfrm>
+          <a:prstGeom prst="roundRect">
+            <a:avLst>
+              <a:gd name="adj" fmla="val 12000"/>
+            </a:avLst>
+          </a:prstGeom>
+          <a:solidFill>
+            <a:srgbClr val="095292"/>
+          </a:solidFill>
+          <a:ln>
+            <a:noFill/>
+          </a:ln>
+        </p:spPr>
+        <p:style>
+          <a:lnRef idx="1">
+            <a:schemeClr val="accent1"/>
+          </a:lnRef>
+          <a:fillRef idx="3">
+            <a:schemeClr val="accent1"/>
+          </a:fillRef>
+          <a:effectRef idx="2">
+            <a:schemeClr val="accent1"/>
+          </a:effectRef>
+          <a:fontRef idx="minor">
+            <a:schemeClr val="lt1"/>
+          </a:fontRef>
+        </p:style>
+        <p:txBody>
+          <a:bodyPr rtlCol="0" anchor="ctr"/>
+          <a:lstStyle/>
+          <a:p>
+            <a:pPr algn="ctr"/>
+          </a:p>
+        </p:txBody>
+      </p:sp>
+      <p:sp>
+        <p:nvSpPr>
+          <p:cNvPr id="19" name="TextBox 18"/>
+          <p:cNvSpPr txBox="1"/>
+          <p:nvPr/>
+        </p:nvSpPr>
+        <p:spPr>
+          <a:xfrm>
+            <a:off x="594360" y="4617720"/>
+            <a:ext cx="438912" cy="438912"/>
+          </a:xfrm>
+          <a:prstGeom prst="rect">
+            <a:avLst/>
+          </a:prstGeom>
+          <a:noFill/>
+        </p:spPr>
+        <p:txBody>
+          <a:bodyPr wrap="square" anchor="ctr"/>
+          <a:lstStyle/>
+          <a:p>
+            <a:pPr algn="ctr"/>
+            <a:r>
+              <a:rPr sz="1600" b="1" i="0">
+                <a:solidFill>
+                  <a:srgbClr val="FFFFFF"/>
+                </a:solidFill>
+                <a:latin typeface="Calibri"/>
+              </a:rPr>
+              <a:t>4</a:t>
+            </a:r>
+          </a:p>
+        </p:txBody>
+      </p:sp>
+      <p:sp>
+        <p:nvSpPr>
+          <p:cNvPr id="20" name="TextBox 19"/>
+          <p:cNvSpPr txBox="1"/>
+          <p:nvPr/>
+        </p:nvSpPr>
+        <p:spPr>
+          <a:xfrm>
+            <a:off x="1188720" y="4453128"/>
+            <a:ext cx="10271455" cy="786384"/>
+          </a:xfrm>
+          <a:prstGeom prst="rect">
+            <a:avLst/>
+          </a:prstGeom>
+          <a:noFill/>
+        </p:spPr>
+        <p:txBody>
+          <a:bodyPr wrap="square" anchor="ctr"/>
+          <a:lstStyle/>
+          <a:p>
+            <a:r>
+              <a:rPr sz="1400" b="1" i="0">
+                <a:solidFill>
+                  <a:srgbClr val="095292"/>
+                </a:solidFill>
+                <a:latin typeface="Calibri"/>
+              </a:rPr>
+              <a:t>Paso 4. Cambie la carga de datos/mascotas.csv a try-with-resources con dos catch separados: FileNotFoundException, que arranca con lista vacia e informa que es la primera ejecucion, e IOException, que muestra el problema real; las lineas del CSV con datos malos se omiten con un aviso, sin tumbar la carga completa.</a:t>
+            </a:r>
+          </a:p>
+        </p:txBody>
+      </p:sp>
+      <p:sp>
+        <p:nvSpPr>
+          <p:cNvPr id="21" name="Rounded Rectangle 20"/>
+          <p:cNvSpPr/>
+          <p:nvPr/>
+        </p:nvSpPr>
+        <p:spPr>
+          <a:xfrm>
+            <a:off x="457200" y="5404104"/>
+            <a:ext cx="11277295" cy="950976"/>
+          </a:xfrm>
+          <a:prstGeom prst="roundRect">
+            <a:avLst>
+              <a:gd name="adj" fmla="val 12000"/>
+            </a:avLst>
+          </a:prstGeom>
+          <a:solidFill>
+            <a:srgbClr val="F2F2F2"/>
+          </a:solidFill>
+          <a:ln>
+            <a:noFill/>
+          </a:ln>
+        </p:spPr>
+        <p:style>
+          <a:lnRef idx="1">
+            <a:schemeClr val="accent1"/>
+          </a:lnRef>
+          <a:fillRef idx="3">
+            <a:schemeClr val="accent1"/>
+          </a:fillRef>
+          <a:effectRef idx="2">
+            <a:schemeClr val="accent1"/>
+          </a:effectRef>
+          <a:fontRef idx="minor">
+            <a:schemeClr val="lt1"/>
+          </a:fontRef>
+        </p:style>
+        <p:txBody>
+          <a:bodyPr rtlCol="0" anchor="ctr"/>
+          <a:lstStyle/>
+          <a:p>
+            <a:pPr algn="ctr"/>
+          </a:p>
+        </p:txBody>
+      </p:sp>
+      <p:sp>
+        <p:nvSpPr>
+          <p:cNvPr id="22" name="Rounded Rectangle 21"/>
+          <p:cNvSpPr/>
+          <p:nvPr/>
+        </p:nvSpPr>
+        <p:spPr>
+          <a:xfrm>
+            <a:off x="594360" y="5660136"/>
+            <a:ext cx="438912" cy="438912"/>
+          </a:xfrm>
+          <a:prstGeom prst="roundRect">
+            <a:avLst>
+              <a:gd name="adj" fmla="val 12000"/>
+            </a:avLst>
+          </a:prstGeom>
+          <a:solidFill>
+            <a:srgbClr val="095292"/>
+          </a:solidFill>
+          <a:ln>
+            <a:noFill/>
+          </a:ln>
+        </p:spPr>
+        <p:style>
+          <a:lnRef idx="1">
+            <a:schemeClr val="accent1"/>
+          </a:lnRef>
+          <a:fillRef idx="3">
+            <a:schemeClr val="accent1"/>
+          </a:fillRef>
+          <a:effectRef idx="2">
+            <a:schemeClr val="accent1"/>
+          </a:effectRef>
+          <a:fontRef idx="minor">
+            <a:schemeClr val="lt1"/>
+          </a:fontRef>
+        </p:style>
+        <p:txBody>
+          <a:bodyPr rtlCol="0" anchor="ctr"/>
+          <a:lstStyle/>
+          <a:p>
+            <a:pPr algn="ctr"/>
+          </a:p>
+        </p:txBody>
+      </p:sp>
+      <p:sp>
+        <p:nvSpPr>
+          <p:cNvPr id="23" name="TextBox 22"/>
+          <p:cNvSpPr txBox="1"/>
+          <p:nvPr/>
+        </p:nvSpPr>
+        <p:spPr>
+          <a:xfrm>
+            <a:off x="594360" y="5660136"/>
+            <a:ext cx="438912" cy="438912"/>
+          </a:xfrm>
+          <a:prstGeom prst="rect">
+            <a:avLst/>
+          </a:prstGeom>
+          <a:noFill/>
+        </p:spPr>
+        <p:txBody>
+          <a:bodyPr wrap="square" anchor="ctr"/>
+          <a:lstStyle/>
+          <a:p>
+            <a:pPr algn="ctr"/>
+            <a:r>
+              <a:rPr sz="1600" b="1" i="0">
+                <a:solidFill>
+                  <a:srgbClr val="FFFFFF"/>
+                </a:solidFill>
+                <a:latin typeface="Calibri"/>
+              </a:rPr>
+              <a:t>5</a:t>
+            </a:r>
+          </a:p>
+        </p:txBody>
+      </p:sp>
+      <p:sp>
+        <p:nvSpPr>
+          <p:cNvPr id="24" name="TextBox 23"/>
+          <p:cNvSpPr txBox="1"/>
+          <p:nvPr/>
+        </p:nvSpPr>
+        <p:spPr>
+          <a:xfrm>
+            <a:off x="1188720" y="5495544"/>
+            <a:ext cx="10271455" cy="786384"/>
+          </a:xfrm>
+          <a:prstGeom prst="rect">
+            <a:avLst/>
+          </a:prstGeom>
+          <a:noFill/>
+        </p:spPr>
+        <p:txBody>
+          <a:bodyPr wrap="square" anchor="ctr"/>
+          <a:lstStyle/>
+          <a:p>
+            <a:r>
+              <a:rPr sz="1400" b="1" i="0">
+                <a:solidFill>
+                  <a:srgbClr val="095292"/>
+                </a:solidFill>
+                <a:latin typeface="Calibri"/>
+              </a:rPr>
+              <a:t>Paso 5. Pruebe el formulario con estas cinco entradas de edad: vacio, 'tres', '-2', '150' y '4'; capture la pantalla de cada caso, arme una tabla de evidencia con entrada, mensaje mostrado y estado de la aplicacion, y suba el codigo mas la tabla a la plataforma del curso.</a:t>
+            </a:r>
+          </a:p>
+        </p:txBody>
+      </p:sp>
+      <p:sp>
+        <p:nvSpPr>
+          <p:cNvPr id="25" name="TextBox 24"/>
+          <p:cNvSpPr txBox="1"/>
+          <p:nvPr/>
+        </p:nvSpPr>
+        <p:spPr>
+          <a:xfrm>
+            <a:off x="11185855" y="6473952"/>
+            <a:ext cx="640080" cy="274320"/>
+          </a:xfrm>
+          <a:prstGeom prst="rect">
+            <a:avLst/>
+          </a:prstGeom>
+          <a:noFill/>
+        </p:spPr>
+        <p:txBody>
+          <a:bodyPr wrap="square">
+            <a:spAutoFit/>
+          </a:bodyPr>
+          <a:lstStyle/>
+          <a:p>
+            <a:pPr algn="r"/>
+            <a:r>
+              <a:rPr sz="1100" b="0" i="0">
+                <a:solidFill>
+                  <a:srgbClr val="666666"/>
+                </a:solidFill>
+                <a:latin typeface="Calibri"/>
+              </a:rPr>
+              <a:t>16</a:t>
+            </a:r>
+          </a:p>
+        </p:txBody>
+      </p:sp>
+    </p:spTree>
+  </p:cSld>
+  <p:clrMapOvr>
+    <a:masterClrMapping/>
+  </p:clrMapOvr>
+</p:sld>
+</file>
+
+<file path=ppt/slides/slide17.xml><?xml version="1.0" encoding="utf-8"?>
+<p:sld xmlns:a="http://schemas.openxmlformats.org/drawingml/2006/main" xmlns:p="http://schemas.openxmlformats.org/presentationml/2006/main" xmlns:r="http://schemas.openxmlformats.org/officeDocument/2006/relationships">
+  <p:cSld>
+    <p:bg>
+      <p:bgPr>
+        <a:solidFill>
+          <a:srgbClr val="FFFFFF"/>
+        </a:solidFill>
+        <a:effectLst/>
+      </p:bgPr>
+    </p:bg>
+    <p:spTree>
+      <p:nvGrpSpPr>
+        <p:cNvPr id="1" name=""/>
+        <p:cNvGrpSpPr/>
+        <p:nvPr/>
+      </p:nvGrpSpPr>
+      <p:grpSpPr/>
+      <p:sp>
+        <p:nvSpPr>
+          <p:cNvPr id="2" name="Rectangle 1"/>
+          <p:cNvSpPr/>
+          <p:nvPr/>
+        </p:nvSpPr>
+        <p:spPr>
+          <a:xfrm>
+            <a:off x="0" y="0"/>
+            <a:ext cx="12191695" cy="960120"/>
+          </a:xfrm>
+          <a:prstGeom prst="rect">
+            <a:avLst/>
+          </a:prstGeom>
+          <a:solidFill>
+            <a:srgbClr val="095292"/>
+          </a:solidFill>
+          <a:ln>
+            <a:noFill/>
+          </a:ln>
+        </p:spPr>
+        <p:style>
+          <a:lnRef idx="1">
+            <a:schemeClr val="accent1"/>
+          </a:lnRef>
+          <a:fillRef idx="3">
+            <a:schemeClr val="accent1"/>
+          </a:fillRef>
+          <a:effectRef idx="2">
+            <a:schemeClr val="accent1"/>
+          </a:effectRef>
+          <a:fontRef idx="minor">
+            <a:schemeClr val="lt1"/>
+          </a:fontRef>
+        </p:style>
+        <p:txBody>
+          <a:bodyPr rtlCol="0" anchor="ctr"/>
+          <a:lstStyle/>
+          <a:p>
+            <a:pPr algn="ctr"/>
+          </a:p>
+        </p:txBody>
+      </p:sp>
+      <p:sp>
+        <p:nvSpPr>
+          <p:cNvPr id="3" name="Rectangle 2"/>
+          <p:cNvSpPr/>
+          <p:nvPr/>
+        </p:nvSpPr>
+        <p:spPr>
+          <a:xfrm>
+            <a:off x="0" y="960120"/>
+            <a:ext cx="12191695" cy="41148"/>
+          </a:xfrm>
+          <a:prstGeom prst="rect">
+            <a:avLst/>
+          </a:prstGeom>
+          <a:solidFill>
+            <a:srgbClr val="FFD000"/>
+          </a:solidFill>
+          <a:ln>
+            <a:noFill/>
+          </a:ln>
+        </p:spPr>
+        <p:style>
+          <a:lnRef idx="1">
+            <a:schemeClr val="accent1"/>
+          </a:lnRef>
+          <a:fillRef idx="3">
+            <a:schemeClr val="accent1"/>
+          </a:fillRef>
+          <a:effectRef idx="2">
+            <a:schemeClr val="accent1"/>
+          </a:effectRef>
+          <a:fontRef idx="minor">
+            <a:schemeClr val="lt1"/>
+          </a:fontRef>
+        </p:style>
+        <p:txBody>
+          <a:bodyPr rtlCol="0" anchor="ctr"/>
+          <a:lstStyle/>
+          <a:p>
+            <a:pPr algn="ctr"/>
+          </a:p>
+        </p:txBody>
+      </p:sp>
+      <p:sp>
+        <p:nvSpPr>
+          <p:cNvPr id="4" name="TextBox 3"/>
+          <p:cNvSpPr txBox="1"/>
+          <p:nvPr/>
+        </p:nvSpPr>
+        <p:spPr>
+          <a:xfrm>
+            <a:off x="457200" y="164592"/>
+            <a:ext cx="11277295" cy="502920"/>
+          </a:xfrm>
+          <a:prstGeom prst="rect">
+            <a:avLst/>
+          </a:prstGeom>
+          <a:noFill/>
+        </p:spPr>
+        <p:txBody>
+          <a:bodyPr wrap="square">
+            <a:spAutoFit/>
+          </a:bodyPr>
+          <a:lstStyle/>
+          <a:p>
+            <a:r>
+              <a:rPr sz="2600" b="1" i="0">
+                <a:solidFill>
+                  <a:srgbClr val="FFFFFF"/>
+                </a:solidFill>
+                <a:latin typeface="Calibri"/>
+              </a:rPr>
+              <a:t>Antes de entregar — autochequeo</a:t>
+            </a:r>
+          </a:p>
+        </p:txBody>
+      </p:sp>
+      <p:sp>
+        <p:nvSpPr>
+          <p:cNvPr id="5" name="Rounded Rectangle 4"/>
+          <p:cNvSpPr/>
+          <p:nvPr/>
+        </p:nvSpPr>
+        <p:spPr>
+          <a:xfrm>
+            <a:off x="457200" y="1261872"/>
+            <a:ext cx="11277295" cy="566928"/>
+          </a:xfrm>
+          <a:prstGeom prst="roundRect">
+            <a:avLst>
+              <a:gd name="adj" fmla="val 12000"/>
+            </a:avLst>
+          </a:prstGeom>
+          <a:solidFill>
+            <a:srgbClr val="F2F2F2"/>
+          </a:solidFill>
+          <a:ln>
+            <a:noFill/>
+          </a:ln>
+        </p:spPr>
+        <p:style>
+          <a:lnRef idx="1">
+            <a:schemeClr val="accent1"/>
+          </a:lnRef>
+          <a:fillRef idx="3">
+            <a:schemeClr val="accent1"/>
+          </a:fillRef>
+          <a:effectRef idx="2">
+            <a:schemeClr val="accent1"/>
+          </a:effectRef>
+          <a:fontRef idx="minor">
+            <a:schemeClr val="lt1"/>
+          </a:fontRef>
+        </p:style>
+        <p:txBody>
+          <a:bodyPr rtlCol="0" anchor="ctr"/>
+          <a:lstStyle/>
+          <a:p>
+            <a:pPr algn="ctr"/>
+          </a:p>
+        </p:txBody>
+      </p:sp>
+      <p:sp>
+        <p:nvSpPr>
+          <p:cNvPr id="6" name="Rectangle 5"/>
+          <p:cNvSpPr/>
+          <p:nvPr/>
+        </p:nvSpPr>
+        <p:spPr>
+          <a:xfrm>
+            <a:off x="640080" y="1408175"/>
+            <a:ext cx="274320" cy="274320"/>
+          </a:xfrm>
+          <a:prstGeom prst="rect">
+            <a:avLst/>
+          </a:prstGeom>
+          <a:solidFill>
+            <a:srgbClr val="FFFFFF"/>
+          </a:solidFill>
+          <a:ln>
+            <a:solidFill>
+              <a:srgbClr val="333333"/>
+            </a:solidFill>
+          </a:ln>
+        </p:spPr>
+        <p:style>
+          <a:lnRef idx="1">
+            <a:schemeClr val="accent1"/>
+          </a:lnRef>
+          <a:fillRef idx="3">
+            <a:schemeClr val="accent1"/>
+          </a:fillRef>
+          <a:effectRef idx="2">
+            <a:schemeClr val="accent1"/>
+          </a:effectRef>
+          <a:fontRef idx="minor">
+            <a:schemeClr val="lt1"/>
+          </a:fontRef>
+        </p:style>
+        <p:txBody>
+          <a:bodyPr rtlCol="0" anchor="ctr"/>
+          <a:lstStyle/>
+          <a:p>
+            <a:pPr algn="ctr"/>
+          </a:p>
+        </p:txBody>
+      </p:sp>
+      <p:sp>
+        <p:nvSpPr>
+          <p:cNvPr id="7" name="Rectangle 6"/>
+          <p:cNvSpPr/>
+          <p:nvPr/>
+        </p:nvSpPr>
+        <p:spPr>
+          <a:xfrm>
+            <a:off x="640080" y="1408175"/>
+            <a:ext cx="73152" cy="274320"/>
           </a:xfrm>
           <a:prstGeom prst="rect">
             <a:avLst/>
@@ -5225,40 +6696,16 @@
           </a:p>
         </p:txBody>
       </p:sp>
-      <p:pic>
-        <p:nvPicPr>
-          <p:cNvPr id="3" name="Picture 2" descr="logo_uniajc_color.png"/>
-          <p:cNvPicPr>
-            <a:picLocks noChangeAspect="1"/>
-          </p:cNvPicPr>
-          <p:nvPr/>
-        </p:nvPicPr>
-        <p:blipFill>
-          <a:blip r:embed="rId2"/>
-          <a:stretch>
-            <a:fillRect/>
-          </a:stretch>
-        </p:blipFill>
-        <p:spPr>
-          <a:xfrm>
-            <a:off x="10271455" y="5998464"/>
-            <a:ext cx="1463040" cy="643233"/>
-          </a:xfrm>
-          <a:prstGeom prst="rect">
-            <a:avLst/>
-          </a:prstGeom>
-        </p:spPr>
-      </p:pic>
-      <p:sp>
-        <p:nvSpPr>
-          <p:cNvPr id="4" name="TextBox 3"/>
+      <p:sp>
+        <p:nvSpPr>
+          <p:cNvPr id="8" name="TextBox 7"/>
           <p:cNvSpPr txBox="1"/>
           <p:nvPr/>
         </p:nvSpPr>
         <p:spPr>
           <a:xfrm>
-            <a:off x="457200" y="1737360"/>
-            <a:ext cx="11277295" cy="1097280"/>
+            <a:off x="1097280" y="1353312"/>
+            <a:ext cx="10362895" cy="402336"/>
           </a:xfrm>
           <a:prstGeom prst="rect">
             <a:avLst/>
@@ -5269,29 +6716,358 @@
           <a:bodyPr wrap="square" anchor="ctr"/>
           <a:lstStyle/>
           <a:p>
+            <a:r>
+              <a:rPr sz="1500" b="0" i="0">
+                <a:solidFill>
+                  <a:srgbClr val="333333"/>
+                </a:solidFill>
+                <a:latin typeface="Calibri"/>
+              </a:rPr>
+              <a:t>Si borro el archivo datos/mascotas.csv y ejecuto la aplicacion, ¿arranca con lista vacia y un aviso, o se cierra?</a:t>
+            </a:r>
+          </a:p>
+        </p:txBody>
+      </p:sp>
+      <p:sp>
+        <p:nvSpPr>
+          <p:cNvPr id="9" name="Rounded Rectangle 8"/>
+          <p:cNvSpPr/>
+          <p:nvPr/>
+        </p:nvSpPr>
+        <p:spPr>
+          <a:xfrm>
+            <a:off x="457200" y="1938528"/>
+            <a:ext cx="11277295" cy="566928"/>
+          </a:xfrm>
+          <a:prstGeom prst="roundRect">
+            <a:avLst>
+              <a:gd name="adj" fmla="val 12000"/>
+            </a:avLst>
+          </a:prstGeom>
+          <a:solidFill>
+            <a:srgbClr val="F2F2F2"/>
+          </a:solidFill>
+          <a:ln>
+            <a:noFill/>
+          </a:ln>
+        </p:spPr>
+        <p:style>
+          <a:lnRef idx="1">
+            <a:schemeClr val="accent1"/>
+          </a:lnRef>
+          <a:fillRef idx="3">
+            <a:schemeClr val="accent1"/>
+          </a:fillRef>
+          <a:effectRef idx="2">
+            <a:schemeClr val="accent1"/>
+          </a:effectRef>
+          <a:fontRef idx="minor">
+            <a:schemeClr val="lt1"/>
+          </a:fontRef>
+        </p:style>
+        <p:txBody>
+          <a:bodyPr rtlCol="0" anchor="ctr"/>
+          <a:lstStyle/>
+          <a:p>
             <a:pPr algn="ctr"/>
-            <a:r>
-              <a:rPr sz="3400" b="1" i="0">
-                <a:solidFill>
-                  <a:srgbClr val="095292"/>
-                </a:solidFill>
-                <a:latin typeface="Calibri"/>
-              </a:rPr>
-              <a:t>Clase 13 · VetCare avanza</a:t>
-            </a:r>
-          </a:p>
-        </p:txBody>
-      </p:sp>
-      <p:sp>
-        <p:nvSpPr>
-          <p:cNvPr id="5" name="TextBox 4"/>
+          </a:p>
+        </p:txBody>
+      </p:sp>
+      <p:sp>
+        <p:nvSpPr>
+          <p:cNvPr id="10" name="Rectangle 9"/>
+          <p:cNvSpPr/>
+          <p:nvPr/>
+        </p:nvSpPr>
+        <p:spPr>
+          <a:xfrm>
+            <a:off x="640080" y="2084832"/>
+            <a:ext cx="274320" cy="274320"/>
+          </a:xfrm>
+          <a:prstGeom prst="rect">
+            <a:avLst/>
+          </a:prstGeom>
+          <a:solidFill>
+            <a:srgbClr val="FFFFFF"/>
+          </a:solidFill>
+          <a:ln>
+            <a:solidFill>
+              <a:srgbClr val="333333"/>
+            </a:solidFill>
+          </a:ln>
+        </p:spPr>
+        <p:style>
+          <a:lnRef idx="1">
+            <a:schemeClr val="accent1"/>
+          </a:lnRef>
+          <a:fillRef idx="3">
+            <a:schemeClr val="accent1"/>
+          </a:fillRef>
+          <a:effectRef idx="2">
+            <a:schemeClr val="accent1"/>
+          </a:effectRef>
+          <a:fontRef idx="minor">
+            <a:schemeClr val="lt1"/>
+          </a:fontRef>
+        </p:style>
+        <p:txBody>
+          <a:bodyPr rtlCol="0" anchor="ctr"/>
+          <a:lstStyle/>
+          <a:p>
+            <a:pPr algn="ctr"/>
+          </a:p>
+        </p:txBody>
+      </p:sp>
+      <p:sp>
+        <p:nvSpPr>
+          <p:cNvPr id="11" name="Rectangle 10"/>
+          <p:cNvSpPr/>
+          <p:nvPr/>
+        </p:nvSpPr>
+        <p:spPr>
+          <a:xfrm>
+            <a:off x="640080" y="2084832"/>
+            <a:ext cx="73152" cy="274320"/>
+          </a:xfrm>
+          <a:prstGeom prst="rect">
+            <a:avLst/>
+          </a:prstGeom>
+          <a:solidFill>
+            <a:srgbClr val="269CCB"/>
+          </a:solidFill>
+          <a:ln>
+            <a:noFill/>
+          </a:ln>
+        </p:spPr>
+        <p:style>
+          <a:lnRef idx="1">
+            <a:schemeClr val="accent1"/>
+          </a:lnRef>
+          <a:fillRef idx="3">
+            <a:schemeClr val="accent1"/>
+          </a:fillRef>
+          <a:effectRef idx="2">
+            <a:schemeClr val="accent1"/>
+          </a:effectRef>
+          <a:fontRef idx="minor">
+            <a:schemeClr val="lt1"/>
+          </a:fontRef>
+        </p:style>
+        <p:txBody>
+          <a:bodyPr rtlCol="0" anchor="ctr"/>
+          <a:lstStyle/>
+          <a:p>
+            <a:pPr algn="ctr"/>
+          </a:p>
+        </p:txBody>
+      </p:sp>
+      <p:sp>
+        <p:nvSpPr>
+          <p:cNvPr id="12" name="TextBox 11"/>
           <p:cNvSpPr txBox="1"/>
           <p:nvPr/>
         </p:nvSpPr>
         <p:spPr>
           <a:xfrm>
-            <a:off x="457200" y="3017520"/>
-            <a:ext cx="11277295" cy="1645920"/>
+            <a:off x="1097280" y="2029968"/>
+            <a:ext cx="10362895" cy="402336"/>
+          </a:xfrm>
+          <a:prstGeom prst="rect">
+            <a:avLst/>
+          </a:prstGeom>
+          <a:noFill/>
+        </p:spPr>
+        <p:txBody>
+          <a:bodyPr wrap="square" anchor="ctr"/>
+          <a:lstStyle/>
+          <a:p>
+            <a:r>
+              <a:rPr sz="1500" b="0" i="0">
+                <a:solidFill>
+                  <a:srgbClr val="333333"/>
+                </a:solidFill>
+                <a:latin typeface="Calibri"/>
+              </a:rPr>
+              <a:t>¿En que capa esta el mensaje que ve el usuario: dentro de la clase Mascota o dentro del formulario? ¿Que pasaria si manana cambio Swing por consola?</a:t>
+            </a:r>
+          </a:p>
+        </p:txBody>
+      </p:sp>
+      <p:sp>
+        <p:nvSpPr>
+          <p:cNvPr id="13" name="Rounded Rectangle 12"/>
+          <p:cNvSpPr/>
+          <p:nvPr/>
+        </p:nvSpPr>
+        <p:spPr>
+          <a:xfrm>
+            <a:off x="457200" y="2615184"/>
+            <a:ext cx="11277295" cy="566928"/>
+          </a:xfrm>
+          <a:prstGeom prst="roundRect">
+            <a:avLst>
+              <a:gd name="adj" fmla="val 12000"/>
+            </a:avLst>
+          </a:prstGeom>
+          <a:solidFill>
+            <a:srgbClr val="F2F2F2"/>
+          </a:solidFill>
+          <a:ln>
+            <a:noFill/>
+          </a:ln>
+        </p:spPr>
+        <p:style>
+          <a:lnRef idx="1">
+            <a:schemeClr val="accent1"/>
+          </a:lnRef>
+          <a:fillRef idx="3">
+            <a:schemeClr val="accent1"/>
+          </a:fillRef>
+          <a:effectRef idx="2">
+            <a:schemeClr val="accent1"/>
+          </a:effectRef>
+          <a:fontRef idx="minor">
+            <a:schemeClr val="lt1"/>
+          </a:fontRef>
+        </p:style>
+        <p:txBody>
+          <a:bodyPr rtlCol="0" anchor="ctr"/>
+          <a:lstStyle/>
+          <a:p>
+            <a:pPr algn="ctr"/>
+          </a:p>
+        </p:txBody>
+      </p:sp>
+      <p:sp>
+        <p:nvSpPr>
+          <p:cNvPr id="14" name="Rectangle 13"/>
+          <p:cNvSpPr/>
+          <p:nvPr/>
+        </p:nvSpPr>
+        <p:spPr>
+          <a:xfrm>
+            <a:off x="640080" y="2761488"/>
+            <a:ext cx="274320" cy="274320"/>
+          </a:xfrm>
+          <a:prstGeom prst="rect">
+            <a:avLst/>
+          </a:prstGeom>
+          <a:solidFill>
+            <a:srgbClr val="FFFFFF"/>
+          </a:solidFill>
+          <a:ln>
+            <a:solidFill>
+              <a:srgbClr val="333333"/>
+            </a:solidFill>
+          </a:ln>
+        </p:spPr>
+        <p:style>
+          <a:lnRef idx="1">
+            <a:schemeClr val="accent1"/>
+          </a:lnRef>
+          <a:fillRef idx="3">
+            <a:schemeClr val="accent1"/>
+          </a:fillRef>
+          <a:effectRef idx="2">
+            <a:schemeClr val="accent1"/>
+          </a:effectRef>
+          <a:fontRef idx="minor">
+            <a:schemeClr val="lt1"/>
+          </a:fontRef>
+        </p:style>
+        <p:txBody>
+          <a:bodyPr rtlCol="0" anchor="ctr"/>
+          <a:lstStyle/>
+          <a:p>
+            <a:pPr algn="ctr"/>
+          </a:p>
+        </p:txBody>
+      </p:sp>
+      <p:sp>
+        <p:nvSpPr>
+          <p:cNvPr id="15" name="Rectangle 14"/>
+          <p:cNvSpPr/>
+          <p:nvPr/>
+        </p:nvSpPr>
+        <p:spPr>
+          <a:xfrm>
+            <a:off x="640080" y="2761488"/>
+            <a:ext cx="73152" cy="274320"/>
+          </a:xfrm>
+          <a:prstGeom prst="rect">
+            <a:avLst/>
+          </a:prstGeom>
+          <a:solidFill>
+            <a:srgbClr val="269CCB"/>
+          </a:solidFill>
+          <a:ln>
+            <a:noFill/>
+          </a:ln>
+        </p:spPr>
+        <p:style>
+          <a:lnRef idx="1">
+            <a:schemeClr val="accent1"/>
+          </a:lnRef>
+          <a:fillRef idx="3">
+            <a:schemeClr val="accent1"/>
+          </a:fillRef>
+          <a:effectRef idx="2">
+            <a:schemeClr val="accent1"/>
+          </a:effectRef>
+          <a:fontRef idx="minor">
+            <a:schemeClr val="lt1"/>
+          </a:fontRef>
+        </p:style>
+        <p:txBody>
+          <a:bodyPr rtlCol="0" anchor="ctr"/>
+          <a:lstStyle/>
+          <a:p>
+            <a:pPr algn="ctr"/>
+          </a:p>
+        </p:txBody>
+      </p:sp>
+      <p:sp>
+        <p:nvSpPr>
+          <p:cNvPr id="16" name="TextBox 15"/>
+          <p:cNvSpPr txBox="1"/>
+          <p:nvPr/>
+        </p:nvSpPr>
+        <p:spPr>
+          <a:xfrm>
+            <a:off x="1097280" y="2706624"/>
+            <a:ext cx="10362895" cy="402336"/>
+          </a:xfrm>
+          <a:prstGeom prst="rect">
+            <a:avLst/>
+          </a:prstGeom>
+          <a:noFill/>
+        </p:spPr>
+        <p:txBody>
+          <a:bodyPr wrap="square" anchor="ctr"/>
+          <a:lstStyle/>
+          <a:p>
+            <a:r>
+              <a:rPr sz="1500" b="0" i="0">
+                <a:solidFill>
+                  <a:srgbClr val="333333"/>
+                </a:solidFill>
+                <a:latin typeface="Calibri"/>
+              </a:rPr>
+              <a:t>¿Cuantos catch de mi proyecto no tienen ni una linea adentro, y que haria el sistema si esa falla ocurriera de verdad?</a:t>
+            </a:r>
+          </a:p>
+        </p:txBody>
+      </p:sp>
+      <p:sp>
+        <p:nvSpPr>
+          <p:cNvPr id="17" name="TextBox 16"/>
+          <p:cNvSpPr txBox="1"/>
+          <p:nvPr/>
+        </p:nvSpPr>
+        <p:spPr>
+          <a:xfrm>
+            <a:off x="11185855" y="6473952"/>
+            <a:ext cx="640080" cy="274320"/>
           </a:xfrm>
           <a:prstGeom prst="rect">
             <a:avLst/>
@@ -5304,65 +7080,141 @@
           </a:bodyPr>
           <a:lstStyle/>
           <a:p>
-            <a:pPr algn="ctr">
-              <a:spcAft>
-                <a:spcPts val="600"/>
-              </a:spcAft>
-            </a:pPr>
-            <a:r>
-              <a:rPr sz="1600" b="0" i="0">
-                <a:solidFill>
-                  <a:srgbClr val="333333"/>
-                </a:solidFill>
-                <a:latin typeface="Calibri"/>
-              </a:rPr>
-              <a:t>El registro de mascotas de VetCare valida edad, peso e ID y avisa con un mensaje claro en lugar de cerrarse.</a:t>
-            </a:r>
-          </a:p>
-          <a:p>
-            <a:pPr algn="ctr">
-              <a:spcAft>
-                <a:spcPts val="600"/>
-              </a:spcAft>
-            </a:pPr>
-            <a:r>
-              <a:rPr sz="1600" b="0" i="0">
-                <a:solidFill>
-                  <a:srgbClr val="333333"/>
-                </a:solidFill>
-                <a:latin typeface="Calibri"/>
-              </a:rPr>
-              <a:t>Entregable: Clase DatoInvalidoException mas los setters validados de Mascota y la carga del CSV con try-with-resources, con evidencia de cinco pruebas de entrada (cuatro malas y una valida), subido a la plataforma del curso.</a:t>
-            </a:r>
-          </a:p>
-          <a:p>
-            <a:pPr algn="ctr">
-              <a:spcAft>
-                <a:spcPts val="600"/>
-              </a:spcAft>
-            </a:pPr>
-            <a:r>
-              <a:rPr sz="1600" b="0" i="0">
-                <a:solidFill>
-                  <a:srgbClr val="333333"/>
-                </a:solidFill>
-                <a:latin typeface="Calibri"/>
-              </a:rPr>
-              <a:t>Siguiente clase: continuamos el hilo del PI</a:t>
-            </a:r>
-          </a:p>
-        </p:txBody>
-      </p:sp>
-      <p:sp>
-        <p:nvSpPr>
-          <p:cNvPr id="6" name="TextBox 5"/>
+            <a:pPr algn="r"/>
+            <a:r>
+              <a:rPr sz="1100" b="0" i="0">
+                <a:solidFill>
+                  <a:srgbClr val="666666"/>
+                </a:solidFill>
+                <a:latin typeface="Calibri"/>
+              </a:rPr>
+              <a:t>17</a:t>
+            </a:r>
+          </a:p>
+        </p:txBody>
+      </p:sp>
+    </p:spTree>
+  </p:cSld>
+  <p:clrMapOvr>
+    <a:masterClrMapping/>
+  </p:clrMapOvr>
+</p:sld>
+</file>
+
+<file path=ppt/slides/slide18.xml><?xml version="1.0" encoding="utf-8"?>
+<p:sld xmlns:a="http://schemas.openxmlformats.org/drawingml/2006/main" xmlns:p="http://schemas.openxmlformats.org/presentationml/2006/main" xmlns:r="http://schemas.openxmlformats.org/officeDocument/2006/relationships">
+  <p:cSld>
+    <p:bg>
+      <p:bgPr>
+        <a:solidFill>
+          <a:srgbClr val="FFFFFF"/>
+        </a:solidFill>
+        <a:effectLst/>
+      </p:bgPr>
+    </p:bg>
+    <p:spTree>
+      <p:nvGrpSpPr>
+        <p:cNvPr id="1" name=""/>
+        <p:cNvGrpSpPr/>
+        <p:nvPr/>
+      </p:nvGrpSpPr>
+      <p:grpSpPr/>
+      <p:sp>
+        <p:nvSpPr>
+          <p:cNvPr id="2" name="Rectangle 1"/>
+          <p:cNvSpPr/>
+          <p:nvPr/>
+        </p:nvSpPr>
+        <p:spPr>
+          <a:xfrm>
+            <a:off x="0" y="0"/>
+            <a:ext cx="12191695" cy="960120"/>
+          </a:xfrm>
+          <a:prstGeom prst="rect">
+            <a:avLst/>
+          </a:prstGeom>
+          <a:solidFill>
+            <a:srgbClr val="095292"/>
+          </a:solidFill>
+          <a:ln>
+            <a:noFill/>
+          </a:ln>
+        </p:spPr>
+        <p:style>
+          <a:lnRef idx="1">
+            <a:schemeClr val="accent1"/>
+          </a:lnRef>
+          <a:fillRef idx="3">
+            <a:schemeClr val="accent1"/>
+          </a:fillRef>
+          <a:effectRef idx="2">
+            <a:schemeClr val="accent1"/>
+          </a:effectRef>
+          <a:fontRef idx="minor">
+            <a:schemeClr val="lt1"/>
+          </a:fontRef>
+        </p:style>
+        <p:txBody>
+          <a:bodyPr rtlCol="0" anchor="ctr"/>
+          <a:lstStyle/>
+          <a:p>
+            <a:pPr algn="ctr"/>
+          </a:p>
+        </p:txBody>
+      </p:sp>
+      <p:sp>
+        <p:nvSpPr>
+          <p:cNvPr id="3" name="Rectangle 2"/>
+          <p:cNvSpPr/>
+          <p:nvPr/>
+        </p:nvSpPr>
+        <p:spPr>
+          <a:xfrm>
+            <a:off x="0" y="960120"/>
+            <a:ext cx="12191695" cy="41148"/>
+          </a:xfrm>
+          <a:prstGeom prst="rect">
+            <a:avLst/>
+          </a:prstGeom>
+          <a:solidFill>
+            <a:srgbClr val="FFD000"/>
+          </a:solidFill>
+          <a:ln>
+            <a:noFill/>
+          </a:ln>
+        </p:spPr>
+        <p:style>
+          <a:lnRef idx="1">
+            <a:schemeClr val="accent1"/>
+          </a:lnRef>
+          <a:fillRef idx="3">
+            <a:schemeClr val="accent1"/>
+          </a:fillRef>
+          <a:effectRef idx="2">
+            <a:schemeClr val="accent1"/>
+          </a:effectRef>
+          <a:fontRef idx="minor">
+            <a:schemeClr val="lt1"/>
+          </a:fontRef>
+        </p:style>
+        <p:txBody>
+          <a:bodyPr rtlCol="0" anchor="ctr"/>
+          <a:lstStyle/>
+          <a:p>
+            <a:pPr algn="ctr"/>
+          </a:p>
+        </p:txBody>
+      </p:sp>
+      <p:sp>
+        <p:nvSpPr>
+          <p:cNvPr id="4" name="TextBox 3"/>
           <p:cNvSpPr txBox="1"/>
           <p:nvPr/>
         </p:nvSpPr>
         <p:spPr>
           <a:xfrm>
-            <a:off x="457200" y="4754880"/>
-            <a:ext cx="11277295" cy="640080"/>
+            <a:off x="457200" y="164592"/>
+            <a:ext cx="11277295" cy="502920"/>
           </a:xfrm>
           <a:prstGeom prst="rect">
             <a:avLst/>
@@ -5375,15 +7227,871 @@
           </a:bodyPr>
           <a:lstStyle/>
           <a:p>
+            <a:r>
+              <a:rPr sz="2600" b="1" i="0">
+                <a:solidFill>
+                  <a:srgbClr val="FFFFFF"/>
+                </a:solidFill>
+                <a:latin typeface="Calibri"/>
+              </a:rPr>
+              <a:t>Criterios de exito / entregable</a:t>
+            </a:r>
+          </a:p>
+        </p:txBody>
+      </p:sp>
+      <p:sp>
+        <p:nvSpPr>
+          <p:cNvPr id="5" name="TextBox 4"/>
+          <p:cNvSpPr txBox="1"/>
+          <p:nvPr/>
+        </p:nvSpPr>
+        <p:spPr>
+          <a:xfrm>
+            <a:off x="457200" y="1170432"/>
+            <a:ext cx="11277295" cy="5230368"/>
+          </a:xfrm>
+          <a:prstGeom prst="rect">
+            <a:avLst/>
+          </a:prstGeom>
+          <a:noFill/>
+        </p:spPr>
+        <p:txBody>
+          <a:bodyPr wrap="square">
+            <a:spAutoFit/>
+          </a:bodyPr>
+          <a:lstStyle/>
+          <a:p>
+            <a:pPr>
+              <a:spcAft>
+                <a:spcPts val="800"/>
+              </a:spcAft>
+            </a:pPr>
+            <a:r>
+              <a:rPr sz="2000" b="0" i="0">
+                <a:solidFill>
+                  <a:srgbClr val="333333"/>
+                </a:solidFill>
+                <a:latin typeface="Calibri"/>
+              </a:rPr>
+              <a:t>–   </a:t>
+            </a:r>
+            <a:r>
+              <a:rPr sz="2000" b="1" i="0">
+                <a:solidFill>
+                  <a:srgbClr val="333333"/>
+                </a:solidFill>
+                <a:latin typeface="Calibri"/>
+              </a:rPr>
+              <a:t>Entregable:</a:t>
+            </a:r>
+            <a:r>
+              <a:rPr sz="2000" b="0" i="0">
+                <a:solidFill>
+                  <a:srgbClr val="333333"/>
+                </a:solidFill>
+                <a:latin typeface="Calibri"/>
+              </a:rPr>
+              <a:t> Clase DatoInvalidoException mas los setters validados de Mascota y la carga del CSV con try-with-resources, con evidencia de cinco pruebas de entrada (cuatro malas y una valida), subido a la plataforma del curso.</a:t>
+            </a:r>
+          </a:p>
+          <a:p>
+            <a:pPr>
+              <a:spcAft>
+                <a:spcPts val="800"/>
+              </a:spcAft>
+            </a:pPr>
+            <a:r>
+              <a:rPr sz="2000" b="0" i="0">
+                <a:solidFill>
+                  <a:srgbClr val="333333"/>
+                </a:solidFill>
+                <a:latin typeface="Calibri"/>
+              </a:rPr>
+              <a:t>–   </a:t>
+            </a:r>
+            <a:r>
+              <a:rPr sz="2000" b="1" i="0">
+                <a:solidFill>
+                  <a:srgbClr val="333333"/>
+                </a:solidFill>
+                <a:latin typeface="Calibri"/>
+              </a:rPr>
+              <a:t>Exito:</a:t>
+            </a:r>
+            <a:r>
+              <a:rPr sz="2000" b="0" i="0">
+                <a:solidFill>
+                  <a:srgbClr val="333333"/>
+                </a:solidFill>
+                <a:latin typeface="Calibri"/>
+              </a:rPr>
+              <a:t> Existe la clase DatoInvalidoException que extiende Exception y todos sus mensajes estan escritos en lenguaje de la clinica, no en lenguaje tecnico.</a:t>
+            </a:r>
+          </a:p>
+          <a:p>
+            <a:pPr>
+              <a:spcAft>
+                <a:spcPts val="800"/>
+              </a:spcAft>
+            </a:pPr>
+            <a:r>
+              <a:rPr sz="2000" b="0" i="0">
+                <a:solidFill>
+                  <a:srgbClr val="333333"/>
+                </a:solidFill>
+                <a:latin typeface="Calibri"/>
+              </a:rPr>
+              <a:t>–   </a:t>
+            </a:r>
+            <a:r>
+              <a:rPr sz="2000" b="1" i="0">
+                <a:solidFill>
+                  <a:srgbClr val="333333"/>
+                </a:solidFill>
+                <a:latin typeface="Calibri"/>
+              </a:rPr>
+              <a:t>Exito:</a:t>
+            </a:r>
+            <a:r>
+              <a:rPr sz="2000" b="0" i="0">
+                <a:solidFill>
+                  <a:srgbClr val="333333"/>
+                </a:solidFill>
+                <a:latin typeface="Calibri"/>
+              </a:rPr>
+              <a:t> Con las cinco entradas de prueba (vacio, texto, negativo, fuera de rango y valida) la aplicacion nunca se cierra ni muestra stack trace al usuario, y solo la ultima agrega la mascota.</a:t>
+            </a:r>
+          </a:p>
+          <a:p>
+            <a:pPr>
+              <a:spcAft>
+                <a:spcPts val="800"/>
+              </a:spcAft>
+            </a:pPr>
+            <a:r>
+              <a:rPr sz="2000" b="0" i="0">
+                <a:solidFill>
+                  <a:srgbClr val="333333"/>
+                </a:solidFill>
+                <a:latin typeface="Calibri"/>
+              </a:rPr>
+              <a:t>–   </a:t>
+            </a:r>
+            <a:r>
+              <a:rPr sz="2000" b="1" i="0">
+                <a:solidFill>
+                  <a:srgbClr val="333333"/>
+                </a:solidFill>
+                <a:latin typeface="Calibri"/>
+              </a:rPr>
+              <a:t>Exito:</a:t>
+            </a:r>
+            <a:r>
+              <a:rPr sz="2000" b="0" i="0">
+                <a:solidFill>
+                  <a:srgbClr val="333333"/>
+                </a:solidFill>
+                <a:latin typeface="Calibri"/>
+              </a:rPr>
+              <a:t> La lectura del CSV usa try-with-resources, distingue FileNotFoundException de IOException y omite unicamente las lineas malas, conservando las buenas.</a:t>
+            </a:r>
+          </a:p>
+          <a:p>
+            <a:pPr>
+              <a:spcAft>
+                <a:spcPts val="800"/>
+              </a:spcAft>
+            </a:pPr>
+            <a:r>
+              <a:rPr sz="2000" b="0" i="0">
+                <a:solidFill>
+                  <a:srgbClr val="333333"/>
+                </a:solidFill>
+                <a:latin typeface="Calibri"/>
+              </a:rPr>
+              <a:t>–   </a:t>
+            </a:r>
+            <a:r>
+              <a:rPr sz="2000" b="1" i="0">
+                <a:solidFill>
+                  <a:srgbClr val="333333"/>
+                </a:solidFill>
+                <a:latin typeface="Calibri"/>
+              </a:rPr>
+              <a:t>Exito:</a:t>
+            </a:r>
+            <a:r>
+              <a:rPr sz="2000" b="0" i="0">
+                <a:solidFill>
+                  <a:srgbClr val="333333"/>
+                </a:solidFill>
+                <a:latin typeface="Calibri"/>
+              </a:rPr>
+              <a:t> No queda ningun catch vacio en el proyecto: cada catch informa, registra o asume un valor por defecto documentado con un comentario.</a:t>
+            </a:r>
+          </a:p>
+          <a:p>
+            <a:pPr>
+              <a:spcAft>
+                <a:spcPts val="800"/>
+              </a:spcAft>
+            </a:pPr>
+            <a:r>
+              <a:rPr sz="2000" b="0" i="0">
+                <a:solidFill>
+                  <a:srgbClr val="333333"/>
+                </a:solidFill>
+                <a:latin typeface="Calibri"/>
+              </a:rPr>
+              <a:t>–   </a:t>
+            </a:r>
+            <a:r>
+              <a:rPr sz="2000" b="1" i="0">
+                <a:solidFill>
+                  <a:srgbClr val="333333"/>
+                </a:solidFill>
+                <a:latin typeface="Calibri"/>
+              </a:rPr>
+              <a:t>Entrega en la plataforma del curso</a:t>
+            </a:r>
+            <a:r>
+              <a:rPr sz="2000" b="0" i="0">
+                <a:solidFill>
+                  <a:srgbClr val="333333"/>
+                </a:solidFill>
+                <a:latin typeface="Calibri"/>
+              </a:rPr>
+              <a:t> — en la fecha que indique el docente.</a:t>
+            </a:r>
+          </a:p>
+        </p:txBody>
+      </p:sp>
+      <p:sp>
+        <p:nvSpPr>
+          <p:cNvPr id="6" name="TextBox 5"/>
+          <p:cNvSpPr txBox="1"/>
+          <p:nvPr/>
+        </p:nvSpPr>
+        <p:spPr>
+          <a:xfrm>
+            <a:off x="11185855" y="6473952"/>
+            <a:ext cx="640080" cy="274320"/>
+          </a:xfrm>
+          <a:prstGeom prst="rect">
+            <a:avLst/>
+          </a:prstGeom>
+          <a:noFill/>
+        </p:spPr>
+        <p:txBody>
+          <a:bodyPr wrap="square">
+            <a:spAutoFit/>
+          </a:bodyPr>
+          <a:lstStyle/>
+          <a:p>
+            <a:pPr algn="r"/>
+            <a:r>
+              <a:rPr sz="1100" b="0" i="0">
+                <a:solidFill>
+                  <a:srgbClr val="666666"/>
+                </a:solidFill>
+                <a:latin typeface="Calibri"/>
+              </a:rPr>
+              <a:t>18</a:t>
+            </a:r>
+          </a:p>
+        </p:txBody>
+      </p:sp>
+    </p:spTree>
+  </p:cSld>
+  <p:clrMapOvr>
+    <a:masterClrMapping/>
+  </p:clrMapOvr>
+</p:sld>
+</file>
+
+<file path=ppt/slides/slide19.xml><?xml version="1.0" encoding="utf-8"?>
+<p:sld xmlns:a="http://schemas.openxmlformats.org/drawingml/2006/main" xmlns:p="http://schemas.openxmlformats.org/presentationml/2006/main" xmlns:r="http://schemas.openxmlformats.org/officeDocument/2006/relationships">
+  <p:cSld>
+    <p:bg>
+      <p:bgPr>
+        <a:solidFill>
+          <a:srgbClr val="FFFFFF"/>
+        </a:solidFill>
+        <a:effectLst/>
+      </p:bgPr>
+    </p:bg>
+    <p:spTree>
+      <p:nvGrpSpPr>
+        <p:cNvPr id="1" name=""/>
+        <p:cNvGrpSpPr/>
+        <p:nvPr/>
+      </p:nvGrpSpPr>
+      <p:grpSpPr/>
+      <p:sp>
+        <p:nvSpPr>
+          <p:cNvPr id="2" name="Rectangle 1"/>
+          <p:cNvSpPr/>
+          <p:nvPr/>
+        </p:nvSpPr>
+        <p:spPr>
+          <a:xfrm>
+            <a:off x="0" y="0"/>
+            <a:ext cx="12191695" cy="960120"/>
+          </a:xfrm>
+          <a:prstGeom prst="rect">
+            <a:avLst/>
+          </a:prstGeom>
+          <a:solidFill>
+            <a:srgbClr val="095292"/>
+          </a:solidFill>
+          <a:ln>
+            <a:noFill/>
+          </a:ln>
+        </p:spPr>
+        <p:style>
+          <a:lnRef idx="1">
+            <a:schemeClr val="accent1"/>
+          </a:lnRef>
+          <a:fillRef idx="3">
+            <a:schemeClr val="accent1"/>
+          </a:fillRef>
+          <a:effectRef idx="2">
+            <a:schemeClr val="accent1"/>
+          </a:effectRef>
+          <a:fontRef idx="minor">
+            <a:schemeClr val="lt1"/>
+          </a:fontRef>
+        </p:style>
+        <p:txBody>
+          <a:bodyPr rtlCol="0" anchor="ctr"/>
+          <a:lstStyle/>
+          <a:p>
             <a:pPr algn="ctr"/>
-            <a:r>
-              <a:rPr sz="2000" b="1" i="0">
+          </a:p>
+        </p:txBody>
+      </p:sp>
+      <p:sp>
+        <p:nvSpPr>
+          <p:cNvPr id="3" name="Rectangle 2"/>
+          <p:cNvSpPr/>
+          <p:nvPr/>
+        </p:nvSpPr>
+        <p:spPr>
+          <a:xfrm>
+            <a:off x="0" y="960120"/>
+            <a:ext cx="12191695" cy="41148"/>
+          </a:xfrm>
+          <a:prstGeom prst="rect">
+            <a:avLst/>
+          </a:prstGeom>
+          <a:solidFill>
+            <a:srgbClr val="FFD000"/>
+          </a:solidFill>
+          <a:ln>
+            <a:noFill/>
+          </a:ln>
+        </p:spPr>
+        <p:style>
+          <a:lnRef idx="1">
+            <a:schemeClr val="accent1"/>
+          </a:lnRef>
+          <a:fillRef idx="3">
+            <a:schemeClr val="accent1"/>
+          </a:fillRef>
+          <a:effectRef idx="2">
+            <a:schemeClr val="accent1"/>
+          </a:effectRef>
+          <a:fontRef idx="minor">
+            <a:schemeClr val="lt1"/>
+          </a:fontRef>
+        </p:style>
+        <p:txBody>
+          <a:bodyPr rtlCol="0" anchor="ctr"/>
+          <a:lstStyle/>
+          <a:p>
+            <a:pPr algn="ctr"/>
+          </a:p>
+        </p:txBody>
+      </p:sp>
+      <p:sp>
+        <p:nvSpPr>
+          <p:cNvPr id="4" name="TextBox 3"/>
+          <p:cNvSpPr txBox="1"/>
+          <p:nvPr/>
+        </p:nvSpPr>
+        <p:spPr>
+          <a:xfrm>
+            <a:off x="457200" y="164592"/>
+            <a:ext cx="11277295" cy="502920"/>
+          </a:xfrm>
+          <a:prstGeom prst="rect">
+            <a:avLst/>
+          </a:prstGeom>
+          <a:noFill/>
+        </p:spPr>
+        <p:txBody>
+          <a:bodyPr wrap="square">
+            <a:spAutoFit/>
+          </a:bodyPr>
+          <a:lstStyle/>
+          <a:p>
+            <a:r>
+              <a:rPr sz="2600" b="1" i="0">
+                <a:solidFill>
+                  <a:srgbClr val="FFFFFF"/>
+                </a:solidFill>
+                <a:latin typeface="Calibri"/>
+              </a:rPr>
+              <a:t>Para el PI esta semana</a:t>
+            </a:r>
+          </a:p>
+        </p:txBody>
+      </p:sp>
+      <p:sp>
+        <p:nvSpPr>
+          <p:cNvPr id="5" name="Rounded Rectangle 4"/>
+          <p:cNvSpPr/>
+          <p:nvPr/>
+        </p:nvSpPr>
+        <p:spPr>
+          <a:xfrm>
+            <a:off x="457200" y="1261872"/>
+            <a:ext cx="11277295" cy="1051560"/>
+          </a:xfrm>
+          <a:prstGeom prst="roundRect">
+            <a:avLst>
+              <a:gd name="adj" fmla="val 12000"/>
+            </a:avLst>
+          </a:prstGeom>
+          <a:solidFill>
+            <a:srgbClr val="E8F4FA"/>
+          </a:solidFill>
+          <a:ln>
+            <a:noFill/>
+          </a:ln>
+        </p:spPr>
+        <p:style>
+          <a:lnRef idx="1">
+            <a:schemeClr val="accent1"/>
+          </a:lnRef>
+          <a:fillRef idx="3">
+            <a:schemeClr val="accent1"/>
+          </a:fillRef>
+          <a:effectRef idx="2">
+            <a:schemeClr val="accent1"/>
+          </a:effectRef>
+          <a:fontRef idx="minor">
+            <a:schemeClr val="lt1"/>
+          </a:fontRef>
+        </p:style>
+        <p:txBody>
+          <a:bodyPr rtlCol="0" anchor="ctr"/>
+          <a:lstStyle/>
+          <a:p>
+            <a:pPr algn="ctr"/>
+          </a:p>
+        </p:txBody>
+      </p:sp>
+      <p:sp>
+        <p:nvSpPr>
+          <p:cNvPr id="6" name="Rectangle 5"/>
+          <p:cNvSpPr/>
+          <p:nvPr/>
+        </p:nvSpPr>
+        <p:spPr>
+          <a:xfrm>
+            <a:off x="457200" y="1261872"/>
+            <a:ext cx="128016" cy="1051560"/>
+          </a:xfrm>
+          <a:prstGeom prst="rect">
+            <a:avLst/>
+          </a:prstGeom>
+          <a:solidFill>
+            <a:srgbClr val="269CCB"/>
+          </a:solidFill>
+          <a:ln>
+            <a:noFill/>
+          </a:ln>
+        </p:spPr>
+        <p:style>
+          <a:lnRef idx="1">
+            <a:schemeClr val="accent1"/>
+          </a:lnRef>
+          <a:fillRef idx="3">
+            <a:schemeClr val="accent1"/>
+          </a:fillRef>
+          <a:effectRef idx="2">
+            <a:schemeClr val="accent1"/>
+          </a:effectRef>
+          <a:fontRef idx="minor">
+            <a:schemeClr val="lt1"/>
+          </a:fontRef>
+        </p:style>
+        <p:txBody>
+          <a:bodyPr rtlCol="0" anchor="ctr"/>
+          <a:lstStyle/>
+          <a:p>
+            <a:pPr algn="ctr"/>
+          </a:p>
+        </p:txBody>
+      </p:sp>
+      <p:sp>
+        <p:nvSpPr>
+          <p:cNvPr id="7" name="TextBox 6"/>
+          <p:cNvSpPr txBox="1"/>
+          <p:nvPr/>
+        </p:nvSpPr>
+        <p:spPr>
+          <a:xfrm>
+            <a:off x="777240" y="1399031"/>
+            <a:ext cx="10774375" cy="822959"/>
+          </a:xfrm>
+          <a:prstGeom prst="rect">
+            <a:avLst/>
+          </a:prstGeom>
+          <a:noFill/>
+        </p:spPr>
+        <p:txBody>
+          <a:bodyPr wrap="square">
+            <a:spAutoFit/>
+          </a:bodyPr>
+          <a:lstStyle/>
+          <a:p>
+            <a:r>
+              <a:rPr sz="1200" b="1" i="0">
                 <a:solidFill>
                   <a:srgbClr val="269CCB"/>
                 </a:solidFill>
                 <a:latin typeface="Calibri"/>
               </a:rPr>
-              <a:t>Teoria al servicio del proyecto</a:t>
+              <a:t>Info</a:t>
+            </a:r>
+          </a:p>
+          <a:p>
+            <a:pPr>
+              <a:spcBef>
+                <a:spcPts val="400"/>
+              </a:spcBef>
+            </a:pPr>
+            <a:r>
+              <a:rPr sz="1400" b="0" i="0">
+                <a:solidFill>
+                  <a:srgbClr val="333333"/>
+                </a:solidFill>
+                <a:latin typeface="Calibri"/>
+              </a:rPr>
+              <a:t>Hito: El registro de mascotas de VetCare valida edad, peso e ID y avisa con un mensaje claro en lugar de cerrarse.</a:t>
+            </a:r>
+          </a:p>
+        </p:txBody>
+      </p:sp>
+      <p:sp>
+        <p:nvSpPr>
+          <p:cNvPr id="8" name="Rounded Rectangle 7"/>
+          <p:cNvSpPr/>
+          <p:nvPr/>
+        </p:nvSpPr>
+        <p:spPr>
+          <a:xfrm>
+            <a:off x="457200" y="2478024"/>
+            <a:ext cx="11277295" cy="1051560"/>
+          </a:xfrm>
+          <a:prstGeom prst="roundRect">
+            <a:avLst>
+              <a:gd name="adj" fmla="val 12000"/>
+            </a:avLst>
+          </a:prstGeom>
+          <a:solidFill>
+            <a:srgbClr val="FFF8E1"/>
+          </a:solidFill>
+          <a:ln>
+            <a:noFill/>
+          </a:ln>
+        </p:spPr>
+        <p:style>
+          <a:lnRef idx="1">
+            <a:schemeClr val="accent1"/>
+          </a:lnRef>
+          <a:fillRef idx="3">
+            <a:schemeClr val="accent1"/>
+          </a:fillRef>
+          <a:effectRef idx="2">
+            <a:schemeClr val="accent1"/>
+          </a:effectRef>
+          <a:fontRef idx="minor">
+            <a:schemeClr val="lt1"/>
+          </a:fontRef>
+        </p:style>
+        <p:txBody>
+          <a:bodyPr rtlCol="0" anchor="ctr"/>
+          <a:lstStyle/>
+          <a:p>
+            <a:pPr algn="ctr"/>
+          </a:p>
+        </p:txBody>
+      </p:sp>
+      <p:sp>
+        <p:nvSpPr>
+          <p:cNvPr id="9" name="Rectangle 8"/>
+          <p:cNvSpPr/>
+          <p:nvPr/>
+        </p:nvSpPr>
+        <p:spPr>
+          <a:xfrm>
+            <a:off x="457200" y="2478024"/>
+            <a:ext cx="128016" cy="1051560"/>
+          </a:xfrm>
+          <a:prstGeom prst="rect">
+            <a:avLst/>
+          </a:prstGeom>
+          <a:solidFill>
+            <a:srgbClr val="FFD000"/>
+          </a:solidFill>
+          <a:ln>
+            <a:noFill/>
+          </a:ln>
+        </p:spPr>
+        <p:style>
+          <a:lnRef idx="1">
+            <a:schemeClr val="accent1"/>
+          </a:lnRef>
+          <a:fillRef idx="3">
+            <a:schemeClr val="accent1"/>
+          </a:fillRef>
+          <a:effectRef idx="2">
+            <a:schemeClr val="accent1"/>
+          </a:effectRef>
+          <a:fontRef idx="minor">
+            <a:schemeClr val="lt1"/>
+          </a:fontRef>
+        </p:style>
+        <p:txBody>
+          <a:bodyPr rtlCol="0" anchor="ctr"/>
+          <a:lstStyle/>
+          <a:p>
+            <a:pPr algn="ctr"/>
+          </a:p>
+        </p:txBody>
+      </p:sp>
+      <p:sp>
+        <p:nvSpPr>
+          <p:cNvPr id="10" name="TextBox 9"/>
+          <p:cNvSpPr txBox="1"/>
+          <p:nvPr/>
+        </p:nvSpPr>
+        <p:spPr>
+          <a:xfrm>
+            <a:off x="777240" y="2615184"/>
+            <a:ext cx="10774375" cy="822959"/>
+          </a:xfrm>
+          <a:prstGeom prst="rect">
+            <a:avLst/>
+          </a:prstGeom>
+          <a:noFill/>
+        </p:spPr>
+        <p:txBody>
+          <a:bodyPr wrap="square">
+            <a:spAutoFit/>
+          </a:bodyPr>
+          <a:lstStyle/>
+          <a:p>
+            <a:r>
+              <a:rPr sz="1200" b="1" i="0">
+                <a:solidFill>
+                  <a:srgbClr val="FFD000"/>
+                </a:solidFill>
+                <a:latin typeface="Calibri"/>
+              </a:rPr>
+              <a:t>Aclaración</a:t>
+            </a:r>
+          </a:p>
+          <a:p>
+            <a:pPr>
+              <a:spcBef>
+                <a:spcPts val="400"/>
+              </a:spcBef>
+            </a:pPr>
+            <a:r>
+              <a:rPr sz="1400" b="0" i="0">
+                <a:solidFill>
+                  <a:srgbClr val="333333"/>
+                </a:solidFill>
+                <a:latin typeface="Calibri"/>
+              </a:rPr>
+              <a:t>Enunciado completo: Clases/Proyecto Integrador/ (VetCare).</a:t>
+            </a:r>
+          </a:p>
+        </p:txBody>
+      </p:sp>
+      <p:sp>
+        <p:nvSpPr>
+          <p:cNvPr id="11" name="Rounded Rectangle 10"/>
+          <p:cNvSpPr/>
+          <p:nvPr/>
+        </p:nvSpPr>
+        <p:spPr>
+          <a:xfrm>
+            <a:off x="457200" y="3694176"/>
+            <a:ext cx="11277295" cy="1051560"/>
+          </a:xfrm>
+          <a:prstGeom prst="roundRect">
+            <a:avLst>
+              <a:gd name="adj" fmla="val 12000"/>
+            </a:avLst>
+          </a:prstGeom>
+          <a:solidFill>
+            <a:srgbClr val="FBE4E4"/>
+          </a:solidFill>
+          <a:ln>
+            <a:noFill/>
+          </a:ln>
+        </p:spPr>
+        <p:style>
+          <a:lnRef idx="1">
+            <a:schemeClr val="accent1"/>
+          </a:lnRef>
+          <a:fillRef idx="3">
+            <a:schemeClr val="accent1"/>
+          </a:fillRef>
+          <a:effectRef idx="2">
+            <a:schemeClr val="accent1"/>
+          </a:effectRef>
+          <a:fontRef idx="minor">
+            <a:schemeClr val="lt1"/>
+          </a:fontRef>
+        </p:style>
+        <p:txBody>
+          <a:bodyPr rtlCol="0" anchor="ctr"/>
+          <a:lstStyle/>
+          <a:p>
+            <a:pPr algn="ctr"/>
+          </a:p>
+        </p:txBody>
+      </p:sp>
+      <p:sp>
+        <p:nvSpPr>
+          <p:cNvPr id="12" name="Rectangle 11"/>
+          <p:cNvSpPr/>
+          <p:nvPr/>
+        </p:nvSpPr>
+        <p:spPr>
+          <a:xfrm>
+            <a:off x="457200" y="3694176"/>
+            <a:ext cx="128016" cy="1051560"/>
+          </a:xfrm>
+          <a:prstGeom prst="rect">
+            <a:avLst/>
+          </a:prstGeom>
+          <a:solidFill>
+            <a:srgbClr val="A02030"/>
+          </a:solidFill>
+          <a:ln>
+            <a:noFill/>
+          </a:ln>
+        </p:spPr>
+        <p:style>
+          <a:lnRef idx="1">
+            <a:schemeClr val="accent1"/>
+          </a:lnRef>
+          <a:fillRef idx="3">
+            <a:schemeClr val="accent1"/>
+          </a:fillRef>
+          <a:effectRef idx="2">
+            <a:schemeClr val="accent1"/>
+          </a:effectRef>
+          <a:fontRef idx="minor">
+            <a:schemeClr val="lt1"/>
+          </a:fontRef>
+        </p:style>
+        <p:txBody>
+          <a:bodyPr rtlCol="0" anchor="ctr"/>
+          <a:lstStyle/>
+          <a:p>
+            <a:pPr algn="ctr"/>
+          </a:p>
+        </p:txBody>
+      </p:sp>
+      <p:sp>
+        <p:nvSpPr>
+          <p:cNvPr id="13" name="TextBox 12"/>
+          <p:cNvSpPr txBox="1"/>
+          <p:nvPr/>
+        </p:nvSpPr>
+        <p:spPr>
+          <a:xfrm>
+            <a:off x="777240" y="3831336"/>
+            <a:ext cx="10774375" cy="822959"/>
+          </a:xfrm>
+          <a:prstGeom prst="rect">
+            <a:avLst/>
+          </a:prstGeom>
+          <a:noFill/>
+        </p:spPr>
+        <p:txBody>
+          <a:bodyPr wrap="square">
+            <a:spAutoFit/>
+          </a:bodyPr>
+          <a:lstStyle/>
+          <a:p>
+            <a:r>
+              <a:rPr sz="1200" b="1" i="0">
+                <a:solidFill>
+                  <a:srgbClr val="A02030"/>
+                </a:solidFill>
+                <a:latin typeface="Calibri"/>
+              </a:rPr>
+              <a:t>Atención</a:t>
+            </a:r>
+          </a:p>
+          <a:p>
+            <a:pPr>
+              <a:spcBef>
+                <a:spcPts val="400"/>
+              </a:spcBef>
+            </a:pPr>
+            <a:r>
+              <a:rPr sz="1400" b="0" i="0">
+                <a:solidFill>
+                  <a:srgbClr val="333333"/>
+                </a:solidFill>
+                <a:latin typeface="Calibri"/>
+              </a:rPr>
+              <a:t>Entrega del taller, si el docente lo asigna · en la fecha que indique el docente.</a:t>
+            </a:r>
+          </a:p>
+        </p:txBody>
+      </p:sp>
+      <p:sp>
+        <p:nvSpPr>
+          <p:cNvPr id="14" name="TextBox 13"/>
+          <p:cNvSpPr txBox="1"/>
+          <p:nvPr/>
+        </p:nvSpPr>
+        <p:spPr>
+          <a:xfrm>
+            <a:off x="11185855" y="6473952"/>
+            <a:ext cx="640080" cy="274320"/>
+          </a:xfrm>
+          <a:prstGeom prst="rect">
+            <a:avLst/>
+          </a:prstGeom>
+          <a:noFill/>
+        </p:spPr>
+        <p:txBody>
+          <a:bodyPr wrap="square">
+            <a:spAutoFit/>
+          </a:bodyPr>
+          <a:lstStyle/>
+          <a:p>
+            <a:pPr algn="r"/>
+            <a:r>
+              <a:rPr sz="1100" b="0" i="0">
+                <a:solidFill>
+                  <a:srgbClr val="666666"/>
+                </a:solidFill>
+                <a:latin typeface="Calibri"/>
+              </a:rPr>
+              <a:t>19</a:t>
             </a:r>
           </a:p>
         </p:txBody>
@@ -5727,6 +8435,238 @@
 </p:sld>
 </file>
 
+<file path=ppt/slides/slide20.xml><?xml version="1.0" encoding="utf-8"?>
+<p:sld xmlns:a="http://schemas.openxmlformats.org/drawingml/2006/main" xmlns:p="http://schemas.openxmlformats.org/presentationml/2006/main" xmlns:r="http://schemas.openxmlformats.org/officeDocument/2006/relationships">
+  <p:cSld>
+    <p:bg>
+      <p:bgPr>
+        <a:solidFill>
+          <a:srgbClr val="FFFFFF"/>
+        </a:solidFill>
+        <a:effectLst/>
+      </p:bgPr>
+    </p:bg>
+    <p:spTree>
+      <p:nvGrpSpPr>
+        <p:cNvPr id="1" name=""/>
+        <p:cNvGrpSpPr/>
+        <p:nvPr/>
+      </p:nvGrpSpPr>
+      <p:grpSpPr/>
+      <p:sp>
+        <p:nvSpPr>
+          <p:cNvPr id="2" name="Rectangle 1"/>
+          <p:cNvSpPr/>
+          <p:nvPr/>
+        </p:nvSpPr>
+        <p:spPr>
+          <a:xfrm>
+            <a:off x="0" y="0"/>
+            <a:ext cx="12191695" cy="164592"/>
+          </a:xfrm>
+          <a:prstGeom prst="rect">
+            <a:avLst/>
+          </a:prstGeom>
+          <a:solidFill>
+            <a:srgbClr val="269CCB"/>
+          </a:solidFill>
+          <a:ln>
+            <a:noFill/>
+          </a:ln>
+        </p:spPr>
+        <p:style>
+          <a:lnRef idx="1">
+            <a:schemeClr val="accent1"/>
+          </a:lnRef>
+          <a:fillRef idx="3">
+            <a:schemeClr val="accent1"/>
+          </a:fillRef>
+          <a:effectRef idx="2">
+            <a:schemeClr val="accent1"/>
+          </a:effectRef>
+          <a:fontRef idx="minor">
+            <a:schemeClr val="lt1"/>
+          </a:fontRef>
+        </p:style>
+        <p:txBody>
+          <a:bodyPr rtlCol="0" anchor="ctr"/>
+          <a:lstStyle/>
+          <a:p>
+            <a:pPr algn="ctr"/>
+          </a:p>
+        </p:txBody>
+      </p:sp>
+      <p:pic>
+        <p:nvPicPr>
+          <p:cNvPr id="3" name="Picture 2" descr="logo_uniajc_color.png"/>
+          <p:cNvPicPr>
+            <a:picLocks noChangeAspect="1"/>
+          </p:cNvPicPr>
+          <p:nvPr/>
+        </p:nvPicPr>
+        <p:blipFill>
+          <a:blip r:embed="rId2"/>
+          <a:stretch>
+            <a:fillRect/>
+          </a:stretch>
+        </p:blipFill>
+        <p:spPr>
+          <a:xfrm>
+            <a:off x="10271455" y="5998464"/>
+            <a:ext cx="1463040" cy="643233"/>
+          </a:xfrm>
+          <a:prstGeom prst="rect">
+            <a:avLst/>
+          </a:prstGeom>
+        </p:spPr>
+      </p:pic>
+      <p:sp>
+        <p:nvSpPr>
+          <p:cNvPr id="4" name="TextBox 3"/>
+          <p:cNvSpPr txBox="1"/>
+          <p:nvPr/>
+        </p:nvSpPr>
+        <p:spPr>
+          <a:xfrm>
+            <a:off x="457200" y="1737360"/>
+            <a:ext cx="11277295" cy="1097280"/>
+          </a:xfrm>
+          <a:prstGeom prst="rect">
+            <a:avLst/>
+          </a:prstGeom>
+          <a:noFill/>
+        </p:spPr>
+        <p:txBody>
+          <a:bodyPr wrap="square" anchor="ctr"/>
+          <a:lstStyle/>
+          <a:p>
+            <a:pPr algn="ctr"/>
+            <a:r>
+              <a:rPr sz="3400" b="1" i="0">
+                <a:solidFill>
+                  <a:srgbClr val="095292"/>
+                </a:solidFill>
+                <a:latin typeface="Calibri"/>
+              </a:rPr>
+              <a:t>Clase 13 · VetCare avanza</a:t>
+            </a:r>
+          </a:p>
+        </p:txBody>
+      </p:sp>
+      <p:sp>
+        <p:nvSpPr>
+          <p:cNvPr id="5" name="TextBox 4"/>
+          <p:cNvSpPr txBox="1"/>
+          <p:nvPr/>
+        </p:nvSpPr>
+        <p:spPr>
+          <a:xfrm>
+            <a:off x="457200" y="3017520"/>
+            <a:ext cx="11277295" cy="1645920"/>
+          </a:xfrm>
+          <a:prstGeom prst="rect">
+            <a:avLst/>
+          </a:prstGeom>
+          <a:noFill/>
+        </p:spPr>
+        <p:txBody>
+          <a:bodyPr wrap="square">
+            <a:spAutoFit/>
+          </a:bodyPr>
+          <a:lstStyle/>
+          <a:p>
+            <a:pPr algn="ctr">
+              <a:spcAft>
+                <a:spcPts val="600"/>
+              </a:spcAft>
+            </a:pPr>
+            <a:r>
+              <a:rPr sz="1600" b="0" i="0">
+                <a:solidFill>
+                  <a:srgbClr val="333333"/>
+                </a:solidFill>
+                <a:latin typeface="Calibri"/>
+              </a:rPr>
+              <a:t>El registro de mascotas de VetCare valida edad, peso e ID y avisa con un mensaje claro en lugar de cerrarse.</a:t>
+            </a:r>
+          </a:p>
+          <a:p>
+            <a:pPr algn="ctr">
+              <a:spcAft>
+                <a:spcPts val="600"/>
+              </a:spcAft>
+            </a:pPr>
+            <a:r>
+              <a:rPr sz="1600" b="0" i="0">
+                <a:solidFill>
+                  <a:srgbClr val="333333"/>
+                </a:solidFill>
+                <a:latin typeface="Calibri"/>
+              </a:rPr>
+              <a:t>Entregable: Clase DatoInvalidoException mas los setters validados de Mascota y la carga del CSV con try-with-resources, con evidencia de cinco pruebas de entrada (cuatro malas y una valida), subido a la plataforma del curso.</a:t>
+            </a:r>
+          </a:p>
+          <a:p>
+            <a:pPr algn="ctr">
+              <a:spcAft>
+                <a:spcPts val="600"/>
+              </a:spcAft>
+            </a:pPr>
+            <a:r>
+              <a:rPr sz="1600" b="0" i="0">
+                <a:solidFill>
+                  <a:srgbClr val="333333"/>
+                </a:solidFill>
+                <a:latin typeface="Calibri"/>
+              </a:rPr>
+              <a:t>Siguiente clase: continuamos el hilo del PI</a:t>
+            </a:r>
+          </a:p>
+        </p:txBody>
+      </p:sp>
+      <p:sp>
+        <p:nvSpPr>
+          <p:cNvPr id="6" name="TextBox 5"/>
+          <p:cNvSpPr txBox="1"/>
+          <p:nvPr/>
+        </p:nvSpPr>
+        <p:spPr>
+          <a:xfrm>
+            <a:off x="457200" y="4754880"/>
+            <a:ext cx="11277295" cy="640080"/>
+          </a:xfrm>
+          <a:prstGeom prst="rect">
+            <a:avLst/>
+          </a:prstGeom>
+          <a:noFill/>
+        </p:spPr>
+        <p:txBody>
+          <a:bodyPr wrap="square">
+            <a:spAutoFit/>
+          </a:bodyPr>
+          <a:lstStyle/>
+          <a:p>
+            <a:pPr algn="ctr"/>
+            <a:r>
+              <a:rPr sz="2000" b="1" i="0">
+                <a:solidFill>
+                  <a:srgbClr val="269CCB"/>
+                </a:solidFill>
+                <a:latin typeface="Calibri"/>
+              </a:rPr>
+              <a:t>Teoria al servicio del proyecto</a:t>
+            </a:r>
+          </a:p>
+        </p:txBody>
+      </p:sp>
+    </p:spTree>
+  </p:cSld>
+  <p:clrMapOvr>
+    <a:masterClrMapping/>
+  </p:clrMapOvr>
+</p:sld>
+</file>
+
 <file path=ppt/slides/slide3.xml><?xml version="1.0" encoding="utf-8"?>
 <p:sld xmlns:a="http://schemas.openxmlformats.org/drawingml/2006/main" xmlns:p="http://schemas.openxmlformats.org/presentationml/2006/main" xmlns:r="http://schemas.openxmlformats.org/officeDocument/2006/relationships">
   <p:cSld>
@@ -6712,7 +9652,7 @@
                 </a:solidFill>
                 <a:latin typeface="Calibri"/>
               </a:rPr>
-              <a:t>Teoria Core</a:t>
+              <a:t>Una excepcion es un objeto que Java crea en el momento exacto en que...</a:t>
             </a:r>
           </a:p>
         </p:txBody>
@@ -6751,7 +9691,7 @@
                 </a:solidFill>
                 <a:latin typeface="Calibri"/>
               </a:rPr>
-              <a:t>–   Una excepcion es un objeto que Java crea en el momento exacto en que una instruccion no puede cumplir lo que…</a:t>
+              <a:t>–   Una excepcion es un objeto que Java crea en el momento exacto en que una instruccion no puede cumplir lo que promete, y que interrumpe el flujo normal del programa para buscar a alguien que se haga cargo.</a:t>
             </a:r>
           </a:p>
           <a:p>
@@ -6767,7 +9707,7 @@
                 </a:solidFill>
                 <a:latin typeface="Calibri"/>
               </a:rPr>
-              <a:t>–   Java parte las excepciones en dos grupos y esa division decide cuanto codigo debe escribir usted</a:t>
+              <a:t>–   No es un mensaje de texto: es un objeto con tipo, mensaje y rastro de llamadas (stack trace).</a:t>
             </a:r>
           </a:p>
           <a:p>
@@ -6783,7 +9723,7 @@
                 </a:solidFill>
                 <a:latin typeface="Calibri"/>
               </a:rPr>
-              <a:t>–   La estructura try-catch-finally tiene una anatomia que conviene explicar despacio</a:t>
+              <a:t>–   Toda la familia cuelga de Throwable, que se divide en Error (fallas de la maquina virtual, como quedarse sin memoria, que no debemos atrapar) y Exception (fallas del programa o del entorno, que si podemos atender).</a:t>
             </a:r>
           </a:p>
           <a:p>
@@ -6799,7 +9739,7 @@
                 </a:solidFill>
                 <a:latin typeface="Calibri"/>
               </a:rPr>
-              <a:t>–   throw y throws se parecen en el nombre y hacen cosas opuestas, y esa confusion es la que mas cuesta en el parcial</a:t>
+              <a:t>–   En VetCare esto se ve todos los dias: cuando la secretaria de la clinica Huellitas escribe 'tres' en el campo edad y el codigo hace Integer.parseInt(txtEdad.getText()), Java no puede convertir esa palabra en numero</a:t>
             </a:r>
           </a:p>
           <a:p>
@@ -6815,7 +9755,23 @@
                 </a:solidFill>
                 <a:latin typeface="Calibri"/>
               </a:rPr>
-              <a:t>–   El catch vacio, ese catch (Exception e) { } que aparece cuando VS Code ofrece en la bombilla 'Surround with…</a:t>
+              <a:t>–   Entonces fabrica un objeto NumberFormatException, lo lanza hacia arriba y, como nadie lo recibe, el hilo muere: la ventana queda congelada y en la consola aparece el chorro rojo que asusta al usuario.</a:t>
+            </a:r>
+          </a:p>
+          <a:p>
+            <a:pPr>
+              <a:spcAft>
+                <a:spcPts val="800"/>
+              </a:spcAft>
+            </a:pPr>
+            <a:r>
+              <a:rPr sz="2000" b="0" i="0">
+                <a:solidFill>
+                  <a:srgbClr val="333333"/>
+                </a:solidFill>
+                <a:latin typeface="Calibri"/>
+              </a:rPr>
+              <a:t>–   La excepcion no es el enemigo, es el mensajero; el problema es que nadie la esta esperando.</a:t>
             </a:r>
           </a:p>
         </p:txBody>
@@ -6996,141 +9952,21 @@
                 </a:solidFill>
                 <a:latin typeface="Calibri"/>
               </a:rPr>
-              <a:t>Validar la edad sin que VetCare se caiga</a:t>
-            </a:r>
-          </a:p>
-        </p:txBody>
-      </p:sp>
-      <p:sp>
-        <p:nvSpPr>
-          <p:cNvPr id="5" name="Rounded Rectangle 4"/>
-          <p:cNvSpPr/>
-          <p:nvPr/>
-        </p:nvSpPr>
-        <p:spPr>
-          <a:xfrm>
-            <a:off x="457200" y="1261872"/>
-            <a:ext cx="11277295" cy="4773168"/>
-          </a:xfrm>
-          <a:prstGeom prst="roundRect">
-            <a:avLst>
-              <a:gd name="adj" fmla="val 12000"/>
-            </a:avLst>
-          </a:prstGeom>
-          <a:solidFill>
-            <a:srgbClr val="1E2A38"/>
-          </a:solidFill>
-          <a:ln>
-            <a:noFill/>
-          </a:ln>
-        </p:spPr>
-        <p:style>
-          <a:lnRef idx="1">
-            <a:schemeClr val="accent1"/>
-          </a:lnRef>
-          <a:fillRef idx="3">
-            <a:schemeClr val="accent1"/>
-          </a:fillRef>
-          <a:effectRef idx="2">
-            <a:schemeClr val="accent1"/>
-          </a:effectRef>
-          <a:fontRef idx="minor">
-            <a:schemeClr val="lt1"/>
-          </a:fontRef>
-        </p:style>
-        <p:txBody>
-          <a:bodyPr rtlCol="0" anchor="ctr"/>
-          <a:lstStyle/>
-          <a:p>
-            <a:pPr algn="ctr"/>
-          </a:p>
-        </p:txBody>
-      </p:sp>
-      <p:sp>
-        <p:nvSpPr>
-          <p:cNvPr id="6" name="Rectangle 5"/>
-          <p:cNvSpPr/>
-          <p:nvPr/>
-        </p:nvSpPr>
-        <p:spPr>
-          <a:xfrm>
-            <a:off x="457200" y="1261872"/>
-            <a:ext cx="11277295" cy="320040"/>
-          </a:xfrm>
-          <a:prstGeom prst="rect">
-            <a:avLst/>
-          </a:prstGeom>
-          <a:solidFill>
-            <a:srgbClr val="095292"/>
-          </a:solidFill>
-          <a:ln>
-            <a:noFill/>
-          </a:ln>
-        </p:spPr>
-        <p:style>
-          <a:lnRef idx="1">
-            <a:schemeClr val="accent1"/>
-          </a:lnRef>
-          <a:fillRef idx="3">
-            <a:schemeClr val="accent1"/>
-          </a:fillRef>
-          <a:effectRef idx="2">
-            <a:schemeClr val="accent1"/>
-          </a:effectRef>
-          <a:fontRef idx="minor">
-            <a:schemeClr val="lt1"/>
-          </a:fontRef>
-        </p:style>
-        <p:txBody>
-          <a:bodyPr rtlCol="0" anchor="ctr"/>
-          <a:lstStyle/>
-          <a:p>
-            <a:pPr algn="ctr"/>
-          </a:p>
-        </p:txBody>
-      </p:sp>
-      <p:sp>
-        <p:nvSpPr>
-          <p:cNvPr id="7" name="TextBox 6"/>
+              <a:t>Java parte las excepciones en dos grupos y esa division decide cuanto... (1/2)</a:t>
+            </a:r>
+          </a:p>
+        </p:txBody>
+      </p:sp>
+      <p:sp>
+        <p:nvSpPr>
+          <p:cNvPr id="5" name="TextBox 4"/>
           <p:cNvSpPr txBox="1"/>
           <p:nvPr/>
         </p:nvSpPr>
         <p:spPr>
           <a:xfrm>
-            <a:off x="685800" y="1307592"/>
-            <a:ext cx="10820095" cy="256032"/>
-          </a:xfrm>
-          <a:prstGeom prst="rect">
-            <a:avLst/>
-          </a:prstGeom>
-          <a:noFill/>
-        </p:spPr>
-        <p:txBody>
-          <a:bodyPr wrap="square" anchor="ctr"/>
-          <a:lstStyle/>
-          <a:p>
-            <a:r>
-              <a:rPr sz="1000" b="1" i="0">
-                <a:solidFill>
-                  <a:srgbClr val="269CCB"/>
-                </a:solidFill>
-                <a:latin typeface="Calibri"/>
-              </a:rPr>
-              <a:t>● ● ●</a:t>
-            </a:r>
-          </a:p>
-        </p:txBody>
-      </p:sp>
-      <p:sp>
-        <p:nvSpPr>
-          <p:cNvPr id="8" name="TextBox 7"/>
-          <p:cNvSpPr txBox="1"/>
-          <p:nvPr/>
-        </p:nvSpPr>
-        <p:spPr>
-          <a:xfrm>
-            <a:off x="777240" y="1719072"/>
-            <a:ext cx="10637215" cy="4133087"/>
+            <a:off x="457200" y="1170432"/>
+            <a:ext cx="11277295" cy="5230368"/>
           </a:xfrm>
           <a:prstGeom prst="rect">
             <a:avLst/>
@@ -7145,283 +9981,72 @@
           <a:p>
             <a:pPr>
               <a:spcAft>
-                <a:spcPts val="400"/>
+                <a:spcPts val="800"/>
               </a:spcAft>
             </a:pPr>
             <a:r>
-              <a:rPr sz="1400" b="0" i="0">
-                <a:solidFill>
-                  <a:srgbClr val="FFFFFF"/>
-                </a:solidFill>
-                <a:latin typeface="Calibri"/>
-              </a:rPr>
-              <a:t>public void setEdad(String texto) throws DatoInvalidoException {   // el dominio LANZA, no muestra ventanas</a:t>
+              <a:rPr sz="2000" b="0" i="0">
+                <a:solidFill>
+                  <a:srgbClr val="333333"/>
+                </a:solidFill>
+                <a:latin typeface="Calibri"/>
+              </a:rPr>
+              <a:t>–   Java parte las excepciones en dos grupos y esa division decide cuanto codigo debe escribir usted.</a:t>
             </a:r>
           </a:p>
           <a:p>
             <a:pPr>
               <a:spcAft>
-                <a:spcPts val="400"/>
+                <a:spcPts val="800"/>
               </a:spcAft>
             </a:pPr>
             <a:r>
-              <a:rPr sz="1400" b="0" i="0">
-                <a:solidFill>
-                  <a:srgbClr val="FFFFFF"/>
-                </a:solidFill>
-                <a:latin typeface="Calibri"/>
-              </a:rPr>
-              <a:t>    if (texto == null || texto.trim().isEmpty()) {</a:t>
+              <a:rPr sz="2000" b="0" i="0">
+                <a:solidFill>
+                  <a:srgbClr val="333333"/>
+                </a:solidFill>
+                <a:latin typeface="Calibri"/>
+              </a:rPr>
+              <a:t>–   Las checked (Exception y sus hijas, menos RuntimeException) representan fallas previsibles del mundo exterior: el archivo mascotas.csv que alguien borro, el disco lleno, la carpeta sin permisos</a:t>
             </a:r>
           </a:p>
           <a:p>
             <a:pPr>
               <a:spcAft>
-                <a:spcPts val="400"/>
+                <a:spcPts val="800"/>
               </a:spcAft>
             </a:pPr>
             <a:r>
-              <a:rPr sz="1400" b="0" i="0">
-                <a:solidFill>
-                  <a:srgbClr val="FFFFFF"/>
-                </a:solidFill>
-                <a:latin typeface="Calibri"/>
-              </a:rPr>
-              <a:t>        throw new DatoInvalidoException("La edad no puede quedar vacia.");   // validar ANTES de convertir</a:t>
+              <a:rPr sz="2000" b="0" i="0">
+                <a:solidFill>
+                  <a:srgbClr val="333333"/>
+                </a:solidFill>
+                <a:latin typeface="Calibri"/>
+              </a:rPr>
+              <a:t>–   El compilador las vigila y obliga a capturarlas con try-catch o a declararlas con throws, y si no lo hace su proyecto ni siquiera compila.</a:t>
             </a:r>
           </a:p>
           <a:p>
             <a:pPr>
               <a:spcAft>
-                <a:spcPts val="400"/>
+                <a:spcPts val="800"/>
               </a:spcAft>
             </a:pPr>
             <a:r>
-              <a:rPr sz="1400" b="0" i="0">
-                <a:solidFill>
-                  <a:srgbClr val="FFFFFF"/>
-                </a:solidFill>
-                <a:latin typeface="Calibri"/>
-              </a:rPr>
-              <a:t>    }</a:t>
-            </a:r>
-          </a:p>
-          <a:p>
-            <a:pPr>
-              <a:spcAft>
-                <a:spcPts val="400"/>
-              </a:spcAft>
-            </a:pPr>
-            <a:r>
-              <a:rPr sz="1400" b="0" i="0">
-                <a:solidFill>
-                  <a:srgbClr val="FFFFFF"/>
-                </a:solidFill>
-                <a:latin typeface="Calibri"/>
-              </a:rPr>
-              <a:t>    int valor;</a:t>
-            </a:r>
-          </a:p>
-          <a:p>
-            <a:pPr>
-              <a:spcAft>
-                <a:spcPts val="400"/>
-              </a:spcAft>
-            </a:pPr>
-            <a:r>
-              <a:rPr sz="1400" b="0" i="0">
-                <a:solidFill>
-                  <a:srgbClr val="FFFFFF"/>
-                </a:solidFill>
-                <a:latin typeface="Calibri"/>
-              </a:rPr>
-              <a:t>    try {</a:t>
-            </a:r>
-          </a:p>
-          <a:p>
-            <a:pPr>
-              <a:spcAft>
-                <a:spcPts val="400"/>
-              </a:spcAft>
-            </a:pPr>
-            <a:r>
-              <a:rPr sz="1400" b="0" i="0">
-                <a:solidFill>
-                  <a:srgbClr val="FFFFFF"/>
-                </a:solidFill>
-                <a:latin typeface="Calibri"/>
-              </a:rPr>
-              <a:t>        valor = Integer.parseInt(texto.trim());        // aqui nace NumberFormatException (unchecked)</a:t>
-            </a:r>
-          </a:p>
-          <a:p>
-            <a:pPr>
-              <a:spcAft>
-                <a:spcPts val="400"/>
-              </a:spcAft>
-            </a:pPr>
-            <a:r>
-              <a:rPr sz="1400" b="0" i="0">
-                <a:solidFill>
-                  <a:srgbClr val="FFFFFF"/>
-                </a:solidFill>
-                <a:latin typeface="Calibri"/>
-              </a:rPr>
-              <a:t>    } catch (NumberFormatException e) {</a:t>
-            </a:r>
-          </a:p>
-          <a:p>
-            <a:pPr>
-              <a:spcAft>
-                <a:spcPts val="400"/>
-              </a:spcAft>
-            </a:pPr>
-            <a:r>
-              <a:rPr sz="1400" b="0" i="0">
-                <a:solidFill>
-                  <a:srgbClr val="FFFFFF"/>
-                </a:solidFill>
-                <a:latin typeface="Calibri"/>
-              </a:rPr>
-              <a:t>        throw new DatoInvalidoException("La edad debe ser un numero entero. Escribieron: " + texto);</a:t>
-            </a:r>
-          </a:p>
-          <a:p>
-            <a:pPr>
-              <a:spcAft>
-                <a:spcPts val="400"/>
-              </a:spcAft>
-            </a:pPr>
-            <a:r>
-              <a:rPr sz="1400" b="0" i="0">
-                <a:solidFill>
-                  <a:srgbClr val="FFFFFF"/>
-                </a:solidFill>
-                <a:latin typeface="Calibri"/>
-              </a:rPr>
-              <a:t>    }</a:t>
-            </a:r>
-          </a:p>
-          <a:p>
-            <a:pPr>
-              <a:spcAft>
-                <a:spcPts val="400"/>
-              </a:spcAft>
-            </a:pPr>
-            <a:r>
-              <a:rPr sz="1400" b="0" i="0">
-                <a:solidFill>
-                  <a:srgbClr val="FFFFFF"/>
-                </a:solidFill>
-                <a:latin typeface="Calibri"/>
-              </a:rPr>
-              <a:t>    if (valor &lt; 0 || valor &gt; 30) {                     // regla del negocio, no del lenguaje</a:t>
-            </a:r>
-          </a:p>
-          <a:p>
-            <a:pPr>
-              <a:spcAft>
-                <a:spcPts val="400"/>
-              </a:spcAft>
-            </a:pPr>
-            <a:r>
-              <a:rPr sz="1400" b="0" i="0">
-                <a:solidFill>
-                  <a:srgbClr val="FFFFFF"/>
-                </a:solidFill>
-                <a:latin typeface="Calibri"/>
-              </a:rPr>
-              <a:t>        throw new DatoInvalidoException("Edad fuera de rango (0-30 anios). Recibi: " + valor);</a:t>
-            </a:r>
-          </a:p>
-          <a:p>
-            <a:pPr>
-              <a:spcAft>
-                <a:spcPts val="400"/>
-              </a:spcAft>
-            </a:pPr>
-            <a:r>
-              <a:rPr sz="1400" b="0" i="0">
-                <a:solidFill>
-                  <a:srgbClr val="FFFFFF"/>
-                </a:solidFill>
-                <a:latin typeface="Calibri"/>
-              </a:rPr>
-              <a:t>    }</a:t>
-            </a:r>
-          </a:p>
-          <a:p>
-            <a:pPr>
-              <a:spcAft>
-                <a:spcPts val="400"/>
-              </a:spcAft>
-            </a:pPr>
-            <a:r>
-              <a:rPr sz="1400" b="0" i="0">
-                <a:solidFill>
-                  <a:srgbClr val="FFFFFF"/>
-                </a:solidFill>
-                <a:latin typeface="Calibri"/>
-              </a:rPr>
-              <a:t>    this.edad = valor;   // solo se asigna cuando el dato paso las tres validaciones</a:t>
-            </a:r>
-          </a:p>
-          <a:p>
-            <a:pPr>
-              <a:spcAft>
-                <a:spcPts val="400"/>
-              </a:spcAft>
-            </a:pPr>
-            <a:r>
-              <a:rPr sz="1400" b="0" i="0">
-                <a:solidFill>
-                  <a:srgbClr val="FFFFFF"/>
-                </a:solidFill>
-                <a:latin typeface="Calibri"/>
-              </a:rPr>
-              <a:t>}</a:t>
-            </a:r>
-          </a:p>
-        </p:txBody>
-      </p:sp>
-      <p:sp>
-        <p:nvSpPr>
-          <p:cNvPr id="9" name="TextBox 8"/>
-          <p:cNvSpPr txBox="1"/>
-          <p:nvPr/>
-        </p:nvSpPr>
-        <p:spPr>
-          <a:xfrm>
-            <a:off x="457200" y="6080760"/>
-            <a:ext cx="11277295" cy="320040"/>
-          </a:xfrm>
-          <a:prstGeom prst="rect">
-            <a:avLst/>
-          </a:prstGeom>
-          <a:noFill/>
-        </p:spPr>
-        <p:txBody>
-          <a:bodyPr wrap="square">
-            <a:spAutoFit/>
-          </a:bodyPr>
-          <a:lstStyle/>
-          <a:p>
-            <a:pPr algn="ctr"/>
-            <a:r>
-              <a:rPr sz="1200" b="0" i="1">
-                <a:solidFill>
-                  <a:srgbClr val="666666"/>
-                </a:solidFill>
-                <a:latin typeface="Calibri"/>
-              </a:rPr>
-              <a:t>El objeto valida y lanza; la ventana captura y traduce: asi el mismo codigo sirve en Swing, en consola o en un servidor.</a:t>
-            </a:r>
-          </a:p>
-        </p:txBody>
-      </p:sp>
-      <p:sp>
-        <p:nvSpPr>
-          <p:cNvPr id="10" name="TextBox 9"/>
+              <a:rPr sz="2000" b="0" i="0">
+                <a:solidFill>
+                  <a:srgbClr val="333333"/>
+                </a:solidFill>
+                <a:latin typeface="Calibri"/>
+              </a:rPr>
+              <a:t>–   Las unchecked (RuntimeException y sus hijas: NumberFormatException, NullPointerException, ArrayIndexOutOfBoundsException, ArithmeticException) representan errores de programacion o datos que nadie valido</a:t>
+            </a:r>
+          </a:p>
+        </p:txBody>
+      </p:sp>
+      <p:sp>
+        <p:nvSpPr>
+          <p:cNvPr id="6" name="TextBox 5"/>
           <p:cNvSpPr txBox="1"/>
           <p:nvPr/>
         </p:nvSpPr>
@@ -7595,7 +10220,7 @@
                 </a:solidFill>
                 <a:latin typeface="Calibri"/>
               </a:rPr>
-              <a:t>Demo del dia</a:t>
+              <a:t>Java parte las excepciones en dos grupos y esa division decide cuanto... (2/2)</a:t>
             </a:r>
           </a:p>
         </p:txBody>
@@ -7634,25 +10259,7 @@
                 </a:solidFill>
                 <a:latin typeface="Calibri"/>
               </a:rPr>
-              <a:t>–   </a:t>
-            </a:r>
-            <a:r>
-              <a:rPr sz="2000" b="1" i="0">
-                <a:solidFill>
-                  <a:srgbClr val="333333"/>
-                </a:solidFill>
-                <a:latin typeface="Calibri"/>
-              </a:rPr>
-              <a:t>Herramienta:</a:t>
-            </a:r>
-            <a:r>
-              <a:rPr sz="2000" b="0" i="0">
-                <a:solidFill>
-                  <a:srgbClr val="333333"/>
-                </a:solidFill>
-                <a:latin typeface="Calibri"/>
-              </a:rPr>
-              <a:t> Visual Studio Code (Java)</a:t>
+              <a:t>–   Y el compilador las deja pasar en silencio hasta que explotan en ejecucion.</a:t>
             </a:r>
           </a:p>
           <a:p>
@@ -7668,25 +10275,7 @@
                 </a:solidFill>
                 <a:latin typeface="Calibri"/>
               </a:rPr>
-              <a:t>–   </a:t>
-            </a:r>
-            <a:r>
-              <a:rPr sz="2000" b="1" i="0">
-                <a:solidFill>
-                  <a:srgbClr val="333333"/>
-                </a:solidFill>
-                <a:latin typeface="Calibri"/>
-              </a:rPr>
-              <a:t>Demo:</a:t>
-            </a:r>
-            <a:r>
-              <a:rPr sz="2000" b="0" i="0">
-                <a:solidFill>
-                  <a:srgbClr val="333333"/>
-                </a:solidFill>
-                <a:latin typeface="Calibri"/>
-              </a:rPr>
-              <a:t> El docente escribe 'tres' en el campo edad, muestra la aplicacion reventando con el stack trace rojo, y en vivo la envuelve en try-catch hasta que responde con un aviso amable.</a:t>
+              <a:t>–   La regla practica que le sirve al estudiante es esta: si la falla viene de afuera (archivo, red, base de datos) casi siempre es checked</a:t>
             </a:r>
           </a:p>
           <a:p>
@@ -7702,7 +10291,23 @@
                 </a:solidFill>
                 <a:latin typeface="Calibri"/>
               </a:rPr>
-              <a:t>–   Mismo dominio VetCare — no otro ejemplo.</a:t>
+              <a:t>–   Si la falla viene de adentro (usted no valido, usted no inicializo el objeto, usted se salio del arreglo) casi siempre es unchecked.</a:t>
+            </a:r>
+          </a:p>
+          <a:p>
+            <a:pPr>
+              <a:spcAft>
+                <a:spcPts val="800"/>
+              </a:spcAft>
+            </a:pPr>
+            <a:r>
+              <a:rPr sz="2000" b="0" i="0">
+                <a:solidFill>
+                  <a:srgbClr val="333333"/>
+                </a:solidFill>
+                <a:latin typeface="Calibri"/>
+              </a:rPr>
+              <a:t>–   En VetCare la lectura de datos/mascotas.csv lanza IOException, que es checked, y la conversion de la edad lanza NumberFormatException, que es unchecked; por eso se manejan en lugares distintos del programa y por eso una obliga a escribir throws y la otra no.</a:t>
             </a:r>
           </a:p>
         </p:txBody>
@@ -7883,7 +10488,7 @@
                 </a:solidFill>
                 <a:latin typeface="Calibri"/>
               </a:rPr>
-              <a:t>Taller PI — por que importa</a:t>
+              <a:t>La estructura try-catch-finally tiene una anatomia que conviene... (1/2)</a:t>
             </a:r>
           </a:p>
         </p:txBody>
@@ -7922,25 +10527,7 @@
                 </a:solidFill>
                 <a:latin typeface="Calibri"/>
               </a:rPr>
-              <a:t>–   </a:t>
-            </a:r>
-            <a:r>
-              <a:rPr sz="2000" b="1" i="0">
-                <a:solidFill>
-                  <a:srgbClr val="333333"/>
-                </a:solidFill>
-                <a:latin typeface="Calibri"/>
-              </a:rPr>
-              <a:t>Por que importa al PI:</a:t>
-            </a:r>
-            <a:r>
-              <a:rPr sz="2000" b="0" i="0">
-                <a:solidFill>
-                  <a:srgbClr val="333333"/>
-                </a:solidFill>
-                <a:latin typeface="Calibri"/>
-              </a:rPr>
-              <a:t> el requisito tecnico del Proyecto Integrador exige manejo de errores con try-catch, y el jurado lo comprueba de la forma mas simple: escribe basura en un campo y mira si la aplicacion aguanta.</a:t>
+              <a:t>–   La estructura try-catch-finally tiene una anatomia que conviene explicar despacio.</a:t>
             </a:r>
           </a:p>
           <a:p>
@@ -7956,7 +10543,7 @@
                 </a:solidFill>
                 <a:latin typeface="Calibri"/>
               </a:rPr>
-              <a:t>–   VetCare ya tiene clases, colecciones, ventanas y archivos; lo unico que falta para que sea usable por la secretaria de Huellitas es que un dato mal escrito no borre el trabajo de toda la manana.</a:t>
+              <a:t>–   En el try va el codigo que puede fallar y nada mas: entre menos lineas tenga el try, mas facil es saber quien fallo.</a:t>
             </a:r>
           </a:p>
           <a:p>
@@ -7972,7 +10559,55 @@
                 </a:solidFill>
                 <a:latin typeface="Calibri"/>
               </a:rPr>
-              <a:t>–   Todo lo que blindemos hoy es lo que permitira, en la clase 14, hacer una demo en vivo tranquila: hasta se puede provocar el error a proposito para mostrar la validacion como una fortaleza.</a:t>
+              <a:t>–   En los catch va la reaccion, y se escriben del tipo mas especifico al mas general</a:t>
+            </a:r>
+          </a:p>
+          <a:p>
+            <a:pPr>
+              <a:spcAft>
+                <a:spcPts val="800"/>
+              </a:spcAft>
+            </a:pPr>
+            <a:r>
+              <a:rPr sz="2000" b="0" i="0">
+                <a:solidFill>
+                  <a:srgbClr val="333333"/>
+                </a:solidFill>
+                <a:latin typeface="Calibri"/>
+              </a:rPr>
+              <a:t>–   Porque Java entrega la excepcion al primer catch que la acepte; si usted pone catch (Exception e) antes de catch (NumberFormatException e), VS Code marca error de compilacion con el mensaje 'exception has already been caught'.</a:t>
+            </a:r>
+          </a:p>
+          <a:p>
+            <a:pPr>
+              <a:spcAft>
+                <a:spcPts val="800"/>
+              </a:spcAft>
+            </a:pPr>
+            <a:r>
+              <a:rPr sz="2000" b="0" i="0">
+                <a:solidFill>
+                  <a:srgbClr val="333333"/>
+                </a:solidFill>
+                <a:latin typeface="Calibri"/>
+              </a:rPr>
+              <a:t>–   Por la misma razon, al leer el CSV de VetCare, catch (FileNotFoundException e) va antes que catch (IOException e), porque la primera es hija de la segunda.</a:t>
+            </a:r>
+          </a:p>
+          <a:p>
+            <a:pPr>
+              <a:spcAft>
+                <a:spcPts val="800"/>
+              </a:spcAft>
+            </a:pPr>
+            <a:r>
+              <a:rPr sz="2000" b="0" i="0">
+                <a:solidFill>
+                  <a:srgbClr val="333333"/>
+                </a:solidFill>
+                <a:latin typeface="Calibri"/>
+              </a:rPr>
+              <a:t>–   Desde Java 7 se pueden unir tipos hermanos con multi-catch: catch (NumberFormatException | NullPointerException e).</a:t>
             </a:r>
           </a:p>
         </p:txBody>
@@ -8153,7 +10788,7 @@
                 </a:solidFill>
                 <a:latin typeface="Calibri"/>
               </a:rPr>
-              <a:t>Taller PI — punto de partida</a:t>
+              <a:t>La estructura try-catch-finally tiene una anatomia que conviene... (2/2)</a:t>
             </a:r>
           </a:p>
         </p:txBody>
@@ -8192,7 +10827,7 @@
                 </a:solidFill>
                 <a:latin typeface="Calibri"/>
               </a:rPr>
-              <a:t>–   El proyecto VetCare ya trae las clases Dueno, Mascota y Cita, un ArrayList&lt;Mascota&gt; cargado en memoria y el archivo datos/mascotas.csv con seis registros separados por punto y coma.</a:t>
+              <a:t>–   El bloque finally se ejecuta siempre, haya o no haya excepcion, e incluso si dentro del try hay un return (lo unico que se lo salta es apagar la maquina virtual con System.exit), y por eso fue durante anios el sitio para cerrar archivos y liberar recursos.</a:t>
             </a:r>
           </a:p>
           <a:p>
@@ -8208,7 +10843,7 @@
                 </a:solidFill>
                 <a:latin typeface="Calibri"/>
               </a:rPr>
-              <a:t>–   El formulario de registro toma el texto del campo edad y hace Integer.parseInt directo, sin validar nada; hoy la aplicacion se cae con cualquier letra o campo vacio.</a:t>
+              <a:t>–   Hoy preferimos el try-with-resources, que abre el recurso entre los parentesis del try y lo cierra solo</a:t>
             </a:r>
           </a:p>
           <a:p>
@@ -8224,7 +10859,23 @@
                 </a:solidFill>
                 <a:latin typeface="Calibri"/>
               </a:rPr>
-              <a:t>–   En la carpeta datos hay tambien un archivo mascotas_danado.csv con una linea incompleta y una edad escrita como 'dos', para probar la carga tolerante a errores.</a:t>
+              <a:t>–   Y funciona con cualquier objeto que implemente la interfaz AutoCloseable, como BufferedReader o PrintWriter: try (BufferedReader lector = new BufferedReader(new FileReader('datos/mascotas.csv'))) {... }.</a:t>
+            </a:r>
+          </a:p>
+          <a:p>
+            <a:pPr>
+              <a:spcAft>
+                <a:spcPts val="800"/>
+              </a:spcAft>
+            </a:pPr>
+            <a:r>
+              <a:rPr sz="2000" b="0" i="0">
+                <a:solidFill>
+                  <a:srgbClr val="333333"/>
+                </a:solidFill>
+                <a:latin typeface="Calibri"/>
+              </a:rPr>
+              <a:t>–   En VetCare esto significa que si el CSV esta corrupto a la mitad, el archivo igual se cierra y la aplicacion sigue viva con las mascotas que alcanzo a leer.</a:t>
             </a:r>
           </a:p>
         </p:txBody>
@@ -8405,111 +11056,21 @@
                 </a:solidFill>
                 <a:latin typeface="Calibri"/>
               </a:rPr>
-              <a:t>Taller PI — pasos guiados</a:t>
-            </a:r>
-          </a:p>
-        </p:txBody>
-      </p:sp>
-      <p:sp>
-        <p:nvSpPr>
-          <p:cNvPr id="5" name="Rounded Rectangle 4"/>
-          <p:cNvSpPr/>
-          <p:nvPr/>
-        </p:nvSpPr>
-        <p:spPr>
-          <a:xfrm>
-            <a:off x="457200" y="1234440"/>
-            <a:ext cx="11277295" cy="950976"/>
-          </a:xfrm>
-          <a:prstGeom prst="roundRect">
-            <a:avLst>
-              <a:gd name="adj" fmla="val 12000"/>
-            </a:avLst>
-          </a:prstGeom>
-          <a:solidFill>
-            <a:srgbClr val="F2F2F2"/>
-          </a:solidFill>
-          <a:ln>
-            <a:noFill/>
-          </a:ln>
-        </p:spPr>
-        <p:style>
-          <a:lnRef idx="1">
-            <a:schemeClr val="accent1"/>
-          </a:lnRef>
-          <a:fillRef idx="3">
-            <a:schemeClr val="accent1"/>
-          </a:fillRef>
-          <a:effectRef idx="2">
-            <a:schemeClr val="accent1"/>
-          </a:effectRef>
-          <a:fontRef idx="minor">
-            <a:schemeClr val="lt1"/>
-          </a:fontRef>
-        </p:style>
-        <p:txBody>
-          <a:bodyPr rtlCol="0" anchor="ctr"/>
-          <a:lstStyle/>
-          <a:p>
-            <a:pPr algn="ctr"/>
-          </a:p>
-        </p:txBody>
-      </p:sp>
-      <p:sp>
-        <p:nvSpPr>
-          <p:cNvPr id="6" name="Rounded Rectangle 5"/>
-          <p:cNvSpPr/>
-          <p:nvPr/>
-        </p:nvSpPr>
-        <p:spPr>
-          <a:xfrm>
-            <a:off x="594360" y="1490472"/>
-            <a:ext cx="438912" cy="438912"/>
-          </a:xfrm>
-          <a:prstGeom prst="roundRect">
-            <a:avLst>
-              <a:gd name="adj" fmla="val 12000"/>
-            </a:avLst>
-          </a:prstGeom>
-          <a:solidFill>
-            <a:srgbClr val="095292"/>
-          </a:solidFill>
-          <a:ln>
-            <a:noFill/>
-          </a:ln>
-        </p:spPr>
-        <p:style>
-          <a:lnRef idx="1">
-            <a:schemeClr val="accent1"/>
-          </a:lnRef>
-          <a:fillRef idx="3">
-            <a:schemeClr val="accent1"/>
-          </a:fillRef>
-          <a:effectRef idx="2">
-            <a:schemeClr val="accent1"/>
-          </a:effectRef>
-          <a:fontRef idx="minor">
-            <a:schemeClr val="lt1"/>
-          </a:fontRef>
-        </p:style>
-        <p:txBody>
-          <a:bodyPr rtlCol="0" anchor="ctr"/>
-          <a:lstStyle/>
-          <a:p>
-            <a:pPr algn="ctr"/>
-          </a:p>
-        </p:txBody>
-      </p:sp>
-      <p:sp>
-        <p:nvSpPr>
-          <p:cNvPr id="7" name="TextBox 6"/>
+              <a:t>Throw y throws se parecen en el nombre y hacen cosas opuestas, y esa... (1/2)</a:t>
+            </a:r>
+          </a:p>
+        </p:txBody>
+      </p:sp>
+      <p:sp>
+        <p:nvSpPr>
+          <p:cNvPr id="5" name="TextBox 4"/>
           <p:cNvSpPr txBox="1"/>
           <p:nvPr/>
         </p:nvSpPr>
         <p:spPr>
           <a:xfrm>
-            <a:off x="594360" y="1490472"/>
-            <a:ext cx="438912" cy="438912"/>
+            <a:off x="457200" y="1170432"/>
+            <a:ext cx="11277295" cy="5230368"/>
           </a:xfrm>
           <a:prstGeom prst="rect">
             <a:avLst/>
@@ -8517,677 +11078,47 @@
           <a:noFill/>
         </p:spPr>
         <p:txBody>
-          <a:bodyPr wrap="square" anchor="ctr"/>
-          <a:lstStyle/>
-          <a:p>
-            <a:pPr algn="ctr"/>
-            <a:r>
-              <a:rPr sz="1600" b="1" i="0">
-                <a:solidFill>
-                  <a:srgbClr val="FFFFFF"/>
-                </a:solidFill>
-                <a:latin typeface="Calibri"/>
-              </a:rPr>
-              <a:t>1</a:t>
-            </a:r>
-          </a:p>
-        </p:txBody>
-      </p:sp>
-      <p:sp>
-        <p:nvSpPr>
-          <p:cNvPr id="8" name="TextBox 7"/>
-          <p:cNvSpPr txBox="1"/>
-          <p:nvPr/>
-        </p:nvSpPr>
-        <p:spPr>
-          <a:xfrm>
-            <a:off x="1188720" y="1325880"/>
-            <a:ext cx="10271455" cy="786384"/>
-          </a:xfrm>
-          <a:prstGeom prst="rect">
-            <a:avLst/>
-          </a:prstGeom>
-          <a:noFill/>
-        </p:spPr>
-        <p:txBody>
-          <a:bodyPr wrap="square" anchor="ctr"/>
-          <a:lstStyle/>
-          <a:p>
-            <a:r>
-              <a:rPr sz="1500" b="1" i="0">
-                <a:solidFill>
-                  <a:srgbClr val="095292"/>
-                </a:solidFill>
-                <a:latin typeface="Calibri"/>
-              </a:rPr>
-              <a:t>Paso 1. Abra el proyecto VetCare en VS Code, cree el paquete vetcare.excepciones y dentro la clase DatoInvalidoException que extienda Exception con un constructor que reciba el mensaje; compile y verifique que no hay errores.</a:t>
-            </a:r>
-          </a:p>
-        </p:txBody>
-      </p:sp>
-      <p:sp>
-        <p:nvSpPr>
-          <p:cNvPr id="9" name="Rounded Rectangle 8"/>
-          <p:cNvSpPr/>
-          <p:nvPr/>
-        </p:nvSpPr>
-        <p:spPr>
-          <a:xfrm>
-            <a:off x="457200" y="2276856"/>
-            <a:ext cx="11277295" cy="950976"/>
-          </a:xfrm>
-          <a:prstGeom prst="roundRect">
-            <a:avLst>
-              <a:gd name="adj" fmla="val 12000"/>
-            </a:avLst>
-          </a:prstGeom>
-          <a:solidFill>
-            <a:srgbClr val="E8F4FA"/>
-          </a:solidFill>
-          <a:ln>
-            <a:noFill/>
-          </a:ln>
-        </p:spPr>
-        <p:style>
-          <a:lnRef idx="1">
-            <a:schemeClr val="accent1"/>
-          </a:lnRef>
-          <a:fillRef idx="3">
-            <a:schemeClr val="accent1"/>
-          </a:fillRef>
-          <a:effectRef idx="2">
-            <a:schemeClr val="accent1"/>
-          </a:effectRef>
-          <a:fontRef idx="minor">
-            <a:schemeClr val="lt1"/>
-          </a:fontRef>
-        </p:style>
-        <p:txBody>
-          <a:bodyPr rtlCol="0" anchor="ctr"/>
-          <a:lstStyle/>
-          <a:p>
-            <a:pPr algn="ctr"/>
-          </a:p>
-        </p:txBody>
-      </p:sp>
-      <p:sp>
-        <p:nvSpPr>
-          <p:cNvPr id="10" name="Rounded Rectangle 9"/>
-          <p:cNvSpPr/>
-          <p:nvPr/>
-        </p:nvSpPr>
-        <p:spPr>
-          <a:xfrm>
-            <a:off x="594360" y="2532888"/>
-            <a:ext cx="438912" cy="438912"/>
-          </a:xfrm>
-          <a:prstGeom prst="roundRect">
-            <a:avLst>
-              <a:gd name="adj" fmla="val 12000"/>
-            </a:avLst>
-          </a:prstGeom>
-          <a:solidFill>
-            <a:srgbClr val="095292"/>
-          </a:solidFill>
-          <a:ln>
-            <a:noFill/>
-          </a:ln>
-        </p:spPr>
-        <p:style>
-          <a:lnRef idx="1">
-            <a:schemeClr val="accent1"/>
-          </a:lnRef>
-          <a:fillRef idx="3">
-            <a:schemeClr val="accent1"/>
-          </a:fillRef>
-          <a:effectRef idx="2">
-            <a:schemeClr val="accent1"/>
-          </a:effectRef>
-          <a:fontRef idx="minor">
-            <a:schemeClr val="lt1"/>
-          </a:fontRef>
-        </p:style>
-        <p:txBody>
-          <a:bodyPr rtlCol="0" anchor="ctr"/>
-          <a:lstStyle/>
-          <a:p>
-            <a:pPr algn="ctr"/>
-          </a:p>
-        </p:txBody>
-      </p:sp>
-      <p:sp>
-        <p:nvSpPr>
-          <p:cNvPr id="11" name="TextBox 10"/>
-          <p:cNvSpPr txBox="1"/>
-          <p:nvPr/>
-        </p:nvSpPr>
-        <p:spPr>
-          <a:xfrm>
-            <a:off x="594360" y="2532888"/>
-            <a:ext cx="438912" cy="438912"/>
-          </a:xfrm>
-          <a:prstGeom prst="rect">
-            <a:avLst/>
-          </a:prstGeom>
-          <a:noFill/>
-        </p:spPr>
-        <p:txBody>
-          <a:bodyPr wrap="square" anchor="ctr"/>
-          <a:lstStyle/>
-          <a:p>
-            <a:pPr algn="ctr"/>
-            <a:r>
-              <a:rPr sz="1600" b="1" i="0">
-                <a:solidFill>
-                  <a:srgbClr val="FFFFFF"/>
-                </a:solidFill>
-                <a:latin typeface="Calibri"/>
-              </a:rPr>
-              <a:t>2</a:t>
-            </a:r>
-          </a:p>
-        </p:txBody>
-      </p:sp>
-      <p:sp>
-        <p:nvSpPr>
-          <p:cNvPr id="12" name="TextBox 11"/>
-          <p:cNvSpPr txBox="1"/>
-          <p:nvPr/>
-        </p:nvSpPr>
-        <p:spPr>
-          <a:xfrm>
-            <a:off x="1188720" y="2368296"/>
-            <a:ext cx="10271455" cy="786384"/>
-          </a:xfrm>
-          <a:prstGeom prst="rect">
-            <a:avLst/>
-          </a:prstGeom>
-          <a:noFill/>
-        </p:spPr>
-        <p:txBody>
-          <a:bodyPr wrap="square" anchor="ctr"/>
-          <a:lstStyle/>
-          <a:p>
-            <a:r>
-              <a:rPr sz="1400" b="1" i="0">
-                <a:solidFill>
-                  <a:srgbClr val="095292"/>
-                </a:solidFill>
-                <a:latin typeface="Calibri"/>
-              </a:rPr>
-              <a:t>Paso 2. En la clase Mascota reemplace setEdad(int) por setEdad(String texto) throws DatoInvalidoException: rechace vacio, convierta con Integer.parseInt dentro de un try, atrape NumberFormatException y relance DatoInvalidoException con un mensaje de la clinica, y valide el rango 0 a 30; repita la idea en setPeso con Double.parseDouble y rango 0.1 a 120.</a:t>
-            </a:r>
-          </a:p>
-        </p:txBody>
-      </p:sp>
-      <p:sp>
-        <p:nvSpPr>
-          <p:cNvPr id="13" name="Rounded Rectangle 12"/>
-          <p:cNvSpPr/>
-          <p:nvPr/>
-        </p:nvSpPr>
-        <p:spPr>
-          <a:xfrm>
-            <a:off x="457200" y="3319272"/>
-            <a:ext cx="11277295" cy="950976"/>
-          </a:xfrm>
-          <a:prstGeom prst="roundRect">
-            <a:avLst>
-              <a:gd name="adj" fmla="val 12000"/>
-            </a:avLst>
-          </a:prstGeom>
-          <a:solidFill>
-            <a:srgbClr val="F2F2F2"/>
-          </a:solidFill>
-          <a:ln>
-            <a:noFill/>
-          </a:ln>
-        </p:spPr>
-        <p:style>
-          <a:lnRef idx="1">
-            <a:schemeClr val="accent1"/>
-          </a:lnRef>
-          <a:fillRef idx="3">
-            <a:schemeClr val="accent1"/>
-          </a:fillRef>
-          <a:effectRef idx="2">
-            <a:schemeClr val="accent1"/>
-          </a:effectRef>
-          <a:fontRef idx="minor">
-            <a:schemeClr val="lt1"/>
-          </a:fontRef>
-        </p:style>
-        <p:txBody>
-          <a:bodyPr rtlCol="0" anchor="ctr"/>
-          <a:lstStyle/>
-          <a:p>
-            <a:pPr algn="ctr"/>
-          </a:p>
-        </p:txBody>
-      </p:sp>
-      <p:sp>
-        <p:nvSpPr>
-          <p:cNvPr id="14" name="Rounded Rectangle 13"/>
-          <p:cNvSpPr/>
-          <p:nvPr/>
-        </p:nvSpPr>
-        <p:spPr>
-          <a:xfrm>
-            <a:off x="594360" y="3575304"/>
-            <a:ext cx="438912" cy="438912"/>
-          </a:xfrm>
-          <a:prstGeom prst="roundRect">
-            <a:avLst>
-              <a:gd name="adj" fmla="val 12000"/>
-            </a:avLst>
-          </a:prstGeom>
-          <a:solidFill>
-            <a:srgbClr val="095292"/>
-          </a:solidFill>
-          <a:ln>
-            <a:noFill/>
-          </a:ln>
-        </p:spPr>
-        <p:style>
-          <a:lnRef idx="1">
-            <a:schemeClr val="accent1"/>
-          </a:lnRef>
-          <a:fillRef idx="3">
-            <a:schemeClr val="accent1"/>
-          </a:fillRef>
-          <a:effectRef idx="2">
-            <a:schemeClr val="accent1"/>
-          </a:effectRef>
-          <a:fontRef idx="minor">
-            <a:schemeClr val="lt1"/>
-          </a:fontRef>
-        </p:style>
-        <p:txBody>
-          <a:bodyPr rtlCol="0" anchor="ctr"/>
-          <a:lstStyle/>
-          <a:p>
-            <a:pPr algn="ctr"/>
-          </a:p>
-        </p:txBody>
-      </p:sp>
-      <p:sp>
-        <p:nvSpPr>
-          <p:cNvPr id="15" name="TextBox 14"/>
-          <p:cNvSpPr txBox="1"/>
-          <p:nvPr/>
-        </p:nvSpPr>
-        <p:spPr>
-          <a:xfrm>
-            <a:off x="594360" y="3575304"/>
-            <a:ext cx="438912" cy="438912"/>
-          </a:xfrm>
-          <a:prstGeom prst="rect">
-            <a:avLst/>
-          </a:prstGeom>
-          <a:noFill/>
-        </p:spPr>
-        <p:txBody>
-          <a:bodyPr wrap="square" anchor="ctr"/>
-          <a:lstStyle/>
-          <a:p>
-            <a:pPr algn="ctr"/>
-            <a:r>
-              <a:rPr sz="1600" b="1" i="0">
-                <a:solidFill>
-                  <a:srgbClr val="FFFFFF"/>
-                </a:solidFill>
-                <a:latin typeface="Calibri"/>
-              </a:rPr>
-              <a:t>3</a:t>
-            </a:r>
-          </a:p>
-        </p:txBody>
-      </p:sp>
-      <p:sp>
-        <p:nvSpPr>
-          <p:cNvPr id="16" name="TextBox 15"/>
-          <p:cNvSpPr txBox="1"/>
-          <p:nvPr/>
-        </p:nvSpPr>
-        <p:spPr>
-          <a:xfrm>
-            <a:off x="1188720" y="3410712"/>
-            <a:ext cx="10271455" cy="786384"/>
-          </a:xfrm>
-          <a:prstGeom prst="rect">
-            <a:avLst/>
-          </a:prstGeom>
-          <a:noFill/>
-        </p:spPr>
-        <p:txBody>
-          <a:bodyPr wrap="square" anchor="ctr"/>
-          <a:lstStyle/>
-          <a:p>
-            <a:r>
-              <a:rPr sz="1400" b="1" i="0">
-                <a:solidFill>
-                  <a:srgbClr val="095292"/>
-                </a:solidFill>
-                <a:latin typeface="Calibri"/>
-              </a:rPr>
-              <a:t>Paso 3. En el formulario de registro (JFrame o menu de consola) envuelva las llamadas a los setters en un try-catch que muestre JOptionPane.showMessageDialog con e.getMessage(), devuelva el foco al campo culpable con requestFocus() y NO agregue la mascota a la lista cuando hubo error.</a:t>
-            </a:r>
-          </a:p>
-        </p:txBody>
-      </p:sp>
-      <p:sp>
-        <p:nvSpPr>
-          <p:cNvPr id="17" name="Rounded Rectangle 16"/>
-          <p:cNvSpPr/>
-          <p:nvPr/>
-        </p:nvSpPr>
-        <p:spPr>
-          <a:xfrm>
-            <a:off x="457200" y="4361688"/>
-            <a:ext cx="11277295" cy="950976"/>
-          </a:xfrm>
-          <a:prstGeom prst="roundRect">
-            <a:avLst>
-              <a:gd name="adj" fmla="val 12000"/>
-            </a:avLst>
-          </a:prstGeom>
-          <a:solidFill>
-            <a:srgbClr val="E8F4FA"/>
-          </a:solidFill>
-          <a:ln>
-            <a:noFill/>
-          </a:ln>
-        </p:spPr>
-        <p:style>
-          <a:lnRef idx="1">
-            <a:schemeClr val="accent1"/>
-          </a:lnRef>
-          <a:fillRef idx="3">
-            <a:schemeClr val="accent1"/>
-          </a:fillRef>
-          <a:effectRef idx="2">
-            <a:schemeClr val="accent1"/>
-          </a:effectRef>
-          <a:fontRef idx="minor">
-            <a:schemeClr val="lt1"/>
-          </a:fontRef>
-        </p:style>
-        <p:txBody>
-          <a:bodyPr rtlCol="0" anchor="ctr"/>
-          <a:lstStyle/>
-          <a:p>
-            <a:pPr algn="ctr"/>
-          </a:p>
-        </p:txBody>
-      </p:sp>
-      <p:sp>
-        <p:nvSpPr>
-          <p:cNvPr id="18" name="Rounded Rectangle 17"/>
-          <p:cNvSpPr/>
-          <p:nvPr/>
-        </p:nvSpPr>
-        <p:spPr>
-          <a:xfrm>
-            <a:off x="594360" y="4617720"/>
-            <a:ext cx="438912" cy="438912"/>
-          </a:xfrm>
-          <a:prstGeom prst="roundRect">
-            <a:avLst>
-              <a:gd name="adj" fmla="val 12000"/>
-            </a:avLst>
-          </a:prstGeom>
-          <a:solidFill>
-            <a:srgbClr val="095292"/>
-          </a:solidFill>
-          <a:ln>
-            <a:noFill/>
-          </a:ln>
-        </p:spPr>
-        <p:style>
-          <a:lnRef idx="1">
-            <a:schemeClr val="accent1"/>
-          </a:lnRef>
-          <a:fillRef idx="3">
-            <a:schemeClr val="accent1"/>
-          </a:fillRef>
-          <a:effectRef idx="2">
-            <a:schemeClr val="accent1"/>
-          </a:effectRef>
-          <a:fontRef idx="minor">
-            <a:schemeClr val="lt1"/>
-          </a:fontRef>
-        </p:style>
-        <p:txBody>
-          <a:bodyPr rtlCol="0" anchor="ctr"/>
-          <a:lstStyle/>
-          <a:p>
-            <a:pPr algn="ctr"/>
-          </a:p>
-        </p:txBody>
-      </p:sp>
-      <p:sp>
-        <p:nvSpPr>
-          <p:cNvPr id="19" name="TextBox 18"/>
-          <p:cNvSpPr txBox="1"/>
-          <p:nvPr/>
-        </p:nvSpPr>
-        <p:spPr>
-          <a:xfrm>
-            <a:off x="594360" y="4617720"/>
-            <a:ext cx="438912" cy="438912"/>
-          </a:xfrm>
-          <a:prstGeom prst="rect">
-            <a:avLst/>
-          </a:prstGeom>
-          <a:noFill/>
-        </p:spPr>
-        <p:txBody>
-          <a:bodyPr wrap="square" anchor="ctr"/>
-          <a:lstStyle/>
-          <a:p>
-            <a:pPr algn="ctr"/>
-            <a:r>
-              <a:rPr sz="1600" b="1" i="0">
-                <a:solidFill>
-                  <a:srgbClr val="FFFFFF"/>
-                </a:solidFill>
-                <a:latin typeface="Calibri"/>
-              </a:rPr>
-              <a:t>4</a:t>
-            </a:r>
-          </a:p>
-        </p:txBody>
-      </p:sp>
-      <p:sp>
-        <p:nvSpPr>
-          <p:cNvPr id="20" name="TextBox 19"/>
-          <p:cNvSpPr txBox="1"/>
-          <p:nvPr/>
-        </p:nvSpPr>
-        <p:spPr>
-          <a:xfrm>
-            <a:off x="1188720" y="4453128"/>
-            <a:ext cx="10271455" cy="786384"/>
-          </a:xfrm>
-          <a:prstGeom prst="rect">
-            <a:avLst/>
-          </a:prstGeom>
-          <a:noFill/>
-        </p:spPr>
-        <p:txBody>
-          <a:bodyPr wrap="square" anchor="ctr"/>
-          <a:lstStyle/>
-          <a:p>
-            <a:r>
-              <a:rPr sz="1400" b="1" i="0">
-                <a:solidFill>
-                  <a:srgbClr val="095292"/>
-                </a:solidFill>
-                <a:latin typeface="Calibri"/>
-              </a:rPr>
-              <a:t>Paso 4. Cambie la carga de datos/mascotas.csv a try-with-resources con dos catch separados: FileNotFoundException, que arranca con lista vacia e informa que es la primera ejecucion, e IOException, que muestra el problema real; las lineas del CSV con datos malos se omiten con un aviso, sin tumbar la carga completa.</a:t>
-            </a:r>
-          </a:p>
-        </p:txBody>
-      </p:sp>
-      <p:sp>
-        <p:nvSpPr>
-          <p:cNvPr id="21" name="Rounded Rectangle 20"/>
-          <p:cNvSpPr/>
-          <p:nvPr/>
-        </p:nvSpPr>
-        <p:spPr>
-          <a:xfrm>
-            <a:off x="457200" y="5404104"/>
-            <a:ext cx="11277295" cy="950976"/>
-          </a:xfrm>
-          <a:prstGeom prst="roundRect">
-            <a:avLst>
-              <a:gd name="adj" fmla="val 12000"/>
-            </a:avLst>
-          </a:prstGeom>
-          <a:solidFill>
-            <a:srgbClr val="F2F2F2"/>
-          </a:solidFill>
-          <a:ln>
-            <a:noFill/>
-          </a:ln>
-        </p:spPr>
-        <p:style>
-          <a:lnRef idx="1">
-            <a:schemeClr val="accent1"/>
-          </a:lnRef>
-          <a:fillRef idx="3">
-            <a:schemeClr val="accent1"/>
-          </a:fillRef>
-          <a:effectRef idx="2">
-            <a:schemeClr val="accent1"/>
-          </a:effectRef>
-          <a:fontRef idx="minor">
-            <a:schemeClr val="lt1"/>
-          </a:fontRef>
-        </p:style>
-        <p:txBody>
-          <a:bodyPr rtlCol="0" anchor="ctr"/>
-          <a:lstStyle/>
-          <a:p>
-            <a:pPr algn="ctr"/>
-          </a:p>
-        </p:txBody>
-      </p:sp>
-      <p:sp>
-        <p:nvSpPr>
-          <p:cNvPr id="22" name="Rounded Rectangle 21"/>
-          <p:cNvSpPr/>
-          <p:nvPr/>
-        </p:nvSpPr>
-        <p:spPr>
-          <a:xfrm>
-            <a:off x="594360" y="5660136"/>
-            <a:ext cx="438912" cy="438912"/>
-          </a:xfrm>
-          <a:prstGeom prst="roundRect">
-            <a:avLst>
-              <a:gd name="adj" fmla="val 12000"/>
-            </a:avLst>
-          </a:prstGeom>
-          <a:solidFill>
-            <a:srgbClr val="095292"/>
-          </a:solidFill>
-          <a:ln>
-            <a:noFill/>
-          </a:ln>
-        </p:spPr>
-        <p:style>
-          <a:lnRef idx="1">
-            <a:schemeClr val="accent1"/>
-          </a:lnRef>
-          <a:fillRef idx="3">
-            <a:schemeClr val="accent1"/>
-          </a:fillRef>
-          <a:effectRef idx="2">
-            <a:schemeClr val="accent1"/>
-          </a:effectRef>
-          <a:fontRef idx="minor">
-            <a:schemeClr val="lt1"/>
-          </a:fontRef>
-        </p:style>
-        <p:txBody>
-          <a:bodyPr rtlCol="0" anchor="ctr"/>
-          <a:lstStyle/>
-          <a:p>
-            <a:pPr algn="ctr"/>
-          </a:p>
-        </p:txBody>
-      </p:sp>
-      <p:sp>
-        <p:nvSpPr>
-          <p:cNvPr id="23" name="TextBox 22"/>
-          <p:cNvSpPr txBox="1"/>
-          <p:nvPr/>
-        </p:nvSpPr>
-        <p:spPr>
-          <a:xfrm>
-            <a:off x="594360" y="5660136"/>
-            <a:ext cx="438912" cy="438912"/>
-          </a:xfrm>
-          <a:prstGeom prst="rect">
-            <a:avLst/>
-          </a:prstGeom>
-          <a:noFill/>
-        </p:spPr>
-        <p:txBody>
-          <a:bodyPr wrap="square" anchor="ctr"/>
-          <a:lstStyle/>
-          <a:p>
-            <a:pPr algn="ctr"/>
-            <a:r>
-              <a:rPr sz="1600" b="1" i="0">
-                <a:solidFill>
-                  <a:srgbClr val="FFFFFF"/>
-                </a:solidFill>
-                <a:latin typeface="Calibri"/>
-              </a:rPr>
-              <a:t>5</a:t>
-            </a:r>
-          </a:p>
-        </p:txBody>
-      </p:sp>
-      <p:sp>
-        <p:nvSpPr>
-          <p:cNvPr id="24" name="TextBox 23"/>
-          <p:cNvSpPr txBox="1"/>
-          <p:nvPr/>
-        </p:nvSpPr>
-        <p:spPr>
-          <a:xfrm>
-            <a:off x="1188720" y="5495544"/>
-            <a:ext cx="10271455" cy="786384"/>
-          </a:xfrm>
-          <a:prstGeom prst="rect">
-            <a:avLst/>
-          </a:prstGeom>
-          <a:noFill/>
-        </p:spPr>
-        <p:txBody>
-          <a:bodyPr wrap="square" anchor="ctr"/>
-          <a:lstStyle/>
-          <a:p>
-            <a:r>
-              <a:rPr sz="1400" b="1" i="0">
-                <a:solidFill>
-                  <a:srgbClr val="095292"/>
-                </a:solidFill>
-                <a:latin typeface="Calibri"/>
-              </a:rPr>
-              <a:t>Paso 5. Pruebe el formulario con estas cinco entradas de edad: vacio, 'tres', '-2', '150' y '4'; capture la pantalla de cada caso, arme una tabla de evidencia con entrada, mensaje mostrado y estado de la aplicacion, y suba el codigo mas la tabla a la plataforma del curso.</a:t>
-            </a:r>
-          </a:p>
-        </p:txBody>
-      </p:sp>
-      <p:sp>
-        <p:nvSpPr>
-          <p:cNvPr id="25" name="TextBox 24"/>
+          <a:bodyPr wrap="square">
+            <a:spAutoFit/>
+          </a:bodyPr>
+          <a:lstStyle/>
+          <a:p>
+            <a:pPr>
+              <a:spcAft>
+                <a:spcPts val="800"/>
+              </a:spcAft>
+            </a:pPr>
+            <a:r>
+              <a:rPr sz="2000" b="0" i="0">
+                <a:solidFill>
+                  <a:srgbClr val="333333"/>
+                </a:solidFill>
+                <a:latin typeface="Calibri"/>
+              </a:rPr>
+              <a:t>–   throw y throws se parecen en el nombre y hacen cosas opuestas, y esa confusion es la que mas cuesta en el parcial. throw (sin s) es una instruccion que se ejecuta y lanza un objeto en ese instante: throw new DatoInvalidoException('La edad debe estar entre 0 y 30 anios.'). throws (con s) es una advertencia escrita en la firma del metodo: public void setEdad(String texto) throws DatoInvalidoException, y significa 'yo no resuelvo esto, quien me llame vera que hace'.</a:t>
+            </a:r>
+          </a:p>
+          <a:p>
+            <a:pPr>
+              <a:spcAft>
+                <a:spcPts val="800"/>
+              </a:spcAft>
+            </a:pPr>
+            <a:r>
+              <a:rPr sz="2000" b="0" i="0">
+                <a:solidFill>
+                  <a:srgbClr val="333333"/>
+                </a:solidFill>
+                <a:latin typeface="Calibri"/>
+              </a:rPr>
+              <a:t>–   De ahi sale la regla de capas que usaremos en VetCare: las clases del dominio (Mascota, Dueno, Cita) validan y LANZAN</a:t>
+            </a:r>
+          </a:p>
+        </p:txBody>
+      </p:sp>
+      <p:sp>
+        <p:nvSpPr>
+          <p:cNvPr id="6" name="TextBox 5"/>
           <p:cNvSpPr txBox="1"/>
           <p:nvPr/>
         </p:nvSpPr>

--- a/Programacion II/Clases/Clase 13 - Control de excepciones/Presentacion.pptx
+++ b/Programacion II/Clases/Clase 13 - Control de excepciones/Presentacion.pptx
@@ -9,40 +9,34 @@
     <p:sldId id="257" r:id="rId8"/>
     <p:sldId id="258" r:id="rId9"/>
     <p:sldId id="259" r:id="rId10"/>
-    <p:sldId id="260" r:id="rId11"/>
-    <p:sldId id="261" r:id="rId12"/>
-    <p:sldId id="262" r:id="rId13"/>
-    <p:sldId id="263" r:id="rId14"/>
-    <p:sldId id="264" r:id="rId15"/>
-    <p:sldId id="265" r:id="rId16"/>
-    <p:sldId id="266" r:id="rId17"/>
-    <p:sldId id="267" r:id="rId18"/>
-    <p:sldId id="268" r:id="rId19"/>
-    <p:sldId id="269" r:id="rId20"/>
-    <p:sldId id="270" r:id="rId21"/>
-    <p:sldId id="271" r:id="rId22"/>
-    <p:sldId id="272" r:id="rId23"/>
-    <p:sldId id="273" r:id="rId24"/>
-    <p:sldId id="274" r:id="rId25"/>
-    <p:sldId id="275" r:id="rId26"/>
-    <p:sldId id="276" r:id="rId27"/>
-    <p:sldId id="277" r:id="rId28"/>
-    <p:sldId id="278" r:id="rId29"/>
-    <p:sldId id="279" r:id="rId30"/>
-    <p:sldId id="280" r:id="rId31"/>
-    <p:sldId id="281" r:id="rId32"/>
-    <p:sldId id="282" r:id="rId33"/>
-    <p:sldId id="283" r:id="rId34"/>
-    <p:sldId id="284" r:id="rId35"/>
-    <p:sldId id="285" r:id="rId36"/>
-    <p:sldId id="286" r:id="rId37"/>
-    <p:sldId id="287" r:id="rId38"/>
-    <p:sldId id="288" r:id="rId39"/>
-    <p:sldId id="289" r:id="rId40"/>
-    <p:sldId id="290" r:id="rId41"/>
-    <p:sldId id="291" r:id="rId42"/>
-    <p:sldId id="292" r:id="rId43"/>
-    <p:sldId id="293" r:id="rId44"/>
+    <p:sldId id="260" r:id="rId12"/>
+    <p:sldId id="261" r:id="rId13"/>
+    <p:sldId id="262" r:id="rId14"/>
+    <p:sldId id="263" r:id="rId15"/>
+    <p:sldId id="264" r:id="rId16"/>
+    <p:sldId id="265" r:id="rId17"/>
+    <p:sldId id="266" r:id="rId18"/>
+    <p:sldId id="267" r:id="rId19"/>
+    <p:sldId id="268" r:id="rId20"/>
+    <p:sldId id="269" r:id="rId21"/>
+    <p:sldId id="270" r:id="rId22"/>
+    <p:sldId id="271" r:id="rId23"/>
+    <p:sldId id="272" r:id="rId24"/>
+    <p:sldId id="273" r:id="rId25"/>
+    <p:sldId id="274" r:id="rId26"/>
+    <p:sldId id="275" r:id="rId27"/>
+    <p:sldId id="276" r:id="rId28"/>
+    <p:sldId id="277" r:id="rId29"/>
+    <p:sldId id="278" r:id="rId30"/>
+    <p:sldId id="279" r:id="rId31"/>
+    <p:sldId id="280" r:id="rId32"/>
+    <p:sldId id="281" r:id="rId33"/>
+    <p:sldId id="282" r:id="rId34"/>
+    <p:sldId id="283" r:id="rId35"/>
+    <p:sldId id="284" r:id="rId36"/>
+    <p:sldId id="285" r:id="rId37"/>
+    <p:sldId id="286" r:id="rId38"/>
+    <p:sldId id="287" r:id="rId39"/>
   </p:sldIdLst>
   <p:sldSz cx="12191695" cy="6858000" type="screen4x3"/>
   <p:notesSz cx="6858000" cy="9144000"/>
@@ -142,6 +136,648 @@
     </a:lvl9pPr>
   </p:defaultTextStyle>
 </p:presentation>
+</file>
+
+<file path=ppt/notesMasters/notesMaster1.xml><?xml version="1.0" encoding="utf-8"?>
+<p:notesMaster xmlns:a="http://schemas.openxmlformats.org/drawingml/2006/main" xmlns:p="http://schemas.openxmlformats.org/presentationml/2006/main" xmlns:r="http://schemas.openxmlformats.org/officeDocument/2006/relationships">
+  <p:cSld>
+    <p:bg>
+      <p:bgRef idx="1001">
+        <a:schemeClr val="bg1"/>
+      </p:bgRef>
+    </p:bg>
+    <p:spTree>
+      <p:nvGrpSpPr>
+        <p:cNvPr id="1" name=""/>
+        <p:cNvGrpSpPr/>
+        <p:nvPr/>
+      </p:nvGrpSpPr>
+      <p:grpSpPr>
+        <a:xfrm>
+          <a:off x="0" y="0"/>
+          <a:ext cx="0" cy="0"/>
+          <a:chOff x="0" y="0"/>
+          <a:chExt cx="0" cy="0"/>
+        </a:xfrm>
+      </p:grpSpPr>
+      <p:sp>
+        <p:nvSpPr>
+          <p:cNvPr id="2" name="Header Placeholder 1"/>
+          <p:cNvSpPr>
+            <a:spLocks noGrp="1"/>
+          </p:cNvSpPr>
+          <p:nvPr>
+            <p:ph type="hdr" sz="quarter"/>
+          </p:nvPr>
+        </p:nvSpPr>
+        <p:spPr>
+          <a:xfrm>
+            <a:off x="0" y="0"/>
+            <a:ext cx="2971800" cy="457200"/>
+          </a:xfrm>
+          <a:prstGeom prst="rect">
+            <a:avLst/>
+          </a:prstGeom>
+        </p:spPr>
+        <p:txBody>
+          <a:bodyPr vert="horz" lIns="91440" tIns="45720" rIns="91440" bIns="45720" rtlCol="0"/>
+          <a:lstStyle>
+            <a:lvl1pPr algn="l">
+              <a:defRPr sz="1200"/>
+            </a:lvl1pPr>
+          </a:lstStyle>
+          <a:p>
+            <a:endParaRPr lang="en-US"/>
+          </a:p>
+        </p:txBody>
+      </p:sp>
+      <p:sp>
+        <p:nvSpPr>
+          <p:cNvPr id="3" name="Date Placeholder 2"/>
+          <p:cNvSpPr>
+            <a:spLocks noGrp="1"/>
+          </p:cNvSpPr>
+          <p:nvPr>
+            <p:ph type="dt" idx="1"/>
+          </p:nvPr>
+        </p:nvSpPr>
+        <p:spPr>
+          <a:xfrm>
+            <a:off x="3884613" y="0"/>
+            <a:ext cx="2971800" cy="457200"/>
+          </a:xfrm>
+          <a:prstGeom prst="rect">
+            <a:avLst/>
+          </a:prstGeom>
+        </p:spPr>
+        <p:txBody>
+          <a:bodyPr vert="horz" lIns="91440" tIns="45720" rIns="91440" bIns="45720" rtlCol="0"/>
+          <a:lstStyle>
+            <a:lvl1pPr algn="r">
+              <a:defRPr sz="1200"/>
+            </a:lvl1pPr>
+          </a:lstStyle>
+          <a:p>
+            <a:fld id="{0F89C1C7-3DCD-1040-A9CF-14679D8B5DDD}" type="datetimeFigureOut">
+              <a:rPr lang="en-US" smtClean="0"/>
+              <a:t>10/17/16</a:t>
+            </a:fld>
+            <a:endParaRPr lang="en-US"/>
+          </a:p>
+        </p:txBody>
+      </p:sp>
+      <p:sp>
+        <p:nvSpPr>
+          <p:cNvPr id="4" name="Slide Image Placeholder 3"/>
+          <p:cNvSpPr>
+            <a:spLocks noGrp="1" noRot="1" noChangeAspect="1"/>
+          </p:cNvSpPr>
+          <p:nvPr>
+            <p:ph type="sldImg" idx="2"/>
+          </p:nvPr>
+        </p:nvSpPr>
+        <p:spPr>
+          <a:xfrm>
+            <a:off x="1143000" y="685800"/>
+            <a:ext cx="4572000" cy="3429000"/>
+          </a:xfrm>
+          <a:prstGeom prst="rect">
+            <a:avLst/>
+          </a:prstGeom>
+          <a:noFill/>
+          <a:ln w="12700">
+            <a:solidFill>
+              <a:prstClr val="black"/>
+            </a:solidFill>
+          </a:ln>
+        </p:spPr>
+        <p:txBody>
+          <a:bodyPr vert="horz" lIns="91440" tIns="45720" rIns="91440" bIns="45720" rtlCol="0" anchor="ctr"/>
+          <a:lstStyle/>
+          <a:p>
+            <a:endParaRPr lang="en-US"/>
+          </a:p>
+        </p:txBody>
+      </p:sp>
+      <p:sp>
+        <p:nvSpPr>
+          <p:cNvPr id="5" name="Notes Placeholder 4"/>
+          <p:cNvSpPr>
+            <a:spLocks noGrp="1"/>
+          </p:cNvSpPr>
+          <p:nvPr>
+            <p:ph type="body" sz="quarter" idx="3"/>
+          </p:nvPr>
+        </p:nvSpPr>
+        <p:spPr>
+          <a:xfrm>
+            <a:off x="685800" y="4343400"/>
+            <a:ext cx="5486400" cy="4114800"/>
+          </a:xfrm>
+          <a:prstGeom prst="rect">
+            <a:avLst/>
+          </a:prstGeom>
+        </p:spPr>
+        <p:txBody>
+          <a:bodyPr vert="horz" lIns="91440" tIns="45720" rIns="91440" bIns="45720" rtlCol="0"/>
+          <a:lstStyle/>
+          <a:p>
+            <a:pPr lvl="0"/>
+            <a:r>
+              <a:rPr lang="en-US" smtClean="0"/>
+              <a:t>Click to edit Master text styles</a:t>
+            </a:r>
+          </a:p>
+          <a:p>
+            <a:pPr lvl="1"/>
+            <a:r>
+              <a:rPr lang="en-US" smtClean="0"/>
+              <a:t>Second level</a:t>
+            </a:r>
+          </a:p>
+          <a:p>
+            <a:pPr lvl="2"/>
+            <a:r>
+              <a:rPr lang="en-US" smtClean="0"/>
+              <a:t>Third level</a:t>
+            </a:r>
+          </a:p>
+          <a:p>
+            <a:pPr lvl="3"/>
+            <a:r>
+              <a:rPr lang="en-US" smtClean="0"/>
+              <a:t>Fourth level</a:t>
+            </a:r>
+          </a:p>
+          <a:p>
+            <a:pPr lvl="4"/>
+            <a:r>
+              <a:rPr lang="en-US" smtClean="0"/>
+              <a:t>Fifth level</a:t>
+            </a:r>
+            <a:endParaRPr lang="en-US"/>
+          </a:p>
+        </p:txBody>
+      </p:sp>
+      <p:sp>
+        <p:nvSpPr>
+          <p:cNvPr id="6" name="Footer Placeholder 5"/>
+          <p:cNvSpPr>
+            <a:spLocks noGrp="1"/>
+          </p:cNvSpPr>
+          <p:nvPr>
+            <p:ph type="ftr" sz="quarter" idx="4"/>
+          </p:nvPr>
+        </p:nvSpPr>
+        <p:spPr>
+          <a:xfrm>
+            <a:off x="0" y="8685213"/>
+            <a:ext cx="2971800" cy="457200"/>
+          </a:xfrm>
+          <a:prstGeom prst="rect">
+            <a:avLst/>
+          </a:prstGeom>
+        </p:spPr>
+        <p:txBody>
+          <a:bodyPr vert="horz" lIns="91440" tIns="45720" rIns="91440" bIns="45720" rtlCol="0" anchor="b"/>
+          <a:lstStyle>
+            <a:lvl1pPr algn="l">
+              <a:defRPr sz="1200"/>
+            </a:lvl1pPr>
+          </a:lstStyle>
+          <a:p>
+            <a:endParaRPr lang="en-US"/>
+          </a:p>
+        </p:txBody>
+      </p:sp>
+      <p:sp>
+        <p:nvSpPr>
+          <p:cNvPr id="7" name="Slide Number Placeholder 6"/>
+          <p:cNvSpPr>
+            <a:spLocks noGrp="1"/>
+          </p:cNvSpPr>
+          <p:nvPr>
+            <p:ph type="sldNum" sz="quarter" idx="5"/>
+          </p:nvPr>
+        </p:nvSpPr>
+        <p:spPr>
+          <a:xfrm>
+            <a:off x="3884613" y="8685213"/>
+            <a:ext cx="2971800" cy="457200"/>
+          </a:xfrm>
+          <a:prstGeom prst="rect">
+            <a:avLst/>
+          </a:prstGeom>
+        </p:spPr>
+        <p:txBody>
+          <a:bodyPr vert="horz" lIns="91440" tIns="45720" rIns="91440" bIns="45720" rtlCol="0" anchor="b"/>
+          <a:lstStyle>
+            <a:lvl1pPr algn="r">
+              <a:defRPr sz="1200"/>
+            </a:lvl1pPr>
+          </a:lstStyle>
+          <a:p>
+            <a:fld id="{BB5E49A5-4136-284D-997B-48E1D791AD67}" type="slidenum">
+              <a:rPr lang="en-US" smtClean="0"/>
+              <a:t>‹#›</a:t>
+            </a:fld>
+            <a:endParaRPr lang="en-US"/>
+          </a:p>
+        </p:txBody>
+      </p:sp>
+    </p:spTree>
+    <p:extLst>
+      <p:ext uri="{BB962C8B-B14F-4D97-AF65-F5344CB8AC3E}">
+        <p14:creationId xmlns:p14="http://schemas.microsoft.com/office/powerpoint/2010/main" val="2623252185"/>
+      </p:ext>
+    </p:extLst>
+  </p:cSld>
+  <p:clrMap bg1="lt1" tx1="dk1" bg2="lt2" tx2="dk2" accent1="accent1" accent2="accent2" accent3="accent3" accent4="accent4" accent5="accent5" accent6="accent6" hlink="hlink" folHlink="folHlink"/>
+  <p:notesStyle>
+    <a:lvl1pPr marL="0" algn="l" defTabSz="457200" rtl="0" eaLnBrk="1" latinLnBrk="0" hangingPunct="1">
+      <a:defRPr sz="1200" kern="1200">
+        <a:solidFill>
+          <a:schemeClr val="tx1"/>
+        </a:solidFill>
+        <a:latin typeface="+mn-lt"/>
+        <a:ea typeface="+mn-ea"/>
+        <a:cs typeface="+mn-cs"/>
+      </a:defRPr>
+    </a:lvl1pPr>
+    <a:lvl2pPr marL="457200" algn="l" defTabSz="457200" rtl="0" eaLnBrk="1" latinLnBrk="0" hangingPunct="1">
+      <a:defRPr sz="1200" kern="1200">
+        <a:solidFill>
+          <a:schemeClr val="tx1"/>
+        </a:solidFill>
+        <a:latin typeface="+mn-lt"/>
+        <a:ea typeface="+mn-ea"/>
+        <a:cs typeface="+mn-cs"/>
+      </a:defRPr>
+    </a:lvl2pPr>
+    <a:lvl3pPr marL="914400" algn="l" defTabSz="457200" rtl="0" eaLnBrk="1" latinLnBrk="0" hangingPunct="1">
+      <a:defRPr sz="1200" kern="1200">
+        <a:solidFill>
+          <a:schemeClr val="tx1"/>
+        </a:solidFill>
+        <a:latin typeface="+mn-lt"/>
+        <a:ea typeface="+mn-ea"/>
+        <a:cs typeface="+mn-cs"/>
+      </a:defRPr>
+    </a:lvl3pPr>
+    <a:lvl4pPr marL="1371600" algn="l" defTabSz="457200" rtl="0" eaLnBrk="1" latinLnBrk="0" hangingPunct="1">
+      <a:defRPr sz="1200" kern="1200">
+        <a:solidFill>
+          <a:schemeClr val="tx1"/>
+        </a:solidFill>
+        <a:latin typeface="+mn-lt"/>
+        <a:ea typeface="+mn-ea"/>
+        <a:cs typeface="+mn-cs"/>
+      </a:defRPr>
+    </a:lvl4pPr>
+    <a:lvl5pPr marL="1828800" algn="l" defTabSz="457200" rtl="0" eaLnBrk="1" latinLnBrk="0" hangingPunct="1">
+      <a:defRPr sz="1200" kern="1200">
+        <a:solidFill>
+          <a:schemeClr val="tx1"/>
+        </a:solidFill>
+        <a:latin typeface="+mn-lt"/>
+        <a:ea typeface="+mn-ea"/>
+        <a:cs typeface="+mn-cs"/>
+      </a:defRPr>
+    </a:lvl5pPr>
+    <a:lvl6pPr marL="2286000" algn="l" defTabSz="457200" rtl="0" eaLnBrk="1" latinLnBrk="0" hangingPunct="1">
+      <a:defRPr sz="1200" kern="1200">
+        <a:solidFill>
+          <a:schemeClr val="tx1"/>
+        </a:solidFill>
+        <a:latin typeface="+mn-lt"/>
+        <a:ea typeface="+mn-ea"/>
+        <a:cs typeface="+mn-cs"/>
+      </a:defRPr>
+    </a:lvl6pPr>
+    <a:lvl7pPr marL="2743200" algn="l" defTabSz="457200" rtl="0" eaLnBrk="1" latinLnBrk="0" hangingPunct="1">
+      <a:defRPr sz="1200" kern="1200">
+        <a:solidFill>
+          <a:schemeClr val="tx1"/>
+        </a:solidFill>
+        <a:latin typeface="+mn-lt"/>
+        <a:ea typeface="+mn-ea"/>
+        <a:cs typeface="+mn-cs"/>
+      </a:defRPr>
+    </a:lvl7pPr>
+    <a:lvl8pPr marL="3200400" algn="l" defTabSz="457200" rtl="0" eaLnBrk="1" latinLnBrk="0" hangingPunct="1">
+      <a:defRPr sz="1200" kern="1200">
+        <a:solidFill>
+          <a:schemeClr val="tx1"/>
+        </a:solidFill>
+        <a:latin typeface="+mn-lt"/>
+        <a:ea typeface="+mn-ea"/>
+        <a:cs typeface="+mn-cs"/>
+      </a:defRPr>
+    </a:lvl8pPr>
+    <a:lvl9pPr marL="3657600" algn="l" defTabSz="457200" rtl="0" eaLnBrk="1" latinLnBrk="0" hangingPunct="1">
+      <a:defRPr sz="1200" kern="1200">
+        <a:solidFill>
+          <a:schemeClr val="tx1"/>
+        </a:solidFill>
+        <a:latin typeface="+mn-lt"/>
+        <a:ea typeface="+mn-ea"/>
+        <a:cs typeface="+mn-cs"/>
+      </a:defRPr>
+    </a:lvl9pPr>
+  </p:notesStyle>
+</p:notesMaster>
+</file>
+
+<file path=ppt/notesSlides/notesSlide1.xml><?xml version="1.0" encoding="utf-8"?>
+<p:notes xmlns:a="http://schemas.openxmlformats.org/drawingml/2006/main" xmlns:p="http://schemas.openxmlformats.org/presentationml/2006/main" xmlns:r="http://schemas.openxmlformats.org/officeDocument/2006/relationships">
+  <p:cSld>
+    <p:spTree>
+      <p:nvGrpSpPr>
+        <p:cNvPr id="1" name=""/>
+        <p:cNvGrpSpPr/>
+        <p:nvPr/>
+      </p:nvGrpSpPr>
+      <p:grpSpPr>
+        <a:xfrm>
+          <a:off x="0" y="0"/>
+          <a:ext cx="0" cy="0"/>
+          <a:chOff x="0" y="0"/>
+          <a:chExt cx="0" cy="0"/>
+        </a:xfrm>
+      </p:grpSpPr>
+      <p:sp>
+        <p:nvSpPr>
+          <p:cNvPr id="2" name="Slide Image Placeholder 1"/>
+          <p:cNvSpPr>
+            <a:spLocks noGrp="1"/>
+          </p:cNvSpPr>
+          <p:nvPr>
+            <p:ph type="sldImg" idx="2"/>
+          </p:nvPr>
+        </p:nvSpPr>
+        <p:spPr/>
+      </p:sp>
+      <p:sp>
+        <p:nvSpPr>
+          <p:cNvPr id="3" name="Notes Placeholder 2"/>
+          <p:cNvSpPr>
+            <a:spLocks noGrp="1"/>
+          </p:cNvSpPr>
+          <p:nvPr>
+            <p:ph type="body" idx="3" sz="quarter"/>
+          </p:nvPr>
+        </p:nvSpPr>
+        <p:spPr/>
+        <p:txBody>
+          <a:bodyPr/>
+          <a:lstStyle/>
+          <a:p>
+            <a:r>
+              <a:t>Toda la familia cuelga de Throwable, que se divide en Error (fallas de la maquina virtual, como quedarse sin memoria, que no debemos atrapar) y Exception (fallas del programa o del entorno, que si podemos atender).</a:t>
+            </a:r>
+          </a:p>
+        </p:txBody>
+      </p:sp>
+      <p:sp>
+        <p:nvSpPr>
+          <p:cNvPr id="4" name="Slide Number Placeholder 3"/>
+          <p:cNvSpPr>
+            <a:spLocks noGrp="1"/>
+          </p:cNvSpPr>
+          <p:nvPr>
+            <p:ph type="sldNum" idx="5" sz="quarter"/>
+          </p:nvPr>
+        </p:nvSpPr>
+        <p:spPr/>
+      </p:sp>
+    </p:spTree>
+  </p:cSld>
+  <p:clrMapOvr>
+    <a:masterClrMapping/>
+  </p:clrMapOvr>
+</p:notes>
+</file>
+
+<file path=ppt/notesSlides/notesSlide2.xml><?xml version="1.0" encoding="utf-8"?>
+<p:notes xmlns:a="http://schemas.openxmlformats.org/drawingml/2006/main" xmlns:p="http://schemas.openxmlformats.org/presentationml/2006/main" xmlns:r="http://schemas.openxmlformats.org/officeDocument/2006/relationships">
+  <p:cSld>
+    <p:spTree>
+      <p:nvGrpSpPr>
+        <p:cNvPr id="1" name=""/>
+        <p:cNvGrpSpPr/>
+        <p:nvPr/>
+      </p:nvGrpSpPr>
+      <p:grpSpPr>
+        <a:xfrm>
+          <a:off x="0" y="0"/>
+          <a:ext cx="0" cy="0"/>
+          <a:chOff x="0" y="0"/>
+          <a:chExt cx="0" cy="0"/>
+        </a:xfrm>
+      </p:grpSpPr>
+      <p:sp>
+        <p:nvSpPr>
+          <p:cNvPr id="2" name="Slide Image Placeholder 1"/>
+          <p:cNvSpPr>
+            <a:spLocks noGrp="1"/>
+          </p:cNvSpPr>
+          <p:nvPr>
+            <p:ph type="sldImg" idx="2"/>
+          </p:nvPr>
+        </p:nvSpPr>
+        <p:spPr/>
+      </p:sp>
+      <p:sp>
+        <p:nvSpPr>
+          <p:cNvPr id="3" name="Notes Placeholder 2"/>
+          <p:cNvSpPr>
+            <a:spLocks noGrp="1"/>
+          </p:cNvSpPr>
+          <p:nvPr>
+            <p:ph type="body" idx="3" sz="quarter"/>
+          </p:nvPr>
+        </p:nvSpPr>
+        <p:spPr/>
+        <p:txBody>
+          <a:bodyPr/>
+          <a:lstStyle/>
+          <a:p>
+            <a:r>
+              <a:t>La estructura try-catch-finally tiene una anatomia que conviene explicar despacio.</a:t>
+            </a:r>
+          </a:p>
+          <a:p/>
+          <a:p>
+            <a:r>
+              <a:t>En VetCare esto significa que si el CSV esta corrupto a la mitad, el archivo igual se cierra y la aplicacion sigue viva con las mascotas que alcanzo a leer.</a:t>
+            </a:r>
+          </a:p>
+        </p:txBody>
+      </p:sp>
+      <p:sp>
+        <p:nvSpPr>
+          <p:cNvPr id="4" name="Slide Number Placeholder 3"/>
+          <p:cNvSpPr>
+            <a:spLocks noGrp="1"/>
+          </p:cNvSpPr>
+          <p:nvPr>
+            <p:ph type="sldNum" idx="5" sz="quarter"/>
+          </p:nvPr>
+        </p:nvSpPr>
+        <p:spPr/>
+      </p:sp>
+    </p:spTree>
+  </p:cSld>
+  <p:clrMapOvr>
+    <a:masterClrMapping/>
+  </p:clrMapOvr>
+</p:notes>
+</file>
+
+<file path=ppt/notesSlides/notesSlide3.xml><?xml version="1.0" encoding="utf-8"?>
+<p:notes xmlns:a="http://schemas.openxmlformats.org/drawingml/2006/main" xmlns:p="http://schemas.openxmlformats.org/presentationml/2006/main" xmlns:r="http://schemas.openxmlformats.org/officeDocument/2006/relationships">
+  <p:cSld>
+    <p:spTree>
+      <p:nvGrpSpPr>
+        <p:cNvPr id="1" name=""/>
+        <p:cNvGrpSpPr/>
+        <p:nvPr/>
+      </p:nvGrpSpPr>
+      <p:grpSpPr>
+        <a:xfrm>
+          <a:off x="0" y="0"/>
+          <a:ext cx="0" cy="0"/>
+          <a:chOff x="0" y="0"/>
+          <a:chExt cx="0" cy="0"/>
+        </a:xfrm>
+      </p:grpSpPr>
+      <p:sp>
+        <p:nvSpPr>
+          <p:cNvPr id="2" name="Slide Image Placeholder 1"/>
+          <p:cNvSpPr>
+            <a:spLocks noGrp="1"/>
+          </p:cNvSpPr>
+          <p:nvPr>
+            <p:ph type="sldImg" idx="2"/>
+          </p:nvPr>
+        </p:nvSpPr>
+        <p:spPr/>
+      </p:sp>
+      <p:sp>
+        <p:nvSpPr>
+          <p:cNvPr id="3" name="Notes Placeholder 2"/>
+          <p:cNvSpPr>
+            <a:spLocks noGrp="1"/>
+          </p:cNvSpPr>
+          <p:nvPr>
+            <p:ph type="body" idx="3" sz="quarter"/>
+          </p:nvPr>
+        </p:nvSpPr>
+        <p:spPr/>
+        <p:txBody>
+          <a:bodyPr/>
+          <a:lstStyle/>
+          <a:p>
+            <a:r>
+              <a:t>throw y throws se parecen en el nombre y hacen cosas opuestas, y esa confusion es la que mas cuesta en el parcial. throw (sin s) es una instruccion que se ejecuta y lanza un objeto en ese instante: throw. throws (con s) es una advertencia escrita en la firma del metodo: public void setEdad(String texto) throws DatoInvalidoException, y significa 'yo no resuelvo esto, quien me llame vera que hace'.</a:t>
+            </a:r>
+          </a:p>
+          <a:p/>
+          <a:p>
+            <a:r>
+              <a:t>De ahi sale la regla de capas que usaremos en VetCare: las clases del dominio (Mascota, Dueno, Cita) validan y LANZAN, porque no saben si hay una ventana, una consola o un servidor al otro lado; la capa de interfaz (el JFrame o el menu de consola) CAPTURA y traduce ese error a un JOptionPane que el usuario entiende.</a:t>
+            </a:r>
+          </a:p>
+        </p:txBody>
+      </p:sp>
+      <p:sp>
+        <p:nvSpPr>
+          <p:cNvPr id="4" name="Slide Number Placeholder 3"/>
+          <p:cNvSpPr>
+            <a:spLocks noGrp="1"/>
+          </p:cNvSpPr>
+          <p:nvPr>
+            <p:ph type="sldNum" idx="5" sz="quarter"/>
+          </p:nvPr>
+        </p:nvSpPr>
+        <p:spPr/>
+      </p:sp>
+    </p:spTree>
+  </p:cSld>
+  <p:clrMapOvr>
+    <a:masterClrMapping/>
+  </p:clrMapOvr>
+</p:notes>
+</file>
+
+<file path=ppt/notesSlides/notesSlide4.xml><?xml version="1.0" encoding="utf-8"?>
+<p:notes xmlns:a="http://schemas.openxmlformats.org/drawingml/2006/main" xmlns:p="http://schemas.openxmlformats.org/presentationml/2006/main" xmlns:r="http://schemas.openxmlformats.org/officeDocument/2006/relationships">
+  <p:cSld>
+    <p:spTree>
+      <p:nvGrpSpPr>
+        <p:cNvPr id="1" name=""/>
+        <p:cNvGrpSpPr/>
+        <p:nvPr/>
+      </p:nvGrpSpPr>
+      <p:grpSpPr>
+        <a:xfrm>
+          <a:off x="0" y="0"/>
+          <a:ext cx="0" cy="0"/>
+          <a:chOff x="0" y="0"/>
+          <a:chExt cx="0" cy="0"/>
+        </a:xfrm>
+      </p:grpSpPr>
+      <p:sp>
+        <p:nvSpPr>
+          <p:cNvPr id="2" name="Slide Image Placeholder 1"/>
+          <p:cNvSpPr>
+            <a:spLocks noGrp="1"/>
+          </p:cNvSpPr>
+          <p:nvPr>
+            <p:ph type="sldImg" idx="2"/>
+          </p:nvPr>
+        </p:nvSpPr>
+        <p:spPr/>
+      </p:sp>
+      <p:sp>
+        <p:nvSpPr>
+          <p:cNvPr id="3" name="Notes Placeholder 2"/>
+          <p:cNvSpPr>
+            <a:spLocks noGrp="1"/>
+          </p:cNvSpPr>
+          <p:nvPr>
+            <p:ph type="body" idx="3" sz="quarter"/>
+          </p:nvPr>
+        </p:nvSpPr>
+        <p:spPr/>
+        <p:txBody>
+          <a:bodyPr/>
+          <a:lstStyle/>
+          <a:p>
+            <a:r>
+              <a:t>Y la mejor excepcion es la que no ocurre: validar antes de convertir (revisar null, aplicar trim, verificar isEmpty y comprobar el rango) evita el 80 por ciento de los try-catch de VetCare y hace que el codigo se lea como las reglas del negocio.</a:t>
+            </a:r>
+          </a:p>
+        </p:txBody>
+      </p:sp>
+      <p:sp>
+        <p:nvSpPr>
+          <p:cNvPr id="4" name="Slide Number Placeholder 3"/>
+          <p:cNvSpPr>
+            <a:spLocks noGrp="1"/>
+          </p:cNvSpPr>
+          <p:nvPr>
+            <p:ph type="sldNum" idx="5" sz="quarter"/>
+          </p:nvPr>
+        </p:nvSpPr>
+        <p:spPr/>
+      </p:sp>
+    </p:spTree>
+  </p:cSld>
+  <p:clrMapOvr>
+    <a:masterClrMapping/>
+  </p:clrMapOvr>
+</p:notes>
 </file>
 
 <file path=ppt/slideLayouts/slideLayout1.xml><?xml version="1.0" encoding="utf-8"?>
@@ -7920,7 +8556,7 @@
                 </a:solidFill>
                 <a:latin typeface="Calibri"/>
               </a:rPr>
-              <a:t>Encuadre de hoy · Objetivo del PI</a:t>
+              <a:t>Encuadre de hoy</a:t>
             </a:r>
           </a:p>
         </p:txBody>
@@ -7968,7 +8604,7 @@
                 </a:solidFill>
                 <a:latin typeface="Calibri"/>
               </a:rPr>
-              <a:t>Hoy avanzamos VetCare en:</a:t>
+              <a:t>Tema de hoy:</a:t>
             </a:r>
             <a:r>
               <a:rPr sz="2000" b="0" i="0">
@@ -7977,7 +8613,7 @@
                 </a:solidFill>
                 <a:latin typeface="Calibri"/>
               </a:rPr>
-              <a:t> El registro de mascotas de VetCare valida edad, peso e ID y avisa con un mensaje claro en lugar de cerrarse.</a:t>
+              <a:t> Control de excepciones · try-catch-finally — Que VetCare no se caiga porque escribieron 'tres' en la edad</a:t>
             </a:r>
           </a:p>
           <a:p>
@@ -8036,41 +8672,23 @@
                 </a:solidFill>
                 <a:latin typeface="Calibri"/>
               </a:rPr>
-              <a:t>–   </a:t>
-            </a:r>
-            <a:r>
-              <a:rPr sz="2000" b="1" i="0">
+              <a:t>–   Primero el concepto, despues el codigo que lo muestra y la demo en vivo.</a:t>
+            </a:r>
+          </a:p>
+          <a:p>
+            <a:pPr>
+              <a:spcAft>
+                <a:spcPts val="800"/>
+              </a:spcAft>
+            </a:pPr>
+            <a:r>
+              <a:rPr sz="2000" b="0" i="0">
                 <a:solidFill>
                   <a:srgbClr val="333333"/>
                 </a:solidFill>
                 <a:latin typeface="Calibri"/>
               </a:rPr>
-              <a:t>Entregable de hoy:</a:t>
-            </a:r>
-            <a:r>
-              <a:rPr sz="2000" b="0" i="0">
-                <a:solidFill>
-                  <a:srgbClr val="333333"/>
-                </a:solidFill>
-                <a:latin typeface="Calibri"/>
-              </a:rPr>
-              <a:t> Clase DatoInvalidoException mas los setters validados de Mascota y la carga del CSV con try-with-resources, con evidencia de cinco pruebas de entrada (cuatro malas y una valida), subido a la plataforma del curso.</a:t>
-            </a:r>
-          </a:p>
-          <a:p>
-            <a:pPr>
-              <a:spcAft>
-                <a:spcPts val="800"/>
-              </a:spcAft>
-            </a:pPr>
-            <a:r>
-              <a:rPr sz="2000" b="0" i="0">
-                <a:solidFill>
-                  <a:srgbClr val="333333"/>
-                </a:solidFill>
-                <a:latin typeface="Calibri"/>
-              </a:rPr>
-              <a:t>–   La teoria esta al servicio del producto: al salir, VetCare avanzo.</a:t>
+              <a:t>–   Todo con el mismo dominio: la clinica veterinaria Huellitas (VetCare).</a:t>
             </a:r>
           </a:p>
         </p:txBody>
@@ -14006,7 +14624,7 @@
                 </a:solidFill>
                 <a:latin typeface="Calibri"/>
               </a:rPr>
-              <a:t>Encuadre y repaso del avance</a:t>
+              <a:t>Encuadre y repaso de la clase anterior</a:t>
             </a:r>
           </a:p>
         </p:txBody>
@@ -14351,7 +14969,7 @@
                 </a:solidFill>
                 <a:latin typeface="Calibri"/>
               </a:rPr>
-              <a:t>Taller guiado = avance del PI</a:t>
+              <a:t>Practica (opcional, guia en la carpeta)</a:t>
             </a:r>
           </a:p>
         </p:txBody>
@@ -14466,7 +15084,7 @@
                 </a:solidFill>
                 <a:latin typeface="Calibri"/>
               </a:rPr>
-              <a:t>Criterios de exito y cierre</a:t>
+              <a:t>Repaso de conceptos y cierre</a:t>
             </a:r>
           </a:p>
         </p:txBody>
@@ -15481,3163 +16099,6 @@
         <p:spPr>
           <a:xfrm>
             <a:off x="0" y="0"/>
-            <a:ext cx="12191695" cy="960120"/>
-          </a:xfrm>
-          <a:prstGeom prst="rect">
-            <a:avLst/>
-          </a:prstGeom>
-          <a:solidFill>
-            <a:srgbClr val="095292"/>
-          </a:solidFill>
-          <a:ln>
-            <a:noFill/>
-          </a:ln>
-        </p:spPr>
-        <p:style>
-          <a:lnRef idx="1">
-            <a:schemeClr val="accent1"/>
-          </a:lnRef>
-          <a:fillRef idx="3">
-            <a:schemeClr val="accent1"/>
-          </a:fillRef>
-          <a:effectRef idx="2">
-            <a:schemeClr val="accent1"/>
-          </a:effectRef>
-          <a:fontRef idx="minor">
-            <a:schemeClr val="lt1"/>
-          </a:fontRef>
-        </p:style>
-        <p:txBody>
-          <a:bodyPr rtlCol="0" anchor="ctr"/>
-          <a:lstStyle/>
-          <a:p>
-            <a:pPr algn="ctr"/>
-          </a:p>
-        </p:txBody>
-      </p:sp>
-      <p:sp>
-        <p:nvSpPr>
-          <p:cNvPr id="3" name="Rectangle 2"/>
-          <p:cNvSpPr/>
-          <p:nvPr/>
-        </p:nvSpPr>
-        <p:spPr>
-          <a:xfrm>
-            <a:off x="0" y="960120"/>
-            <a:ext cx="12191695" cy="41148"/>
-          </a:xfrm>
-          <a:prstGeom prst="rect">
-            <a:avLst/>
-          </a:prstGeom>
-          <a:solidFill>
-            <a:srgbClr val="FFD000"/>
-          </a:solidFill>
-          <a:ln>
-            <a:noFill/>
-          </a:ln>
-        </p:spPr>
-        <p:style>
-          <a:lnRef idx="1">
-            <a:schemeClr val="accent1"/>
-          </a:lnRef>
-          <a:fillRef idx="3">
-            <a:schemeClr val="accent1"/>
-          </a:fillRef>
-          <a:effectRef idx="2">
-            <a:schemeClr val="accent1"/>
-          </a:effectRef>
-          <a:fontRef idx="minor">
-            <a:schemeClr val="lt1"/>
-          </a:fontRef>
-        </p:style>
-        <p:txBody>
-          <a:bodyPr rtlCol="0" anchor="ctr"/>
-          <a:lstStyle/>
-          <a:p>
-            <a:pPr algn="ctr"/>
-          </a:p>
-        </p:txBody>
-      </p:sp>
-      <p:sp>
-        <p:nvSpPr>
-          <p:cNvPr id="4" name="TextBox 3"/>
-          <p:cNvSpPr txBox="1"/>
-          <p:nvPr/>
-        </p:nvSpPr>
-        <p:spPr>
-          <a:xfrm>
-            <a:off x="457200" y="164592"/>
-            <a:ext cx="11277295" cy="502920"/>
-          </a:xfrm>
-          <a:prstGeom prst="rect">
-            <a:avLst/>
-          </a:prstGeom>
-          <a:noFill/>
-        </p:spPr>
-        <p:txBody>
-          <a:bodyPr wrap="square">
-            <a:spAutoFit/>
-          </a:bodyPr>
-          <a:lstStyle/>
-          <a:p>
-            <a:r>
-              <a:rPr sz="2600" b="1" i="0">
-                <a:solidFill>
-                  <a:srgbClr val="FFFFFF"/>
-                </a:solidFill>
-                <a:latin typeface="Calibri"/>
-              </a:rPr>
-              <a:t>Taller PI — por que importa</a:t>
-            </a:r>
-          </a:p>
-        </p:txBody>
-      </p:sp>
-      <p:sp>
-        <p:nvSpPr>
-          <p:cNvPr id="5" name="TextBox 4"/>
-          <p:cNvSpPr txBox="1"/>
-          <p:nvPr/>
-        </p:nvSpPr>
-        <p:spPr>
-          <a:xfrm>
-            <a:off x="457200" y="1170432"/>
-            <a:ext cx="11277295" cy="5230368"/>
-          </a:xfrm>
-          <a:prstGeom prst="rect">
-            <a:avLst/>
-          </a:prstGeom>
-          <a:noFill/>
-        </p:spPr>
-        <p:txBody>
-          <a:bodyPr wrap="square">
-            <a:spAutoFit/>
-          </a:bodyPr>
-          <a:lstStyle/>
-          <a:p>
-            <a:pPr>
-              <a:spcAft>
-                <a:spcPts val="800"/>
-              </a:spcAft>
-            </a:pPr>
-            <a:r>
-              <a:rPr sz="2000" b="0" i="0">
-                <a:solidFill>
-                  <a:srgbClr val="333333"/>
-                </a:solidFill>
-                <a:latin typeface="Calibri"/>
-              </a:rPr>
-              <a:t>–   </a:t>
-            </a:r>
-            <a:r>
-              <a:rPr sz="2000" b="1" i="0">
-                <a:solidFill>
-                  <a:srgbClr val="333333"/>
-                </a:solidFill>
-                <a:latin typeface="Calibri"/>
-              </a:rPr>
-              <a:t>Por que importa al PI:</a:t>
-            </a:r>
-            <a:r>
-              <a:rPr sz="2000" b="0" i="0">
-                <a:solidFill>
-                  <a:srgbClr val="333333"/>
-                </a:solidFill>
-                <a:latin typeface="Calibri"/>
-              </a:rPr>
-              <a:t> el requisito tecnico del Proyecto Integrador exige manejo de errores con try-catch, y el jurado lo comprueba de la forma mas simple: escribe basura en un campo y mira si la aplicacion aguanta.</a:t>
-            </a:r>
-          </a:p>
-          <a:p>
-            <a:pPr>
-              <a:spcAft>
-                <a:spcPts val="800"/>
-              </a:spcAft>
-            </a:pPr>
-            <a:r>
-              <a:rPr sz="2000" b="0" i="0">
-                <a:solidFill>
-                  <a:srgbClr val="333333"/>
-                </a:solidFill>
-                <a:latin typeface="Calibri"/>
-              </a:rPr>
-              <a:t>–   VetCare ya tiene clases, colecciones, ventanas y archivos; lo unico que falta para que sea usable por la secretaria de Huellitas es que un dato mal escrito no borre el trabajo de toda la manana.</a:t>
-            </a:r>
-          </a:p>
-          <a:p>
-            <a:pPr>
-              <a:spcAft>
-                <a:spcPts val="800"/>
-              </a:spcAft>
-            </a:pPr>
-            <a:r>
-              <a:rPr sz="2000" b="0" i="0">
-                <a:solidFill>
-                  <a:srgbClr val="333333"/>
-                </a:solidFill>
-                <a:latin typeface="Calibri"/>
-              </a:rPr>
-              <a:t>–   Todo lo que blindemos hoy es lo que permitira, en la clase 14, hacer una demo en vivo tranquila: hasta se puede provocar el error a proposito para mostrar la validacion como una fortaleza.</a:t>
-            </a:r>
-          </a:p>
-        </p:txBody>
-      </p:sp>
-      <p:sp>
-        <p:nvSpPr>
-          <p:cNvPr id="6" name="TextBox 5"/>
-          <p:cNvSpPr txBox="1"/>
-          <p:nvPr/>
-        </p:nvSpPr>
-        <p:spPr>
-          <a:xfrm>
-            <a:off x="11185855" y="6473952"/>
-            <a:ext cx="640080" cy="274320"/>
-          </a:xfrm>
-          <a:prstGeom prst="rect">
-            <a:avLst/>
-          </a:prstGeom>
-          <a:noFill/>
-        </p:spPr>
-        <p:txBody>
-          <a:bodyPr wrap="square">
-            <a:spAutoFit/>
-          </a:bodyPr>
-          <a:lstStyle/>
-          <a:p>
-            <a:pPr algn="r"/>
-            <a:r>
-              <a:rPr sz="1100" b="0" i="0">
-                <a:solidFill>
-                  <a:srgbClr val="666666"/>
-                </a:solidFill>
-                <a:latin typeface="Calibri"/>
-              </a:rPr>
-              <a:t>32</a:t>
-            </a:r>
-          </a:p>
-        </p:txBody>
-      </p:sp>
-    </p:spTree>
-  </p:cSld>
-  <p:clrMapOvr>
-    <a:masterClrMapping/>
-  </p:clrMapOvr>
-</p:sld>
-</file>
-
-<file path=ppt/slides/slide33.xml><?xml version="1.0" encoding="utf-8"?>
-<p:sld xmlns:a="http://schemas.openxmlformats.org/drawingml/2006/main" xmlns:p="http://schemas.openxmlformats.org/presentationml/2006/main" xmlns:r="http://schemas.openxmlformats.org/officeDocument/2006/relationships">
-  <p:cSld>
-    <p:bg>
-      <p:bgPr>
-        <a:solidFill>
-          <a:srgbClr val="FFFFFF"/>
-        </a:solidFill>
-        <a:effectLst/>
-      </p:bgPr>
-    </p:bg>
-    <p:spTree>
-      <p:nvGrpSpPr>
-        <p:cNvPr id="1" name=""/>
-        <p:cNvGrpSpPr/>
-        <p:nvPr/>
-      </p:nvGrpSpPr>
-      <p:grpSpPr/>
-      <p:sp>
-        <p:nvSpPr>
-          <p:cNvPr id="2" name="Rectangle 1"/>
-          <p:cNvSpPr/>
-          <p:nvPr/>
-        </p:nvSpPr>
-        <p:spPr>
-          <a:xfrm>
-            <a:off x="0" y="0"/>
-            <a:ext cx="12191695" cy="960120"/>
-          </a:xfrm>
-          <a:prstGeom prst="rect">
-            <a:avLst/>
-          </a:prstGeom>
-          <a:solidFill>
-            <a:srgbClr val="095292"/>
-          </a:solidFill>
-          <a:ln>
-            <a:noFill/>
-          </a:ln>
-        </p:spPr>
-        <p:style>
-          <a:lnRef idx="1">
-            <a:schemeClr val="accent1"/>
-          </a:lnRef>
-          <a:fillRef idx="3">
-            <a:schemeClr val="accent1"/>
-          </a:fillRef>
-          <a:effectRef idx="2">
-            <a:schemeClr val="accent1"/>
-          </a:effectRef>
-          <a:fontRef idx="minor">
-            <a:schemeClr val="lt1"/>
-          </a:fontRef>
-        </p:style>
-        <p:txBody>
-          <a:bodyPr rtlCol="0" anchor="ctr"/>
-          <a:lstStyle/>
-          <a:p>
-            <a:pPr algn="ctr"/>
-          </a:p>
-        </p:txBody>
-      </p:sp>
-      <p:sp>
-        <p:nvSpPr>
-          <p:cNvPr id="3" name="Rectangle 2"/>
-          <p:cNvSpPr/>
-          <p:nvPr/>
-        </p:nvSpPr>
-        <p:spPr>
-          <a:xfrm>
-            <a:off x="0" y="960120"/>
-            <a:ext cx="12191695" cy="41148"/>
-          </a:xfrm>
-          <a:prstGeom prst="rect">
-            <a:avLst/>
-          </a:prstGeom>
-          <a:solidFill>
-            <a:srgbClr val="FFD000"/>
-          </a:solidFill>
-          <a:ln>
-            <a:noFill/>
-          </a:ln>
-        </p:spPr>
-        <p:style>
-          <a:lnRef idx="1">
-            <a:schemeClr val="accent1"/>
-          </a:lnRef>
-          <a:fillRef idx="3">
-            <a:schemeClr val="accent1"/>
-          </a:fillRef>
-          <a:effectRef idx="2">
-            <a:schemeClr val="accent1"/>
-          </a:effectRef>
-          <a:fontRef idx="minor">
-            <a:schemeClr val="lt1"/>
-          </a:fontRef>
-        </p:style>
-        <p:txBody>
-          <a:bodyPr rtlCol="0" anchor="ctr"/>
-          <a:lstStyle/>
-          <a:p>
-            <a:pPr algn="ctr"/>
-          </a:p>
-        </p:txBody>
-      </p:sp>
-      <p:sp>
-        <p:nvSpPr>
-          <p:cNvPr id="4" name="TextBox 3"/>
-          <p:cNvSpPr txBox="1"/>
-          <p:nvPr/>
-        </p:nvSpPr>
-        <p:spPr>
-          <a:xfrm>
-            <a:off x="457200" y="164592"/>
-            <a:ext cx="11277295" cy="502920"/>
-          </a:xfrm>
-          <a:prstGeom prst="rect">
-            <a:avLst/>
-          </a:prstGeom>
-          <a:noFill/>
-        </p:spPr>
-        <p:txBody>
-          <a:bodyPr wrap="square">
-            <a:spAutoFit/>
-          </a:bodyPr>
-          <a:lstStyle/>
-          <a:p>
-            <a:r>
-              <a:rPr sz="2600" b="1" i="0">
-                <a:solidFill>
-                  <a:srgbClr val="FFFFFF"/>
-                </a:solidFill>
-                <a:latin typeface="Calibri"/>
-              </a:rPr>
-              <a:t>Taller PI — punto de partida</a:t>
-            </a:r>
-          </a:p>
-        </p:txBody>
-      </p:sp>
-      <p:sp>
-        <p:nvSpPr>
-          <p:cNvPr id="5" name="TextBox 4"/>
-          <p:cNvSpPr txBox="1"/>
-          <p:nvPr/>
-        </p:nvSpPr>
-        <p:spPr>
-          <a:xfrm>
-            <a:off x="457200" y="1170432"/>
-            <a:ext cx="11277295" cy="5230368"/>
-          </a:xfrm>
-          <a:prstGeom prst="rect">
-            <a:avLst/>
-          </a:prstGeom>
-          <a:noFill/>
-        </p:spPr>
-        <p:txBody>
-          <a:bodyPr wrap="square">
-            <a:spAutoFit/>
-          </a:bodyPr>
-          <a:lstStyle/>
-          <a:p>
-            <a:pPr>
-              <a:spcAft>
-                <a:spcPts val="800"/>
-              </a:spcAft>
-            </a:pPr>
-            <a:r>
-              <a:rPr sz="2000" b="0" i="0">
-                <a:solidFill>
-                  <a:srgbClr val="333333"/>
-                </a:solidFill>
-                <a:latin typeface="Calibri"/>
-              </a:rPr>
-              <a:t>–   El proyecto VetCare ya trae las clases Dueno, Mascota y Cita, un ArrayList&lt;Mascota&gt; cargado en memoria y el archivo datos/mascotas.csv con seis registros separados por punto y coma.</a:t>
-            </a:r>
-          </a:p>
-          <a:p>
-            <a:pPr>
-              <a:spcAft>
-                <a:spcPts val="800"/>
-              </a:spcAft>
-            </a:pPr>
-            <a:r>
-              <a:rPr sz="2000" b="0" i="0">
-                <a:solidFill>
-                  <a:srgbClr val="333333"/>
-                </a:solidFill>
-                <a:latin typeface="Calibri"/>
-              </a:rPr>
-              <a:t>–   El formulario de registro toma el texto del campo edad y hace Integer.parseInt directo, sin validar nada; hoy la aplicacion se cae con cualquier letra o campo vacio.</a:t>
-            </a:r>
-          </a:p>
-          <a:p>
-            <a:pPr>
-              <a:spcAft>
-                <a:spcPts val="800"/>
-              </a:spcAft>
-            </a:pPr>
-            <a:r>
-              <a:rPr sz="2000" b="0" i="0">
-                <a:solidFill>
-                  <a:srgbClr val="333333"/>
-                </a:solidFill>
-                <a:latin typeface="Calibri"/>
-              </a:rPr>
-              <a:t>–   En la carpeta datos hay tambien un archivo mascotas_danado.csv con una linea incompleta y una edad escrita como 'dos', para probar la carga tolerante a errores.</a:t>
-            </a:r>
-          </a:p>
-        </p:txBody>
-      </p:sp>
-      <p:sp>
-        <p:nvSpPr>
-          <p:cNvPr id="6" name="TextBox 5"/>
-          <p:cNvSpPr txBox="1"/>
-          <p:nvPr/>
-        </p:nvSpPr>
-        <p:spPr>
-          <a:xfrm>
-            <a:off x="11185855" y="6473952"/>
-            <a:ext cx="640080" cy="274320"/>
-          </a:xfrm>
-          <a:prstGeom prst="rect">
-            <a:avLst/>
-          </a:prstGeom>
-          <a:noFill/>
-        </p:spPr>
-        <p:txBody>
-          <a:bodyPr wrap="square">
-            <a:spAutoFit/>
-          </a:bodyPr>
-          <a:lstStyle/>
-          <a:p>
-            <a:pPr algn="r"/>
-            <a:r>
-              <a:rPr sz="1100" b="0" i="0">
-                <a:solidFill>
-                  <a:srgbClr val="666666"/>
-                </a:solidFill>
-                <a:latin typeface="Calibri"/>
-              </a:rPr>
-              <a:t>33</a:t>
-            </a:r>
-          </a:p>
-        </p:txBody>
-      </p:sp>
-    </p:spTree>
-  </p:cSld>
-  <p:clrMapOvr>
-    <a:masterClrMapping/>
-  </p:clrMapOvr>
-</p:sld>
-</file>
-
-<file path=ppt/slides/slide34.xml><?xml version="1.0" encoding="utf-8"?>
-<p:sld xmlns:a="http://schemas.openxmlformats.org/drawingml/2006/main" xmlns:p="http://schemas.openxmlformats.org/presentationml/2006/main" xmlns:r="http://schemas.openxmlformats.org/officeDocument/2006/relationships">
-  <p:cSld>
-    <p:bg>
-      <p:bgPr>
-        <a:solidFill>
-          <a:srgbClr val="FFFFFF"/>
-        </a:solidFill>
-        <a:effectLst/>
-      </p:bgPr>
-    </p:bg>
-    <p:spTree>
-      <p:nvGrpSpPr>
-        <p:cNvPr id="1" name=""/>
-        <p:cNvGrpSpPr/>
-        <p:nvPr/>
-      </p:nvGrpSpPr>
-      <p:grpSpPr/>
-      <p:sp>
-        <p:nvSpPr>
-          <p:cNvPr id="2" name="Rectangle 1"/>
-          <p:cNvSpPr/>
-          <p:nvPr/>
-        </p:nvSpPr>
-        <p:spPr>
-          <a:xfrm>
-            <a:off x="0" y="0"/>
-            <a:ext cx="12191695" cy="960120"/>
-          </a:xfrm>
-          <a:prstGeom prst="rect">
-            <a:avLst/>
-          </a:prstGeom>
-          <a:solidFill>
-            <a:srgbClr val="095292"/>
-          </a:solidFill>
-          <a:ln>
-            <a:noFill/>
-          </a:ln>
-        </p:spPr>
-        <p:style>
-          <a:lnRef idx="1">
-            <a:schemeClr val="accent1"/>
-          </a:lnRef>
-          <a:fillRef idx="3">
-            <a:schemeClr val="accent1"/>
-          </a:fillRef>
-          <a:effectRef idx="2">
-            <a:schemeClr val="accent1"/>
-          </a:effectRef>
-          <a:fontRef idx="minor">
-            <a:schemeClr val="lt1"/>
-          </a:fontRef>
-        </p:style>
-        <p:txBody>
-          <a:bodyPr rtlCol="0" anchor="ctr"/>
-          <a:lstStyle/>
-          <a:p>
-            <a:pPr algn="ctr"/>
-          </a:p>
-        </p:txBody>
-      </p:sp>
-      <p:sp>
-        <p:nvSpPr>
-          <p:cNvPr id="3" name="Rectangle 2"/>
-          <p:cNvSpPr/>
-          <p:nvPr/>
-        </p:nvSpPr>
-        <p:spPr>
-          <a:xfrm>
-            <a:off x="0" y="960120"/>
-            <a:ext cx="12191695" cy="41148"/>
-          </a:xfrm>
-          <a:prstGeom prst="rect">
-            <a:avLst/>
-          </a:prstGeom>
-          <a:solidFill>
-            <a:srgbClr val="FFD000"/>
-          </a:solidFill>
-          <a:ln>
-            <a:noFill/>
-          </a:ln>
-        </p:spPr>
-        <p:style>
-          <a:lnRef idx="1">
-            <a:schemeClr val="accent1"/>
-          </a:lnRef>
-          <a:fillRef idx="3">
-            <a:schemeClr val="accent1"/>
-          </a:fillRef>
-          <a:effectRef idx="2">
-            <a:schemeClr val="accent1"/>
-          </a:effectRef>
-          <a:fontRef idx="minor">
-            <a:schemeClr val="lt1"/>
-          </a:fontRef>
-        </p:style>
-        <p:txBody>
-          <a:bodyPr rtlCol="0" anchor="ctr"/>
-          <a:lstStyle/>
-          <a:p>
-            <a:pPr algn="ctr"/>
-          </a:p>
-        </p:txBody>
-      </p:sp>
-      <p:sp>
-        <p:nvSpPr>
-          <p:cNvPr id="4" name="TextBox 3"/>
-          <p:cNvSpPr txBox="1"/>
-          <p:nvPr/>
-        </p:nvSpPr>
-        <p:spPr>
-          <a:xfrm>
-            <a:off x="457200" y="164592"/>
-            <a:ext cx="11277295" cy="502920"/>
-          </a:xfrm>
-          <a:prstGeom prst="rect">
-            <a:avLst/>
-          </a:prstGeom>
-          <a:noFill/>
-        </p:spPr>
-        <p:txBody>
-          <a:bodyPr wrap="square">
-            <a:spAutoFit/>
-          </a:bodyPr>
-          <a:lstStyle/>
-          <a:p>
-            <a:r>
-              <a:rPr sz="2600" b="1" i="0">
-                <a:solidFill>
-                  <a:srgbClr val="FFFFFF"/>
-                </a:solidFill>
-                <a:latin typeface="Calibri"/>
-              </a:rPr>
-              <a:t>Taller PI — pasos guiados</a:t>
-            </a:r>
-          </a:p>
-        </p:txBody>
-      </p:sp>
-      <p:sp>
-        <p:nvSpPr>
-          <p:cNvPr id="5" name="Rounded Rectangle 4"/>
-          <p:cNvSpPr/>
-          <p:nvPr/>
-        </p:nvSpPr>
-        <p:spPr>
-          <a:xfrm>
-            <a:off x="457200" y="1234440"/>
-            <a:ext cx="11277295" cy="950976"/>
-          </a:xfrm>
-          <a:prstGeom prst="roundRect">
-            <a:avLst>
-              <a:gd name="adj" fmla="val 12000"/>
-            </a:avLst>
-          </a:prstGeom>
-          <a:solidFill>
-            <a:srgbClr val="F2F2F2"/>
-          </a:solidFill>
-          <a:ln>
-            <a:noFill/>
-          </a:ln>
-        </p:spPr>
-        <p:style>
-          <a:lnRef idx="1">
-            <a:schemeClr val="accent1"/>
-          </a:lnRef>
-          <a:fillRef idx="3">
-            <a:schemeClr val="accent1"/>
-          </a:fillRef>
-          <a:effectRef idx="2">
-            <a:schemeClr val="accent1"/>
-          </a:effectRef>
-          <a:fontRef idx="minor">
-            <a:schemeClr val="lt1"/>
-          </a:fontRef>
-        </p:style>
-        <p:txBody>
-          <a:bodyPr rtlCol="0" anchor="ctr"/>
-          <a:lstStyle/>
-          <a:p>
-            <a:pPr algn="ctr"/>
-          </a:p>
-        </p:txBody>
-      </p:sp>
-      <p:sp>
-        <p:nvSpPr>
-          <p:cNvPr id="6" name="Rounded Rectangle 5"/>
-          <p:cNvSpPr/>
-          <p:nvPr/>
-        </p:nvSpPr>
-        <p:spPr>
-          <a:xfrm>
-            <a:off x="594360" y="1490472"/>
-            <a:ext cx="438912" cy="438912"/>
-          </a:xfrm>
-          <a:prstGeom prst="roundRect">
-            <a:avLst>
-              <a:gd name="adj" fmla="val 12000"/>
-            </a:avLst>
-          </a:prstGeom>
-          <a:solidFill>
-            <a:srgbClr val="095292"/>
-          </a:solidFill>
-          <a:ln>
-            <a:noFill/>
-          </a:ln>
-        </p:spPr>
-        <p:style>
-          <a:lnRef idx="1">
-            <a:schemeClr val="accent1"/>
-          </a:lnRef>
-          <a:fillRef idx="3">
-            <a:schemeClr val="accent1"/>
-          </a:fillRef>
-          <a:effectRef idx="2">
-            <a:schemeClr val="accent1"/>
-          </a:effectRef>
-          <a:fontRef idx="minor">
-            <a:schemeClr val="lt1"/>
-          </a:fontRef>
-        </p:style>
-        <p:txBody>
-          <a:bodyPr rtlCol="0" anchor="ctr"/>
-          <a:lstStyle/>
-          <a:p>
-            <a:pPr algn="ctr"/>
-          </a:p>
-        </p:txBody>
-      </p:sp>
-      <p:sp>
-        <p:nvSpPr>
-          <p:cNvPr id="7" name="TextBox 6"/>
-          <p:cNvSpPr txBox="1"/>
-          <p:nvPr/>
-        </p:nvSpPr>
-        <p:spPr>
-          <a:xfrm>
-            <a:off x="594360" y="1490472"/>
-            <a:ext cx="438912" cy="438912"/>
-          </a:xfrm>
-          <a:prstGeom prst="rect">
-            <a:avLst/>
-          </a:prstGeom>
-          <a:noFill/>
-        </p:spPr>
-        <p:txBody>
-          <a:bodyPr wrap="square" anchor="ctr"/>
-          <a:lstStyle/>
-          <a:p>
-            <a:pPr algn="ctr"/>
-            <a:r>
-              <a:rPr sz="1600" b="1" i="0">
-                <a:solidFill>
-                  <a:srgbClr val="FFFFFF"/>
-                </a:solidFill>
-                <a:latin typeface="Calibri"/>
-              </a:rPr>
-              <a:t>1</a:t>
-            </a:r>
-          </a:p>
-        </p:txBody>
-      </p:sp>
-      <p:sp>
-        <p:nvSpPr>
-          <p:cNvPr id="8" name="TextBox 7"/>
-          <p:cNvSpPr txBox="1"/>
-          <p:nvPr/>
-        </p:nvSpPr>
-        <p:spPr>
-          <a:xfrm>
-            <a:off x="1188720" y="1325880"/>
-            <a:ext cx="10271455" cy="786384"/>
-          </a:xfrm>
-          <a:prstGeom prst="rect">
-            <a:avLst/>
-          </a:prstGeom>
-          <a:noFill/>
-        </p:spPr>
-        <p:txBody>
-          <a:bodyPr wrap="square" anchor="ctr"/>
-          <a:lstStyle/>
-          <a:p>
-            <a:r>
-              <a:rPr sz="1500" b="1" i="0">
-                <a:solidFill>
-                  <a:srgbClr val="095292"/>
-                </a:solidFill>
-                <a:latin typeface="Calibri"/>
-              </a:rPr>
-              <a:t>Paso 1. Abra el proyecto VetCare en VS Code, cree el paquete vetcare.excepciones y dentro la clase DatoInvalidoException que extienda Exception con un constructor que reciba el mensaje; compile y verifique que no hay errores.</a:t>
-            </a:r>
-          </a:p>
-        </p:txBody>
-      </p:sp>
-      <p:sp>
-        <p:nvSpPr>
-          <p:cNvPr id="9" name="Rounded Rectangle 8"/>
-          <p:cNvSpPr/>
-          <p:nvPr/>
-        </p:nvSpPr>
-        <p:spPr>
-          <a:xfrm>
-            <a:off x="457200" y="2276856"/>
-            <a:ext cx="11277295" cy="950976"/>
-          </a:xfrm>
-          <a:prstGeom prst="roundRect">
-            <a:avLst>
-              <a:gd name="adj" fmla="val 12000"/>
-            </a:avLst>
-          </a:prstGeom>
-          <a:solidFill>
-            <a:srgbClr val="E8F4FA"/>
-          </a:solidFill>
-          <a:ln>
-            <a:noFill/>
-          </a:ln>
-        </p:spPr>
-        <p:style>
-          <a:lnRef idx="1">
-            <a:schemeClr val="accent1"/>
-          </a:lnRef>
-          <a:fillRef idx="3">
-            <a:schemeClr val="accent1"/>
-          </a:fillRef>
-          <a:effectRef idx="2">
-            <a:schemeClr val="accent1"/>
-          </a:effectRef>
-          <a:fontRef idx="minor">
-            <a:schemeClr val="lt1"/>
-          </a:fontRef>
-        </p:style>
-        <p:txBody>
-          <a:bodyPr rtlCol="0" anchor="ctr"/>
-          <a:lstStyle/>
-          <a:p>
-            <a:pPr algn="ctr"/>
-          </a:p>
-        </p:txBody>
-      </p:sp>
-      <p:sp>
-        <p:nvSpPr>
-          <p:cNvPr id="10" name="Rounded Rectangle 9"/>
-          <p:cNvSpPr/>
-          <p:nvPr/>
-        </p:nvSpPr>
-        <p:spPr>
-          <a:xfrm>
-            <a:off x="594360" y="2532888"/>
-            <a:ext cx="438912" cy="438912"/>
-          </a:xfrm>
-          <a:prstGeom prst="roundRect">
-            <a:avLst>
-              <a:gd name="adj" fmla="val 12000"/>
-            </a:avLst>
-          </a:prstGeom>
-          <a:solidFill>
-            <a:srgbClr val="095292"/>
-          </a:solidFill>
-          <a:ln>
-            <a:noFill/>
-          </a:ln>
-        </p:spPr>
-        <p:style>
-          <a:lnRef idx="1">
-            <a:schemeClr val="accent1"/>
-          </a:lnRef>
-          <a:fillRef idx="3">
-            <a:schemeClr val="accent1"/>
-          </a:fillRef>
-          <a:effectRef idx="2">
-            <a:schemeClr val="accent1"/>
-          </a:effectRef>
-          <a:fontRef idx="minor">
-            <a:schemeClr val="lt1"/>
-          </a:fontRef>
-        </p:style>
-        <p:txBody>
-          <a:bodyPr rtlCol="0" anchor="ctr"/>
-          <a:lstStyle/>
-          <a:p>
-            <a:pPr algn="ctr"/>
-          </a:p>
-        </p:txBody>
-      </p:sp>
-      <p:sp>
-        <p:nvSpPr>
-          <p:cNvPr id="11" name="TextBox 10"/>
-          <p:cNvSpPr txBox="1"/>
-          <p:nvPr/>
-        </p:nvSpPr>
-        <p:spPr>
-          <a:xfrm>
-            <a:off x="594360" y="2532888"/>
-            <a:ext cx="438912" cy="438912"/>
-          </a:xfrm>
-          <a:prstGeom prst="rect">
-            <a:avLst/>
-          </a:prstGeom>
-          <a:noFill/>
-        </p:spPr>
-        <p:txBody>
-          <a:bodyPr wrap="square" anchor="ctr"/>
-          <a:lstStyle/>
-          <a:p>
-            <a:pPr algn="ctr"/>
-            <a:r>
-              <a:rPr sz="1600" b="1" i="0">
-                <a:solidFill>
-                  <a:srgbClr val="FFFFFF"/>
-                </a:solidFill>
-                <a:latin typeface="Calibri"/>
-              </a:rPr>
-              <a:t>2</a:t>
-            </a:r>
-          </a:p>
-        </p:txBody>
-      </p:sp>
-      <p:sp>
-        <p:nvSpPr>
-          <p:cNvPr id="12" name="TextBox 11"/>
-          <p:cNvSpPr txBox="1"/>
-          <p:nvPr/>
-        </p:nvSpPr>
-        <p:spPr>
-          <a:xfrm>
-            <a:off x="1188720" y="2368296"/>
-            <a:ext cx="10271455" cy="786384"/>
-          </a:xfrm>
-          <a:prstGeom prst="rect">
-            <a:avLst/>
-          </a:prstGeom>
-          <a:noFill/>
-        </p:spPr>
-        <p:txBody>
-          <a:bodyPr wrap="square" anchor="ctr"/>
-          <a:lstStyle/>
-          <a:p>
-            <a:r>
-              <a:rPr sz="1400" b="1" i="0">
-                <a:solidFill>
-                  <a:srgbClr val="095292"/>
-                </a:solidFill>
-                <a:latin typeface="Calibri"/>
-              </a:rPr>
-              <a:t>Paso 2. En la clase Mascota reemplace setEdad(int) por setEdad(String texto) throws DatoInvalidoException: rechace vacio, convierta con Integer.parseInt dentro de un try, atrape NumberFormatException y relance DatoInvalidoException con un mensaje de la clinica, y valide el rango 0 a 30; repita la idea en setPeso con Double.parseDouble y rango 0.1 a 120.</a:t>
-            </a:r>
-          </a:p>
-        </p:txBody>
-      </p:sp>
-      <p:sp>
-        <p:nvSpPr>
-          <p:cNvPr id="13" name="Rounded Rectangle 12"/>
-          <p:cNvSpPr/>
-          <p:nvPr/>
-        </p:nvSpPr>
-        <p:spPr>
-          <a:xfrm>
-            <a:off x="457200" y="3319272"/>
-            <a:ext cx="11277295" cy="950976"/>
-          </a:xfrm>
-          <a:prstGeom prst="roundRect">
-            <a:avLst>
-              <a:gd name="adj" fmla="val 12000"/>
-            </a:avLst>
-          </a:prstGeom>
-          <a:solidFill>
-            <a:srgbClr val="F2F2F2"/>
-          </a:solidFill>
-          <a:ln>
-            <a:noFill/>
-          </a:ln>
-        </p:spPr>
-        <p:style>
-          <a:lnRef idx="1">
-            <a:schemeClr val="accent1"/>
-          </a:lnRef>
-          <a:fillRef idx="3">
-            <a:schemeClr val="accent1"/>
-          </a:fillRef>
-          <a:effectRef idx="2">
-            <a:schemeClr val="accent1"/>
-          </a:effectRef>
-          <a:fontRef idx="minor">
-            <a:schemeClr val="lt1"/>
-          </a:fontRef>
-        </p:style>
-        <p:txBody>
-          <a:bodyPr rtlCol="0" anchor="ctr"/>
-          <a:lstStyle/>
-          <a:p>
-            <a:pPr algn="ctr"/>
-          </a:p>
-        </p:txBody>
-      </p:sp>
-      <p:sp>
-        <p:nvSpPr>
-          <p:cNvPr id="14" name="Rounded Rectangle 13"/>
-          <p:cNvSpPr/>
-          <p:nvPr/>
-        </p:nvSpPr>
-        <p:spPr>
-          <a:xfrm>
-            <a:off x="594360" y="3575304"/>
-            <a:ext cx="438912" cy="438912"/>
-          </a:xfrm>
-          <a:prstGeom prst="roundRect">
-            <a:avLst>
-              <a:gd name="adj" fmla="val 12000"/>
-            </a:avLst>
-          </a:prstGeom>
-          <a:solidFill>
-            <a:srgbClr val="095292"/>
-          </a:solidFill>
-          <a:ln>
-            <a:noFill/>
-          </a:ln>
-        </p:spPr>
-        <p:style>
-          <a:lnRef idx="1">
-            <a:schemeClr val="accent1"/>
-          </a:lnRef>
-          <a:fillRef idx="3">
-            <a:schemeClr val="accent1"/>
-          </a:fillRef>
-          <a:effectRef idx="2">
-            <a:schemeClr val="accent1"/>
-          </a:effectRef>
-          <a:fontRef idx="minor">
-            <a:schemeClr val="lt1"/>
-          </a:fontRef>
-        </p:style>
-        <p:txBody>
-          <a:bodyPr rtlCol="0" anchor="ctr"/>
-          <a:lstStyle/>
-          <a:p>
-            <a:pPr algn="ctr"/>
-          </a:p>
-        </p:txBody>
-      </p:sp>
-      <p:sp>
-        <p:nvSpPr>
-          <p:cNvPr id="15" name="TextBox 14"/>
-          <p:cNvSpPr txBox="1"/>
-          <p:nvPr/>
-        </p:nvSpPr>
-        <p:spPr>
-          <a:xfrm>
-            <a:off x="594360" y="3575304"/>
-            <a:ext cx="438912" cy="438912"/>
-          </a:xfrm>
-          <a:prstGeom prst="rect">
-            <a:avLst/>
-          </a:prstGeom>
-          <a:noFill/>
-        </p:spPr>
-        <p:txBody>
-          <a:bodyPr wrap="square" anchor="ctr"/>
-          <a:lstStyle/>
-          <a:p>
-            <a:pPr algn="ctr"/>
-            <a:r>
-              <a:rPr sz="1600" b="1" i="0">
-                <a:solidFill>
-                  <a:srgbClr val="FFFFFF"/>
-                </a:solidFill>
-                <a:latin typeface="Calibri"/>
-              </a:rPr>
-              <a:t>3</a:t>
-            </a:r>
-          </a:p>
-        </p:txBody>
-      </p:sp>
-      <p:sp>
-        <p:nvSpPr>
-          <p:cNvPr id="16" name="TextBox 15"/>
-          <p:cNvSpPr txBox="1"/>
-          <p:nvPr/>
-        </p:nvSpPr>
-        <p:spPr>
-          <a:xfrm>
-            <a:off x="1188720" y="3410712"/>
-            <a:ext cx="10271455" cy="786384"/>
-          </a:xfrm>
-          <a:prstGeom prst="rect">
-            <a:avLst/>
-          </a:prstGeom>
-          <a:noFill/>
-        </p:spPr>
-        <p:txBody>
-          <a:bodyPr wrap="square" anchor="ctr"/>
-          <a:lstStyle/>
-          <a:p>
-            <a:r>
-              <a:rPr sz="1400" b="1" i="0">
-                <a:solidFill>
-                  <a:srgbClr val="095292"/>
-                </a:solidFill>
-                <a:latin typeface="Calibri"/>
-              </a:rPr>
-              <a:t>Paso 3. En el formulario de registro (JFrame o menu de consola) envuelva las llamadas a los setters en un try-catch que muestre JOptionPane.showMessageDialog con e.getMessage(), devuelva el foco al campo culpable con requestFocus() y NO agregue la mascota a la lista cuando hubo error.</a:t>
-            </a:r>
-          </a:p>
-        </p:txBody>
-      </p:sp>
-      <p:sp>
-        <p:nvSpPr>
-          <p:cNvPr id="17" name="Rounded Rectangle 16"/>
-          <p:cNvSpPr/>
-          <p:nvPr/>
-        </p:nvSpPr>
-        <p:spPr>
-          <a:xfrm>
-            <a:off x="457200" y="4361688"/>
-            <a:ext cx="11277295" cy="950976"/>
-          </a:xfrm>
-          <a:prstGeom prst="roundRect">
-            <a:avLst>
-              <a:gd name="adj" fmla="val 12000"/>
-            </a:avLst>
-          </a:prstGeom>
-          <a:solidFill>
-            <a:srgbClr val="E8F4FA"/>
-          </a:solidFill>
-          <a:ln>
-            <a:noFill/>
-          </a:ln>
-        </p:spPr>
-        <p:style>
-          <a:lnRef idx="1">
-            <a:schemeClr val="accent1"/>
-          </a:lnRef>
-          <a:fillRef idx="3">
-            <a:schemeClr val="accent1"/>
-          </a:fillRef>
-          <a:effectRef idx="2">
-            <a:schemeClr val="accent1"/>
-          </a:effectRef>
-          <a:fontRef idx="minor">
-            <a:schemeClr val="lt1"/>
-          </a:fontRef>
-        </p:style>
-        <p:txBody>
-          <a:bodyPr rtlCol="0" anchor="ctr"/>
-          <a:lstStyle/>
-          <a:p>
-            <a:pPr algn="ctr"/>
-          </a:p>
-        </p:txBody>
-      </p:sp>
-      <p:sp>
-        <p:nvSpPr>
-          <p:cNvPr id="18" name="Rounded Rectangle 17"/>
-          <p:cNvSpPr/>
-          <p:nvPr/>
-        </p:nvSpPr>
-        <p:spPr>
-          <a:xfrm>
-            <a:off x="594360" y="4617720"/>
-            <a:ext cx="438912" cy="438912"/>
-          </a:xfrm>
-          <a:prstGeom prst="roundRect">
-            <a:avLst>
-              <a:gd name="adj" fmla="val 12000"/>
-            </a:avLst>
-          </a:prstGeom>
-          <a:solidFill>
-            <a:srgbClr val="095292"/>
-          </a:solidFill>
-          <a:ln>
-            <a:noFill/>
-          </a:ln>
-        </p:spPr>
-        <p:style>
-          <a:lnRef idx="1">
-            <a:schemeClr val="accent1"/>
-          </a:lnRef>
-          <a:fillRef idx="3">
-            <a:schemeClr val="accent1"/>
-          </a:fillRef>
-          <a:effectRef idx="2">
-            <a:schemeClr val="accent1"/>
-          </a:effectRef>
-          <a:fontRef idx="minor">
-            <a:schemeClr val="lt1"/>
-          </a:fontRef>
-        </p:style>
-        <p:txBody>
-          <a:bodyPr rtlCol="0" anchor="ctr"/>
-          <a:lstStyle/>
-          <a:p>
-            <a:pPr algn="ctr"/>
-          </a:p>
-        </p:txBody>
-      </p:sp>
-      <p:sp>
-        <p:nvSpPr>
-          <p:cNvPr id="19" name="TextBox 18"/>
-          <p:cNvSpPr txBox="1"/>
-          <p:nvPr/>
-        </p:nvSpPr>
-        <p:spPr>
-          <a:xfrm>
-            <a:off x="594360" y="4617720"/>
-            <a:ext cx="438912" cy="438912"/>
-          </a:xfrm>
-          <a:prstGeom prst="rect">
-            <a:avLst/>
-          </a:prstGeom>
-          <a:noFill/>
-        </p:spPr>
-        <p:txBody>
-          <a:bodyPr wrap="square" anchor="ctr"/>
-          <a:lstStyle/>
-          <a:p>
-            <a:pPr algn="ctr"/>
-            <a:r>
-              <a:rPr sz="1600" b="1" i="0">
-                <a:solidFill>
-                  <a:srgbClr val="FFFFFF"/>
-                </a:solidFill>
-                <a:latin typeface="Calibri"/>
-              </a:rPr>
-              <a:t>4</a:t>
-            </a:r>
-          </a:p>
-        </p:txBody>
-      </p:sp>
-      <p:sp>
-        <p:nvSpPr>
-          <p:cNvPr id="20" name="TextBox 19"/>
-          <p:cNvSpPr txBox="1"/>
-          <p:nvPr/>
-        </p:nvSpPr>
-        <p:spPr>
-          <a:xfrm>
-            <a:off x="1188720" y="4453128"/>
-            <a:ext cx="10271455" cy="786384"/>
-          </a:xfrm>
-          <a:prstGeom prst="rect">
-            <a:avLst/>
-          </a:prstGeom>
-          <a:noFill/>
-        </p:spPr>
-        <p:txBody>
-          <a:bodyPr wrap="square" anchor="ctr"/>
-          <a:lstStyle/>
-          <a:p>
-            <a:r>
-              <a:rPr sz="1400" b="1" i="0">
-                <a:solidFill>
-                  <a:srgbClr val="095292"/>
-                </a:solidFill>
-                <a:latin typeface="Calibri"/>
-              </a:rPr>
-              <a:t>Paso 4. Cambie la carga de datos/mascotas.csv a try-with-resources con dos catch separados: FileNotFoundException, que arranca con lista vacia e informa que es la primera ejecucion, e IOException, que muestra el problema real; las lineas del CSV con datos malos se omiten con un aviso, sin tumbar la carga completa.</a:t>
-            </a:r>
-          </a:p>
-        </p:txBody>
-      </p:sp>
-      <p:sp>
-        <p:nvSpPr>
-          <p:cNvPr id="21" name="Rounded Rectangle 20"/>
-          <p:cNvSpPr/>
-          <p:nvPr/>
-        </p:nvSpPr>
-        <p:spPr>
-          <a:xfrm>
-            <a:off x="457200" y="5404104"/>
-            <a:ext cx="11277295" cy="950976"/>
-          </a:xfrm>
-          <a:prstGeom prst="roundRect">
-            <a:avLst>
-              <a:gd name="adj" fmla="val 12000"/>
-            </a:avLst>
-          </a:prstGeom>
-          <a:solidFill>
-            <a:srgbClr val="F2F2F2"/>
-          </a:solidFill>
-          <a:ln>
-            <a:noFill/>
-          </a:ln>
-        </p:spPr>
-        <p:style>
-          <a:lnRef idx="1">
-            <a:schemeClr val="accent1"/>
-          </a:lnRef>
-          <a:fillRef idx="3">
-            <a:schemeClr val="accent1"/>
-          </a:fillRef>
-          <a:effectRef idx="2">
-            <a:schemeClr val="accent1"/>
-          </a:effectRef>
-          <a:fontRef idx="minor">
-            <a:schemeClr val="lt1"/>
-          </a:fontRef>
-        </p:style>
-        <p:txBody>
-          <a:bodyPr rtlCol="0" anchor="ctr"/>
-          <a:lstStyle/>
-          <a:p>
-            <a:pPr algn="ctr"/>
-          </a:p>
-        </p:txBody>
-      </p:sp>
-      <p:sp>
-        <p:nvSpPr>
-          <p:cNvPr id="22" name="Rounded Rectangle 21"/>
-          <p:cNvSpPr/>
-          <p:nvPr/>
-        </p:nvSpPr>
-        <p:spPr>
-          <a:xfrm>
-            <a:off x="594360" y="5660136"/>
-            <a:ext cx="438912" cy="438912"/>
-          </a:xfrm>
-          <a:prstGeom prst="roundRect">
-            <a:avLst>
-              <a:gd name="adj" fmla="val 12000"/>
-            </a:avLst>
-          </a:prstGeom>
-          <a:solidFill>
-            <a:srgbClr val="095292"/>
-          </a:solidFill>
-          <a:ln>
-            <a:noFill/>
-          </a:ln>
-        </p:spPr>
-        <p:style>
-          <a:lnRef idx="1">
-            <a:schemeClr val="accent1"/>
-          </a:lnRef>
-          <a:fillRef idx="3">
-            <a:schemeClr val="accent1"/>
-          </a:fillRef>
-          <a:effectRef idx="2">
-            <a:schemeClr val="accent1"/>
-          </a:effectRef>
-          <a:fontRef idx="minor">
-            <a:schemeClr val="lt1"/>
-          </a:fontRef>
-        </p:style>
-        <p:txBody>
-          <a:bodyPr rtlCol="0" anchor="ctr"/>
-          <a:lstStyle/>
-          <a:p>
-            <a:pPr algn="ctr"/>
-          </a:p>
-        </p:txBody>
-      </p:sp>
-      <p:sp>
-        <p:nvSpPr>
-          <p:cNvPr id="23" name="TextBox 22"/>
-          <p:cNvSpPr txBox="1"/>
-          <p:nvPr/>
-        </p:nvSpPr>
-        <p:spPr>
-          <a:xfrm>
-            <a:off x="594360" y="5660136"/>
-            <a:ext cx="438912" cy="438912"/>
-          </a:xfrm>
-          <a:prstGeom prst="rect">
-            <a:avLst/>
-          </a:prstGeom>
-          <a:noFill/>
-        </p:spPr>
-        <p:txBody>
-          <a:bodyPr wrap="square" anchor="ctr"/>
-          <a:lstStyle/>
-          <a:p>
-            <a:pPr algn="ctr"/>
-            <a:r>
-              <a:rPr sz="1600" b="1" i="0">
-                <a:solidFill>
-                  <a:srgbClr val="FFFFFF"/>
-                </a:solidFill>
-                <a:latin typeface="Calibri"/>
-              </a:rPr>
-              <a:t>5</a:t>
-            </a:r>
-          </a:p>
-        </p:txBody>
-      </p:sp>
-      <p:sp>
-        <p:nvSpPr>
-          <p:cNvPr id="24" name="TextBox 23"/>
-          <p:cNvSpPr txBox="1"/>
-          <p:nvPr/>
-        </p:nvSpPr>
-        <p:spPr>
-          <a:xfrm>
-            <a:off x="1188720" y="5495544"/>
-            <a:ext cx="10271455" cy="786384"/>
-          </a:xfrm>
-          <a:prstGeom prst="rect">
-            <a:avLst/>
-          </a:prstGeom>
-          <a:noFill/>
-        </p:spPr>
-        <p:txBody>
-          <a:bodyPr wrap="square" anchor="ctr"/>
-          <a:lstStyle/>
-          <a:p>
-            <a:r>
-              <a:rPr sz="1400" b="1" i="0">
-                <a:solidFill>
-                  <a:srgbClr val="095292"/>
-                </a:solidFill>
-                <a:latin typeface="Calibri"/>
-              </a:rPr>
-              <a:t>Paso 5. Pruebe el formulario con estas cinco entradas de edad: vacio, 'tres', '-2', '150' y '4'; capture la pantalla de cada caso, arme una tabla de evidencia con entrada, mensaje mostrado y estado de la aplicacion, y suba el codigo mas la tabla a la plataforma del curso.</a:t>
-            </a:r>
-          </a:p>
-        </p:txBody>
-      </p:sp>
-      <p:sp>
-        <p:nvSpPr>
-          <p:cNvPr id="25" name="TextBox 24"/>
-          <p:cNvSpPr txBox="1"/>
-          <p:nvPr/>
-        </p:nvSpPr>
-        <p:spPr>
-          <a:xfrm>
-            <a:off x="11185855" y="6473952"/>
-            <a:ext cx="640080" cy="274320"/>
-          </a:xfrm>
-          <a:prstGeom prst="rect">
-            <a:avLst/>
-          </a:prstGeom>
-          <a:noFill/>
-        </p:spPr>
-        <p:txBody>
-          <a:bodyPr wrap="square">
-            <a:spAutoFit/>
-          </a:bodyPr>
-          <a:lstStyle/>
-          <a:p>
-            <a:pPr algn="r"/>
-            <a:r>
-              <a:rPr sz="1100" b="0" i="0">
-                <a:solidFill>
-                  <a:srgbClr val="666666"/>
-                </a:solidFill>
-                <a:latin typeface="Calibri"/>
-              </a:rPr>
-              <a:t>34</a:t>
-            </a:r>
-          </a:p>
-        </p:txBody>
-      </p:sp>
-    </p:spTree>
-  </p:cSld>
-  <p:clrMapOvr>
-    <a:masterClrMapping/>
-  </p:clrMapOvr>
-</p:sld>
-</file>
-
-<file path=ppt/slides/slide35.xml><?xml version="1.0" encoding="utf-8"?>
-<p:sld xmlns:a="http://schemas.openxmlformats.org/drawingml/2006/main" xmlns:p="http://schemas.openxmlformats.org/presentationml/2006/main" xmlns:r="http://schemas.openxmlformats.org/officeDocument/2006/relationships">
-  <p:cSld>
-    <p:bg>
-      <p:bgPr>
-        <a:solidFill>
-          <a:srgbClr val="FFFFFF"/>
-        </a:solidFill>
-        <a:effectLst/>
-      </p:bgPr>
-    </p:bg>
-    <p:spTree>
-      <p:nvGrpSpPr>
-        <p:cNvPr id="1" name=""/>
-        <p:cNvGrpSpPr/>
-        <p:nvPr/>
-      </p:nvGrpSpPr>
-      <p:grpSpPr/>
-      <p:sp>
-        <p:nvSpPr>
-          <p:cNvPr id="2" name="Rectangle 1"/>
-          <p:cNvSpPr/>
-          <p:nvPr/>
-        </p:nvSpPr>
-        <p:spPr>
-          <a:xfrm>
-            <a:off x="0" y="0"/>
-            <a:ext cx="12191695" cy="960120"/>
-          </a:xfrm>
-          <a:prstGeom prst="rect">
-            <a:avLst/>
-          </a:prstGeom>
-          <a:solidFill>
-            <a:srgbClr val="095292"/>
-          </a:solidFill>
-          <a:ln>
-            <a:noFill/>
-          </a:ln>
-        </p:spPr>
-        <p:style>
-          <a:lnRef idx="1">
-            <a:schemeClr val="accent1"/>
-          </a:lnRef>
-          <a:fillRef idx="3">
-            <a:schemeClr val="accent1"/>
-          </a:fillRef>
-          <a:effectRef idx="2">
-            <a:schemeClr val="accent1"/>
-          </a:effectRef>
-          <a:fontRef idx="minor">
-            <a:schemeClr val="lt1"/>
-          </a:fontRef>
-        </p:style>
-        <p:txBody>
-          <a:bodyPr rtlCol="0" anchor="ctr"/>
-          <a:lstStyle/>
-          <a:p>
-            <a:pPr algn="ctr"/>
-          </a:p>
-        </p:txBody>
-      </p:sp>
-      <p:sp>
-        <p:nvSpPr>
-          <p:cNvPr id="3" name="Rectangle 2"/>
-          <p:cNvSpPr/>
-          <p:nvPr/>
-        </p:nvSpPr>
-        <p:spPr>
-          <a:xfrm>
-            <a:off x="0" y="960120"/>
-            <a:ext cx="12191695" cy="41148"/>
-          </a:xfrm>
-          <a:prstGeom prst="rect">
-            <a:avLst/>
-          </a:prstGeom>
-          <a:solidFill>
-            <a:srgbClr val="FFD000"/>
-          </a:solidFill>
-          <a:ln>
-            <a:noFill/>
-          </a:ln>
-        </p:spPr>
-        <p:style>
-          <a:lnRef idx="1">
-            <a:schemeClr val="accent1"/>
-          </a:lnRef>
-          <a:fillRef idx="3">
-            <a:schemeClr val="accent1"/>
-          </a:fillRef>
-          <a:effectRef idx="2">
-            <a:schemeClr val="accent1"/>
-          </a:effectRef>
-          <a:fontRef idx="minor">
-            <a:schemeClr val="lt1"/>
-          </a:fontRef>
-        </p:style>
-        <p:txBody>
-          <a:bodyPr rtlCol="0" anchor="ctr"/>
-          <a:lstStyle/>
-          <a:p>
-            <a:pPr algn="ctr"/>
-          </a:p>
-        </p:txBody>
-      </p:sp>
-      <p:sp>
-        <p:nvSpPr>
-          <p:cNvPr id="4" name="TextBox 3"/>
-          <p:cNvSpPr txBox="1"/>
-          <p:nvPr/>
-        </p:nvSpPr>
-        <p:spPr>
-          <a:xfrm>
-            <a:off x="457200" y="164592"/>
-            <a:ext cx="11277295" cy="502920"/>
-          </a:xfrm>
-          <a:prstGeom prst="rect">
-            <a:avLst/>
-          </a:prstGeom>
-          <a:noFill/>
-        </p:spPr>
-        <p:txBody>
-          <a:bodyPr wrap="square">
-            <a:spAutoFit/>
-          </a:bodyPr>
-          <a:lstStyle/>
-          <a:p>
-            <a:r>
-              <a:rPr sz="2600" b="1" i="0">
-                <a:solidFill>
-                  <a:srgbClr val="FFFFFF"/>
-                </a:solidFill>
-                <a:latin typeface="Calibri"/>
-              </a:rPr>
-              <a:t>Antes de entregar — autochequeo</a:t>
-            </a:r>
-          </a:p>
-        </p:txBody>
-      </p:sp>
-      <p:sp>
-        <p:nvSpPr>
-          <p:cNvPr id="5" name="Rounded Rectangle 4"/>
-          <p:cNvSpPr/>
-          <p:nvPr/>
-        </p:nvSpPr>
-        <p:spPr>
-          <a:xfrm>
-            <a:off x="457200" y="1261872"/>
-            <a:ext cx="11277295" cy="566928"/>
-          </a:xfrm>
-          <a:prstGeom prst="roundRect">
-            <a:avLst>
-              <a:gd name="adj" fmla="val 12000"/>
-            </a:avLst>
-          </a:prstGeom>
-          <a:solidFill>
-            <a:srgbClr val="F2F2F2"/>
-          </a:solidFill>
-          <a:ln>
-            <a:noFill/>
-          </a:ln>
-        </p:spPr>
-        <p:style>
-          <a:lnRef idx="1">
-            <a:schemeClr val="accent1"/>
-          </a:lnRef>
-          <a:fillRef idx="3">
-            <a:schemeClr val="accent1"/>
-          </a:fillRef>
-          <a:effectRef idx="2">
-            <a:schemeClr val="accent1"/>
-          </a:effectRef>
-          <a:fontRef idx="minor">
-            <a:schemeClr val="lt1"/>
-          </a:fontRef>
-        </p:style>
-        <p:txBody>
-          <a:bodyPr rtlCol="0" anchor="ctr"/>
-          <a:lstStyle/>
-          <a:p>
-            <a:pPr algn="ctr"/>
-          </a:p>
-        </p:txBody>
-      </p:sp>
-      <p:sp>
-        <p:nvSpPr>
-          <p:cNvPr id="6" name="Rectangle 5"/>
-          <p:cNvSpPr/>
-          <p:nvPr/>
-        </p:nvSpPr>
-        <p:spPr>
-          <a:xfrm>
-            <a:off x="640080" y="1408175"/>
-            <a:ext cx="274320" cy="274320"/>
-          </a:xfrm>
-          <a:prstGeom prst="rect">
-            <a:avLst/>
-          </a:prstGeom>
-          <a:solidFill>
-            <a:srgbClr val="FFFFFF"/>
-          </a:solidFill>
-          <a:ln>
-            <a:solidFill>
-              <a:srgbClr val="333333"/>
-            </a:solidFill>
-          </a:ln>
-        </p:spPr>
-        <p:style>
-          <a:lnRef idx="1">
-            <a:schemeClr val="accent1"/>
-          </a:lnRef>
-          <a:fillRef idx="3">
-            <a:schemeClr val="accent1"/>
-          </a:fillRef>
-          <a:effectRef idx="2">
-            <a:schemeClr val="accent1"/>
-          </a:effectRef>
-          <a:fontRef idx="minor">
-            <a:schemeClr val="lt1"/>
-          </a:fontRef>
-        </p:style>
-        <p:txBody>
-          <a:bodyPr rtlCol="0" anchor="ctr"/>
-          <a:lstStyle/>
-          <a:p>
-            <a:pPr algn="ctr"/>
-          </a:p>
-        </p:txBody>
-      </p:sp>
-      <p:sp>
-        <p:nvSpPr>
-          <p:cNvPr id="7" name="Rectangle 6"/>
-          <p:cNvSpPr/>
-          <p:nvPr/>
-        </p:nvSpPr>
-        <p:spPr>
-          <a:xfrm>
-            <a:off x="640080" y="1408175"/>
-            <a:ext cx="73152" cy="274320"/>
-          </a:xfrm>
-          <a:prstGeom prst="rect">
-            <a:avLst/>
-          </a:prstGeom>
-          <a:solidFill>
-            <a:srgbClr val="269CCB"/>
-          </a:solidFill>
-          <a:ln>
-            <a:noFill/>
-          </a:ln>
-        </p:spPr>
-        <p:style>
-          <a:lnRef idx="1">
-            <a:schemeClr val="accent1"/>
-          </a:lnRef>
-          <a:fillRef idx="3">
-            <a:schemeClr val="accent1"/>
-          </a:fillRef>
-          <a:effectRef idx="2">
-            <a:schemeClr val="accent1"/>
-          </a:effectRef>
-          <a:fontRef idx="minor">
-            <a:schemeClr val="lt1"/>
-          </a:fontRef>
-        </p:style>
-        <p:txBody>
-          <a:bodyPr rtlCol="0" anchor="ctr"/>
-          <a:lstStyle/>
-          <a:p>
-            <a:pPr algn="ctr"/>
-          </a:p>
-        </p:txBody>
-      </p:sp>
-      <p:sp>
-        <p:nvSpPr>
-          <p:cNvPr id="8" name="TextBox 7"/>
-          <p:cNvSpPr txBox="1"/>
-          <p:nvPr/>
-        </p:nvSpPr>
-        <p:spPr>
-          <a:xfrm>
-            <a:off x="1097280" y="1353312"/>
-            <a:ext cx="10362895" cy="402336"/>
-          </a:xfrm>
-          <a:prstGeom prst="rect">
-            <a:avLst/>
-          </a:prstGeom>
-          <a:noFill/>
-        </p:spPr>
-        <p:txBody>
-          <a:bodyPr wrap="square" anchor="ctr"/>
-          <a:lstStyle/>
-          <a:p>
-            <a:r>
-              <a:rPr sz="1500" b="0" i="0">
-                <a:solidFill>
-                  <a:srgbClr val="333333"/>
-                </a:solidFill>
-                <a:latin typeface="Calibri"/>
-              </a:rPr>
-              <a:t>Si borro el archivo datos/mascotas.csv y ejecuto la aplicacion, ¿arranca con lista vacia y un aviso, o se cierra?</a:t>
-            </a:r>
-          </a:p>
-        </p:txBody>
-      </p:sp>
-      <p:sp>
-        <p:nvSpPr>
-          <p:cNvPr id="9" name="Rounded Rectangle 8"/>
-          <p:cNvSpPr/>
-          <p:nvPr/>
-        </p:nvSpPr>
-        <p:spPr>
-          <a:xfrm>
-            <a:off x="457200" y="1938528"/>
-            <a:ext cx="11277295" cy="566928"/>
-          </a:xfrm>
-          <a:prstGeom prst="roundRect">
-            <a:avLst>
-              <a:gd name="adj" fmla="val 12000"/>
-            </a:avLst>
-          </a:prstGeom>
-          <a:solidFill>
-            <a:srgbClr val="F2F2F2"/>
-          </a:solidFill>
-          <a:ln>
-            <a:noFill/>
-          </a:ln>
-        </p:spPr>
-        <p:style>
-          <a:lnRef idx="1">
-            <a:schemeClr val="accent1"/>
-          </a:lnRef>
-          <a:fillRef idx="3">
-            <a:schemeClr val="accent1"/>
-          </a:fillRef>
-          <a:effectRef idx="2">
-            <a:schemeClr val="accent1"/>
-          </a:effectRef>
-          <a:fontRef idx="minor">
-            <a:schemeClr val="lt1"/>
-          </a:fontRef>
-        </p:style>
-        <p:txBody>
-          <a:bodyPr rtlCol="0" anchor="ctr"/>
-          <a:lstStyle/>
-          <a:p>
-            <a:pPr algn="ctr"/>
-          </a:p>
-        </p:txBody>
-      </p:sp>
-      <p:sp>
-        <p:nvSpPr>
-          <p:cNvPr id="10" name="Rectangle 9"/>
-          <p:cNvSpPr/>
-          <p:nvPr/>
-        </p:nvSpPr>
-        <p:spPr>
-          <a:xfrm>
-            <a:off x="640080" y="2084832"/>
-            <a:ext cx="274320" cy="274320"/>
-          </a:xfrm>
-          <a:prstGeom prst="rect">
-            <a:avLst/>
-          </a:prstGeom>
-          <a:solidFill>
-            <a:srgbClr val="FFFFFF"/>
-          </a:solidFill>
-          <a:ln>
-            <a:solidFill>
-              <a:srgbClr val="333333"/>
-            </a:solidFill>
-          </a:ln>
-        </p:spPr>
-        <p:style>
-          <a:lnRef idx="1">
-            <a:schemeClr val="accent1"/>
-          </a:lnRef>
-          <a:fillRef idx="3">
-            <a:schemeClr val="accent1"/>
-          </a:fillRef>
-          <a:effectRef idx="2">
-            <a:schemeClr val="accent1"/>
-          </a:effectRef>
-          <a:fontRef idx="minor">
-            <a:schemeClr val="lt1"/>
-          </a:fontRef>
-        </p:style>
-        <p:txBody>
-          <a:bodyPr rtlCol="0" anchor="ctr"/>
-          <a:lstStyle/>
-          <a:p>
-            <a:pPr algn="ctr"/>
-          </a:p>
-        </p:txBody>
-      </p:sp>
-      <p:sp>
-        <p:nvSpPr>
-          <p:cNvPr id="11" name="Rectangle 10"/>
-          <p:cNvSpPr/>
-          <p:nvPr/>
-        </p:nvSpPr>
-        <p:spPr>
-          <a:xfrm>
-            <a:off x="640080" y="2084832"/>
-            <a:ext cx="73152" cy="274320"/>
-          </a:xfrm>
-          <a:prstGeom prst="rect">
-            <a:avLst/>
-          </a:prstGeom>
-          <a:solidFill>
-            <a:srgbClr val="269CCB"/>
-          </a:solidFill>
-          <a:ln>
-            <a:noFill/>
-          </a:ln>
-        </p:spPr>
-        <p:style>
-          <a:lnRef idx="1">
-            <a:schemeClr val="accent1"/>
-          </a:lnRef>
-          <a:fillRef idx="3">
-            <a:schemeClr val="accent1"/>
-          </a:fillRef>
-          <a:effectRef idx="2">
-            <a:schemeClr val="accent1"/>
-          </a:effectRef>
-          <a:fontRef idx="minor">
-            <a:schemeClr val="lt1"/>
-          </a:fontRef>
-        </p:style>
-        <p:txBody>
-          <a:bodyPr rtlCol="0" anchor="ctr"/>
-          <a:lstStyle/>
-          <a:p>
-            <a:pPr algn="ctr"/>
-          </a:p>
-        </p:txBody>
-      </p:sp>
-      <p:sp>
-        <p:nvSpPr>
-          <p:cNvPr id="12" name="TextBox 11"/>
-          <p:cNvSpPr txBox="1"/>
-          <p:nvPr/>
-        </p:nvSpPr>
-        <p:spPr>
-          <a:xfrm>
-            <a:off x="1097280" y="2029968"/>
-            <a:ext cx="10362895" cy="402336"/>
-          </a:xfrm>
-          <a:prstGeom prst="rect">
-            <a:avLst/>
-          </a:prstGeom>
-          <a:noFill/>
-        </p:spPr>
-        <p:txBody>
-          <a:bodyPr wrap="square" anchor="ctr"/>
-          <a:lstStyle/>
-          <a:p>
-            <a:r>
-              <a:rPr sz="1500" b="0" i="0">
-                <a:solidFill>
-                  <a:srgbClr val="333333"/>
-                </a:solidFill>
-                <a:latin typeface="Calibri"/>
-              </a:rPr>
-              <a:t>¿En que capa esta el mensaje que ve el usuario: dentro de la clase Mascota o dentro del formulario? ¿Que pasaria si manana cambio Swing por consola?</a:t>
-            </a:r>
-          </a:p>
-        </p:txBody>
-      </p:sp>
-      <p:sp>
-        <p:nvSpPr>
-          <p:cNvPr id="13" name="Rounded Rectangle 12"/>
-          <p:cNvSpPr/>
-          <p:nvPr/>
-        </p:nvSpPr>
-        <p:spPr>
-          <a:xfrm>
-            <a:off x="457200" y="2615184"/>
-            <a:ext cx="11277295" cy="566928"/>
-          </a:xfrm>
-          <a:prstGeom prst="roundRect">
-            <a:avLst>
-              <a:gd name="adj" fmla="val 12000"/>
-            </a:avLst>
-          </a:prstGeom>
-          <a:solidFill>
-            <a:srgbClr val="F2F2F2"/>
-          </a:solidFill>
-          <a:ln>
-            <a:noFill/>
-          </a:ln>
-        </p:spPr>
-        <p:style>
-          <a:lnRef idx="1">
-            <a:schemeClr val="accent1"/>
-          </a:lnRef>
-          <a:fillRef idx="3">
-            <a:schemeClr val="accent1"/>
-          </a:fillRef>
-          <a:effectRef idx="2">
-            <a:schemeClr val="accent1"/>
-          </a:effectRef>
-          <a:fontRef idx="minor">
-            <a:schemeClr val="lt1"/>
-          </a:fontRef>
-        </p:style>
-        <p:txBody>
-          <a:bodyPr rtlCol="0" anchor="ctr"/>
-          <a:lstStyle/>
-          <a:p>
-            <a:pPr algn="ctr"/>
-          </a:p>
-        </p:txBody>
-      </p:sp>
-      <p:sp>
-        <p:nvSpPr>
-          <p:cNvPr id="14" name="Rectangle 13"/>
-          <p:cNvSpPr/>
-          <p:nvPr/>
-        </p:nvSpPr>
-        <p:spPr>
-          <a:xfrm>
-            <a:off x="640080" y="2761488"/>
-            <a:ext cx="274320" cy="274320"/>
-          </a:xfrm>
-          <a:prstGeom prst="rect">
-            <a:avLst/>
-          </a:prstGeom>
-          <a:solidFill>
-            <a:srgbClr val="FFFFFF"/>
-          </a:solidFill>
-          <a:ln>
-            <a:solidFill>
-              <a:srgbClr val="333333"/>
-            </a:solidFill>
-          </a:ln>
-        </p:spPr>
-        <p:style>
-          <a:lnRef idx="1">
-            <a:schemeClr val="accent1"/>
-          </a:lnRef>
-          <a:fillRef idx="3">
-            <a:schemeClr val="accent1"/>
-          </a:fillRef>
-          <a:effectRef idx="2">
-            <a:schemeClr val="accent1"/>
-          </a:effectRef>
-          <a:fontRef idx="minor">
-            <a:schemeClr val="lt1"/>
-          </a:fontRef>
-        </p:style>
-        <p:txBody>
-          <a:bodyPr rtlCol="0" anchor="ctr"/>
-          <a:lstStyle/>
-          <a:p>
-            <a:pPr algn="ctr"/>
-          </a:p>
-        </p:txBody>
-      </p:sp>
-      <p:sp>
-        <p:nvSpPr>
-          <p:cNvPr id="15" name="Rectangle 14"/>
-          <p:cNvSpPr/>
-          <p:nvPr/>
-        </p:nvSpPr>
-        <p:spPr>
-          <a:xfrm>
-            <a:off x="640080" y="2761488"/>
-            <a:ext cx="73152" cy="274320"/>
-          </a:xfrm>
-          <a:prstGeom prst="rect">
-            <a:avLst/>
-          </a:prstGeom>
-          <a:solidFill>
-            <a:srgbClr val="269CCB"/>
-          </a:solidFill>
-          <a:ln>
-            <a:noFill/>
-          </a:ln>
-        </p:spPr>
-        <p:style>
-          <a:lnRef idx="1">
-            <a:schemeClr val="accent1"/>
-          </a:lnRef>
-          <a:fillRef idx="3">
-            <a:schemeClr val="accent1"/>
-          </a:fillRef>
-          <a:effectRef idx="2">
-            <a:schemeClr val="accent1"/>
-          </a:effectRef>
-          <a:fontRef idx="minor">
-            <a:schemeClr val="lt1"/>
-          </a:fontRef>
-        </p:style>
-        <p:txBody>
-          <a:bodyPr rtlCol="0" anchor="ctr"/>
-          <a:lstStyle/>
-          <a:p>
-            <a:pPr algn="ctr"/>
-          </a:p>
-        </p:txBody>
-      </p:sp>
-      <p:sp>
-        <p:nvSpPr>
-          <p:cNvPr id="16" name="TextBox 15"/>
-          <p:cNvSpPr txBox="1"/>
-          <p:nvPr/>
-        </p:nvSpPr>
-        <p:spPr>
-          <a:xfrm>
-            <a:off x="1097280" y="2706624"/>
-            <a:ext cx="10362895" cy="402336"/>
-          </a:xfrm>
-          <a:prstGeom prst="rect">
-            <a:avLst/>
-          </a:prstGeom>
-          <a:noFill/>
-        </p:spPr>
-        <p:txBody>
-          <a:bodyPr wrap="square" anchor="ctr"/>
-          <a:lstStyle/>
-          <a:p>
-            <a:r>
-              <a:rPr sz="1500" b="0" i="0">
-                <a:solidFill>
-                  <a:srgbClr val="333333"/>
-                </a:solidFill>
-                <a:latin typeface="Calibri"/>
-              </a:rPr>
-              <a:t>¿Cuantos catch de mi proyecto no tienen ni una linea adentro, y que haria el sistema si esa falla ocurriera de verdad?</a:t>
-            </a:r>
-          </a:p>
-        </p:txBody>
-      </p:sp>
-      <p:sp>
-        <p:nvSpPr>
-          <p:cNvPr id="17" name="TextBox 16"/>
-          <p:cNvSpPr txBox="1"/>
-          <p:nvPr/>
-        </p:nvSpPr>
-        <p:spPr>
-          <a:xfrm>
-            <a:off x="11185855" y="6473952"/>
-            <a:ext cx="640080" cy="274320"/>
-          </a:xfrm>
-          <a:prstGeom prst="rect">
-            <a:avLst/>
-          </a:prstGeom>
-          <a:noFill/>
-        </p:spPr>
-        <p:txBody>
-          <a:bodyPr wrap="square">
-            <a:spAutoFit/>
-          </a:bodyPr>
-          <a:lstStyle/>
-          <a:p>
-            <a:pPr algn="r"/>
-            <a:r>
-              <a:rPr sz="1100" b="0" i="0">
-                <a:solidFill>
-                  <a:srgbClr val="666666"/>
-                </a:solidFill>
-                <a:latin typeface="Calibri"/>
-              </a:rPr>
-              <a:t>35</a:t>
-            </a:r>
-          </a:p>
-        </p:txBody>
-      </p:sp>
-    </p:spTree>
-  </p:cSld>
-  <p:clrMapOvr>
-    <a:masterClrMapping/>
-  </p:clrMapOvr>
-</p:sld>
-</file>
-
-<file path=ppt/slides/slide36.xml><?xml version="1.0" encoding="utf-8"?>
-<p:sld xmlns:a="http://schemas.openxmlformats.org/drawingml/2006/main" xmlns:p="http://schemas.openxmlformats.org/presentationml/2006/main" xmlns:r="http://schemas.openxmlformats.org/officeDocument/2006/relationships">
-  <p:cSld>
-    <p:bg>
-      <p:bgPr>
-        <a:solidFill>
-          <a:srgbClr val="FFFFFF"/>
-        </a:solidFill>
-        <a:effectLst/>
-      </p:bgPr>
-    </p:bg>
-    <p:spTree>
-      <p:nvGrpSpPr>
-        <p:cNvPr id="1" name=""/>
-        <p:cNvGrpSpPr/>
-        <p:nvPr/>
-      </p:nvGrpSpPr>
-      <p:grpSpPr/>
-      <p:sp>
-        <p:nvSpPr>
-          <p:cNvPr id="2" name="Rectangle 1"/>
-          <p:cNvSpPr/>
-          <p:nvPr/>
-        </p:nvSpPr>
-        <p:spPr>
-          <a:xfrm>
-            <a:off x="0" y="0"/>
-            <a:ext cx="12191695" cy="960120"/>
-          </a:xfrm>
-          <a:prstGeom prst="rect">
-            <a:avLst/>
-          </a:prstGeom>
-          <a:solidFill>
-            <a:srgbClr val="095292"/>
-          </a:solidFill>
-          <a:ln>
-            <a:noFill/>
-          </a:ln>
-        </p:spPr>
-        <p:style>
-          <a:lnRef idx="1">
-            <a:schemeClr val="accent1"/>
-          </a:lnRef>
-          <a:fillRef idx="3">
-            <a:schemeClr val="accent1"/>
-          </a:fillRef>
-          <a:effectRef idx="2">
-            <a:schemeClr val="accent1"/>
-          </a:effectRef>
-          <a:fontRef idx="minor">
-            <a:schemeClr val="lt1"/>
-          </a:fontRef>
-        </p:style>
-        <p:txBody>
-          <a:bodyPr rtlCol="0" anchor="ctr"/>
-          <a:lstStyle/>
-          <a:p>
-            <a:pPr algn="ctr"/>
-          </a:p>
-        </p:txBody>
-      </p:sp>
-      <p:sp>
-        <p:nvSpPr>
-          <p:cNvPr id="3" name="Rectangle 2"/>
-          <p:cNvSpPr/>
-          <p:nvPr/>
-        </p:nvSpPr>
-        <p:spPr>
-          <a:xfrm>
-            <a:off x="0" y="960120"/>
-            <a:ext cx="12191695" cy="41148"/>
-          </a:xfrm>
-          <a:prstGeom prst="rect">
-            <a:avLst/>
-          </a:prstGeom>
-          <a:solidFill>
-            <a:srgbClr val="FFD000"/>
-          </a:solidFill>
-          <a:ln>
-            <a:noFill/>
-          </a:ln>
-        </p:spPr>
-        <p:style>
-          <a:lnRef idx="1">
-            <a:schemeClr val="accent1"/>
-          </a:lnRef>
-          <a:fillRef idx="3">
-            <a:schemeClr val="accent1"/>
-          </a:fillRef>
-          <a:effectRef idx="2">
-            <a:schemeClr val="accent1"/>
-          </a:effectRef>
-          <a:fontRef idx="minor">
-            <a:schemeClr val="lt1"/>
-          </a:fontRef>
-        </p:style>
-        <p:txBody>
-          <a:bodyPr rtlCol="0" anchor="ctr"/>
-          <a:lstStyle/>
-          <a:p>
-            <a:pPr algn="ctr"/>
-          </a:p>
-        </p:txBody>
-      </p:sp>
-      <p:sp>
-        <p:nvSpPr>
-          <p:cNvPr id="4" name="TextBox 3"/>
-          <p:cNvSpPr txBox="1"/>
-          <p:nvPr/>
-        </p:nvSpPr>
-        <p:spPr>
-          <a:xfrm>
-            <a:off x="457200" y="164592"/>
-            <a:ext cx="11277295" cy="502920"/>
-          </a:xfrm>
-          <a:prstGeom prst="rect">
-            <a:avLst/>
-          </a:prstGeom>
-          <a:noFill/>
-        </p:spPr>
-        <p:txBody>
-          <a:bodyPr wrap="square">
-            <a:spAutoFit/>
-          </a:bodyPr>
-          <a:lstStyle/>
-          <a:p>
-            <a:r>
-              <a:rPr sz="2600" b="1" i="0">
-                <a:solidFill>
-                  <a:srgbClr val="FFFFFF"/>
-                </a:solidFill>
-                <a:latin typeface="Calibri"/>
-              </a:rPr>
-              <a:t>Criterios de exito / entregable</a:t>
-            </a:r>
-          </a:p>
-        </p:txBody>
-      </p:sp>
-      <p:sp>
-        <p:nvSpPr>
-          <p:cNvPr id="5" name="TextBox 4"/>
-          <p:cNvSpPr txBox="1"/>
-          <p:nvPr/>
-        </p:nvSpPr>
-        <p:spPr>
-          <a:xfrm>
-            <a:off x="457200" y="1170432"/>
-            <a:ext cx="11277295" cy="5230368"/>
-          </a:xfrm>
-          <a:prstGeom prst="rect">
-            <a:avLst/>
-          </a:prstGeom>
-          <a:noFill/>
-        </p:spPr>
-        <p:txBody>
-          <a:bodyPr wrap="square">
-            <a:spAutoFit/>
-          </a:bodyPr>
-          <a:lstStyle/>
-          <a:p>
-            <a:pPr>
-              <a:spcAft>
-                <a:spcPts val="800"/>
-              </a:spcAft>
-            </a:pPr>
-            <a:r>
-              <a:rPr sz="2000" b="0" i="0">
-                <a:solidFill>
-                  <a:srgbClr val="333333"/>
-                </a:solidFill>
-                <a:latin typeface="Calibri"/>
-              </a:rPr>
-              <a:t>–   </a:t>
-            </a:r>
-            <a:r>
-              <a:rPr sz="2000" b="1" i="0">
-                <a:solidFill>
-                  <a:srgbClr val="333333"/>
-                </a:solidFill>
-                <a:latin typeface="Calibri"/>
-              </a:rPr>
-              <a:t>Entregable:</a:t>
-            </a:r>
-            <a:r>
-              <a:rPr sz="2000" b="0" i="0">
-                <a:solidFill>
-                  <a:srgbClr val="333333"/>
-                </a:solidFill>
-                <a:latin typeface="Calibri"/>
-              </a:rPr>
-              <a:t> Clase DatoInvalidoException mas los setters validados de Mascota y la carga del CSV con try-with-resources, con evidencia de cinco pruebas de entrada (cuatro malas y una valida), subido a la plataforma del curso.</a:t>
-            </a:r>
-          </a:p>
-          <a:p>
-            <a:pPr>
-              <a:spcAft>
-                <a:spcPts val="800"/>
-              </a:spcAft>
-            </a:pPr>
-            <a:r>
-              <a:rPr sz="2000" b="0" i="0">
-                <a:solidFill>
-                  <a:srgbClr val="333333"/>
-                </a:solidFill>
-                <a:latin typeface="Calibri"/>
-              </a:rPr>
-              <a:t>–   </a:t>
-            </a:r>
-            <a:r>
-              <a:rPr sz="2000" b="1" i="0">
-                <a:solidFill>
-                  <a:srgbClr val="333333"/>
-                </a:solidFill>
-                <a:latin typeface="Calibri"/>
-              </a:rPr>
-              <a:t>Exito:</a:t>
-            </a:r>
-            <a:r>
-              <a:rPr sz="2000" b="0" i="0">
-                <a:solidFill>
-                  <a:srgbClr val="333333"/>
-                </a:solidFill>
-                <a:latin typeface="Calibri"/>
-              </a:rPr>
-              <a:t> Existe la clase DatoInvalidoException que extiende Exception y todos sus mensajes estan escritos en lenguaje de la clinica, no en lenguaje tecnico.</a:t>
-            </a:r>
-          </a:p>
-          <a:p>
-            <a:pPr>
-              <a:spcAft>
-                <a:spcPts val="800"/>
-              </a:spcAft>
-            </a:pPr>
-            <a:r>
-              <a:rPr sz="2000" b="0" i="0">
-                <a:solidFill>
-                  <a:srgbClr val="333333"/>
-                </a:solidFill>
-                <a:latin typeface="Calibri"/>
-              </a:rPr>
-              <a:t>–   </a:t>
-            </a:r>
-            <a:r>
-              <a:rPr sz="2000" b="1" i="0">
-                <a:solidFill>
-                  <a:srgbClr val="333333"/>
-                </a:solidFill>
-                <a:latin typeface="Calibri"/>
-              </a:rPr>
-              <a:t>Exito:</a:t>
-            </a:r>
-            <a:r>
-              <a:rPr sz="2000" b="0" i="0">
-                <a:solidFill>
-                  <a:srgbClr val="333333"/>
-                </a:solidFill>
-                <a:latin typeface="Calibri"/>
-              </a:rPr>
-              <a:t> Con las cinco entradas de prueba (vacio, texto, negativo, fuera de rango y valida) la aplicacion nunca se cierra ni muestra stack trace al usuario, y solo la ultima agrega la mascota.</a:t>
-            </a:r>
-          </a:p>
-          <a:p>
-            <a:pPr>
-              <a:spcAft>
-                <a:spcPts val="800"/>
-              </a:spcAft>
-            </a:pPr>
-            <a:r>
-              <a:rPr sz="2000" b="0" i="0">
-                <a:solidFill>
-                  <a:srgbClr val="333333"/>
-                </a:solidFill>
-                <a:latin typeface="Calibri"/>
-              </a:rPr>
-              <a:t>–   </a:t>
-            </a:r>
-            <a:r>
-              <a:rPr sz="2000" b="1" i="0">
-                <a:solidFill>
-                  <a:srgbClr val="333333"/>
-                </a:solidFill>
-                <a:latin typeface="Calibri"/>
-              </a:rPr>
-              <a:t>Exito:</a:t>
-            </a:r>
-            <a:r>
-              <a:rPr sz="2000" b="0" i="0">
-                <a:solidFill>
-                  <a:srgbClr val="333333"/>
-                </a:solidFill>
-                <a:latin typeface="Calibri"/>
-              </a:rPr>
-              <a:t> La lectura del CSV usa try-with-resources, distingue FileNotFoundException de IOException y omite unicamente las lineas malas, conservando las buenas.</a:t>
-            </a:r>
-          </a:p>
-          <a:p>
-            <a:pPr>
-              <a:spcAft>
-                <a:spcPts val="800"/>
-              </a:spcAft>
-            </a:pPr>
-            <a:r>
-              <a:rPr sz="2000" b="0" i="0">
-                <a:solidFill>
-                  <a:srgbClr val="333333"/>
-                </a:solidFill>
-                <a:latin typeface="Calibri"/>
-              </a:rPr>
-              <a:t>–   </a:t>
-            </a:r>
-            <a:r>
-              <a:rPr sz="2000" b="1" i="0">
-                <a:solidFill>
-                  <a:srgbClr val="333333"/>
-                </a:solidFill>
-                <a:latin typeface="Calibri"/>
-              </a:rPr>
-              <a:t>Exito:</a:t>
-            </a:r>
-            <a:r>
-              <a:rPr sz="2000" b="0" i="0">
-                <a:solidFill>
-                  <a:srgbClr val="333333"/>
-                </a:solidFill>
-                <a:latin typeface="Calibri"/>
-              </a:rPr>
-              <a:t> No queda ningun catch vacio en el proyecto: cada catch informa, registra o asume un valor por defecto documentado con un comentario.</a:t>
-            </a:r>
-          </a:p>
-          <a:p>
-            <a:pPr>
-              <a:spcAft>
-                <a:spcPts val="800"/>
-              </a:spcAft>
-            </a:pPr>
-            <a:r>
-              <a:rPr sz="2000" b="0" i="0">
-                <a:solidFill>
-                  <a:srgbClr val="333333"/>
-                </a:solidFill>
-                <a:latin typeface="Calibri"/>
-              </a:rPr>
-              <a:t>–   </a:t>
-            </a:r>
-            <a:r>
-              <a:rPr sz="2000" b="1" i="0">
-                <a:solidFill>
-                  <a:srgbClr val="333333"/>
-                </a:solidFill>
-                <a:latin typeface="Calibri"/>
-              </a:rPr>
-              <a:t>Entrega en la plataforma del curso</a:t>
-            </a:r>
-            <a:r>
-              <a:rPr sz="2000" b="0" i="0">
-                <a:solidFill>
-                  <a:srgbClr val="333333"/>
-                </a:solidFill>
-                <a:latin typeface="Calibri"/>
-              </a:rPr>
-              <a:t> — en la fecha que indique el docente.</a:t>
-            </a:r>
-          </a:p>
-        </p:txBody>
-      </p:sp>
-      <p:sp>
-        <p:nvSpPr>
-          <p:cNvPr id="6" name="TextBox 5"/>
-          <p:cNvSpPr txBox="1"/>
-          <p:nvPr/>
-        </p:nvSpPr>
-        <p:spPr>
-          <a:xfrm>
-            <a:off x="11185855" y="6473952"/>
-            <a:ext cx="640080" cy="274320"/>
-          </a:xfrm>
-          <a:prstGeom prst="rect">
-            <a:avLst/>
-          </a:prstGeom>
-          <a:noFill/>
-        </p:spPr>
-        <p:txBody>
-          <a:bodyPr wrap="square">
-            <a:spAutoFit/>
-          </a:bodyPr>
-          <a:lstStyle/>
-          <a:p>
-            <a:pPr algn="r"/>
-            <a:r>
-              <a:rPr sz="1100" b="0" i="0">
-                <a:solidFill>
-                  <a:srgbClr val="666666"/>
-                </a:solidFill>
-                <a:latin typeface="Calibri"/>
-              </a:rPr>
-              <a:t>36</a:t>
-            </a:r>
-          </a:p>
-        </p:txBody>
-      </p:sp>
-    </p:spTree>
-  </p:cSld>
-  <p:clrMapOvr>
-    <a:masterClrMapping/>
-  </p:clrMapOvr>
-</p:sld>
-</file>
-
-<file path=ppt/slides/slide37.xml><?xml version="1.0" encoding="utf-8"?>
-<p:sld xmlns:a="http://schemas.openxmlformats.org/drawingml/2006/main" xmlns:p="http://schemas.openxmlformats.org/presentationml/2006/main" xmlns:r="http://schemas.openxmlformats.org/officeDocument/2006/relationships">
-  <p:cSld>
-    <p:bg>
-      <p:bgPr>
-        <a:solidFill>
-          <a:srgbClr val="FFFFFF"/>
-        </a:solidFill>
-        <a:effectLst/>
-      </p:bgPr>
-    </p:bg>
-    <p:spTree>
-      <p:nvGrpSpPr>
-        <p:cNvPr id="1" name=""/>
-        <p:cNvGrpSpPr/>
-        <p:nvPr/>
-      </p:nvGrpSpPr>
-      <p:grpSpPr/>
-      <p:sp>
-        <p:nvSpPr>
-          <p:cNvPr id="2" name="Rectangle 1"/>
-          <p:cNvSpPr/>
-          <p:nvPr/>
-        </p:nvSpPr>
-        <p:spPr>
-          <a:xfrm>
-            <a:off x="0" y="0"/>
-            <a:ext cx="12191695" cy="960120"/>
-          </a:xfrm>
-          <a:prstGeom prst="rect">
-            <a:avLst/>
-          </a:prstGeom>
-          <a:solidFill>
-            <a:srgbClr val="095292"/>
-          </a:solidFill>
-          <a:ln>
-            <a:noFill/>
-          </a:ln>
-        </p:spPr>
-        <p:style>
-          <a:lnRef idx="1">
-            <a:schemeClr val="accent1"/>
-          </a:lnRef>
-          <a:fillRef idx="3">
-            <a:schemeClr val="accent1"/>
-          </a:fillRef>
-          <a:effectRef idx="2">
-            <a:schemeClr val="accent1"/>
-          </a:effectRef>
-          <a:fontRef idx="minor">
-            <a:schemeClr val="lt1"/>
-          </a:fontRef>
-        </p:style>
-        <p:txBody>
-          <a:bodyPr rtlCol="0" anchor="ctr"/>
-          <a:lstStyle/>
-          <a:p>
-            <a:pPr algn="ctr"/>
-          </a:p>
-        </p:txBody>
-      </p:sp>
-      <p:sp>
-        <p:nvSpPr>
-          <p:cNvPr id="3" name="Rectangle 2"/>
-          <p:cNvSpPr/>
-          <p:nvPr/>
-        </p:nvSpPr>
-        <p:spPr>
-          <a:xfrm>
-            <a:off x="0" y="960120"/>
-            <a:ext cx="12191695" cy="41148"/>
-          </a:xfrm>
-          <a:prstGeom prst="rect">
-            <a:avLst/>
-          </a:prstGeom>
-          <a:solidFill>
-            <a:srgbClr val="FFD000"/>
-          </a:solidFill>
-          <a:ln>
-            <a:noFill/>
-          </a:ln>
-        </p:spPr>
-        <p:style>
-          <a:lnRef idx="1">
-            <a:schemeClr val="accent1"/>
-          </a:lnRef>
-          <a:fillRef idx="3">
-            <a:schemeClr val="accent1"/>
-          </a:fillRef>
-          <a:effectRef idx="2">
-            <a:schemeClr val="accent1"/>
-          </a:effectRef>
-          <a:fontRef idx="minor">
-            <a:schemeClr val="lt1"/>
-          </a:fontRef>
-        </p:style>
-        <p:txBody>
-          <a:bodyPr rtlCol="0" anchor="ctr"/>
-          <a:lstStyle/>
-          <a:p>
-            <a:pPr algn="ctr"/>
-          </a:p>
-        </p:txBody>
-      </p:sp>
-      <p:sp>
-        <p:nvSpPr>
-          <p:cNvPr id="4" name="TextBox 3"/>
-          <p:cNvSpPr txBox="1"/>
-          <p:nvPr/>
-        </p:nvSpPr>
-        <p:spPr>
-          <a:xfrm>
-            <a:off x="457200" y="164592"/>
-            <a:ext cx="11277295" cy="502920"/>
-          </a:xfrm>
-          <a:prstGeom prst="rect">
-            <a:avLst/>
-          </a:prstGeom>
-          <a:noFill/>
-        </p:spPr>
-        <p:txBody>
-          <a:bodyPr wrap="square">
-            <a:spAutoFit/>
-          </a:bodyPr>
-          <a:lstStyle/>
-          <a:p>
-            <a:r>
-              <a:rPr sz="2600" b="1" i="0">
-                <a:solidFill>
-                  <a:srgbClr val="FFFFFF"/>
-                </a:solidFill>
-                <a:latin typeface="Calibri"/>
-              </a:rPr>
-              <a:t>Para el PI esta semana</a:t>
-            </a:r>
-          </a:p>
-        </p:txBody>
-      </p:sp>
-      <p:sp>
-        <p:nvSpPr>
-          <p:cNvPr id="5" name="Rounded Rectangle 4"/>
-          <p:cNvSpPr/>
-          <p:nvPr/>
-        </p:nvSpPr>
-        <p:spPr>
-          <a:xfrm>
-            <a:off x="457200" y="1261872"/>
-            <a:ext cx="11277295" cy="1051560"/>
-          </a:xfrm>
-          <a:prstGeom prst="roundRect">
-            <a:avLst>
-              <a:gd name="adj" fmla="val 12000"/>
-            </a:avLst>
-          </a:prstGeom>
-          <a:solidFill>
-            <a:srgbClr val="E8F4FA"/>
-          </a:solidFill>
-          <a:ln>
-            <a:noFill/>
-          </a:ln>
-        </p:spPr>
-        <p:style>
-          <a:lnRef idx="1">
-            <a:schemeClr val="accent1"/>
-          </a:lnRef>
-          <a:fillRef idx="3">
-            <a:schemeClr val="accent1"/>
-          </a:fillRef>
-          <a:effectRef idx="2">
-            <a:schemeClr val="accent1"/>
-          </a:effectRef>
-          <a:fontRef idx="minor">
-            <a:schemeClr val="lt1"/>
-          </a:fontRef>
-        </p:style>
-        <p:txBody>
-          <a:bodyPr rtlCol="0" anchor="ctr"/>
-          <a:lstStyle/>
-          <a:p>
-            <a:pPr algn="ctr"/>
-          </a:p>
-        </p:txBody>
-      </p:sp>
-      <p:sp>
-        <p:nvSpPr>
-          <p:cNvPr id="6" name="Rectangle 5"/>
-          <p:cNvSpPr/>
-          <p:nvPr/>
-        </p:nvSpPr>
-        <p:spPr>
-          <a:xfrm>
-            <a:off x="457200" y="1261872"/>
-            <a:ext cx="128016" cy="1051560"/>
-          </a:xfrm>
-          <a:prstGeom prst="rect">
-            <a:avLst/>
-          </a:prstGeom>
-          <a:solidFill>
-            <a:srgbClr val="269CCB"/>
-          </a:solidFill>
-          <a:ln>
-            <a:noFill/>
-          </a:ln>
-        </p:spPr>
-        <p:style>
-          <a:lnRef idx="1">
-            <a:schemeClr val="accent1"/>
-          </a:lnRef>
-          <a:fillRef idx="3">
-            <a:schemeClr val="accent1"/>
-          </a:fillRef>
-          <a:effectRef idx="2">
-            <a:schemeClr val="accent1"/>
-          </a:effectRef>
-          <a:fontRef idx="minor">
-            <a:schemeClr val="lt1"/>
-          </a:fontRef>
-        </p:style>
-        <p:txBody>
-          <a:bodyPr rtlCol="0" anchor="ctr"/>
-          <a:lstStyle/>
-          <a:p>
-            <a:pPr algn="ctr"/>
-          </a:p>
-        </p:txBody>
-      </p:sp>
-      <p:sp>
-        <p:nvSpPr>
-          <p:cNvPr id="7" name="TextBox 6"/>
-          <p:cNvSpPr txBox="1"/>
-          <p:nvPr/>
-        </p:nvSpPr>
-        <p:spPr>
-          <a:xfrm>
-            <a:off x="777240" y="1399031"/>
-            <a:ext cx="10774375" cy="822959"/>
-          </a:xfrm>
-          <a:prstGeom prst="rect">
-            <a:avLst/>
-          </a:prstGeom>
-          <a:noFill/>
-        </p:spPr>
-        <p:txBody>
-          <a:bodyPr wrap="square">
-            <a:spAutoFit/>
-          </a:bodyPr>
-          <a:lstStyle/>
-          <a:p>
-            <a:r>
-              <a:rPr sz="1200" b="1" i="0">
-                <a:solidFill>
-                  <a:srgbClr val="269CCB"/>
-                </a:solidFill>
-                <a:latin typeface="Calibri"/>
-              </a:rPr>
-              <a:t>Info</a:t>
-            </a:r>
-          </a:p>
-          <a:p>
-            <a:pPr>
-              <a:spcBef>
-                <a:spcPts val="400"/>
-              </a:spcBef>
-            </a:pPr>
-            <a:r>
-              <a:rPr sz="1400" b="0" i="0">
-                <a:solidFill>
-                  <a:srgbClr val="333333"/>
-                </a:solidFill>
-                <a:latin typeface="Calibri"/>
-              </a:rPr>
-              <a:t>Hito: El registro de mascotas de VetCare valida edad, peso e ID y avisa con un mensaje claro en lugar de cerrarse.</a:t>
-            </a:r>
-          </a:p>
-        </p:txBody>
-      </p:sp>
-      <p:sp>
-        <p:nvSpPr>
-          <p:cNvPr id="8" name="Rounded Rectangle 7"/>
-          <p:cNvSpPr/>
-          <p:nvPr/>
-        </p:nvSpPr>
-        <p:spPr>
-          <a:xfrm>
-            <a:off x="457200" y="2478024"/>
-            <a:ext cx="11277295" cy="1051560"/>
-          </a:xfrm>
-          <a:prstGeom prst="roundRect">
-            <a:avLst>
-              <a:gd name="adj" fmla="val 12000"/>
-            </a:avLst>
-          </a:prstGeom>
-          <a:solidFill>
-            <a:srgbClr val="FFF8E1"/>
-          </a:solidFill>
-          <a:ln>
-            <a:noFill/>
-          </a:ln>
-        </p:spPr>
-        <p:style>
-          <a:lnRef idx="1">
-            <a:schemeClr val="accent1"/>
-          </a:lnRef>
-          <a:fillRef idx="3">
-            <a:schemeClr val="accent1"/>
-          </a:fillRef>
-          <a:effectRef idx="2">
-            <a:schemeClr val="accent1"/>
-          </a:effectRef>
-          <a:fontRef idx="minor">
-            <a:schemeClr val="lt1"/>
-          </a:fontRef>
-        </p:style>
-        <p:txBody>
-          <a:bodyPr rtlCol="0" anchor="ctr"/>
-          <a:lstStyle/>
-          <a:p>
-            <a:pPr algn="ctr"/>
-          </a:p>
-        </p:txBody>
-      </p:sp>
-      <p:sp>
-        <p:nvSpPr>
-          <p:cNvPr id="9" name="Rectangle 8"/>
-          <p:cNvSpPr/>
-          <p:nvPr/>
-        </p:nvSpPr>
-        <p:spPr>
-          <a:xfrm>
-            <a:off x="457200" y="2478024"/>
-            <a:ext cx="128016" cy="1051560"/>
-          </a:xfrm>
-          <a:prstGeom prst="rect">
-            <a:avLst/>
-          </a:prstGeom>
-          <a:solidFill>
-            <a:srgbClr val="FFD000"/>
-          </a:solidFill>
-          <a:ln>
-            <a:noFill/>
-          </a:ln>
-        </p:spPr>
-        <p:style>
-          <a:lnRef idx="1">
-            <a:schemeClr val="accent1"/>
-          </a:lnRef>
-          <a:fillRef idx="3">
-            <a:schemeClr val="accent1"/>
-          </a:fillRef>
-          <a:effectRef idx="2">
-            <a:schemeClr val="accent1"/>
-          </a:effectRef>
-          <a:fontRef idx="minor">
-            <a:schemeClr val="lt1"/>
-          </a:fontRef>
-        </p:style>
-        <p:txBody>
-          <a:bodyPr rtlCol="0" anchor="ctr"/>
-          <a:lstStyle/>
-          <a:p>
-            <a:pPr algn="ctr"/>
-          </a:p>
-        </p:txBody>
-      </p:sp>
-      <p:sp>
-        <p:nvSpPr>
-          <p:cNvPr id="10" name="TextBox 9"/>
-          <p:cNvSpPr txBox="1"/>
-          <p:nvPr/>
-        </p:nvSpPr>
-        <p:spPr>
-          <a:xfrm>
-            <a:off x="777240" y="2615184"/>
-            <a:ext cx="10774375" cy="822959"/>
-          </a:xfrm>
-          <a:prstGeom prst="rect">
-            <a:avLst/>
-          </a:prstGeom>
-          <a:noFill/>
-        </p:spPr>
-        <p:txBody>
-          <a:bodyPr wrap="square">
-            <a:spAutoFit/>
-          </a:bodyPr>
-          <a:lstStyle/>
-          <a:p>
-            <a:r>
-              <a:rPr sz="1200" b="1" i="0">
-                <a:solidFill>
-                  <a:srgbClr val="FFD000"/>
-                </a:solidFill>
-                <a:latin typeface="Calibri"/>
-              </a:rPr>
-              <a:t>Aclaración</a:t>
-            </a:r>
-          </a:p>
-          <a:p>
-            <a:pPr>
-              <a:spcBef>
-                <a:spcPts val="400"/>
-              </a:spcBef>
-            </a:pPr>
-            <a:r>
-              <a:rPr sz="1400" b="0" i="0">
-                <a:solidFill>
-                  <a:srgbClr val="333333"/>
-                </a:solidFill>
-                <a:latin typeface="Calibri"/>
-              </a:rPr>
-              <a:t>Enunciado completo: Clases/Proyecto Integrador/ (VetCare).</a:t>
-            </a:r>
-          </a:p>
-        </p:txBody>
-      </p:sp>
-      <p:sp>
-        <p:nvSpPr>
-          <p:cNvPr id="11" name="Rounded Rectangle 10"/>
-          <p:cNvSpPr/>
-          <p:nvPr/>
-        </p:nvSpPr>
-        <p:spPr>
-          <a:xfrm>
-            <a:off x="457200" y="3694176"/>
-            <a:ext cx="11277295" cy="1051560"/>
-          </a:xfrm>
-          <a:prstGeom prst="roundRect">
-            <a:avLst>
-              <a:gd name="adj" fmla="val 12000"/>
-            </a:avLst>
-          </a:prstGeom>
-          <a:solidFill>
-            <a:srgbClr val="FBE4E4"/>
-          </a:solidFill>
-          <a:ln>
-            <a:noFill/>
-          </a:ln>
-        </p:spPr>
-        <p:style>
-          <a:lnRef idx="1">
-            <a:schemeClr val="accent1"/>
-          </a:lnRef>
-          <a:fillRef idx="3">
-            <a:schemeClr val="accent1"/>
-          </a:fillRef>
-          <a:effectRef idx="2">
-            <a:schemeClr val="accent1"/>
-          </a:effectRef>
-          <a:fontRef idx="minor">
-            <a:schemeClr val="lt1"/>
-          </a:fontRef>
-        </p:style>
-        <p:txBody>
-          <a:bodyPr rtlCol="0" anchor="ctr"/>
-          <a:lstStyle/>
-          <a:p>
-            <a:pPr algn="ctr"/>
-          </a:p>
-        </p:txBody>
-      </p:sp>
-      <p:sp>
-        <p:nvSpPr>
-          <p:cNvPr id="12" name="Rectangle 11"/>
-          <p:cNvSpPr/>
-          <p:nvPr/>
-        </p:nvSpPr>
-        <p:spPr>
-          <a:xfrm>
-            <a:off x="457200" y="3694176"/>
-            <a:ext cx="128016" cy="1051560"/>
-          </a:xfrm>
-          <a:prstGeom prst="rect">
-            <a:avLst/>
-          </a:prstGeom>
-          <a:solidFill>
-            <a:srgbClr val="A02030"/>
-          </a:solidFill>
-          <a:ln>
-            <a:noFill/>
-          </a:ln>
-        </p:spPr>
-        <p:style>
-          <a:lnRef idx="1">
-            <a:schemeClr val="accent1"/>
-          </a:lnRef>
-          <a:fillRef idx="3">
-            <a:schemeClr val="accent1"/>
-          </a:fillRef>
-          <a:effectRef idx="2">
-            <a:schemeClr val="accent1"/>
-          </a:effectRef>
-          <a:fontRef idx="minor">
-            <a:schemeClr val="lt1"/>
-          </a:fontRef>
-        </p:style>
-        <p:txBody>
-          <a:bodyPr rtlCol="0" anchor="ctr"/>
-          <a:lstStyle/>
-          <a:p>
-            <a:pPr algn="ctr"/>
-          </a:p>
-        </p:txBody>
-      </p:sp>
-      <p:sp>
-        <p:nvSpPr>
-          <p:cNvPr id="13" name="TextBox 12"/>
-          <p:cNvSpPr txBox="1"/>
-          <p:nvPr/>
-        </p:nvSpPr>
-        <p:spPr>
-          <a:xfrm>
-            <a:off x="777240" y="3831336"/>
-            <a:ext cx="10774375" cy="822959"/>
-          </a:xfrm>
-          <a:prstGeom prst="rect">
-            <a:avLst/>
-          </a:prstGeom>
-          <a:noFill/>
-        </p:spPr>
-        <p:txBody>
-          <a:bodyPr wrap="square">
-            <a:spAutoFit/>
-          </a:bodyPr>
-          <a:lstStyle/>
-          <a:p>
-            <a:r>
-              <a:rPr sz="1200" b="1" i="0">
-                <a:solidFill>
-                  <a:srgbClr val="A02030"/>
-                </a:solidFill>
-                <a:latin typeface="Calibri"/>
-              </a:rPr>
-              <a:t>Atención</a:t>
-            </a:r>
-          </a:p>
-          <a:p>
-            <a:pPr>
-              <a:spcBef>
-                <a:spcPts val="400"/>
-              </a:spcBef>
-            </a:pPr>
-            <a:r>
-              <a:rPr sz="1400" b="0" i="0">
-                <a:solidFill>
-                  <a:srgbClr val="333333"/>
-                </a:solidFill>
-                <a:latin typeface="Calibri"/>
-              </a:rPr>
-              <a:t>Entrega del taller, si el docente lo asigna · en la fecha que indique el docente.</a:t>
-            </a:r>
-          </a:p>
-        </p:txBody>
-      </p:sp>
-      <p:sp>
-        <p:nvSpPr>
-          <p:cNvPr id="14" name="TextBox 13"/>
-          <p:cNvSpPr txBox="1"/>
-          <p:nvPr/>
-        </p:nvSpPr>
-        <p:spPr>
-          <a:xfrm>
-            <a:off x="11185855" y="6473952"/>
-            <a:ext cx="640080" cy="274320"/>
-          </a:xfrm>
-          <a:prstGeom prst="rect">
-            <a:avLst/>
-          </a:prstGeom>
-          <a:noFill/>
-        </p:spPr>
-        <p:txBody>
-          <a:bodyPr wrap="square">
-            <a:spAutoFit/>
-          </a:bodyPr>
-          <a:lstStyle/>
-          <a:p>
-            <a:pPr algn="r"/>
-            <a:r>
-              <a:rPr sz="1100" b="0" i="0">
-                <a:solidFill>
-                  <a:srgbClr val="666666"/>
-                </a:solidFill>
-                <a:latin typeface="Calibri"/>
-              </a:rPr>
-              <a:t>37</a:t>
-            </a:r>
-          </a:p>
-        </p:txBody>
-      </p:sp>
-    </p:spTree>
-  </p:cSld>
-  <p:clrMapOvr>
-    <a:masterClrMapping/>
-  </p:clrMapOvr>
-</p:sld>
-</file>
-
-<file path=ppt/slides/slide38.xml><?xml version="1.0" encoding="utf-8"?>
-<p:sld xmlns:a="http://schemas.openxmlformats.org/drawingml/2006/main" xmlns:p="http://schemas.openxmlformats.org/presentationml/2006/main" xmlns:r="http://schemas.openxmlformats.org/officeDocument/2006/relationships">
-  <p:cSld>
-    <p:bg>
-      <p:bgPr>
-        <a:solidFill>
-          <a:srgbClr val="FFFFFF"/>
-        </a:solidFill>
-        <a:effectLst/>
-      </p:bgPr>
-    </p:bg>
-    <p:spTree>
-      <p:nvGrpSpPr>
-        <p:cNvPr id="1" name=""/>
-        <p:cNvGrpSpPr/>
-        <p:nvPr/>
-      </p:nvGrpSpPr>
-      <p:grpSpPr/>
-      <p:sp>
-        <p:nvSpPr>
-          <p:cNvPr id="2" name="Rectangle 1"/>
-          <p:cNvSpPr/>
-          <p:nvPr/>
-        </p:nvSpPr>
-        <p:spPr>
-          <a:xfrm>
-            <a:off x="0" y="0"/>
             <a:ext cx="12191695" cy="164592"/>
           </a:xfrm>
           <a:prstGeom prst="rect">
@@ -18724,7 +16185,7 @@
                 </a:solidFill>
                 <a:latin typeface="Calibri"/>
               </a:rPr>
-              <a:t>Clase 13 · VetCare avanza</a:t>
+              <a:t>Clase 13 · Control de excepciones · try-catch-finally</a:t>
             </a:r>
           </a:p>
         </p:txBody>
@@ -18763,7 +16224,7 @@
                 </a:solidFill>
                 <a:latin typeface="Calibri"/>
               </a:rPr>
-              <a:t>El registro de mascotas de VetCare valida edad, peso e ID y avisa con un mensaje claro en lugar de cerrarse.</a:t>
+              <a:t>Que VetCare no se caiga porque escribieron 'tres' en la edad</a:t>
             </a:r>
           </a:p>
           <a:p>
@@ -18779,7 +16240,7 @@
                 </a:solidFill>
                 <a:latin typeface="Calibri"/>
               </a:rPr>
-              <a:t>Entregable: Clase DatoInvalidoException mas los setters validados de Mascota y la carga del CSV con try-with-resources, con evidencia de cinco pruebas de entrada (cuatro malas y una valida), subido a la plataforma del curso.</a:t>
+              <a:t>Repasa las laminas de concepto y el codigo de la demo</a:t>
             </a:r>
           </a:p>
           <a:p>
@@ -18795,7 +16256,7 @@
                 </a:solidFill>
                 <a:latin typeface="Calibri"/>
               </a:rPr>
-              <a:t>Siguiente clase: continuamos el hilo del PI</a:t>
+              <a:t>Siguiente clase: continuamos el hilo del tema</a:t>
             </a:r>
           </a:p>
         </p:txBody>
@@ -20705,4 +18166,324 @@
   </a:objectDefaults>
   <a:extraClrSchemeLst/>
 </a:theme>
+</file>
+
+<file path=ppt/theme/theme2.xml><?xml version="1.0" encoding="utf-8"?>
+<a:theme xmlns:a="http://schemas.openxmlformats.org/drawingml/2006/main" name="Office Theme">
+  <a:themeElements>
+    <a:clrScheme name="Office">
+      <a:dk1>
+        <a:sysClr val="windowText" lastClr="000000"/>
+      </a:dk1>
+      <a:lt1>
+        <a:sysClr val="window" lastClr="FFFFFF"/>
+      </a:lt1>
+      <a:dk2>
+        <a:srgbClr val="1F497D"/>
+      </a:dk2>
+      <a:lt2>
+        <a:srgbClr val="EEECE1"/>
+      </a:lt2>
+      <a:accent1>
+        <a:srgbClr val="4F81BD"/>
+      </a:accent1>
+      <a:accent2>
+        <a:srgbClr val="C0504D"/>
+      </a:accent2>
+      <a:accent3>
+        <a:srgbClr val="9BBB59"/>
+      </a:accent3>
+      <a:accent4>
+        <a:srgbClr val="8064A2"/>
+      </a:accent4>
+      <a:accent5>
+        <a:srgbClr val="4BACC6"/>
+      </a:accent5>
+      <a:accent6>
+        <a:srgbClr val="F79646"/>
+      </a:accent6>
+      <a:hlink>
+        <a:srgbClr val="0000FF"/>
+      </a:hlink>
+      <a:folHlink>
+        <a:srgbClr val="800080"/>
+      </a:folHlink>
+    </a:clrScheme>
+    <a:fontScheme name="Office">
+      <a:majorFont>
+        <a:latin typeface="Calibri"/>
+        <a:ea typeface=""/>
+        <a:cs typeface=""/>
+        <a:font script="Jpan" typeface="ＭＳ Ｐゴシック"/>
+        <a:font script="Hang" typeface="맑은 고딕"/>
+        <a:font script="Hans" typeface="宋体"/>
+        <a:font script="Hant" typeface="新細明體"/>
+        <a:font script="Arab" typeface="Times New Roman"/>
+        <a:font script="Hebr" typeface="Times New Roman"/>
+        <a:font script="Thai" typeface="Angsana New"/>
+        <a:font script="Ethi" typeface="Nyala"/>
+        <a:font script="Beng" typeface="Vrinda"/>
+        <a:font script="Gujr" typeface="Shruti"/>
+        <a:font script="Khmr" typeface="MoolBoran"/>
+        <a:font script="Knda" typeface="Tunga"/>
+        <a:font script="Guru" typeface="Raavi"/>
+        <a:font script="Cans" typeface="Euphemia"/>
+        <a:font script="Cher" typeface="Plantagenet Cherokee"/>
+        <a:font script="Yiii" typeface="Microsoft Yi Baiti"/>
+        <a:font script="Tibt" typeface="Microsoft Himalaya"/>
+        <a:font script="Thaa" typeface="MV Boli"/>
+        <a:font script="Deva" typeface="Mangal"/>
+        <a:font script="Telu" typeface="Gautami"/>
+        <a:font script="Taml" typeface="Latha"/>
+        <a:font script="Syrc" typeface="Estrangelo Edessa"/>
+        <a:font script="Orya" typeface="Kalinga"/>
+        <a:font script="Mlym" typeface="Kartika"/>
+        <a:font script="Laoo" typeface="DokChampa"/>
+        <a:font script="Sinh" typeface="Iskoola Pota"/>
+        <a:font script="Mong" typeface="Mongolian Baiti"/>
+        <a:font script="Viet" typeface="Times New Roman"/>
+        <a:font script="Uigh" typeface="Microsoft Uighur"/>
+        <a:font script="Geor" typeface="Sylfaen"/>
+      </a:majorFont>
+      <a:minorFont>
+        <a:latin typeface="Calibri"/>
+        <a:ea typeface=""/>
+        <a:cs typeface=""/>
+        <a:font script="Jpan" typeface="ＭＳ Ｐゴシック"/>
+        <a:font script="Hang" typeface="맑은 고딕"/>
+        <a:font script="Hans" typeface="宋体"/>
+        <a:font script="Hant" typeface="新細明體"/>
+        <a:font script="Arab" typeface="Arial"/>
+        <a:font script="Hebr" typeface="Arial"/>
+        <a:font script="Thai" typeface="Cordia New"/>
+        <a:font script="Ethi" typeface="Nyala"/>
+        <a:font script="Beng" typeface="Vrinda"/>
+        <a:font script="Gujr" typeface="Shruti"/>
+        <a:font script="Khmr" typeface="DaunPenh"/>
+        <a:font script="Knda" typeface="Tunga"/>
+        <a:font script="Guru" typeface="Raavi"/>
+        <a:font script="Cans" typeface="Euphemia"/>
+        <a:font script="Cher" typeface="Plantagenet Cherokee"/>
+        <a:font script="Yiii" typeface="Microsoft Yi Baiti"/>
+        <a:font script="Tibt" typeface="Microsoft Himalaya"/>
+        <a:font script="Thaa" typeface="MV Boli"/>
+        <a:font script="Deva" typeface="Mangal"/>
+        <a:font script="Telu" typeface="Gautami"/>
+        <a:font script="Taml" typeface="Latha"/>
+        <a:font script="Syrc" typeface="Estrangelo Edessa"/>
+        <a:font script="Orya" typeface="Kalinga"/>
+        <a:font script="Mlym" typeface="Kartika"/>
+        <a:font script="Laoo" typeface="DokChampa"/>
+        <a:font script="Sinh" typeface="Iskoola Pota"/>
+        <a:font script="Mong" typeface="Mongolian Baiti"/>
+        <a:font script="Viet" typeface="Arial"/>
+        <a:font script="Uigh" typeface="Microsoft Uighur"/>
+        <a:font script="Geor" typeface="Sylfaen"/>
+      </a:minorFont>
+    </a:fontScheme>
+    <a:fmtScheme name="Office">
+      <a:fillStyleLst>
+        <a:solidFill>
+          <a:schemeClr val="phClr"/>
+        </a:solidFill>
+        <a:gradFill rotWithShape="1">
+          <a:gsLst>
+            <a:gs pos="0">
+              <a:schemeClr val="phClr">
+                <a:tint val="50000"/>
+                <a:satMod val="300000"/>
+              </a:schemeClr>
+            </a:gs>
+            <a:gs pos="35000">
+              <a:schemeClr val="phClr">
+                <a:tint val="37000"/>
+                <a:satMod val="300000"/>
+              </a:schemeClr>
+            </a:gs>
+            <a:gs pos="100000">
+              <a:schemeClr val="phClr">
+                <a:tint val="15000"/>
+                <a:satMod val="350000"/>
+              </a:schemeClr>
+            </a:gs>
+          </a:gsLst>
+          <a:lin ang="16200000" scaled="1"/>
+        </a:gradFill>
+        <a:gradFill rotWithShape="1">
+          <a:gsLst>
+            <a:gs pos="0">
+              <a:schemeClr val="phClr">
+                <a:tint val="100000"/>
+                <a:shade val="100000"/>
+                <a:satMod val="130000"/>
+              </a:schemeClr>
+            </a:gs>
+            <a:gs pos="100000">
+              <a:schemeClr val="phClr">
+                <a:tint val="50000"/>
+                <a:shade val="100000"/>
+                <a:satMod val="350000"/>
+              </a:schemeClr>
+            </a:gs>
+          </a:gsLst>
+          <a:lin ang="16200000" scaled="0"/>
+        </a:gradFill>
+      </a:fillStyleLst>
+      <a:lnStyleLst>
+        <a:ln w="9525" cap="flat" cmpd="sng" algn="ctr">
+          <a:solidFill>
+            <a:schemeClr val="phClr">
+              <a:shade val="95000"/>
+              <a:satMod val="105000"/>
+            </a:schemeClr>
+          </a:solidFill>
+          <a:prstDash val="solid"/>
+        </a:ln>
+        <a:ln w="25400" cap="flat" cmpd="sng" algn="ctr">
+          <a:solidFill>
+            <a:schemeClr val="phClr"/>
+          </a:solidFill>
+          <a:prstDash val="solid"/>
+        </a:ln>
+        <a:ln w="38100" cap="flat" cmpd="sng" algn="ctr">
+          <a:solidFill>
+            <a:schemeClr val="phClr"/>
+          </a:solidFill>
+          <a:prstDash val="solid"/>
+        </a:ln>
+      </a:lnStyleLst>
+      <a:effectStyleLst>
+        <a:effectStyle>
+          <a:effectLst>
+            <a:outerShdw blurRad="40000" dist="20000" dir="5400000" rotWithShape="0">
+              <a:srgbClr val="000000">
+                <a:alpha val="38000"/>
+              </a:srgbClr>
+            </a:outerShdw>
+          </a:effectLst>
+        </a:effectStyle>
+        <a:effectStyle>
+          <a:effectLst>
+            <a:outerShdw blurRad="40000" dist="23000" dir="5400000" rotWithShape="0">
+              <a:srgbClr val="000000">
+                <a:alpha val="35000"/>
+              </a:srgbClr>
+            </a:outerShdw>
+          </a:effectLst>
+        </a:effectStyle>
+        <a:effectStyle>
+          <a:effectLst>
+            <a:outerShdw blurRad="40000" dist="23000" dir="5400000" rotWithShape="0">
+              <a:srgbClr val="000000">
+                <a:alpha val="35000"/>
+              </a:srgbClr>
+            </a:outerShdw>
+          </a:effectLst>
+          <a:scene3d>
+            <a:camera prst="orthographicFront">
+              <a:rot lat="0" lon="0" rev="0"/>
+            </a:camera>
+            <a:lightRig rig="threePt" dir="t">
+              <a:rot lat="0" lon="0" rev="1200000"/>
+            </a:lightRig>
+          </a:scene3d>
+          <a:sp3d>
+            <a:bevelT w="63500" h="25400"/>
+          </a:sp3d>
+        </a:effectStyle>
+      </a:effectStyleLst>
+      <a:bgFillStyleLst>
+        <a:solidFill>
+          <a:schemeClr val="phClr"/>
+        </a:solidFill>
+        <a:gradFill rotWithShape="1">
+          <a:gsLst>
+            <a:gs pos="0">
+              <a:schemeClr val="phClr">
+                <a:tint val="40000"/>
+                <a:satMod val="350000"/>
+              </a:schemeClr>
+            </a:gs>
+            <a:gs pos="40000">
+              <a:schemeClr val="phClr">
+                <a:tint val="45000"/>
+                <a:shade val="99000"/>
+                <a:satMod val="350000"/>
+              </a:schemeClr>
+            </a:gs>
+            <a:gs pos="100000">
+              <a:schemeClr val="phClr">
+                <a:shade val="20000"/>
+                <a:satMod val="255000"/>
+              </a:schemeClr>
+            </a:gs>
+          </a:gsLst>
+          <a:path path="circle">
+            <a:fillToRect l="50000" t="-80000" r="50000" b="180000"/>
+          </a:path>
+        </a:gradFill>
+        <a:gradFill rotWithShape="1">
+          <a:gsLst>
+            <a:gs pos="0">
+              <a:schemeClr val="phClr">
+                <a:tint val="80000"/>
+                <a:satMod val="300000"/>
+              </a:schemeClr>
+            </a:gs>
+            <a:gs pos="100000">
+              <a:schemeClr val="phClr">
+                <a:shade val="30000"/>
+                <a:satMod val="200000"/>
+              </a:schemeClr>
+            </a:gs>
+          </a:gsLst>
+          <a:path path="circle">
+            <a:fillToRect l="50000" t="50000" r="50000" b="50000"/>
+          </a:path>
+        </a:gradFill>
+      </a:bgFillStyleLst>
+    </a:fmtScheme>
+  </a:themeElements>
+  <a:objectDefaults>
+    <a:spDef>
+      <a:spPr/>
+      <a:bodyPr/>
+      <a:lstStyle/>
+      <a:style>
+        <a:lnRef idx="1">
+          <a:schemeClr val="accent1"/>
+        </a:lnRef>
+        <a:fillRef idx="3">
+          <a:schemeClr val="accent1"/>
+        </a:fillRef>
+        <a:effectRef idx="2">
+          <a:schemeClr val="accent1"/>
+        </a:effectRef>
+        <a:fontRef idx="minor">
+          <a:schemeClr val="lt1"/>
+        </a:fontRef>
+      </a:style>
+    </a:spDef>
+    <a:lnDef>
+      <a:spPr/>
+      <a:bodyPr/>
+      <a:lstStyle/>
+      <a:style>
+        <a:lnRef idx="2">
+          <a:schemeClr val="accent1"/>
+        </a:lnRef>
+        <a:fillRef idx="0">
+          <a:schemeClr val="accent1"/>
+        </a:fillRef>
+        <a:effectRef idx="1">
+          <a:schemeClr val="accent1"/>
+        </a:effectRef>
+        <a:fontRef idx="minor">
+          <a:schemeClr val="tx1"/>
+        </a:fontRef>
+      </a:style>
+    </a:lnDef>
+  </a:objectDefaults>
+  <a:extraClrSchemeLst/>
+</a:theme>
 </file>
--- a/Programacion II/Clases/Clase 13 - Control de excepciones/Presentacion.pptx
+++ b/Programacion II/Clases/Clase 13 - Control de excepciones/Presentacion.pptx
@@ -609,7 +609,7 @@
           <a:p/>
           <a:p>
             <a:r>
-              <a:t>En VetCare esto significa que si el CSV esta corrupto a la mitad, el archivo igual se cierra y la aplicacion sigue viva con las mascotas que alcanzo a leer.</a:t>
+              <a:t>En el sistema de la clinica esto significa que si el CSV esta corrupto a la mitad, el archivo igual se cierra y la aplicacion sigue viva con las mascotas que alcanzo a leer.</a:t>
             </a:r>
           </a:p>
         </p:txBody>
@@ -685,7 +685,7 @@
           <a:p/>
           <a:p>
             <a:r>
-              <a:t>De ahi sale la regla de capas que usaremos en VetCare: las clases del dominio (Mascota, Dueno, Cita) validan y LANZAN, porque no saben si hay una ventana, una consola o un servidor al otro lado; la capa de interfaz (el JFrame o el menu de consola) CAPTURA y traduce ese error a un JOptionPane que el usuario entiende.</a:t>
+              <a:t>De ahi sale la regla de capas que usaremos en el sistema de la clinica: las clases del dominio (Mascota, Dueno, Cita) validan y LANZAN, porque no saben si hay una ventana, una consola o un servidor al otro lado; la capa de interfaz (el JFrame o el menu de consola) CAPTURA y traduce ese error a un JOptionPane que el usuario entiende.</a:t>
             </a:r>
           </a:p>
         </p:txBody>
@@ -755,7 +755,7 @@
           <a:lstStyle/>
           <a:p>
             <a:r>
-              <a:t>Y la mejor excepcion es la que no ocurre: validar antes de convertir (revisar null, aplicar trim, verificar isEmpty y comprobar el rango) evita el 80 por ciento de los try-catch de VetCare y hace que el codigo se lea como las reglas del negocio.</a:t>
+              <a:t>Y la mejor excepcion es la que no ocurre: validar antes de convertir (revisar null, aplicar trim, verificar isEmpty y comprobar el rango) evita el 80 por ciento de los try-catch del sistema de la clinica y hace que el codigo se lea como las reglas del negocio.</a:t>
             </a:r>
           </a:p>
         </p:txBody>
@@ -4098,7 +4098,7 @@
                 </a:solidFill>
                 <a:latin typeface="Calibri"/>
               </a:rPr>
-              <a:t>Que VetCare no se caiga porque escribieron 'tres' en la edad</a:t>
+              <a:t>Que el sistema de la clinica no se caiga porque escribieron 'tres' en la edad</a:t>
             </a:r>
           </a:p>
         </p:txBody>
@@ -5699,7 +5699,7 @@
                 </a:solidFill>
                 <a:latin typeface="Calibri"/>
               </a:rPr>
-              <a:t>DemoExcepcionesVetCare.java — class DemoExcepcionesVetCare</a:t>
+              <a:t>DemoExcepcionesClinica.java — class DemoExcepcionesClinica</a:t>
             </a:r>
           </a:p>
         </p:txBody>
@@ -5858,7 +5858,7 @@
                 </a:solidFill>
                 <a:latin typeface="Calibri"/>
               </a:rPr>
-              <a:t>public class DemoExcepcionesVetCare {</a:t>
+              <a:t>public class DemoExcepcionesClinica {</a:t>
             </a:r>
           </a:p>
           <a:p>
@@ -6103,7 +6103,7 @@
                 </a:solidFill>
                 <a:latin typeface="Calibri"/>
               </a:rPr>
-              <a:t>DemoExcepcionesVetCare.java — class DatoInvalidoException</a:t>
+              <a:t>DemoExcepcionesClinica.java — class DatoInvalidoException</a:t>
             </a:r>
           </a:p>
         </p:txBody>
@@ -6555,7 +6555,7 @@
                 </a:solidFill>
                 <a:latin typeface="Calibri"/>
               </a:rPr>
-              <a:t>DemoExcepcionesVetCare.java — class Mascota (1/4)</a:t>
+              <a:t>DemoExcepcionesClinica.java — class Mascota (1/4)</a:t>
             </a:r>
           </a:p>
         </p:txBody>
@@ -7222,7 +7222,7 @@
                 </a:solidFill>
                 <a:latin typeface="Calibri"/>
               </a:rPr>
-              <a:t>DemoExcepcionesVetCare.java — class Mascota (2/4)</a:t>
+              <a:t>DemoExcepcionesClinica.java — class Mascota (2/4)</a:t>
             </a:r>
           </a:p>
         </p:txBody>
@@ -7889,7 +7889,7 @@
                 </a:solidFill>
                 <a:latin typeface="Calibri"/>
               </a:rPr>
-              <a:t>DemoExcepcionesVetCare.java — class Mascota (3/4)</a:t>
+              <a:t>DemoExcepcionesClinica.java — class Mascota (3/4)</a:t>
             </a:r>
           </a:p>
         </p:txBody>
@@ -8613,7 +8613,7 @@
                 </a:solidFill>
                 <a:latin typeface="Calibri"/>
               </a:rPr>
-              <a:t> Control de excepciones · try-catch-finally — Que VetCare no se caiga porque escribieron 'tres' en la edad</a:t>
+              <a:t> Control de excepciones · try-catch-finally — Que el sistema de la clinica no se caiga porque escribieron 'tres' en la edad</a:t>
             </a:r>
           </a:p>
           <a:p>
@@ -8688,7 +8688,7 @@
                 </a:solidFill>
                 <a:latin typeface="Calibri"/>
               </a:rPr>
-              <a:t>–   Todo con el mismo dominio: la clinica veterinaria Huellitas (VetCare).</a:t>
+              <a:t>–   Todo con el mismo dominio: una clinica veterinaria.</a:t>
             </a:r>
           </a:p>
         </p:txBody>
@@ -8869,7 +8869,7 @@
                 </a:solidFill>
                 <a:latin typeface="Calibri"/>
               </a:rPr>
-              <a:t>DemoExcepcionesVetCare.java — class Mascota (4/4)</a:t>
+              <a:t>DemoExcepcionesClinica.java — class Mascota (4/4)</a:t>
             </a:r>
           </a:p>
         </p:txBody>
@@ -9353,7 +9353,7 @@
                 </a:solidFill>
                 <a:latin typeface="Calibri"/>
               </a:rPr>
-              <a:t>DemoExcepcionesVetCare.java — registrar()</a:t>
+              <a:t>DemoExcepcionesClinica.java — registrar()</a:t>
             </a:r>
           </a:p>
         </p:txBody>
@@ -9933,7 +9933,7 @@
                 </a:solidFill>
                 <a:latin typeface="Calibri"/>
               </a:rPr>
-              <a:t>DemoExcepcionesVetCare.java — buscarNombrePorId()</a:t>
+              <a:t>DemoExcepcionesClinica.java — buscarNombrePorId()</a:t>
             </a:r>
           </a:p>
         </p:txBody>
@@ -10481,7 +10481,7 @@
                 </a:solidFill>
                 <a:latin typeface="Calibri"/>
               </a:rPr>
-              <a:t>DemoExcepcionesVetCare.java — cargar() (1/2)</a:t>
+              <a:t>DemoExcepcionesClinica.java — cargar() (1/2)</a:t>
             </a:r>
           </a:p>
         </p:txBody>
@@ -11148,7 +11148,7 @@
                 </a:solidFill>
                 <a:latin typeface="Calibri"/>
               </a:rPr>
-              <a:t>DemoExcepcionesVetCare.java — cargar() (2/2)</a:t>
+              <a:t>DemoExcepcionesClinica.java — cargar() (2/2)</a:t>
             </a:r>
           </a:p>
         </p:txBody>
@@ -11307,7 +11307,7 @@
                 </a:solidFill>
                 <a:latin typeface="Calibri"/>
               </a:rPr>
-              <a:t>            System.out.println("  [INFO] No existe " + ruta + ". VetCare arranca con la lista vacia.");</a:t>
+              <a:t>            System.out.println("  [INFO] No existe " + ruta + ". El sistema de la clinica arranca con la lista vacia.");</a:t>
             </a:r>
           </a:p>
           <a:p>
@@ -11584,7 +11584,7 @@
                 </a:solidFill>
                 <a:latin typeface="Calibri"/>
               </a:rPr>
-              <a:t>DemoExcepcionesVetCare.java — guardar()</a:t>
+              <a:t>DemoExcepcionesClinica.java — guardar()</a:t>
             </a:r>
           </a:p>
         </p:txBody>
@@ -12164,7 +12164,7 @@
                 </a:solidFill>
                 <a:latin typeface="Calibri"/>
               </a:rPr>
-              <a:t>DemoExcepcionesVetCare.java — malaPractica()</a:t>
+              <a:t>DemoExcepcionesClinica.java — malaPractica()</a:t>
             </a:r>
           </a:p>
         </p:txBody>
@@ -12680,7 +12680,7 @@
                 </a:solidFill>
                 <a:latin typeface="Calibri"/>
               </a:rPr>
-              <a:t>DemoExcepcionesVetCare.java — main() (1/3)</a:t>
+              <a:t>DemoExcepcionesClinica.java — main() (1/3)</a:t>
             </a:r>
           </a:p>
         </p:txBody>
@@ -12855,7 +12855,7 @@
                 </a:solidFill>
                 <a:latin typeface="Calibri"/>
               </a:rPr>
-              <a:t>        System.out.println("=== VetCare | Clase 13: control de excepciones ===");</a:t>
+              <a:t>        System.out.println("=== Clinica | Clase 13: control de excepciones ===");</a:t>
             </a:r>
           </a:p>
           <a:p>
@@ -13347,7 +13347,7 @@
                 </a:solidFill>
                 <a:latin typeface="Calibri"/>
               </a:rPr>
-              <a:t>DemoExcepcionesVetCare.java — main() (2/3)</a:t>
+              <a:t>DemoExcepcionesClinica.java — main() (2/3)</a:t>
             </a:r>
           </a:p>
         </p:txBody>
@@ -14014,7 +14014,7 @@
                 </a:solidFill>
                 <a:latin typeface="Calibri"/>
               </a:rPr>
-              <a:t>DemoExcepcionesVetCare.java — main() (3/3)</a:t>
+              <a:t>DemoExcepcionesClinica.java — main() (3/3)</a:t>
             </a:r>
           </a:p>
         </p:txBody>
@@ -14237,7 +14237,7 @@
                 </a:solidFill>
                 <a:latin typeface="Calibri"/>
               </a:rPr>
-              <a:t>        System.out.println("=== Fin de la demo: VetCare nunca se cerro por un dato mal escrito. ===");</a:t>
+              <a:t>        System.out.println("=== Fin de la demo: el sistema de la clinica nunca se cerro por un dato mal escrito. ===");</a:t>
             </a:r>
           </a:p>
           <a:p>
@@ -14854,7 +14854,7 @@
                 </a:solidFill>
                 <a:latin typeface="Calibri"/>
               </a:rPr>
-              <a:t>Demo en vivo sobre VetCare</a:t>
+              <a:t>Demo en vivo sobre el tema</a:t>
             </a:r>
           </a:p>
         </p:txBody>
@@ -15318,7 +15318,7 @@
                 </a:solidFill>
                 <a:latin typeface="Calibri"/>
               </a:rPr>
-              <a:t>Validar la edad sin que VetCare se caiga</a:t>
+              <a:t>Validar la edad sin que el sistema de la clinica se caiga</a:t>
             </a:r>
           </a:p>
         </p:txBody>
@@ -16024,7 +16024,7 @@
                 </a:solidFill>
                 <a:latin typeface="Calibri"/>
               </a:rPr>
-              <a:t>–   Mismo dominio VetCare — no otro ejemplo.</a:t>
+              <a:t>–   Mismo dominio de la clinica — no otro ejemplo.</a:t>
             </a:r>
           </a:p>
         </p:txBody>
@@ -16224,7 +16224,7 @@
                 </a:solidFill>
                 <a:latin typeface="Calibri"/>
               </a:rPr>
-              <a:t>Que VetCare no se caiga porque escribieron 'tres' en la edad</a:t>
+              <a:t>Que el sistema de la clinica no se caiga porque escribieron 'tres' en la edad</a:t>
             </a:r>
           </a:p>
           <a:p>
@@ -16508,7 +16508,7 @@
                 </a:solidFill>
                 <a:latin typeface="Calibri"/>
               </a:rPr>
-              <a:t>–   En VetCare esto se ve todos los dias: cuando la secretaria de la clinica Huellitas escribe 'tres' en el campo edad y el codigo hace Integer.parseInt(txtEdad.getText()), Java no puede convertir esa palabra en numero</a:t>
+              <a:t>–   En el sistema de la clinica esto se ve todos los dias: cuando la secretaria de la clinica escribe 'tres' en el campo edad y el codigo hace Integer.parseInt(txtEdad.getText()), Java no puede convertir esa palabra en numero</a:t>
             </a:r>
           </a:p>
         </p:txBody>
@@ -17280,7 +17280,23 @@
                 </a:solidFill>
                 <a:latin typeface="Calibri"/>
               </a:rPr>
-              <a:t>–   En VetCare la lectura de datos/mascotas.csv lanza IOException, que es checked, y la conversion de la edad lanza NumberFormatException, que es unchecked; por eso se manejan en lugares distintos del programa y por eso una obliga a escribir throws y la otra no.</a:t>
+              <a:t>–   En el sistema de la clinica la lectura de datos/mascotas.csv lanza IOException, que es checked</a:t>
+            </a:r>
+          </a:p>
+          <a:p>
+            <a:pPr>
+              <a:spcAft>
+                <a:spcPts val="800"/>
+              </a:spcAft>
+            </a:pPr>
+            <a:r>
+              <a:rPr sz="2000" b="0" i="0">
+                <a:solidFill>
+                  <a:srgbClr val="333333"/>
+                </a:solidFill>
+                <a:latin typeface="Calibri"/>
+              </a:rPr>
+              <a:t>–   Y la conversion de la edad lanza NumberFormatException, que es unchecked; por eso se manejan en lugares distintos del programa y por eso una obliga a escribir throws y la otra no.</a:t>
             </a:r>
           </a:p>
         </p:txBody>
@@ -17548,7 +17564,7 @@
                 </a:solidFill>
                 <a:latin typeface="Calibri"/>
               </a:rPr>
-              <a:t>–   Por la misma razon, al leer el CSV de VetCare, catch (FileNotFoundException e) va antes que catch (IOException e), porque la primera es hija de la segunda.</a:t>
+              <a:t>–   Por la misma razon, al leer el CSV del sistema de la clinica, catch (FileNotFoundException e) va antes que catch (IOException e), porque la primera es hija de la segunda.</a:t>
             </a:r>
           </a:p>
           <a:p>

--- a/Programacion II/Clases/Clase 13 - Control de excepciones/Presentacion.pptx
+++ b/Programacion II/Clases/Clase 13 - Control de excepciones/Presentacion.pptx
@@ -828,94 +828,6 @@
           <a:p>
             <a:r>
               <a:t>El catch vacio, ese catch (Exception e) { } que aparece cuando VS Code ofrece en la bombilla 'Surround with try/catch' y el estudiante borra el contenido para que no moleste, es el error mas caro del curso. Silencia la falla pero no la arregla: el objeto queda a medio construir, la mascota nunca se agrego a la lista, el usuario cree que guardo y el error reaparece tres pantallas mas adelante como un NullPointerException que no tiene nada que ver con la causa real. Manejar una excepcion significa hacer al menos una de cuatro cosas: informarle al usuario en su idioma, registrar el problema para poder repararlo despues, asumir un valor por defecto que este documentado, o relanzar la excepcion envuelta en otra con mas contexto. Ojo: e.printStackTrace() tampoco es manejar, es apenas dejar una nota en una consola que el usuario final nunca ve. Y la mejor excepcion es la que no ocurre: validar antes de convertir (revisar null, aplicar trim, verificar isEmpty y comprobar el rango) evita el 80 por ciento de los try-catch del sistema de la clinica y hace que el codigo se lea como las reglas del negocio.</a:t>
-            </a:r>
-          </a:p>
-        </p:txBody>
-      </p:sp>
-      <p:sp>
-        <p:nvSpPr>
-          <p:cNvPr id="4" name="Slide Number Placeholder 3"/>
-          <p:cNvSpPr>
-            <a:spLocks noGrp="1"/>
-          </p:cNvSpPr>
-          <p:nvPr>
-            <p:ph type="sldNum" idx="5" sz="quarter"/>
-          </p:nvPr>
-        </p:nvSpPr>
-        <p:spPr/>
-      </p:sp>
-    </p:spTree>
-  </p:cSld>
-  <p:clrMapOvr>
-    <a:masterClrMapping/>
-  </p:clrMapOvr>
-</p:notes>
-</file>
-
-<file path=ppt/notesSlides/notesSlide6.xml><?xml version="1.0" encoding="utf-8"?>
-<p:notes xmlns:a="http://schemas.openxmlformats.org/drawingml/2006/main" xmlns:p="http://schemas.openxmlformats.org/presentationml/2006/main" xmlns:r="http://schemas.openxmlformats.org/officeDocument/2006/relationships">
-  <p:cSld>
-    <p:spTree>
-      <p:nvGrpSpPr>
-        <p:cNvPr id="1" name=""/>
-        <p:cNvGrpSpPr/>
-        <p:nvPr/>
-      </p:nvGrpSpPr>
-      <p:grpSpPr>
-        <a:xfrm>
-          <a:off x="0" y="0"/>
-          <a:ext cx="0" cy="0"/>
-          <a:chOff x="0" y="0"/>
-          <a:chExt cx="0" cy="0"/>
-        </a:xfrm>
-      </p:grpSpPr>
-      <p:sp>
-        <p:nvSpPr>
-          <p:cNvPr id="2" name="Slide Image Placeholder 1"/>
-          <p:cNvSpPr>
-            <a:spLocks noGrp="1"/>
-          </p:cNvSpPr>
-          <p:nvPr>
-            <p:ph type="sldImg" idx="2"/>
-          </p:nvPr>
-        </p:nvSpPr>
-        <p:spPr/>
-      </p:sp>
-      <p:sp>
-        <p:nvSpPr>
-          <p:cNvPr id="3" name="Notes Placeholder 2"/>
-          <p:cNvSpPr>
-            <a:spLocks noGrp="1"/>
-          </p:cNvSpPr>
-          <p:nvPr>
-            <p:ph type="body" idx="3" sz="quarter"/>
-          </p:nvPr>
-        </p:nvSpPr>
-        <p:spPr/>
-        <p:txBody>
-          <a:bodyPr/>
-          <a:lstStyle/>
-          <a:p>
-            <a:r>
-              <a:t>TEXTO COMPLETO DE LA LÁMINA (se proyecta resumido):</a:t>
-            </a:r>
-          </a:p>
-          <a:p/>
-          <a:p>
-            <a:r>
-              <a:t>Herramienta: Visual Studio Code (Java)</a:t>
-            </a:r>
-          </a:p>
-          <a:p/>
-          <a:p>
-            <a:r>
-              <a:t>Demo: El docente escribe 'tres' en el campo edad, muestra la aplicacion reventando con el stack trace rojo, y en vivo la envuelve en try-catch hasta que responde con un aviso amable.</a:t>
-            </a:r>
-          </a:p>
-          <a:p/>
-          <a:p>
-            <a:r>
-              <a:t>Mismo dominio de la clinica — no otro ejemplo.</a:t>
             </a:r>
           </a:p>
         </p:txBody>
@@ -10361,118 +10273,14 @@
       </p:sp>
       <p:sp>
         <p:nvSpPr>
-          <p:cNvPr id="5" name="Rounded Rectangle 4"/>
-          <p:cNvSpPr/>
-          <p:nvPr/>
-        </p:nvSpPr>
-        <p:spPr>
-          <a:xfrm>
-            <a:off x="5797149" y="1573813"/>
-            <a:ext cx="6010497" cy="4057845"/>
-          </a:xfrm>
-          <a:prstGeom prst="roundRect">
-            <a:avLst>
-              <a:gd name="adj" fmla="val 4000"/>
-            </a:avLst>
-          </a:prstGeom>
-          <a:solidFill>
-            <a:srgbClr val="E8EEF4"/>
-          </a:solidFill>
-          <a:ln>
-            <a:noFill/>
-          </a:ln>
-        </p:spPr>
-        <p:style>
-          <a:lnRef idx="1">
-            <a:schemeClr val="accent1"/>
-          </a:lnRef>
-          <a:fillRef idx="3">
-            <a:schemeClr val="accent1"/>
-          </a:fillRef>
-          <a:effectRef idx="2">
-            <a:schemeClr val="accent1"/>
-          </a:effectRef>
-          <a:fontRef idx="minor">
-            <a:schemeClr val="lt1"/>
-          </a:fontRef>
-        </p:style>
-        <p:txBody>
-          <a:bodyPr rtlCol="0" anchor="ctr"/>
-          <a:lstStyle/>
-          <a:p>
-            <a:pPr algn="ctr"/>
-          </a:p>
-        </p:txBody>
-      </p:sp>
-      <p:pic>
-        <p:nvPicPr>
-          <p:cNvPr id="6" name="Picture 5" descr="laptop-code-live-demo.jpg"/>
-          <p:cNvPicPr>
-            <a:picLocks noChangeAspect="1"/>
-          </p:cNvPicPr>
-          <p:nvPr/>
-        </p:nvPicPr>
-        <p:blipFill>
-          <a:blip r:embed="rId2"/>
-          <a:stretch>
-            <a:fillRect/>
-          </a:stretch>
-        </p:blipFill>
-        <p:spPr>
-          <a:xfrm>
-            <a:off x="5870301" y="1646965"/>
-            <a:ext cx="5864193" cy="3911541"/>
-          </a:xfrm>
-          <a:prstGeom prst="rect">
-            <a:avLst/>
-          </a:prstGeom>
-        </p:spPr>
-      </p:pic>
-      <p:sp>
-        <p:nvSpPr>
-          <p:cNvPr id="7" name="TextBox 6"/>
+          <p:cNvPr id="5" name="TextBox 4"/>
           <p:cNvSpPr txBox="1"/>
           <p:nvPr/>
         </p:nvSpPr>
         <p:spPr>
           <a:xfrm>
-            <a:off x="5870301" y="5961888"/>
-            <a:ext cx="5864193" cy="320040"/>
-          </a:xfrm>
-          <a:prstGeom prst="rect">
-            <a:avLst/>
-          </a:prstGeom>
-          <a:noFill/>
-        </p:spPr>
-        <p:txBody>
-          <a:bodyPr wrap="square">
-            <a:spAutoFit/>
-          </a:bodyPr>
-          <a:lstStyle/>
-          <a:p>
-            <a:pPr algn="ctr"/>
-            <a:r>
-              <a:rPr sz="1100" b="0" i="1">
-                <a:solidFill>
-                  <a:srgbClr val="666666"/>
-                </a:solidFill>
-                <a:latin typeface="Calibri"/>
-              </a:rPr>
-              <a:t>Foto: olia danilevich · Pexels</a:t>
-            </a:r>
-          </a:p>
-        </p:txBody>
-      </p:sp>
-      <p:sp>
-        <p:nvSpPr>
-          <p:cNvPr id="8" name="TextBox 7"/>
-          <p:cNvSpPr txBox="1"/>
-          <p:nvPr/>
-        </p:nvSpPr>
-        <p:spPr>
-          <a:xfrm>
-            <a:off x="457200" y="1353312"/>
-            <a:ext cx="5093061" cy="5047488"/>
+            <a:off x="457200" y="1170432"/>
+            <a:ext cx="11277295" cy="5230368"/>
           </a:xfrm>
           <a:prstGeom prst="rect">
             <a:avLst/>
@@ -10542,6 +10350,15 @@
               </a:rPr>
               <a:t>Demo:</a:t>
             </a:r>
+            <a:r>
+              <a:rPr sz="2000" b="0" i="0">
+                <a:solidFill>
+                  <a:srgbClr val="333333"/>
+                </a:solidFill>
+                <a:latin typeface="Calibri"/>
+              </a:rPr>
+              <a:t> El docente escribe 'tres' en el campo edad, muestra la aplicacion reventando con el stack trace rojo, y en vivo la envuelve en try-catch hasta que responde con un aviso amable.</a:t>
+            </a:r>
           </a:p>
           <a:p>
             <a:pPr>
@@ -10563,7 +10380,7 @@
       </p:sp>
       <p:sp>
         <p:nvSpPr>
-          <p:cNvPr id="9" name="TextBox 8"/>
+          <p:cNvPr id="6" name="TextBox 5"/>
           <p:cNvSpPr txBox="1"/>
           <p:nvPr/>
         </p:nvSpPr>
@@ -10976,118 +10793,14 @@
       </p:sp>
       <p:sp>
         <p:nvSpPr>
-          <p:cNvPr id="5" name="Rounded Rectangle 4"/>
-          <p:cNvSpPr/>
-          <p:nvPr/>
-        </p:nvSpPr>
-        <p:spPr>
-          <a:xfrm>
-            <a:off x="5797149" y="1573813"/>
-            <a:ext cx="6010497" cy="4057845"/>
-          </a:xfrm>
-          <a:prstGeom prst="roundRect">
-            <a:avLst>
-              <a:gd name="adj" fmla="val 4000"/>
-            </a:avLst>
-          </a:prstGeom>
-          <a:solidFill>
-            <a:srgbClr val="E8EEF4"/>
-          </a:solidFill>
-          <a:ln>
-            <a:noFill/>
-          </a:ln>
-        </p:spPr>
-        <p:style>
-          <a:lnRef idx="1">
-            <a:schemeClr val="accent1"/>
-          </a:lnRef>
-          <a:fillRef idx="3">
-            <a:schemeClr val="accent1"/>
-          </a:fillRef>
-          <a:effectRef idx="2">
-            <a:schemeClr val="accent1"/>
-          </a:effectRef>
-          <a:fontRef idx="minor">
-            <a:schemeClr val="lt1"/>
-          </a:fontRef>
-        </p:style>
-        <p:txBody>
-          <a:bodyPr rtlCol="0" anchor="ctr"/>
-          <a:lstStyle/>
-          <a:p>
-            <a:pPr algn="ctr"/>
-          </a:p>
-        </p:txBody>
-      </p:sp>
-      <p:pic>
-        <p:nvPicPr>
-          <p:cNvPr id="6" name="Picture 5" descr="notebook-planning-desk-coffee.jpg"/>
-          <p:cNvPicPr>
-            <a:picLocks noChangeAspect="1"/>
-          </p:cNvPicPr>
-          <p:nvPr/>
-        </p:nvPicPr>
-        <p:blipFill>
-          <a:blip r:embed="rId2"/>
-          <a:stretch>
-            <a:fillRect/>
-          </a:stretch>
-        </p:blipFill>
-        <p:spPr>
-          <a:xfrm>
-            <a:off x="5870301" y="1646965"/>
-            <a:ext cx="5864193" cy="3911541"/>
-          </a:xfrm>
-          <a:prstGeom prst="rect">
-            <a:avLst/>
-          </a:prstGeom>
-        </p:spPr>
-      </p:pic>
-      <p:sp>
-        <p:nvSpPr>
-          <p:cNvPr id="7" name="TextBox 6"/>
+          <p:cNvPr id="5" name="TextBox 4"/>
           <p:cNvSpPr txBox="1"/>
           <p:nvPr/>
         </p:nvSpPr>
         <p:spPr>
           <a:xfrm>
-            <a:off x="5870301" y="5961888"/>
-            <a:ext cx="5864193" cy="320040"/>
-          </a:xfrm>
-          <a:prstGeom prst="rect">
-            <a:avLst/>
-          </a:prstGeom>
-          <a:noFill/>
-        </p:spPr>
-        <p:txBody>
-          <a:bodyPr wrap="square">
-            <a:spAutoFit/>
-          </a:bodyPr>
-          <a:lstStyle/>
-          <a:p>
-            <a:pPr algn="ctr"/>
-            <a:r>
-              <a:rPr sz="1100" b="0" i="1">
-                <a:solidFill>
-                  <a:srgbClr val="666666"/>
-                </a:solidFill>
-                <a:latin typeface="Calibri"/>
-              </a:rPr>
-              <a:t>Foto: Cup of  Couple · Pexels</a:t>
-            </a:r>
-          </a:p>
-        </p:txBody>
-      </p:sp>
-      <p:sp>
-        <p:nvSpPr>
-          <p:cNvPr id="8" name="TextBox 7"/>
-          <p:cNvSpPr txBox="1"/>
-          <p:nvPr/>
-        </p:nvSpPr>
-        <p:spPr>
-          <a:xfrm>
-            <a:off x="457200" y="1353312"/>
-            <a:ext cx="5093061" cy="5047488"/>
+            <a:off x="457200" y="1170432"/>
+            <a:ext cx="11277295" cy="5230368"/>
           </a:xfrm>
           <a:prstGeom prst="rect">
             <a:avLst/>
@@ -11212,7 +10925,7 @@
       </p:sp>
       <p:sp>
         <p:nvSpPr>
-          <p:cNvPr id="9" name="TextBox 8"/>
+          <p:cNvPr id="6" name="TextBox 5"/>
           <p:cNvSpPr txBox="1"/>
           <p:nvPr/>
         </p:nvSpPr>

--- a/Programacion II/Clases/Clase 13 - Control de excepciones/Presentacion.pptx
+++ b/Programacion II/Clases/Clase 13 - Control de excepciones/Presentacion.pptx
@@ -828,6 +828,94 @@
           <a:p>
             <a:r>
               <a:t>El catch vacio, ese catch (Exception e) { } que aparece cuando VS Code ofrece en la bombilla 'Surround with try/catch' y el estudiante borra el contenido para que no moleste, es el error mas caro del curso. Silencia la falla pero no la arregla: el objeto queda a medio construir, la mascota nunca se agrego a la lista, el usuario cree que guardo y el error reaparece tres pantallas mas adelante como un NullPointerException que no tiene nada que ver con la causa real. Manejar una excepcion significa hacer al menos una de cuatro cosas: informarle al usuario en su idioma, registrar el problema para poder repararlo despues, asumir un valor por defecto que este documentado, o relanzar la excepcion envuelta en otra con mas contexto. Ojo: e.printStackTrace() tampoco es manejar, es apenas dejar una nota en una consola que el usuario final nunca ve. Y la mejor excepcion es la que no ocurre: validar antes de convertir (revisar null, aplicar trim, verificar isEmpty y comprobar el rango) evita el 80 por ciento de los try-catch del sistema de la clinica y hace que el codigo se lea como las reglas del negocio.</a:t>
+            </a:r>
+          </a:p>
+        </p:txBody>
+      </p:sp>
+      <p:sp>
+        <p:nvSpPr>
+          <p:cNvPr id="4" name="Slide Number Placeholder 3"/>
+          <p:cNvSpPr>
+            <a:spLocks noGrp="1"/>
+          </p:cNvSpPr>
+          <p:nvPr>
+            <p:ph type="sldNum" idx="5" sz="quarter"/>
+          </p:nvPr>
+        </p:nvSpPr>
+        <p:spPr/>
+      </p:sp>
+    </p:spTree>
+  </p:cSld>
+  <p:clrMapOvr>
+    <a:masterClrMapping/>
+  </p:clrMapOvr>
+</p:notes>
+</file>
+
+<file path=ppt/notesSlides/notesSlide6.xml><?xml version="1.0" encoding="utf-8"?>
+<p:notes xmlns:a="http://schemas.openxmlformats.org/drawingml/2006/main" xmlns:p="http://schemas.openxmlformats.org/presentationml/2006/main" xmlns:r="http://schemas.openxmlformats.org/officeDocument/2006/relationships">
+  <p:cSld>
+    <p:spTree>
+      <p:nvGrpSpPr>
+        <p:cNvPr id="1" name=""/>
+        <p:cNvGrpSpPr/>
+        <p:nvPr/>
+      </p:nvGrpSpPr>
+      <p:grpSpPr>
+        <a:xfrm>
+          <a:off x="0" y="0"/>
+          <a:ext cx="0" cy="0"/>
+          <a:chOff x="0" y="0"/>
+          <a:chExt cx="0" cy="0"/>
+        </a:xfrm>
+      </p:grpSpPr>
+      <p:sp>
+        <p:nvSpPr>
+          <p:cNvPr id="2" name="Slide Image Placeholder 1"/>
+          <p:cNvSpPr>
+            <a:spLocks noGrp="1"/>
+          </p:cNvSpPr>
+          <p:nvPr>
+            <p:ph type="sldImg" idx="2"/>
+          </p:nvPr>
+        </p:nvSpPr>
+        <p:spPr/>
+      </p:sp>
+      <p:sp>
+        <p:nvSpPr>
+          <p:cNvPr id="3" name="Notes Placeholder 2"/>
+          <p:cNvSpPr>
+            <a:spLocks noGrp="1"/>
+          </p:cNvSpPr>
+          <p:nvPr>
+            <p:ph type="body" idx="3" sz="quarter"/>
+          </p:nvPr>
+        </p:nvSpPr>
+        <p:spPr/>
+        <p:txBody>
+          <a:bodyPr/>
+          <a:lstStyle/>
+          <a:p>
+            <a:r>
+              <a:t>TEXTO COMPLETO DE LA LÁMINA (se proyecta resumido):</a:t>
+            </a:r>
+          </a:p>
+          <a:p/>
+          <a:p>
+            <a:r>
+              <a:t>Herramienta: Visual Studio Code (Java)</a:t>
+            </a:r>
+          </a:p>
+          <a:p/>
+          <a:p>
+            <a:r>
+              <a:t>Demo: El docente escribe 'tres' en el campo edad, muestra la aplicacion reventando con el stack trace rojo, y en vivo la envuelve en try-catch hasta que responde con un aviso amable.</a:t>
+            </a:r>
+          </a:p>
+          <a:p/>
+          <a:p>
+            <a:r>
+              <a:t>Mismo dominio de la clinica — no otro ejemplo.</a:t>
             </a:r>
           </a:p>
         </p:txBody>
@@ -10273,14 +10361,83 @@
       </p:sp>
       <p:sp>
         <p:nvSpPr>
-          <p:cNvPr id="5" name="TextBox 4"/>
+          <p:cNvPr id="5" name="Rounded Rectangle 4"/>
+          <p:cNvSpPr/>
+          <p:nvPr/>
+        </p:nvSpPr>
+        <p:spPr>
+          <a:xfrm>
+            <a:off x="5797149" y="1343926"/>
+            <a:ext cx="6010497" cy="4837658"/>
+          </a:xfrm>
+          <a:prstGeom prst="roundRect">
+            <a:avLst>
+              <a:gd name="adj" fmla="val 4000"/>
+            </a:avLst>
+          </a:prstGeom>
+          <a:solidFill>
+            <a:srgbClr val="E8EEF4"/>
+          </a:solidFill>
+          <a:ln>
+            <a:noFill/>
+          </a:ln>
+        </p:spPr>
+        <p:style>
+          <a:lnRef idx="1">
+            <a:schemeClr val="accent1"/>
+          </a:lnRef>
+          <a:fillRef idx="3">
+            <a:schemeClr val="accent1"/>
+          </a:fillRef>
+          <a:effectRef idx="2">
+            <a:schemeClr val="accent1"/>
+          </a:effectRef>
+          <a:fontRef idx="minor">
+            <a:schemeClr val="lt1"/>
+          </a:fontRef>
+        </p:style>
+        <p:txBody>
+          <a:bodyPr rtlCol="0" anchor="ctr"/>
+          <a:lstStyle/>
+          <a:p>
+            <a:pPr algn="ctr"/>
+          </a:p>
+        </p:txBody>
+      </p:sp>
+      <p:pic>
+        <p:nvPicPr>
+          <p:cNvPr id="6" name="Picture 5" descr="ilus-demo-paso1.png"/>
+          <p:cNvPicPr>
+            <a:picLocks noChangeAspect="1"/>
+          </p:cNvPicPr>
+          <p:nvPr/>
+        </p:nvPicPr>
+        <p:blipFill>
+          <a:blip r:embed="rId2"/>
+          <a:stretch>
+            <a:fillRect/>
+          </a:stretch>
+        </p:blipFill>
+        <p:spPr>
+          <a:xfrm>
+            <a:off x="5870301" y="1417078"/>
+            <a:ext cx="5864193" cy="4691354"/>
+          </a:xfrm>
+          <a:prstGeom prst="rect">
+            <a:avLst/>
+          </a:prstGeom>
+        </p:spPr>
+      </p:pic>
+      <p:sp>
+        <p:nvSpPr>
+          <p:cNvPr id="7" name="TextBox 6"/>
           <p:cNvSpPr txBox="1"/>
           <p:nvPr/>
         </p:nvSpPr>
         <p:spPr>
           <a:xfrm>
-            <a:off x="457200" y="1170432"/>
-            <a:ext cx="11277295" cy="5230368"/>
+            <a:off x="457200" y="1353312"/>
+            <a:ext cx="5093061" cy="5047488"/>
           </a:xfrm>
           <a:prstGeom prst="rect">
             <a:avLst/>
@@ -10357,7 +10514,7 @@
                 </a:solidFill>
                 <a:latin typeface="Calibri"/>
               </a:rPr>
-              <a:t> El docente escribe 'tres' en el campo edad, muestra la aplicacion reventando con el stack trace rojo, y en vivo la envuelve en try-catch hasta que responde con un aviso amable.</a:t>
+              <a:t> El docente escribe 'tres' en el campo edad, muestra la aplicacion reventando con el stack trace rojo, y en vivo la envuelve en try-catch…</a:t>
             </a:r>
           </a:p>
           <a:p>
@@ -10380,7 +10537,7 @@
       </p:sp>
       <p:sp>
         <p:nvSpPr>
-          <p:cNvPr id="6" name="TextBox 5"/>
+          <p:cNvPr id="8" name="TextBox 7"/>
           <p:cNvSpPr txBox="1"/>
           <p:nvPr/>
         </p:nvSpPr>

--- a/Programacion II/Clases/Clase 13 - Control de excepciones/Presentacion.pptx
+++ b/Programacion II/Clases/Clase 13 - Control de excepciones/Presentacion.pptx
@@ -4453,7 +4453,7 @@
         <p:spPr>
           <a:xfrm>
             <a:off x="457200" y="1261872"/>
-            <a:ext cx="11277295" cy="4333711"/>
+            <a:ext cx="11277295" cy="4101167"/>
           </a:xfrm>
           <a:prstGeom prst="roundRect">
             <a:avLst>
@@ -4703,7 +4703,7 @@
         <p:spPr>
           <a:xfrm>
             <a:off x="685800" y="1719072"/>
-            <a:ext cx="502920" cy="3739351"/>
+            <a:ext cx="502920" cy="3506807"/>
           </a:xfrm>
           <a:prstGeom prst="rect">
             <a:avLst/>
@@ -4718,11 +4718,11 @@
           <a:p>
             <a:pPr algn="r">
               <a:spcAft>
-                <a:spcPts val="278"/>
+                <a:spcPts val="257"/>
               </a:spcAft>
             </a:pPr>
             <a:r>
-              <a:rPr sz="1300" i="0" b="0">
+              <a:rPr sz="1200" i="0" b="0">
                 <a:solidFill>
                   <a:srgbClr val="858585"/>
                 </a:solidFill>
@@ -4734,11 +4734,11 @@
           <a:p>
             <a:pPr algn="r">
               <a:spcAft>
-                <a:spcPts val="278"/>
+                <a:spcPts val="257"/>
               </a:spcAft>
             </a:pPr>
             <a:r>
-              <a:rPr sz="1300" i="0" b="0">
+              <a:rPr sz="1200" i="0" b="0">
                 <a:solidFill>
                   <a:srgbClr val="858585"/>
                 </a:solidFill>
@@ -4750,11 +4750,11 @@
           <a:p>
             <a:pPr algn="r">
               <a:spcAft>
-                <a:spcPts val="278"/>
+                <a:spcPts val="257"/>
               </a:spcAft>
             </a:pPr>
             <a:r>
-              <a:rPr sz="1300" i="0" b="0">
+              <a:rPr sz="1200" i="0" b="0">
                 <a:solidFill>
                   <a:srgbClr val="858585"/>
                 </a:solidFill>
@@ -4766,11 +4766,11 @@
           <a:p>
             <a:pPr algn="r">
               <a:spcAft>
-                <a:spcPts val="278"/>
+                <a:spcPts val="257"/>
               </a:spcAft>
             </a:pPr>
             <a:r>
-              <a:rPr sz="1300" i="0" b="0">
+              <a:rPr sz="1200" i="0" b="0">
                 <a:solidFill>
                   <a:srgbClr val="858585"/>
                 </a:solidFill>
@@ -4782,11 +4782,11 @@
           <a:p>
             <a:pPr algn="r">
               <a:spcAft>
-                <a:spcPts val="278"/>
+                <a:spcPts val="257"/>
               </a:spcAft>
             </a:pPr>
             <a:r>
-              <a:rPr sz="1300" i="0" b="0">
+              <a:rPr sz="1200" i="0" b="0">
                 <a:solidFill>
                   <a:srgbClr val="858585"/>
                 </a:solidFill>
@@ -4798,11 +4798,11 @@
           <a:p>
             <a:pPr algn="r">
               <a:spcAft>
-                <a:spcPts val="278"/>
+                <a:spcPts val="257"/>
               </a:spcAft>
             </a:pPr>
             <a:r>
-              <a:rPr sz="1300" i="0" b="0">
+              <a:rPr sz="1200" i="0" b="0">
                 <a:solidFill>
                   <a:srgbClr val="858585"/>
                 </a:solidFill>
@@ -4814,11 +4814,11 @@
           <a:p>
             <a:pPr algn="r">
               <a:spcAft>
-                <a:spcPts val="278"/>
+                <a:spcPts val="257"/>
               </a:spcAft>
             </a:pPr>
             <a:r>
-              <a:rPr sz="1300" i="0" b="0">
+              <a:rPr sz="1200" i="0" b="0">
                 <a:solidFill>
                   <a:srgbClr val="858585"/>
                 </a:solidFill>
@@ -4830,11 +4830,11 @@
           <a:p>
             <a:pPr algn="r">
               <a:spcAft>
-                <a:spcPts val="278"/>
+                <a:spcPts val="257"/>
               </a:spcAft>
             </a:pPr>
             <a:r>
-              <a:rPr sz="1300" i="0" b="0">
+              <a:rPr sz="1200" i="0" b="0">
                 <a:solidFill>
                   <a:srgbClr val="858585"/>
                 </a:solidFill>
@@ -4846,11 +4846,11 @@
           <a:p>
             <a:pPr algn="r">
               <a:spcAft>
-                <a:spcPts val="278"/>
+                <a:spcPts val="257"/>
               </a:spcAft>
             </a:pPr>
             <a:r>
-              <a:rPr sz="1300" i="0" b="0">
+              <a:rPr sz="1200" i="0" b="0">
                 <a:solidFill>
                   <a:srgbClr val="858585"/>
                 </a:solidFill>
@@ -4862,11 +4862,11 @@
           <a:p>
             <a:pPr algn="r">
               <a:spcAft>
-                <a:spcPts val="278"/>
+                <a:spcPts val="257"/>
               </a:spcAft>
             </a:pPr>
             <a:r>
-              <a:rPr sz="1300" i="0" b="0">
+              <a:rPr sz="1200" i="0" b="0">
                 <a:solidFill>
                   <a:srgbClr val="858585"/>
                 </a:solidFill>
@@ -4878,11 +4878,11 @@
           <a:p>
             <a:pPr algn="r">
               <a:spcAft>
-                <a:spcPts val="278"/>
+                <a:spcPts val="257"/>
               </a:spcAft>
             </a:pPr>
             <a:r>
-              <a:rPr sz="1300" i="0" b="0">
+              <a:rPr sz="1200" i="0" b="0">
                 <a:solidFill>
                   <a:srgbClr val="858585"/>
                 </a:solidFill>
@@ -4894,11 +4894,11 @@
           <a:p>
             <a:pPr algn="r">
               <a:spcAft>
-                <a:spcPts val="278"/>
+                <a:spcPts val="257"/>
               </a:spcAft>
             </a:pPr>
             <a:r>
-              <a:rPr sz="1300" i="0" b="0">
+              <a:rPr sz="1200" i="0" b="0">
                 <a:solidFill>
                   <a:srgbClr val="858585"/>
                 </a:solidFill>
@@ -4910,11 +4910,11 @@
           <a:p>
             <a:pPr algn="r">
               <a:spcAft>
-                <a:spcPts val="278"/>
+                <a:spcPts val="257"/>
               </a:spcAft>
             </a:pPr>
             <a:r>
-              <a:rPr sz="1300" i="0" b="0">
+              <a:rPr sz="1200" i="0" b="0">
                 <a:solidFill>
                   <a:srgbClr val="858585"/>
                 </a:solidFill>
@@ -4926,11 +4926,11 @@
           <a:p>
             <a:pPr algn="r">
               <a:spcAft>
-                <a:spcPts val="278"/>
+                <a:spcPts val="257"/>
               </a:spcAft>
             </a:pPr>
             <a:r>
-              <a:rPr sz="1300" i="0" b="0">
+              <a:rPr sz="1200" i="0" b="0">
                 <a:solidFill>
                   <a:srgbClr val="858585"/>
                 </a:solidFill>
@@ -4942,11 +4942,11 @@
           <a:p>
             <a:pPr algn="r">
               <a:spcAft>
-                <a:spcPts val="278"/>
+                <a:spcPts val="257"/>
               </a:spcAft>
             </a:pPr>
             <a:r>
-              <a:rPr sz="1300" i="0" b="0">
+              <a:rPr sz="1200" i="0" b="0">
                 <a:solidFill>
                   <a:srgbClr val="858585"/>
                 </a:solidFill>
@@ -4966,7 +4966,7 @@
         <p:spPr>
           <a:xfrm>
             <a:off x="1188720" y="1719072"/>
-            <a:ext cx="10271455" cy="3739351"/>
+            <a:ext cx="10271455" cy="3506807"/>
           </a:xfrm>
           <a:prstGeom prst="rect">
             <a:avLst/>
@@ -4981,11 +4981,11 @@
           <a:p>
             <a:pPr>
               <a:spcAft>
-                <a:spcPts val="278"/>
+                <a:spcPts val="257"/>
               </a:spcAft>
             </a:pPr>
             <a:r>
-              <a:rPr sz="1300" i="1" b="0">
+              <a:rPr sz="1200" i="1" b="0">
                 <a:solidFill>
                   <a:srgbClr val="6A9955"/>
                 </a:solidFill>
@@ -4997,11 +4997,11 @@
           <a:p>
             <a:pPr>
               <a:spcAft>
-                <a:spcPts val="278"/>
+                <a:spcPts val="257"/>
               </a:spcAft>
             </a:pPr>
             <a:r>
-              <a:rPr sz="1300" i="0" b="0">
+              <a:rPr sz="1200" i="0" b="0">
                 <a:solidFill>
                   <a:srgbClr val="569CD6"/>
                 </a:solidFill>
@@ -5010,7 +5010,7 @@
               <a:t>private</a:t>
             </a:r>
             <a:r>
-              <a:rPr sz="1300" i="0" b="0">
+              <a:rPr sz="1200" i="0" b="0">
                 <a:solidFill>
                   <a:srgbClr val="D4D4D4"/>
                 </a:solidFill>
@@ -5019,7 +5019,7 @@
               <a:t> </a:t>
             </a:r>
             <a:r>
-              <a:rPr sz="1300" i="0" b="0">
+              <a:rPr sz="1200" i="0" b="0">
                 <a:solidFill>
                   <a:srgbClr val="569CD6"/>
                 </a:solidFill>
@@ -5028,7 +5028,7 @@
               <a:t>static</a:t>
             </a:r>
             <a:r>
-              <a:rPr sz="1300" i="0" b="0">
+              <a:rPr sz="1200" i="0" b="0">
                 <a:solidFill>
                   <a:srgbClr val="D4D4D4"/>
                 </a:solidFill>
@@ -5037,7 +5037,7 @@
               <a:t> </a:t>
             </a:r>
             <a:r>
-              <a:rPr sz="1300" i="0" b="0">
+              <a:rPr sz="1200" i="0" b="0">
                 <a:solidFill>
                   <a:srgbClr val="4EC9B0"/>
                 </a:solidFill>
@@ -5046,7 +5046,7 @@
               <a:t>List</a:t>
             </a:r>
             <a:r>
-              <a:rPr sz="1300" i="0" b="0">
+              <a:rPr sz="1200" i="0" b="0">
                 <a:solidFill>
                   <a:srgbClr val="D4D4D4"/>
                 </a:solidFill>
@@ -5055,7 +5055,7 @@
               <a:t>&lt;</a:t>
             </a:r>
             <a:r>
-              <a:rPr sz="1300" i="0" b="0">
+              <a:rPr sz="1200" i="0" b="0">
                 <a:solidFill>
                   <a:srgbClr val="D4D4D4"/>
                 </a:solidFill>
@@ -5064,7 +5064,7 @@
               <a:t>Mascota</a:t>
             </a:r>
             <a:r>
-              <a:rPr sz="1300" i="0" b="0">
+              <a:rPr sz="1200" i="0" b="0">
                 <a:solidFill>
                   <a:srgbClr val="D4D4D4"/>
                 </a:solidFill>
@@ -5073,7 +5073,7 @@
               <a:t>&gt; </a:t>
             </a:r>
             <a:r>
-              <a:rPr sz="1300" i="0" b="0">
+              <a:rPr sz="1200" i="0" b="0">
                 <a:solidFill>
                   <a:srgbClr val="DCDCAA"/>
                 </a:solidFill>
@@ -5082,7 +5082,7 @@
               <a:t>cargar</a:t>
             </a:r>
             <a:r>
-              <a:rPr sz="1300" i="0" b="0">
+              <a:rPr sz="1200" i="0" b="0">
                 <a:solidFill>
                   <a:srgbClr val="D4D4D4"/>
                 </a:solidFill>
@@ -5091,7 +5091,7 @@
               <a:t>(</a:t>
             </a:r>
             <a:r>
-              <a:rPr sz="1300" i="0" b="0">
+              <a:rPr sz="1200" i="0" b="0">
                 <a:solidFill>
                   <a:srgbClr val="4EC9B0"/>
                 </a:solidFill>
@@ -5100,7 +5100,7 @@
               <a:t>String</a:t>
             </a:r>
             <a:r>
-              <a:rPr sz="1300" i="0" b="0">
+              <a:rPr sz="1200" i="0" b="0">
                 <a:solidFill>
                   <a:srgbClr val="D4D4D4"/>
                 </a:solidFill>
@@ -5109,7 +5109,7 @@
               <a:t> </a:t>
             </a:r>
             <a:r>
-              <a:rPr sz="1300" i="0" b="0">
+              <a:rPr sz="1200" i="0" b="0">
                 <a:solidFill>
                   <a:srgbClr val="D4D4D4"/>
                 </a:solidFill>
@@ -5118,7 +5118,7 @@
               <a:t>ruta</a:t>
             </a:r>
             <a:r>
-              <a:rPr sz="1300" i="0" b="0">
+              <a:rPr sz="1200" i="0" b="0">
                 <a:solidFill>
                   <a:srgbClr val="D4D4D4"/>
                 </a:solidFill>
@@ -5130,11 +5130,11 @@
           <a:p>
             <a:pPr>
               <a:spcAft>
-                <a:spcPts val="278"/>
+                <a:spcPts val="257"/>
               </a:spcAft>
             </a:pPr>
             <a:r>
-              <a:rPr sz="1300" i="0" b="0">
+              <a:rPr sz="1200" i="0" b="0">
                 <a:solidFill>
                   <a:srgbClr val="D4D4D4"/>
                 </a:solidFill>
@@ -5143,7 +5143,7 @@
               <a:t>    </a:t>
             </a:r>
             <a:r>
-              <a:rPr sz="1300" i="0" b="0">
+              <a:rPr sz="1200" i="0" b="0">
                 <a:solidFill>
                   <a:srgbClr val="4EC9B0"/>
                 </a:solidFill>
@@ -5152,7 +5152,7 @@
               <a:t>List</a:t>
             </a:r>
             <a:r>
-              <a:rPr sz="1300" i="0" b="0">
+              <a:rPr sz="1200" i="0" b="0">
                 <a:solidFill>
                   <a:srgbClr val="D4D4D4"/>
                 </a:solidFill>
@@ -5161,7 +5161,7 @@
               <a:t>&lt;</a:t>
             </a:r>
             <a:r>
-              <a:rPr sz="1300" i="0" b="0">
+              <a:rPr sz="1200" i="0" b="0">
                 <a:solidFill>
                   <a:srgbClr val="D4D4D4"/>
                 </a:solidFill>
@@ -5170,7 +5170,7 @@
               <a:t>Mascota</a:t>
             </a:r>
             <a:r>
-              <a:rPr sz="1300" i="0" b="0">
+              <a:rPr sz="1200" i="0" b="0">
                 <a:solidFill>
                   <a:srgbClr val="D4D4D4"/>
                 </a:solidFill>
@@ -5179,7 +5179,7 @@
               <a:t>&gt; </a:t>
             </a:r>
             <a:r>
-              <a:rPr sz="1300" i="0" b="0">
+              <a:rPr sz="1200" i="0" b="0">
                 <a:solidFill>
                   <a:srgbClr val="D4D4D4"/>
                 </a:solidFill>
@@ -5188,7 +5188,7 @@
               <a:t>lista</a:t>
             </a:r>
             <a:r>
-              <a:rPr sz="1300" i="0" b="0">
+              <a:rPr sz="1200" i="0" b="0">
                 <a:solidFill>
                   <a:srgbClr val="D4D4D4"/>
                 </a:solidFill>
@@ -5197,7 +5197,7 @@
               <a:t> = </a:t>
             </a:r>
             <a:r>
-              <a:rPr sz="1300" i="0" b="0">
+              <a:rPr sz="1200" i="0" b="0">
                 <a:solidFill>
                   <a:srgbClr val="569CD6"/>
                 </a:solidFill>
@@ -5206,7 +5206,7 @@
               <a:t>new</a:t>
             </a:r>
             <a:r>
-              <a:rPr sz="1300" i="0" b="0">
+              <a:rPr sz="1200" i="0" b="0">
                 <a:solidFill>
                   <a:srgbClr val="D4D4D4"/>
                 </a:solidFill>
@@ -5215,7 +5215,7 @@
               <a:t> </a:t>
             </a:r>
             <a:r>
-              <a:rPr sz="1300" i="0" b="0">
+              <a:rPr sz="1200" i="0" b="0">
                 <a:solidFill>
                   <a:srgbClr val="4EC9B0"/>
                 </a:solidFill>
@@ -5224,7 +5224,7 @@
               <a:t>ArrayList</a:t>
             </a:r>
             <a:r>
-              <a:rPr sz="1300" i="0" b="0">
+              <a:rPr sz="1200" i="0" b="0">
                 <a:solidFill>
                   <a:srgbClr val="D4D4D4"/>
                 </a:solidFill>
@@ -5236,11 +5236,11 @@
           <a:p>
             <a:pPr>
               <a:spcAft>
-                <a:spcPts val="278"/>
+                <a:spcPts val="257"/>
               </a:spcAft>
             </a:pPr>
             <a:r>
-              <a:rPr sz="1300" i="0" b="0">
+              <a:rPr sz="1200" i="0" b="0">
                 <a:solidFill>
                   <a:srgbClr val="D4D4D4"/>
                 </a:solidFill>
@@ -5249,7 +5249,7 @@
               <a:t>    </a:t>
             </a:r>
             <a:r>
-              <a:rPr sz="1300" i="0" b="0">
+              <a:rPr sz="1200" i="0" b="0">
                 <a:solidFill>
                   <a:srgbClr val="569CD6"/>
                 </a:solidFill>
@@ -5258,7 +5258,7 @@
               <a:t>try</a:t>
             </a:r>
             <a:r>
-              <a:rPr sz="1300" i="0" b="0">
+              <a:rPr sz="1200" i="0" b="0">
                 <a:solidFill>
                   <a:srgbClr val="D4D4D4"/>
                 </a:solidFill>
@@ -5267,7 +5267,7 @@
               <a:t> (</a:t>
             </a:r>
             <a:r>
-              <a:rPr sz="1300" i="0" b="0">
+              <a:rPr sz="1200" i="0" b="0">
                 <a:solidFill>
                   <a:srgbClr val="D4D4D4"/>
                 </a:solidFill>
@@ -5276,7 +5276,7 @@
               <a:t>BufferedReader</a:t>
             </a:r>
             <a:r>
-              <a:rPr sz="1300" i="0" b="0">
+              <a:rPr sz="1200" i="0" b="0">
                 <a:solidFill>
                   <a:srgbClr val="D4D4D4"/>
                 </a:solidFill>
@@ -5285,7 +5285,7 @@
               <a:t> </a:t>
             </a:r>
             <a:r>
-              <a:rPr sz="1300" i="0" b="0">
+              <a:rPr sz="1200" i="0" b="0">
                 <a:solidFill>
                   <a:srgbClr val="D4D4D4"/>
                 </a:solidFill>
@@ -5294,7 +5294,7 @@
               <a:t>lector</a:t>
             </a:r>
             <a:r>
-              <a:rPr sz="1300" i="0" b="0">
+              <a:rPr sz="1200" i="0" b="0">
                 <a:solidFill>
                   <a:srgbClr val="D4D4D4"/>
                 </a:solidFill>
@@ -5303,7 +5303,7 @@
               <a:t> = </a:t>
             </a:r>
             <a:r>
-              <a:rPr sz="1300" i="0" b="0">
+              <a:rPr sz="1200" i="0" b="0">
                 <a:solidFill>
                   <a:srgbClr val="569CD6"/>
                 </a:solidFill>
@@ -5312,7 +5312,7 @@
               <a:t>new</a:t>
             </a:r>
             <a:r>
-              <a:rPr sz="1300" i="0" b="0">
+              <a:rPr sz="1200" i="0" b="0">
                 <a:solidFill>
                   <a:srgbClr val="D4D4D4"/>
                 </a:solidFill>
@@ -5321,7 +5321,7 @@
               <a:t> </a:t>
             </a:r>
             <a:r>
-              <a:rPr sz="1300" i="0" b="0">
+              <a:rPr sz="1200" i="0" b="0">
                 <a:solidFill>
                   <a:srgbClr val="4EC9B0"/>
                 </a:solidFill>
@@ -5330,7 +5330,7 @@
               <a:t>BufferedReader</a:t>
             </a:r>
             <a:r>
-              <a:rPr sz="1300" i="0" b="0">
+              <a:rPr sz="1200" i="0" b="0">
                 <a:solidFill>
                   <a:srgbClr val="D4D4D4"/>
                 </a:solidFill>
@@ -5339,7 +5339,7 @@
               <a:t>(</a:t>
             </a:r>
             <a:r>
-              <a:rPr sz="1300" i="0" b="0">
+              <a:rPr sz="1200" i="0" b="0">
                 <a:solidFill>
                   <a:srgbClr val="569CD6"/>
                 </a:solidFill>
@@ -5348,7 +5348,7 @@
               <a:t>new</a:t>
             </a:r>
             <a:r>
-              <a:rPr sz="1300" i="0" b="0">
+              <a:rPr sz="1200" i="0" b="0">
                 <a:solidFill>
                   <a:srgbClr val="D4D4D4"/>
                 </a:solidFill>
@@ -5357,7 +5357,7 @@
               <a:t> </a:t>
             </a:r>
             <a:r>
-              <a:rPr sz="1300" i="0" b="0">
+              <a:rPr sz="1200" i="0" b="0">
                 <a:solidFill>
                   <a:srgbClr val="4EC9B0"/>
                 </a:solidFill>
@@ -5366,7 +5366,7 @@
               <a:t>FileReader</a:t>
             </a:r>
             <a:r>
-              <a:rPr sz="1300" i="0" b="0">
+              <a:rPr sz="1200" i="0" b="0">
                 <a:solidFill>
                   <a:srgbClr val="D4D4D4"/>
                 </a:solidFill>
@@ -5375,7 +5375,7 @@
               <a:t>(</a:t>
             </a:r>
             <a:r>
-              <a:rPr sz="1300" i="0" b="0">
+              <a:rPr sz="1200" i="0" b="0">
                 <a:solidFill>
                   <a:srgbClr val="D4D4D4"/>
                 </a:solidFill>
@@ -5384,7 +5384,7 @@
               <a:t>ruta</a:t>
             </a:r>
             <a:r>
-              <a:rPr sz="1300" i="0" b="0">
+              <a:rPr sz="1200" i="0" b="0">
                 <a:solidFill>
                   <a:srgbClr val="D4D4D4"/>
                 </a:solidFill>
@@ -5393,7 +5393,7 @@
               <a:t>))) {   </a:t>
             </a:r>
             <a:r>
-              <a:rPr sz="1300" i="1" b="0">
+              <a:rPr sz="1200" i="1" b="0">
                 <a:solidFill>
                   <a:srgbClr val="6A9955"/>
                 </a:solidFill>
@@ -5405,11 +5405,11 @@
           <a:p>
             <a:pPr>
               <a:spcAft>
-                <a:spcPts val="278"/>
+                <a:spcPts val="257"/>
               </a:spcAft>
             </a:pPr>
             <a:r>
-              <a:rPr sz="1300" i="0" b="0">
+              <a:rPr sz="1200" i="0" b="0">
                 <a:solidFill>
                   <a:srgbClr val="D4D4D4"/>
                 </a:solidFill>
@@ -5418,7 +5418,7 @@
               <a:t>        </a:t>
             </a:r>
             <a:r>
-              <a:rPr sz="1300" i="0" b="0">
+              <a:rPr sz="1200" i="0" b="0">
                 <a:solidFill>
                   <a:srgbClr val="4EC9B0"/>
                 </a:solidFill>
@@ -5427,7 +5427,7 @@
               <a:t>String</a:t>
             </a:r>
             <a:r>
-              <a:rPr sz="1300" i="0" b="0">
+              <a:rPr sz="1200" i="0" b="0">
                 <a:solidFill>
                   <a:srgbClr val="D4D4D4"/>
                 </a:solidFill>
@@ -5436,7 +5436,7 @@
               <a:t> </a:t>
             </a:r>
             <a:r>
-              <a:rPr sz="1300" i="0" b="0">
+              <a:rPr sz="1200" i="0" b="0">
                 <a:solidFill>
                   <a:srgbClr val="D4D4D4"/>
                 </a:solidFill>
@@ -5445,7 +5445,7 @@
               <a:t>linea</a:t>
             </a:r>
             <a:r>
-              <a:rPr sz="1300" i="0" b="0">
+              <a:rPr sz="1200" i="0" b="0">
                 <a:solidFill>
                   <a:srgbClr val="D4D4D4"/>
                 </a:solidFill>
@@ -5457,11 +5457,11 @@
           <a:p>
             <a:pPr>
               <a:spcAft>
-                <a:spcPts val="278"/>
+                <a:spcPts val="257"/>
               </a:spcAft>
             </a:pPr>
             <a:r>
-              <a:rPr sz="1300" i="0" b="0">
+              <a:rPr sz="1200" i="0" b="0">
                 <a:solidFill>
                   <a:srgbClr val="D4D4D4"/>
                 </a:solidFill>
@@ -5470,7 +5470,7 @@
               <a:t>        </a:t>
             </a:r>
             <a:r>
-              <a:rPr sz="1300" i="0" b="0">
+              <a:rPr sz="1200" i="0" b="0">
                 <a:solidFill>
                   <a:srgbClr val="569CD6"/>
                 </a:solidFill>
@@ -5479,7 +5479,7 @@
               <a:t>while</a:t>
             </a:r>
             <a:r>
-              <a:rPr sz="1300" i="0" b="0">
+              <a:rPr sz="1200" i="0" b="0">
                 <a:solidFill>
                   <a:srgbClr val="D4D4D4"/>
                 </a:solidFill>
@@ -5488,7 +5488,7 @@
               <a:t> ((</a:t>
             </a:r>
             <a:r>
-              <a:rPr sz="1300" i="0" b="0">
+              <a:rPr sz="1200" i="0" b="0">
                 <a:solidFill>
                   <a:srgbClr val="D4D4D4"/>
                 </a:solidFill>
@@ -5497,7 +5497,7 @@
               <a:t>linea</a:t>
             </a:r>
             <a:r>
-              <a:rPr sz="1300" i="0" b="0">
+              <a:rPr sz="1200" i="0" b="0">
                 <a:solidFill>
                   <a:srgbClr val="D4D4D4"/>
                 </a:solidFill>
@@ -5506,7 +5506,7 @@
               <a:t> = </a:t>
             </a:r>
             <a:r>
-              <a:rPr sz="1300" i="0" b="0">
+              <a:rPr sz="1200" i="0" b="0">
                 <a:solidFill>
                   <a:srgbClr val="DCDCAA"/>
                 </a:solidFill>
@@ -5515,7 +5515,7 @@
               <a:t>lector.readLine</a:t>
             </a:r>
             <a:r>
-              <a:rPr sz="1300" i="0" b="0">
+              <a:rPr sz="1200" i="0" b="0">
                 <a:solidFill>
                   <a:srgbClr val="D4D4D4"/>
                 </a:solidFill>
@@ -5524,7 +5524,7 @@
               <a:t>()) != </a:t>
             </a:r>
             <a:r>
-              <a:rPr sz="1300" i="0" b="0">
+              <a:rPr sz="1200" i="0" b="0">
                 <a:solidFill>
                   <a:srgbClr val="569CD6"/>
                 </a:solidFill>
@@ -5533,7 +5533,7 @@
               <a:t>null</a:t>
             </a:r>
             <a:r>
-              <a:rPr sz="1300" i="0" b="0">
+              <a:rPr sz="1200" i="0" b="0">
                 <a:solidFill>
                   <a:srgbClr val="D4D4D4"/>
                 </a:solidFill>
@@ -5545,11 +5545,11 @@
           <a:p>
             <a:pPr>
               <a:spcAft>
-                <a:spcPts val="278"/>
+                <a:spcPts val="257"/>
               </a:spcAft>
             </a:pPr>
             <a:r>
-              <a:rPr sz="1300" i="0" b="0">
+              <a:rPr sz="1200" i="0" b="0">
                 <a:solidFill>
                   <a:srgbClr val="D4D4D4"/>
                 </a:solidFill>
@@ -5558,7 +5558,7 @@
               <a:t>            </a:t>
             </a:r>
             <a:r>
-              <a:rPr sz="1300" i="1" b="0">
+              <a:rPr sz="1200" i="1" b="0">
                 <a:solidFill>
                   <a:srgbClr val="6A9955"/>
                 </a:solidFill>
@@ -5570,11 +5570,11 @@
           <a:p>
             <a:pPr>
               <a:spcAft>
-                <a:spcPts val="278"/>
+                <a:spcPts val="257"/>
               </a:spcAft>
             </a:pPr>
             <a:r>
-              <a:rPr sz="1300" i="0" b="0">
+              <a:rPr sz="1200" i="0" b="0">
                 <a:solidFill>
                   <a:srgbClr val="D4D4D4"/>
                 </a:solidFill>
@@ -5586,11 +5586,11 @@
           <a:p>
             <a:pPr>
               <a:spcAft>
-                <a:spcPts val="278"/>
+                <a:spcPts val="257"/>
               </a:spcAft>
             </a:pPr>
             <a:r>
-              <a:rPr sz="1300" i="0" b="0">
+              <a:rPr sz="1200" i="0" b="0">
                 <a:solidFill>
                   <a:srgbClr val="D4D4D4"/>
                 </a:solidFill>
@@ -5599,7 +5599,7 @@
               <a:t>    } </a:t>
             </a:r>
             <a:r>
-              <a:rPr sz="1300" i="0" b="0">
+              <a:rPr sz="1200" i="0" b="0">
                 <a:solidFill>
                   <a:srgbClr val="569CD6"/>
                 </a:solidFill>
@@ -5608,7 +5608,7 @@
               <a:t>catch</a:t>
             </a:r>
             <a:r>
-              <a:rPr sz="1300" i="0" b="0">
+              <a:rPr sz="1200" i="0" b="0">
                 <a:solidFill>
                   <a:srgbClr val="D4D4D4"/>
                 </a:solidFill>
@@ -5617,7 +5617,7 @@
               <a:t> (</a:t>
             </a:r>
             <a:r>
-              <a:rPr sz="1300" i="0" b="0">
+              <a:rPr sz="1200" i="0" b="0">
                 <a:solidFill>
                   <a:srgbClr val="D4D4D4"/>
                 </a:solidFill>
@@ -5626,7 +5626,7 @@
               <a:t>FileNotFoundException</a:t>
             </a:r>
             <a:r>
-              <a:rPr sz="1300" i="0" b="0">
+              <a:rPr sz="1200" i="0" b="0">
                 <a:solidFill>
                   <a:srgbClr val="D4D4D4"/>
                 </a:solidFill>
@@ -5635,7 +5635,7 @@
               <a:t> </a:t>
             </a:r>
             <a:r>
-              <a:rPr sz="1300" i="0" b="0">
+              <a:rPr sz="1200" i="0" b="0">
                 <a:solidFill>
                   <a:srgbClr val="D4D4D4"/>
                 </a:solidFill>
@@ -5644,7 +5644,7 @@
               <a:t>e</a:t>
             </a:r>
             <a:r>
-              <a:rPr sz="1300" i="0" b="0">
+              <a:rPr sz="1200" i="0" b="0">
                 <a:solidFill>
                   <a:srgbClr val="D4D4D4"/>
                 </a:solidFill>
@@ -5653,7 +5653,7 @@
               <a:t>) {   </a:t>
             </a:r>
             <a:r>
-              <a:rPr sz="1300" i="1" b="0">
+              <a:rPr sz="1200" i="1" b="0">
                 <a:solidFill>
                   <a:srgbClr val="6A9955"/>
                 </a:solidFill>
@@ -5665,11 +5665,11 @@
           <a:p>
             <a:pPr>
               <a:spcAft>
-                <a:spcPts val="278"/>
+                <a:spcPts val="257"/>
               </a:spcAft>
             </a:pPr>
             <a:r>
-              <a:rPr sz="1300" i="0" b="0">
+              <a:rPr sz="1200" i="0" b="0">
                 <a:solidFill>
                   <a:srgbClr val="D4D4D4"/>
                 </a:solidFill>
@@ -5678,7 +5678,7 @@
               <a:t>        </a:t>
             </a:r>
             <a:r>
-              <a:rPr sz="1300" i="0" b="0">
+              <a:rPr sz="1200" i="0" b="0">
                 <a:solidFill>
                   <a:srgbClr val="DCDCAA"/>
                 </a:solidFill>
@@ -5687,7 +5687,7 @@
               <a:t>System.out.println</a:t>
             </a:r>
             <a:r>
-              <a:rPr sz="1300" i="0" b="0">
+              <a:rPr sz="1200" i="0" b="0">
                 <a:solidFill>
                   <a:srgbClr val="D4D4D4"/>
                 </a:solidFill>
@@ -5696,7 +5696,7 @@
               <a:t>(</a:t>
             </a:r>
             <a:r>
-              <a:rPr sz="1300" i="0" b="0">
+              <a:rPr sz="1200" i="0" b="0">
                 <a:solidFill>
                   <a:srgbClr val="CE9178"/>
                 </a:solidFill>
@@ -5705,7 +5705,7 @@
               <a:t>"  [INFO] No existe "</a:t>
             </a:r>
             <a:r>
-              <a:rPr sz="1300" i="0" b="0">
+              <a:rPr sz="1200" i="0" b="0">
                 <a:solidFill>
                   <a:srgbClr val="D4D4D4"/>
                 </a:solidFill>
@@ -5714,7 +5714,7 @@
               <a:t> + </a:t>
             </a:r>
             <a:r>
-              <a:rPr sz="1300" i="0" b="0">
+              <a:rPr sz="1200" i="0" b="0">
                 <a:solidFill>
                   <a:srgbClr val="D4D4D4"/>
                 </a:solidFill>
@@ -5723,7 +5723,7 @@
               <a:t>ruta</a:t>
             </a:r>
             <a:r>
-              <a:rPr sz="1300" i="0" b="0">
+              <a:rPr sz="1200" i="0" b="0">
                 <a:solidFill>
                   <a:srgbClr val="D4D4D4"/>
                 </a:solidFill>
@@ -5732,7 +5732,7 @@
               <a:t> + </a:t>
             </a:r>
             <a:r>
-              <a:rPr sz="1300" i="0" b="0">
+              <a:rPr sz="1200" i="0" b="0">
                 <a:solidFill>
                   <a:srgbClr val="CE9178"/>
                 </a:solidFill>
@@ -5741,7 +5741,7 @@
               <a:t>". El sistema de la clinica arranca con la lista vacia."</a:t>
             </a:r>
             <a:r>
-              <a:rPr sz="1300" i="0" b="0">
+              <a:rPr sz="1200" i="0" b="0">
                 <a:solidFill>
                   <a:srgbClr val="D4D4D4"/>
                 </a:solidFill>
@@ -5753,11 +5753,11 @@
           <a:p>
             <a:pPr>
               <a:spcAft>
-                <a:spcPts val="278"/>
+                <a:spcPts val="257"/>
               </a:spcAft>
             </a:pPr>
             <a:r>
-              <a:rPr sz="1300" i="0" b="0">
+              <a:rPr sz="1200" i="0" b="0">
                 <a:solidFill>
                   <a:srgbClr val="D4D4D4"/>
                 </a:solidFill>
@@ -5766,7 +5766,7 @@
               <a:t>    } </a:t>
             </a:r>
             <a:r>
-              <a:rPr sz="1300" i="0" b="0">
+              <a:rPr sz="1200" i="0" b="0">
                 <a:solidFill>
                   <a:srgbClr val="569CD6"/>
                 </a:solidFill>
@@ -5775,7 +5775,7 @@
               <a:t>catch</a:t>
             </a:r>
             <a:r>
-              <a:rPr sz="1300" i="0" b="0">
+              <a:rPr sz="1200" i="0" b="0">
                 <a:solidFill>
                   <a:srgbClr val="D4D4D4"/>
                 </a:solidFill>
@@ -5784,7 +5784,7 @@
               <a:t> (</a:t>
             </a:r>
             <a:r>
-              <a:rPr sz="1300" i="0" b="0">
+              <a:rPr sz="1200" i="0" b="0">
                 <a:solidFill>
                   <a:srgbClr val="D4D4D4"/>
                 </a:solidFill>
@@ -5793,7 +5793,7 @@
               <a:t>IOException</a:t>
             </a:r>
             <a:r>
-              <a:rPr sz="1300" i="0" b="0">
+              <a:rPr sz="1200" i="0" b="0">
                 <a:solidFill>
                   <a:srgbClr val="D4D4D4"/>
                 </a:solidFill>
@@ -5802,7 +5802,7 @@
               <a:t> </a:t>
             </a:r>
             <a:r>
-              <a:rPr sz="1300" i="0" b="0">
+              <a:rPr sz="1200" i="0" b="0">
                 <a:solidFill>
                   <a:srgbClr val="D4D4D4"/>
                 </a:solidFill>
@@ -5811,7 +5811,7 @@
               <a:t>e</a:t>
             </a:r>
             <a:r>
-              <a:rPr sz="1300" i="0" b="0">
+              <a:rPr sz="1200" i="0" b="0">
                 <a:solidFill>
                   <a:srgbClr val="D4D4D4"/>
                 </a:solidFill>
@@ -5823,11 +5823,11 @@
           <a:p>
             <a:pPr>
               <a:spcAft>
-                <a:spcPts val="278"/>
+                <a:spcPts val="257"/>
               </a:spcAft>
             </a:pPr>
             <a:r>
-              <a:rPr sz="1300" i="0" b="0">
+              <a:rPr sz="1200" i="0" b="0">
                 <a:solidFill>
                   <a:srgbClr val="D4D4D4"/>
                 </a:solidFill>
@@ -5836,7 +5836,7 @@
               <a:t>        </a:t>
             </a:r>
             <a:r>
-              <a:rPr sz="1300" i="0" b="0">
+              <a:rPr sz="1200" i="0" b="0">
                 <a:solidFill>
                   <a:srgbClr val="DCDCAA"/>
                 </a:solidFill>
@@ -5845,7 +5845,7 @@
               <a:t>System.out.println</a:t>
             </a:r>
             <a:r>
-              <a:rPr sz="1300" i="0" b="0">
+              <a:rPr sz="1200" i="0" b="0">
                 <a:solidFill>
                   <a:srgbClr val="D4D4D4"/>
                 </a:solidFill>
@@ -5854,7 +5854,7 @@
               <a:t>(</a:t>
             </a:r>
             <a:r>
-              <a:rPr sz="1300" i="0" b="0">
+              <a:rPr sz="1200" i="0" b="0">
                 <a:solidFill>
                   <a:srgbClr val="CE9178"/>
                 </a:solidFill>
@@ -5863,7 +5863,7 @@
               <a:t>"  [ERROR] Fallo leyendo "</a:t>
             </a:r>
             <a:r>
-              <a:rPr sz="1300" i="0" b="0">
+              <a:rPr sz="1200" i="0" b="0">
                 <a:solidFill>
                   <a:srgbClr val="D4D4D4"/>
                 </a:solidFill>
@@ -5872,7 +5872,7 @@
               <a:t> + </a:t>
             </a:r>
             <a:r>
-              <a:rPr sz="1300" i="0" b="0">
+              <a:rPr sz="1200" i="0" b="0">
                 <a:solidFill>
                   <a:srgbClr val="D4D4D4"/>
                 </a:solidFill>
@@ -5881,7 +5881,7 @@
               <a:t>ruta</a:t>
             </a:r>
             <a:r>
-              <a:rPr sz="1300" i="0" b="0">
+              <a:rPr sz="1200" i="0" b="0">
                 <a:solidFill>
                   <a:srgbClr val="D4D4D4"/>
                 </a:solidFill>
@@ -5890,7 +5890,7 @@
               <a:t> + </a:t>
             </a:r>
             <a:r>
-              <a:rPr sz="1300" i="0" b="0">
+              <a:rPr sz="1200" i="0" b="0">
                 <a:solidFill>
                   <a:srgbClr val="CE9178"/>
                 </a:solidFill>
@@ -5899,7 +5899,7 @@
               <a:t>": "</a:t>
             </a:r>
             <a:r>
-              <a:rPr sz="1300" i="0" b="0">
+              <a:rPr sz="1200" i="0" b="0">
                 <a:solidFill>
                   <a:srgbClr val="D4D4D4"/>
                 </a:solidFill>
@@ -5908,7 +5908,7 @@
               <a:t> + </a:t>
             </a:r>
             <a:r>
-              <a:rPr sz="1300" i="0" b="0">
+              <a:rPr sz="1200" i="0" b="0">
                 <a:solidFill>
                   <a:srgbClr val="DCDCAA"/>
                 </a:solidFill>
@@ -5917,7 +5917,7 @@
               <a:t>e.getMessage</a:t>
             </a:r>
             <a:r>
-              <a:rPr sz="1300" i="0" b="0">
+              <a:rPr sz="1200" i="0" b="0">
                 <a:solidFill>
                   <a:srgbClr val="D4D4D4"/>
                 </a:solidFill>
@@ -5929,11 +5929,11 @@
           <a:p>
             <a:pPr>
               <a:spcAft>
-                <a:spcPts val="278"/>
+                <a:spcPts val="257"/>
               </a:spcAft>
             </a:pPr>
             <a:r>
-              <a:rPr sz="1300" i="0" b="0">
+              <a:rPr sz="1200" i="0" b="0">
                 <a:solidFill>
                   <a:srgbClr val="D4D4D4"/>
                 </a:solidFill>
@@ -5945,11 +5945,11 @@
           <a:p>
             <a:pPr>
               <a:spcAft>
-                <a:spcPts val="278"/>
+                <a:spcPts val="257"/>
               </a:spcAft>
             </a:pPr>
             <a:r>
-              <a:rPr sz="1300" i="0" b="0">
+              <a:rPr sz="1200" i="0" b="0">
                 <a:solidFill>
                   <a:srgbClr val="D4D4D4"/>
                 </a:solidFill>
@@ -5958,7 +5958,7 @@
               <a:t>    </a:t>
             </a:r>
             <a:r>
-              <a:rPr sz="1300" i="0" b="0">
+              <a:rPr sz="1200" i="0" b="0">
                 <a:solidFill>
                   <a:srgbClr val="569CD6"/>
                 </a:solidFill>
@@ -5967,7 +5967,7 @@
               <a:t>return</a:t>
             </a:r>
             <a:r>
-              <a:rPr sz="1300" i="0" b="0">
+              <a:rPr sz="1200" i="0" b="0">
                 <a:solidFill>
                   <a:srgbClr val="D4D4D4"/>
                 </a:solidFill>
@@ -5976,7 +5976,7 @@
               <a:t> </a:t>
             </a:r>
             <a:r>
-              <a:rPr sz="1300" i="0" b="0">
+              <a:rPr sz="1200" i="0" b="0">
                 <a:solidFill>
                   <a:srgbClr val="D4D4D4"/>
                 </a:solidFill>
@@ -5985,7 +5985,7 @@
               <a:t>lista</a:t>
             </a:r>
             <a:r>
-              <a:rPr sz="1300" i="0" b="0">
+              <a:rPr sz="1200" i="0" b="0">
                 <a:solidFill>
                   <a:srgbClr val="D4D4D4"/>
                 </a:solidFill>
@@ -5997,11 +5997,11 @@
           <a:p>
             <a:pPr>
               <a:spcAft>
-                <a:spcPts val="278"/>
+                <a:spcPts val="257"/>
               </a:spcAft>
             </a:pPr>
             <a:r>
-              <a:rPr sz="1300" i="0" b="0">
+              <a:rPr sz="1200" i="0" b="0">
                 <a:solidFill>
                   <a:srgbClr val="D4D4D4"/>
                 </a:solidFill>
@@ -9147,7 +9147,7 @@
         <p:spPr>
           <a:xfrm>
             <a:off x="457200" y="1261872"/>
-            <a:ext cx="11277295" cy="4622487"/>
+            <a:ext cx="11277295" cy="3242726"/>
           </a:xfrm>
           <a:prstGeom prst="roundRect">
             <a:avLst>
@@ -9396,8 +9396,8 @@
         </p:nvSpPr>
         <p:spPr>
           <a:xfrm>
-            <a:off x="1188720" y="1719072"/>
-            <a:ext cx="10271455" cy="4028127"/>
+            <a:off x="685800" y="1719072"/>
+            <a:ext cx="502920" cy="2648366"/>
           </a:xfrm>
           <a:prstGeom prst="rect">
             <a:avLst/>
@@ -9410,735 +9410,195 @@
           </a:bodyPr>
           <a:lstStyle/>
           <a:p>
-            <a:pPr>
+            <a:pPr algn="r">
               <a:spcAft>
-                <a:spcPts val="364"/>
+                <a:spcPts val="235"/>
               </a:spcAft>
             </a:pPr>
             <a:r>
-              <a:rPr sz="1700" i="1" b="0">
-                <a:solidFill>
-                  <a:srgbClr val="6A9955"/>
-                </a:solidFill>
-                <a:latin typeface="Consolas"/>
-              </a:rPr>
-              <a:t>/** ASI NO: ejemplo intencional de catch vacio, para verlo fallar en clase. */</a:t>
-            </a:r>
-          </a:p>
-          <a:p>
-            <a:pPr>
+              <a:rPr sz="1100" i="0" b="0">
+                <a:solidFill>
+                  <a:srgbClr val="858585"/>
+                </a:solidFill>
+                <a:latin typeface="Consolas"/>
+              </a:rPr>
+              <a:t>1</a:t>
+            </a:r>
+          </a:p>
+          <a:p>
+            <a:pPr algn="r">
               <a:spcAft>
-                <a:spcPts val="364"/>
+                <a:spcPts val="235"/>
               </a:spcAft>
             </a:pPr>
             <a:r>
-              <a:rPr sz="1700" i="0" b="0">
-                <a:solidFill>
-                  <a:srgbClr val="569CD6"/>
-                </a:solidFill>
-                <a:latin typeface="Consolas"/>
-              </a:rPr>
-              <a:t>private</a:t>
-            </a:r>
-            <a:r>
-              <a:rPr sz="1700" i="0" b="0">
-                <a:solidFill>
-                  <a:srgbClr val="D4D4D4"/>
-                </a:solidFill>
-                <a:latin typeface="Consolas"/>
-              </a:rPr>
-              <a:t> </a:t>
-            </a:r>
-            <a:r>
-              <a:rPr sz="1700" i="0" b="0">
-                <a:solidFill>
-                  <a:srgbClr val="569CD6"/>
-                </a:solidFill>
-                <a:latin typeface="Consolas"/>
-              </a:rPr>
-              <a:t>static</a:t>
-            </a:r>
-            <a:r>
-              <a:rPr sz="1700" i="0" b="0">
-                <a:solidFill>
-                  <a:srgbClr val="D4D4D4"/>
-                </a:solidFill>
-                <a:latin typeface="Consolas"/>
-              </a:rPr>
-              <a:t> </a:t>
-            </a:r>
-            <a:r>
-              <a:rPr sz="1700" i="0" b="0">
-                <a:solidFill>
-                  <a:srgbClr val="569CD6"/>
-                </a:solidFill>
-                <a:latin typeface="Consolas"/>
-              </a:rPr>
-              <a:t>void</a:t>
-            </a:r>
-            <a:r>
-              <a:rPr sz="1700" i="0" b="0">
-                <a:solidFill>
-                  <a:srgbClr val="D4D4D4"/>
-                </a:solidFill>
-                <a:latin typeface="Consolas"/>
-              </a:rPr>
-              <a:t> </a:t>
-            </a:r>
-            <a:r>
-              <a:rPr sz="1700" i="0" b="0">
-                <a:solidFill>
-                  <a:srgbClr val="DCDCAA"/>
-                </a:solidFill>
-                <a:latin typeface="Consolas"/>
-              </a:rPr>
-              <a:t>malaPractica</a:t>
-            </a:r>
-            <a:r>
-              <a:rPr sz="1700" i="0" b="0">
-                <a:solidFill>
-                  <a:srgbClr val="D4D4D4"/>
-                </a:solidFill>
-                <a:latin typeface="Consolas"/>
-              </a:rPr>
-              <a:t>(</a:t>
-            </a:r>
-            <a:r>
-              <a:rPr sz="1700" i="0" b="0">
-                <a:solidFill>
-                  <a:srgbClr val="4EC9B0"/>
-                </a:solidFill>
-                <a:latin typeface="Consolas"/>
-              </a:rPr>
-              <a:t>List</a:t>
-            </a:r>
-            <a:r>
-              <a:rPr sz="1700" i="0" b="0">
-                <a:solidFill>
-                  <a:srgbClr val="D4D4D4"/>
-                </a:solidFill>
-                <a:latin typeface="Consolas"/>
-              </a:rPr>
-              <a:t>&lt;</a:t>
-            </a:r>
-            <a:r>
-              <a:rPr sz="1700" i="0" b="0">
-                <a:solidFill>
-                  <a:srgbClr val="D4D4D4"/>
-                </a:solidFill>
-                <a:latin typeface="Consolas"/>
-              </a:rPr>
-              <a:t>Mascota</a:t>
-            </a:r>
-            <a:r>
-              <a:rPr sz="1700" i="0" b="0">
-                <a:solidFill>
-                  <a:srgbClr val="D4D4D4"/>
-                </a:solidFill>
-                <a:latin typeface="Consolas"/>
-              </a:rPr>
-              <a:t>&gt; </a:t>
-            </a:r>
-            <a:r>
-              <a:rPr sz="1700" i="0" b="0">
-                <a:solidFill>
-                  <a:srgbClr val="D4D4D4"/>
-                </a:solidFill>
-                <a:latin typeface="Consolas"/>
-              </a:rPr>
-              <a:t>agenda</a:t>
-            </a:r>
-            <a:r>
-              <a:rPr sz="1700" i="0" b="0">
-                <a:solidFill>
-                  <a:srgbClr val="D4D4D4"/>
-                </a:solidFill>
-                <a:latin typeface="Consolas"/>
-              </a:rPr>
-              <a:t>) {</a:t>
-            </a:r>
-          </a:p>
-          <a:p>
-            <a:pPr>
+              <a:rPr sz="1100" i="0" b="0">
+                <a:solidFill>
+                  <a:srgbClr val="858585"/>
+                </a:solidFill>
+                <a:latin typeface="Consolas"/>
+              </a:rPr>
+              <a:t>2</a:t>
+            </a:r>
+          </a:p>
+          <a:p>
+            <a:pPr algn="r">
               <a:spcAft>
-                <a:spcPts val="364"/>
+                <a:spcPts val="235"/>
               </a:spcAft>
             </a:pPr>
             <a:r>
-              <a:rPr sz="1700" i="0" b="0">
-                <a:solidFill>
-                  <a:srgbClr val="D4D4D4"/>
-                </a:solidFill>
-                <a:latin typeface="Consolas"/>
-              </a:rPr>
-              <a:t>    </a:t>
-            </a:r>
-            <a:r>
-              <a:rPr sz="1700" i="0" b="0">
-                <a:solidFill>
-                  <a:srgbClr val="4EC9B0"/>
-                </a:solidFill>
-                <a:latin typeface="Consolas"/>
-              </a:rPr>
-              <a:t>int</a:t>
-            </a:r>
-            <a:r>
-              <a:rPr sz="1700" i="0" b="0">
-                <a:solidFill>
-                  <a:srgbClr val="D4D4D4"/>
-                </a:solidFill>
-                <a:latin typeface="Consolas"/>
-              </a:rPr>
-              <a:t> </a:t>
-            </a:r>
-            <a:r>
-              <a:rPr sz="1700" i="0" b="0">
-                <a:solidFill>
-                  <a:srgbClr val="D4D4D4"/>
-                </a:solidFill>
-                <a:latin typeface="Consolas"/>
-              </a:rPr>
-              <a:t>antes</a:t>
-            </a:r>
-            <a:r>
-              <a:rPr sz="1700" i="0" b="0">
-                <a:solidFill>
-                  <a:srgbClr val="D4D4D4"/>
-                </a:solidFill>
-                <a:latin typeface="Consolas"/>
-              </a:rPr>
-              <a:t> = </a:t>
-            </a:r>
-            <a:r>
-              <a:rPr sz="1700" i="0" b="0">
-                <a:solidFill>
-                  <a:srgbClr val="DCDCAA"/>
-                </a:solidFill>
-                <a:latin typeface="Consolas"/>
-              </a:rPr>
-              <a:t>agenda.size</a:t>
-            </a:r>
-            <a:r>
-              <a:rPr sz="1700" i="0" b="0">
-                <a:solidFill>
-                  <a:srgbClr val="D4D4D4"/>
-                </a:solidFill>
-                <a:latin typeface="Consolas"/>
-              </a:rPr>
-              <a:t>();</a:t>
-            </a:r>
-          </a:p>
-          <a:p>
-            <a:pPr>
+              <a:rPr sz="1100" i="0" b="0">
+                <a:solidFill>
+                  <a:srgbClr val="858585"/>
+                </a:solidFill>
+                <a:latin typeface="Consolas"/>
+              </a:rPr>
+              <a:t>3</a:t>
+            </a:r>
+          </a:p>
+          <a:p>
+            <a:pPr algn="r">
               <a:spcAft>
-                <a:spcPts val="364"/>
+                <a:spcPts val="235"/>
               </a:spcAft>
             </a:pPr>
             <a:r>
-              <a:rPr sz="1700" i="0" b="0">
-                <a:solidFill>
-                  <a:srgbClr val="D4D4D4"/>
-                </a:solidFill>
-                <a:latin typeface="Consolas"/>
-              </a:rPr>
-              <a:t>    </a:t>
-            </a:r>
-            <a:r>
-              <a:rPr sz="1700" i="0" b="0">
-                <a:solidFill>
-                  <a:srgbClr val="569CD6"/>
-                </a:solidFill>
-                <a:latin typeface="Consolas"/>
-              </a:rPr>
-              <a:t>try</a:t>
-            </a:r>
-            <a:r>
-              <a:rPr sz="1700" i="0" b="0">
-                <a:solidFill>
-                  <a:srgbClr val="D4D4D4"/>
-                </a:solidFill>
-                <a:latin typeface="Consolas"/>
-              </a:rPr>
-              <a:t> {</a:t>
-            </a:r>
-          </a:p>
-          <a:p>
-            <a:pPr>
+              <a:rPr sz="1100" i="0" b="0">
+                <a:solidFill>
+                  <a:srgbClr val="858585"/>
+                </a:solidFill>
+                <a:latin typeface="Consolas"/>
+              </a:rPr>
+              <a:t>4</a:t>
+            </a:r>
+          </a:p>
+          <a:p>
+            <a:pPr algn="r">
               <a:spcAft>
-                <a:spcPts val="364"/>
+                <a:spcPts val="235"/>
               </a:spcAft>
             </a:pPr>
             <a:r>
-              <a:rPr sz="1700" i="0" b="0">
-                <a:solidFill>
-                  <a:srgbClr val="D4D4D4"/>
-                </a:solidFill>
-                <a:latin typeface="Consolas"/>
-              </a:rPr>
-              <a:t>        </a:t>
-            </a:r>
-            <a:r>
-              <a:rPr sz="1700" i="0" b="0">
-                <a:solidFill>
-                  <a:srgbClr val="D4D4D4"/>
-                </a:solidFill>
-                <a:latin typeface="Consolas"/>
-              </a:rPr>
-              <a:t>Mascota</a:t>
-            </a:r>
-            <a:r>
-              <a:rPr sz="1700" i="0" b="0">
-                <a:solidFill>
-                  <a:srgbClr val="D4D4D4"/>
-                </a:solidFill>
-                <a:latin typeface="Consolas"/>
-              </a:rPr>
-              <a:t> </a:t>
-            </a:r>
-            <a:r>
-              <a:rPr sz="1700" i="0" b="0">
-                <a:solidFill>
-                  <a:srgbClr val="D4D4D4"/>
-                </a:solidFill>
-                <a:latin typeface="Consolas"/>
-              </a:rPr>
-              <a:t>m</a:t>
-            </a:r>
-            <a:r>
-              <a:rPr sz="1700" i="0" b="0">
-                <a:solidFill>
-                  <a:srgbClr val="D4D4D4"/>
-                </a:solidFill>
-                <a:latin typeface="Consolas"/>
-              </a:rPr>
-              <a:t> = </a:t>
-            </a:r>
-            <a:r>
-              <a:rPr sz="1700" i="0" b="0">
-                <a:solidFill>
-                  <a:srgbClr val="569CD6"/>
-                </a:solidFill>
-                <a:latin typeface="Consolas"/>
-              </a:rPr>
-              <a:t>new</a:t>
-            </a:r>
-            <a:r>
-              <a:rPr sz="1700" i="0" b="0">
-                <a:solidFill>
-                  <a:srgbClr val="D4D4D4"/>
-                </a:solidFill>
-                <a:latin typeface="Consolas"/>
-              </a:rPr>
-              <a:t> </a:t>
-            </a:r>
-            <a:r>
-              <a:rPr sz="1700" i="0" b="0">
-                <a:solidFill>
-                  <a:srgbClr val="4EC9B0"/>
-                </a:solidFill>
-                <a:latin typeface="Consolas"/>
-              </a:rPr>
-              <a:t>Mascota</a:t>
-            </a:r>
-            <a:r>
-              <a:rPr sz="1700" i="0" b="0">
-                <a:solidFill>
-                  <a:srgbClr val="D4D4D4"/>
-                </a:solidFill>
-                <a:latin typeface="Consolas"/>
-              </a:rPr>
-              <a:t>(</a:t>
-            </a:r>
-            <a:r>
-              <a:rPr sz="1700" i="0" b="0">
-                <a:solidFill>
-                  <a:srgbClr val="CE9178"/>
-                </a:solidFill>
-                <a:latin typeface="Consolas"/>
-              </a:rPr>
-              <a:t>"M-999"</a:t>
-            </a:r>
-            <a:r>
-              <a:rPr sz="1700" i="0" b="0">
-                <a:solidFill>
-                  <a:srgbClr val="D4D4D4"/>
-                </a:solidFill>
-                <a:latin typeface="Consolas"/>
-              </a:rPr>
-              <a:t>, </a:t>
-            </a:r>
-            <a:r>
-              <a:rPr sz="1700" i="0" b="0">
-                <a:solidFill>
-                  <a:srgbClr val="CE9178"/>
-                </a:solidFill>
-                <a:latin typeface="Consolas"/>
-              </a:rPr>
-              <a:t>"Fantasma"</a:t>
-            </a:r>
-            <a:r>
-              <a:rPr sz="1700" i="0" b="0">
-                <a:solidFill>
-                  <a:srgbClr val="D4D4D4"/>
-                </a:solidFill>
-                <a:latin typeface="Consolas"/>
-              </a:rPr>
-              <a:t>);</a:t>
-            </a:r>
-          </a:p>
-          <a:p>
-            <a:pPr>
+              <a:rPr sz="1100" i="0" b="0">
+                <a:solidFill>
+                  <a:srgbClr val="858585"/>
+                </a:solidFill>
+                <a:latin typeface="Consolas"/>
+              </a:rPr>
+              <a:t>5</a:t>
+            </a:r>
+          </a:p>
+          <a:p>
+            <a:pPr algn="r">
               <a:spcAft>
-                <a:spcPts val="364"/>
+                <a:spcPts val="235"/>
               </a:spcAft>
             </a:pPr>
             <a:r>
-              <a:rPr sz="1700" i="0" b="0">
-                <a:solidFill>
-                  <a:srgbClr val="D4D4D4"/>
-                </a:solidFill>
-                <a:latin typeface="Consolas"/>
-              </a:rPr>
-              <a:t>        </a:t>
-            </a:r>
-            <a:r>
-              <a:rPr sz="1700" i="0" b="0">
-                <a:solidFill>
-                  <a:srgbClr val="DCDCAA"/>
-                </a:solidFill>
-                <a:latin typeface="Consolas"/>
-              </a:rPr>
-              <a:t>m.setEdad</a:t>
-            </a:r>
-            <a:r>
-              <a:rPr sz="1700" i="0" b="0">
-                <a:solidFill>
-                  <a:srgbClr val="D4D4D4"/>
-                </a:solidFill>
-                <a:latin typeface="Consolas"/>
-              </a:rPr>
-              <a:t>(</a:t>
-            </a:r>
-            <a:r>
-              <a:rPr sz="1700" i="0" b="0">
-                <a:solidFill>
-                  <a:srgbClr val="CE9178"/>
-                </a:solidFill>
-                <a:latin typeface="Consolas"/>
-              </a:rPr>
-              <a:t>"tres"</a:t>
-            </a:r>
-            <a:r>
-              <a:rPr sz="1700" i="0" b="0">
-                <a:solidFill>
-                  <a:srgbClr val="D4D4D4"/>
-                </a:solidFill>
-                <a:latin typeface="Consolas"/>
-              </a:rPr>
-              <a:t>);</a:t>
-            </a:r>
-          </a:p>
-          <a:p>
-            <a:pPr>
+              <a:rPr sz="1100" i="0" b="0">
+                <a:solidFill>
+                  <a:srgbClr val="858585"/>
+                </a:solidFill>
+                <a:latin typeface="Consolas"/>
+              </a:rPr>
+              <a:t>6</a:t>
+            </a:r>
+          </a:p>
+          <a:p>
+            <a:pPr algn="r">
               <a:spcAft>
-                <a:spcPts val="364"/>
+                <a:spcPts val="235"/>
               </a:spcAft>
             </a:pPr>
             <a:r>
-              <a:rPr sz="1700" i="0" b="0">
-                <a:solidFill>
-                  <a:srgbClr val="D4D4D4"/>
-                </a:solidFill>
-                <a:latin typeface="Consolas"/>
-              </a:rPr>
-              <a:t>        </a:t>
-            </a:r>
-            <a:r>
-              <a:rPr sz="1700" i="0" b="0">
-                <a:solidFill>
-                  <a:srgbClr val="DCDCAA"/>
-                </a:solidFill>
-                <a:latin typeface="Consolas"/>
-              </a:rPr>
-              <a:t>agenda.add</a:t>
-            </a:r>
-            <a:r>
-              <a:rPr sz="1700" i="0" b="0">
-                <a:solidFill>
-                  <a:srgbClr val="D4D4D4"/>
-                </a:solidFill>
-                <a:latin typeface="Consolas"/>
-              </a:rPr>
-              <a:t>(</a:t>
-            </a:r>
-            <a:r>
-              <a:rPr sz="1700" i="0" b="0">
-                <a:solidFill>
-                  <a:srgbClr val="D4D4D4"/>
-                </a:solidFill>
-                <a:latin typeface="Consolas"/>
-              </a:rPr>
-              <a:t>m</a:t>
-            </a:r>
-            <a:r>
-              <a:rPr sz="1700" i="0" b="0">
-                <a:solidFill>
-                  <a:srgbClr val="D4D4D4"/>
-                </a:solidFill>
-                <a:latin typeface="Consolas"/>
-              </a:rPr>
-              <a:t>);</a:t>
-            </a:r>
-          </a:p>
-          <a:p>
-            <a:pPr>
+              <a:rPr sz="1100" i="0" b="0">
+                <a:solidFill>
+                  <a:srgbClr val="858585"/>
+                </a:solidFill>
+                <a:latin typeface="Consolas"/>
+              </a:rPr>
+              <a:t>7</a:t>
+            </a:r>
+          </a:p>
+          <a:p>
+            <a:pPr algn="r">
               <a:spcAft>
-                <a:spcPts val="364"/>
+                <a:spcPts val="235"/>
               </a:spcAft>
             </a:pPr>
             <a:r>
-              <a:rPr sz="1700" i="0" b="0">
-                <a:solidFill>
-                  <a:srgbClr val="D4D4D4"/>
-                </a:solidFill>
-                <a:latin typeface="Consolas"/>
-              </a:rPr>
-              <a:t>    } </a:t>
-            </a:r>
-            <a:r>
-              <a:rPr sz="1700" i="0" b="0">
-                <a:solidFill>
-                  <a:srgbClr val="569CD6"/>
-                </a:solidFill>
-                <a:latin typeface="Consolas"/>
-              </a:rPr>
-              <a:t>catch</a:t>
-            </a:r>
-            <a:r>
-              <a:rPr sz="1700" i="0" b="0">
-                <a:solidFill>
-                  <a:srgbClr val="D4D4D4"/>
-                </a:solidFill>
-                <a:latin typeface="Consolas"/>
-              </a:rPr>
-              <a:t> (</a:t>
-            </a:r>
-            <a:r>
-              <a:rPr sz="1700" i="0" b="0">
-                <a:solidFill>
-                  <a:srgbClr val="D4D4D4"/>
-                </a:solidFill>
-                <a:latin typeface="Consolas"/>
-              </a:rPr>
-              <a:t>DatoInvalidoException</a:t>
-            </a:r>
-            <a:r>
-              <a:rPr sz="1700" i="0" b="0">
-                <a:solidFill>
-                  <a:srgbClr val="D4D4D4"/>
-                </a:solidFill>
-                <a:latin typeface="Consolas"/>
-              </a:rPr>
-              <a:t> </a:t>
-            </a:r>
-            <a:r>
-              <a:rPr sz="1700" i="0" b="0">
-                <a:solidFill>
-                  <a:srgbClr val="D4D4D4"/>
-                </a:solidFill>
-                <a:latin typeface="Consolas"/>
-              </a:rPr>
-              <a:t>e</a:t>
-            </a:r>
-            <a:r>
-              <a:rPr sz="1700" i="0" b="0">
-                <a:solidFill>
-                  <a:srgbClr val="D4D4D4"/>
-                </a:solidFill>
-                <a:latin typeface="Consolas"/>
-              </a:rPr>
-              <a:t>) {</a:t>
-            </a:r>
-          </a:p>
-          <a:p>
-            <a:pPr>
+              <a:rPr sz="1100" i="0" b="0">
+                <a:solidFill>
+                  <a:srgbClr val="858585"/>
+                </a:solidFill>
+                <a:latin typeface="Consolas"/>
+              </a:rPr>
+              <a:t>8</a:t>
+            </a:r>
+          </a:p>
+          <a:p>
+            <a:pPr algn="r">
               <a:spcAft>
-                <a:spcPts val="364"/>
+                <a:spcPts val="235"/>
               </a:spcAft>
             </a:pPr>
             <a:r>
-              <a:rPr sz="1700" i="0" b="0">
-                <a:solidFill>
-                  <a:srgbClr val="D4D4D4"/>
-                </a:solidFill>
-                <a:latin typeface="Consolas"/>
-              </a:rPr>
-              <a:t>        </a:t>
-            </a:r>
-            <a:r>
-              <a:rPr sz="1700" i="1" b="0">
-                <a:solidFill>
-                  <a:srgbClr val="6A9955"/>
-                </a:solidFill>
-                <a:latin typeface="Consolas"/>
-              </a:rPr>
-              <a:t>// MALA PRACTICA A PROPOSITO: catch vacio, nadie se entera de nada.</a:t>
-            </a:r>
-          </a:p>
-          <a:p>
-            <a:pPr>
+              <a:rPr sz="1100" i="0" b="0">
+                <a:solidFill>
+                  <a:srgbClr val="858585"/>
+                </a:solidFill>
+                <a:latin typeface="Consolas"/>
+              </a:rPr>
+              <a:t>9</a:t>
+            </a:r>
+          </a:p>
+          <a:p>
+            <a:pPr algn="r">
               <a:spcAft>
-                <a:spcPts val="364"/>
+                <a:spcPts val="235"/>
               </a:spcAft>
             </a:pPr>
             <a:r>
-              <a:rPr sz="1700" i="0" b="0">
-                <a:solidFill>
-                  <a:srgbClr val="D4D4D4"/>
-                </a:solidFill>
-                <a:latin typeface="Consolas"/>
-              </a:rPr>
-              <a:t>    }</a:t>
-            </a:r>
-          </a:p>
-          <a:p>
-            <a:pPr>
+              <a:rPr sz="1100" i="0" b="0">
+                <a:solidFill>
+                  <a:srgbClr val="858585"/>
+                </a:solidFill>
+                <a:latin typeface="Consolas"/>
+              </a:rPr>
+              <a:t>10</a:t>
+            </a:r>
+          </a:p>
+          <a:p>
+            <a:pPr algn="r">
               <a:spcAft>
-                <a:spcPts val="364"/>
+                <a:spcPts val="235"/>
               </a:spcAft>
             </a:pPr>
             <a:r>
-              <a:rPr sz="1700" i="0" b="0">
-                <a:solidFill>
-                  <a:srgbClr val="D4D4D4"/>
-                </a:solidFill>
-                <a:latin typeface="Consolas"/>
-              </a:rPr>
-              <a:t>    </a:t>
-            </a:r>
-            <a:r>
-              <a:rPr sz="1700" i="0" b="0">
-                <a:solidFill>
-                  <a:srgbClr val="DCDCAA"/>
-                </a:solidFill>
-                <a:latin typeface="Consolas"/>
-              </a:rPr>
-              <a:t>System.out.println</a:t>
-            </a:r>
-            <a:r>
-              <a:rPr sz="1700" i="0" b="0">
-                <a:solidFill>
-                  <a:srgbClr val="D4D4D4"/>
-                </a:solidFill>
-                <a:latin typeface="Consolas"/>
-              </a:rPr>
-              <a:t>(</a:t>
-            </a:r>
-            <a:r>
-              <a:rPr sz="1700" i="0" b="0">
-                <a:solidFill>
-                  <a:srgbClr val="CE9178"/>
-                </a:solidFill>
-                <a:latin typeface="Consolas"/>
-              </a:rPr>
-              <a:t>"  Antes: "</a:t>
-            </a:r>
-            <a:r>
-              <a:rPr sz="1700" i="0" b="0">
-                <a:solidFill>
-                  <a:srgbClr val="D4D4D4"/>
-                </a:solidFill>
-                <a:latin typeface="Consolas"/>
-              </a:rPr>
-              <a:t> + </a:t>
-            </a:r>
-            <a:r>
-              <a:rPr sz="1700" i="0" b="0">
-                <a:solidFill>
-                  <a:srgbClr val="D4D4D4"/>
-                </a:solidFill>
-                <a:latin typeface="Consolas"/>
-              </a:rPr>
-              <a:t>antes</a:t>
-            </a:r>
-            <a:r>
-              <a:rPr sz="1700" i="0" b="0">
-                <a:solidFill>
-                  <a:srgbClr val="D4D4D4"/>
-                </a:solidFill>
-                <a:latin typeface="Consolas"/>
-              </a:rPr>
-              <a:t> + </a:t>
-            </a:r>
-            <a:r>
-              <a:rPr sz="1700" i="0" b="0">
-                <a:solidFill>
-                  <a:srgbClr val="CE9178"/>
-                </a:solidFill>
-                <a:latin typeface="Consolas"/>
-              </a:rPr>
-              <a:t>" | Ahora: "</a:t>
-            </a:r>
-            <a:r>
-              <a:rPr sz="1700" i="0" b="0">
-                <a:solidFill>
-                  <a:srgbClr val="D4D4D4"/>
-                </a:solidFill>
-                <a:latin typeface="Consolas"/>
-              </a:rPr>
-              <a:t> + </a:t>
-            </a:r>
-            <a:r>
-              <a:rPr sz="1700" i="0" b="0">
-                <a:solidFill>
-                  <a:srgbClr val="DCDCAA"/>
-                </a:solidFill>
-                <a:latin typeface="Consolas"/>
-              </a:rPr>
-              <a:t>agenda.size</a:t>
-            </a:r>
-            <a:r>
-              <a:rPr sz="1700" i="0" b="0">
-                <a:solidFill>
-                  <a:srgbClr val="D4D4D4"/>
-                </a:solidFill>
-                <a:latin typeface="Consolas"/>
-              </a:rPr>
-              <a:t>() + </a:t>
-            </a:r>
-            <a:r>
-              <a:rPr sz="1700" i="0" b="0">
-                <a:solidFill>
-                  <a:srgbClr val="CE9178"/>
-                </a:solidFill>
-                <a:latin typeface="Consolas"/>
-              </a:rPr>
-              <a:t>" -&gt; la mascota nunca entro y nadie aviso."</a:t>
-            </a:r>
-            <a:r>
-              <a:rPr sz="1700" i="0" b="0">
-                <a:solidFill>
-                  <a:srgbClr val="D4D4D4"/>
-                </a:solidFill>
-                <a:latin typeface="Consolas"/>
-              </a:rPr>
-              <a:t>);</a:t>
-            </a:r>
-          </a:p>
-          <a:p>
-            <a:pPr>
+              <a:rPr sz="1100" i="0" b="0">
+                <a:solidFill>
+                  <a:srgbClr val="858585"/>
+                </a:solidFill>
+                <a:latin typeface="Consolas"/>
+              </a:rPr>
+              <a:t>11</a:t>
+            </a:r>
+          </a:p>
+          <a:p>
+            <a:pPr algn="r">
               <a:spcAft>
-                <a:spcPts val="364"/>
+                <a:spcPts val="235"/>
               </a:spcAft>
             </a:pPr>
             <a:r>
-              <a:rPr sz="1700" i="0" b="0">
-                <a:solidFill>
-                  <a:srgbClr val="D4D4D4"/>
-                </a:solidFill>
-                <a:latin typeface="Consolas"/>
-              </a:rPr>
-              <a:t>}</a:t>
+              <a:rPr sz="1100" i="0" b="0">
+                <a:solidFill>
+                  <a:srgbClr val="858585"/>
+                </a:solidFill>
+                <a:latin typeface="Consolas"/>
+              </a:rPr>
+              <a:t>12</a:t>
             </a:r>
           </a:p>
         </p:txBody>
@@ -10151,8 +9611,8 @@
         </p:nvSpPr>
         <p:spPr>
           <a:xfrm>
-            <a:off x="457200" y="6035040"/>
-            <a:ext cx="11277295" cy="365760"/>
+            <a:off x="1188720" y="1719072"/>
+            <a:ext cx="10271455" cy="2648366"/>
           </a:xfrm>
           <a:prstGeom prst="rect">
             <a:avLst/>
@@ -10165,6 +9625,761 @@
           </a:bodyPr>
           <a:lstStyle/>
           <a:p>
+            <a:pPr>
+              <a:spcAft>
+                <a:spcPts val="235"/>
+              </a:spcAft>
+            </a:pPr>
+            <a:r>
+              <a:rPr sz="1100" i="1" b="0">
+                <a:solidFill>
+                  <a:srgbClr val="6A9955"/>
+                </a:solidFill>
+                <a:latin typeface="Consolas"/>
+              </a:rPr>
+              <a:t>/** ASI NO: ejemplo intencional de catch vacio, para verlo fallar en clase. */</a:t>
+            </a:r>
+          </a:p>
+          <a:p>
+            <a:pPr>
+              <a:spcAft>
+                <a:spcPts val="235"/>
+              </a:spcAft>
+            </a:pPr>
+            <a:r>
+              <a:rPr sz="1100" i="0" b="0">
+                <a:solidFill>
+                  <a:srgbClr val="569CD6"/>
+                </a:solidFill>
+                <a:latin typeface="Consolas"/>
+              </a:rPr>
+              <a:t>private</a:t>
+            </a:r>
+            <a:r>
+              <a:rPr sz="1100" i="0" b="0">
+                <a:solidFill>
+                  <a:srgbClr val="D4D4D4"/>
+                </a:solidFill>
+                <a:latin typeface="Consolas"/>
+              </a:rPr>
+              <a:t> </a:t>
+            </a:r>
+            <a:r>
+              <a:rPr sz="1100" i="0" b="0">
+                <a:solidFill>
+                  <a:srgbClr val="569CD6"/>
+                </a:solidFill>
+                <a:latin typeface="Consolas"/>
+              </a:rPr>
+              <a:t>static</a:t>
+            </a:r>
+            <a:r>
+              <a:rPr sz="1100" i="0" b="0">
+                <a:solidFill>
+                  <a:srgbClr val="D4D4D4"/>
+                </a:solidFill>
+                <a:latin typeface="Consolas"/>
+              </a:rPr>
+              <a:t> </a:t>
+            </a:r>
+            <a:r>
+              <a:rPr sz="1100" i="0" b="0">
+                <a:solidFill>
+                  <a:srgbClr val="569CD6"/>
+                </a:solidFill>
+                <a:latin typeface="Consolas"/>
+              </a:rPr>
+              <a:t>void</a:t>
+            </a:r>
+            <a:r>
+              <a:rPr sz="1100" i="0" b="0">
+                <a:solidFill>
+                  <a:srgbClr val="D4D4D4"/>
+                </a:solidFill>
+                <a:latin typeface="Consolas"/>
+              </a:rPr>
+              <a:t> </a:t>
+            </a:r>
+            <a:r>
+              <a:rPr sz="1100" i="0" b="0">
+                <a:solidFill>
+                  <a:srgbClr val="DCDCAA"/>
+                </a:solidFill>
+                <a:latin typeface="Consolas"/>
+              </a:rPr>
+              <a:t>malaPractica</a:t>
+            </a:r>
+            <a:r>
+              <a:rPr sz="1100" i="0" b="0">
+                <a:solidFill>
+                  <a:srgbClr val="D4D4D4"/>
+                </a:solidFill>
+                <a:latin typeface="Consolas"/>
+              </a:rPr>
+              <a:t>(</a:t>
+            </a:r>
+            <a:r>
+              <a:rPr sz="1100" i="0" b="0">
+                <a:solidFill>
+                  <a:srgbClr val="4EC9B0"/>
+                </a:solidFill>
+                <a:latin typeface="Consolas"/>
+              </a:rPr>
+              <a:t>List</a:t>
+            </a:r>
+            <a:r>
+              <a:rPr sz="1100" i="0" b="0">
+                <a:solidFill>
+                  <a:srgbClr val="D4D4D4"/>
+                </a:solidFill>
+                <a:latin typeface="Consolas"/>
+              </a:rPr>
+              <a:t>&lt;</a:t>
+            </a:r>
+            <a:r>
+              <a:rPr sz="1100" i="0" b="0">
+                <a:solidFill>
+                  <a:srgbClr val="D4D4D4"/>
+                </a:solidFill>
+                <a:latin typeface="Consolas"/>
+              </a:rPr>
+              <a:t>Mascota</a:t>
+            </a:r>
+            <a:r>
+              <a:rPr sz="1100" i="0" b="0">
+                <a:solidFill>
+                  <a:srgbClr val="D4D4D4"/>
+                </a:solidFill>
+                <a:latin typeface="Consolas"/>
+              </a:rPr>
+              <a:t>&gt; </a:t>
+            </a:r>
+            <a:r>
+              <a:rPr sz="1100" i="0" b="0">
+                <a:solidFill>
+                  <a:srgbClr val="D4D4D4"/>
+                </a:solidFill>
+                <a:latin typeface="Consolas"/>
+              </a:rPr>
+              <a:t>agenda</a:t>
+            </a:r>
+            <a:r>
+              <a:rPr sz="1100" i="0" b="0">
+                <a:solidFill>
+                  <a:srgbClr val="D4D4D4"/>
+                </a:solidFill>
+                <a:latin typeface="Consolas"/>
+              </a:rPr>
+              <a:t>) {</a:t>
+            </a:r>
+          </a:p>
+          <a:p>
+            <a:pPr>
+              <a:spcAft>
+                <a:spcPts val="235"/>
+              </a:spcAft>
+            </a:pPr>
+            <a:r>
+              <a:rPr sz="1100" i="0" b="0">
+                <a:solidFill>
+                  <a:srgbClr val="D4D4D4"/>
+                </a:solidFill>
+                <a:latin typeface="Consolas"/>
+              </a:rPr>
+              <a:t>    </a:t>
+            </a:r>
+            <a:r>
+              <a:rPr sz="1100" i="0" b="0">
+                <a:solidFill>
+                  <a:srgbClr val="4EC9B0"/>
+                </a:solidFill>
+                <a:latin typeface="Consolas"/>
+              </a:rPr>
+              <a:t>int</a:t>
+            </a:r>
+            <a:r>
+              <a:rPr sz="1100" i="0" b="0">
+                <a:solidFill>
+                  <a:srgbClr val="D4D4D4"/>
+                </a:solidFill>
+                <a:latin typeface="Consolas"/>
+              </a:rPr>
+              <a:t> </a:t>
+            </a:r>
+            <a:r>
+              <a:rPr sz="1100" i="0" b="0">
+                <a:solidFill>
+                  <a:srgbClr val="D4D4D4"/>
+                </a:solidFill>
+                <a:latin typeface="Consolas"/>
+              </a:rPr>
+              <a:t>antes</a:t>
+            </a:r>
+            <a:r>
+              <a:rPr sz="1100" i="0" b="0">
+                <a:solidFill>
+                  <a:srgbClr val="D4D4D4"/>
+                </a:solidFill>
+                <a:latin typeface="Consolas"/>
+              </a:rPr>
+              <a:t> = </a:t>
+            </a:r>
+            <a:r>
+              <a:rPr sz="1100" i="0" b="0">
+                <a:solidFill>
+                  <a:srgbClr val="DCDCAA"/>
+                </a:solidFill>
+                <a:latin typeface="Consolas"/>
+              </a:rPr>
+              <a:t>agenda.size</a:t>
+            </a:r>
+            <a:r>
+              <a:rPr sz="1100" i="0" b="0">
+                <a:solidFill>
+                  <a:srgbClr val="D4D4D4"/>
+                </a:solidFill>
+                <a:latin typeface="Consolas"/>
+              </a:rPr>
+              <a:t>();</a:t>
+            </a:r>
+          </a:p>
+          <a:p>
+            <a:pPr>
+              <a:spcAft>
+                <a:spcPts val="235"/>
+              </a:spcAft>
+            </a:pPr>
+            <a:r>
+              <a:rPr sz="1100" i="0" b="0">
+                <a:solidFill>
+                  <a:srgbClr val="D4D4D4"/>
+                </a:solidFill>
+                <a:latin typeface="Consolas"/>
+              </a:rPr>
+              <a:t>    </a:t>
+            </a:r>
+            <a:r>
+              <a:rPr sz="1100" i="0" b="0">
+                <a:solidFill>
+                  <a:srgbClr val="569CD6"/>
+                </a:solidFill>
+                <a:latin typeface="Consolas"/>
+              </a:rPr>
+              <a:t>try</a:t>
+            </a:r>
+            <a:r>
+              <a:rPr sz="1100" i="0" b="0">
+                <a:solidFill>
+                  <a:srgbClr val="D4D4D4"/>
+                </a:solidFill>
+                <a:latin typeface="Consolas"/>
+              </a:rPr>
+              <a:t> {</a:t>
+            </a:r>
+          </a:p>
+          <a:p>
+            <a:pPr>
+              <a:spcAft>
+                <a:spcPts val="235"/>
+              </a:spcAft>
+            </a:pPr>
+            <a:r>
+              <a:rPr sz="1100" i="0" b="0">
+                <a:solidFill>
+                  <a:srgbClr val="D4D4D4"/>
+                </a:solidFill>
+                <a:latin typeface="Consolas"/>
+              </a:rPr>
+              <a:t>        </a:t>
+            </a:r>
+            <a:r>
+              <a:rPr sz="1100" i="0" b="0">
+                <a:solidFill>
+                  <a:srgbClr val="D4D4D4"/>
+                </a:solidFill>
+                <a:latin typeface="Consolas"/>
+              </a:rPr>
+              <a:t>Mascota</a:t>
+            </a:r>
+            <a:r>
+              <a:rPr sz="1100" i="0" b="0">
+                <a:solidFill>
+                  <a:srgbClr val="D4D4D4"/>
+                </a:solidFill>
+                <a:latin typeface="Consolas"/>
+              </a:rPr>
+              <a:t> </a:t>
+            </a:r>
+            <a:r>
+              <a:rPr sz="1100" i="0" b="0">
+                <a:solidFill>
+                  <a:srgbClr val="D4D4D4"/>
+                </a:solidFill>
+                <a:latin typeface="Consolas"/>
+              </a:rPr>
+              <a:t>m</a:t>
+            </a:r>
+            <a:r>
+              <a:rPr sz="1100" i="0" b="0">
+                <a:solidFill>
+                  <a:srgbClr val="D4D4D4"/>
+                </a:solidFill>
+                <a:latin typeface="Consolas"/>
+              </a:rPr>
+              <a:t> = </a:t>
+            </a:r>
+            <a:r>
+              <a:rPr sz="1100" i="0" b="0">
+                <a:solidFill>
+                  <a:srgbClr val="569CD6"/>
+                </a:solidFill>
+                <a:latin typeface="Consolas"/>
+              </a:rPr>
+              <a:t>new</a:t>
+            </a:r>
+            <a:r>
+              <a:rPr sz="1100" i="0" b="0">
+                <a:solidFill>
+                  <a:srgbClr val="D4D4D4"/>
+                </a:solidFill>
+                <a:latin typeface="Consolas"/>
+              </a:rPr>
+              <a:t> </a:t>
+            </a:r>
+            <a:r>
+              <a:rPr sz="1100" i="0" b="0">
+                <a:solidFill>
+                  <a:srgbClr val="4EC9B0"/>
+                </a:solidFill>
+                <a:latin typeface="Consolas"/>
+              </a:rPr>
+              <a:t>Mascota</a:t>
+            </a:r>
+            <a:r>
+              <a:rPr sz="1100" i="0" b="0">
+                <a:solidFill>
+                  <a:srgbClr val="D4D4D4"/>
+                </a:solidFill>
+                <a:latin typeface="Consolas"/>
+              </a:rPr>
+              <a:t>(</a:t>
+            </a:r>
+            <a:r>
+              <a:rPr sz="1100" i="0" b="0">
+                <a:solidFill>
+                  <a:srgbClr val="CE9178"/>
+                </a:solidFill>
+                <a:latin typeface="Consolas"/>
+              </a:rPr>
+              <a:t>"M-999"</a:t>
+            </a:r>
+            <a:r>
+              <a:rPr sz="1100" i="0" b="0">
+                <a:solidFill>
+                  <a:srgbClr val="D4D4D4"/>
+                </a:solidFill>
+                <a:latin typeface="Consolas"/>
+              </a:rPr>
+              <a:t>, </a:t>
+            </a:r>
+            <a:r>
+              <a:rPr sz="1100" i="0" b="0">
+                <a:solidFill>
+                  <a:srgbClr val="CE9178"/>
+                </a:solidFill>
+                <a:latin typeface="Consolas"/>
+              </a:rPr>
+              <a:t>"Fantasma"</a:t>
+            </a:r>
+            <a:r>
+              <a:rPr sz="1100" i="0" b="0">
+                <a:solidFill>
+                  <a:srgbClr val="D4D4D4"/>
+                </a:solidFill>
+                <a:latin typeface="Consolas"/>
+              </a:rPr>
+              <a:t>);</a:t>
+            </a:r>
+          </a:p>
+          <a:p>
+            <a:pPr>
+              <a:spcAft>
+                <a:spcPts val="235"/>
+              </a:spcAft>
+            </a:pPr>
+            <a:r>
+              <a:rPr sz="1100" i="0" b="0">
+                <a:solidFill>
+                  <a:srgbClr val="D4D4D4"/>
+                </a:solidFill>
+                <a:latin typeface="Consolas"/>
+              </a:rPr>
+              <a:t>        </a:t>
+            </a:r>
+            <a:r>
+              <a:rPr sz="1100" i="0" b="0">
+                <a:solidFill>
+                  <a:srgbClr val="DCDCAA"/>
+                </a:solidFill>
+                <a:latin typeface="Consolas"/>
+              </a:rPr>
+              <a:t>m.setEdad</a:t>
+            </a:r>
+            <a:r>
+              <a:rPr sz="1100" i="0" b="0">
+                <a:solidFill>
+                  <a:srgbClr val="D4D4D4"/>
+                </a:solidFill>
+                <a:latin typeface="Consolas"/>
+              </a:rPr>
+              <a:t>(</a:t>
+            </a:r>
+            <a:r>
+              <a:rPr sz="1100" i="0" b="0">
+                <a:solidFill>
+                  <a:srgbClr val="CE9178"/>
+                </a:solidFill>
+                <a:latin typeface="Consolas"/>
+              </a:rPr>
+              <a:t>"tres"</a:t>
+            </a:r>
+            <a:r>
+              <a:rPr sz="1100" i="0" b="0">
+                <a:solidFill>
+                  <a:srgbClr val="D4D4D4"/>
+                </a:solidFill>
+                <a:latin typeface="Consolas"/>
+              </a:rPr>
+              <a:t>);</a:t>
+            </a:r>
+          </a:p>
+          <a:p>
+            <a:pPr>
+              <a:spcAft>
+                <a:spcPts val="235"/>
+              </a:spcAft>
+            </a:pPr>
+            <a:r>
+              <a:rPr sz="1100" i="0" b="0">
+                <a:solidFill>
+                  <a:srgbClr val="D4D4D4"/>
+                </a:solidFill>
+                <a:latin typeface="Consolas"/>
+              </a:rPr>
+              <a:t>        </a:t>
+            </a:r>
+            <a:r>
+              <a:rPr sz="1100" i="0" b="0">
+                <a:solidFill>
+                  <a:srgbClr val="DCDCAA"/>
+                </a:solidFill>
+                <a:latin typeface="Consolas"/>
+              </a:rPr>
+              <a:t>agenda.add</a:t>
+            </a:r>
+            <a:r>
+              <a:rPr sz="1100" i="0" b="0">
+                <a:solidFill>
+                  <a:srgbClr val="D4D4D4"/>
+                </a:solidFill>
+                <a:latin typeface="Consolas"/>
+              </a:rPr>
+              <a:t>(</a:t>
+            </a:r>
+            <a:r>
+              <a:rPr sz="1100" i="0" b="0">
+                <a:solidFill>
+                  <a:srgbClr val="D4D4D4"/>
+                </a:solidFill>
+                <a:latin typeface="Consolas"/>
+              </a:rPr>
+              <a:t>m</a:t>
+            </a:r>
+            <a:r>
+              <a:rPr sz="1100" i="0" b="0">
+                <a:solidFill>
+                  <a:srgbClr val="D4D4D4"/>
+                </a:solidFill>
+                <a:latin typeface="Consolas"/>
+              </a:rPr>
+              <a:t>);</a:t>
+            </a:r>
+          </a:p>
+          <a:p>
+            <a:pPr>
+              <a:spcAft>
+                <a:spcPts val="235"/>
+              </a:spcAft>
+            </a:pPr>
+            <a:r>
+              <a:rPr sz="1100" i="0" b="0">
+                <a:solidFill>
+                  <a:srgbClr val="D4D4D4"/>
+                </a:solidFill>
+                <a:latin typeface="Consolas"/>
+              </a:rPr>
+              <a:t>    } </a:t>
+            </a:r>
+            <a:r>
+              <a:rPr sz="1100" i="0" b="0">
+                <a:solidFill>
+                  <a:srgbClr val="569CD6"/>
+                </a:solidFill>
+                <a:latin typeface="Consolas"/>
+              </a:rPr>
+              <a:t>catch</a:t>
+            </a:r>
+            <a:r>
+              <a:rPr sz="1100" i="0" b="0">
+                <a:solidFill>
+                  <a:srgbClr val="D4D4D4"/>
+                </a:solidFill>
+                <a:latin typeface="Consolas"/>
+              </a:rPr>
+              <a:t> (</a:t>
+            </a:r>
+            <a:r>
+              <a:rPr sz="1100" i="0" b="0">
+                <a:solidFill>
+                  <a:srgbClr val="D4D4D4"/>
+                </a:solidFill>
+                <a:latin typeface="Consolas"/>
+              </a:rPr>
+              <a:t>DatoInvalidoException</a:t>
+            </a:r>
+            <a:r>
+              <a:rPr sz="1100" i="0" b="0">
+                <a:solidFill>
+                  <a:srgbClr val="D4D4D4"/>
+                </a:solidFill>
+                <a:latin typeface="Consolas"/>
+              </a:rPr>
+              <a:t> </a:t>
+            </a:r>
+            <a:r>
+              <a:rPr sz="1100" i="0" b="0">
+                <a:solidFill>
+                  <a:srgbClr val="D4D4D4"/>
+                </a:solidFill>
+                <a:latin typeface="Consolas"/>
+              </a:rPr>
+              <a:t>e</a:t>
+            </a:r>
+            <a:r>
+              <a:rPr sz="1100" i="0" b="0">
+                <a:solidFill>
+                  <a:srgbClr val="D4D4D4"/>
+                </a:solidFill>
+                <a:latin typeface="Consolas"/>
+              </a:rPr>
+              <a:t>) {</a:t>
+            </a:r>
+          </a:p>
+          <a:p>
+            <a:pPr>
+              <a:spcAft>
+                <a:spcPts val="235"/>
+              </a:spcAft>
+            </a:pPr>
+            <a:r>
+              <a:rPr sz="1100" i="0" b="0">
+                <a:solidFill>
+                  <a:srgbClr val="D4D4D4"/>
+                </a:solidFill>
+                <a:latin typeface="Consolas"/>
+              </a:rPr>
+              <a:t>        </a:t>
+            </a:r>
+            <a:r>
+              <a:rPr sz="1100" i="1" b="0">
+                <a:solidFill>
+                  <a:srgbClr val="6A9955"/>
+                </a:solidFill>
+                <a:latin typeface="Consolas"/>
+              </a:rPr>
+              <a:t>// MALA PRACTICA A PROPOSITO: catch vacio, nadie se entera de nada.</a:t>
+            </a:r>
+          </a:p>
+          <a:p>
+            <a:pPr>
+              <a:spcAft>
+                <a:spcPts val="235"/>
+              </a:spcAft>
+            </a:pPr>
+            <a:r>
+              <a:rPr sz="1100" i="0" b="0">
+                <a:solidFill>
+                  <a:srgbClr val="D4D4D4"/>
+                </a:solidFill>
+                <a:latin typeface="Consolas"/>
+              </a:rPr>
+              <a:t>    }</a:t>
+            </a:r>
+          </a:p>
+          <a:p>
+            <a:pPr>
+              <a:spcAft>
+                <a:spcPts val="235"/>
+              </a:spcAft>
+            </a:pPr>
+            <a:r>
+              <a:rPr sz="1100" i="0" b="0">
+                <a:solidFill>
+                  <a:srgbClr val="D4D4D4"/>
+                </a:solidFill>
+                <a:latin typeface="Consolas"/>
+              </a:rPr>
+              <a:t>    </a:t>
+            </a:r>
+            <a:r>
+              <a:rPr sz="1100" i="0" b="0">
+                <a:solidFill>
+                  <a:srgbClr val="DCDCAA"/>
+                </a:solidFill>
+                <a:latin typeface="Consolas"/>
+              </a:rPr>
+              <a:t>System.out.println</a:t>
+            </a:r>
+            <a:r>
+              <a:rPr sz="1100" i="0" b="0">
+                <a:solidFill>
+                  <a:srgbClr val="D4D4D4"/>
+                </a:solidFill>
+                <a:latin typeface="Consolas"/>
+              </a:rPr>
+              <a:t>(</a:t>
+            </a:r>
+            <a:r>
+              <a:rPr sz="1100" i="0" b="0">
+                <a:solidFill>
+                  <a:srgbClr val="CE9178"/>
+                </a:solidFill>
+                <a:latin typeface="Consolas"/>
+              </a:rPr>
+              <a:t>"  Antes: "</a:t>
+            </a:r>
+            <a:r>
+              <a:rPr sz="1100" i="0" b="0">
+                <a:solidFill>
+                  <a:srgbClr val="D4D4D4"/>
+                </a:solidFill>
+                <a:latin typeface="Consolas"/>
+              </a:rPr>
+              <a:t> + </a:t>
+            </a:r>
+            <a:r>
+              <a:rPr sz="1100" i="0" b="0">
+                <a:solidFill>
+                  <a:srgbClr val="D4D4D4"/>
+                </a:solidFill>
+                <a:latin typeface="Consolas"/>
+              </a:rPr>
+              <a:t>antes</a:t>
+            </a:r>
+            <a:r>
+              <a:rPr sz="1100" i="0" b="0">
+                <a:solidFill>
+                  <a:srgbClr val="D4D4D4"/>
+                </a:solidFill>
+                <a:latin typeface="Consolas"/>
+              </a:rPr>
+              <a:t> + </a:t>
+            </a:r>
+            <a:r>
+              <a:rPr sz="1100" i="0" b="0">
+                <a:solidFill>
+                  <a:srgbClr val="CE9178"/>
+                </a:solidFill>
+                <a:latin typeface="Consolas"/>
+              </a:rPr>
+              <a:t>" | Ahora: "</a:t>
+            </a:r>
+            <a:r>
+              <a:rPr sz="1100" i="0" b="0">
+                <a:solidFill>
+                  <a:srgbClr val="D4D4D4"/>
+                </a:solidFill>
+                <a:latin typeface="Consolas"/>
+              </a:rPr>
+              <a:t> + </a:t>
+            </a:r>
+            <a:r>
+              <a:rPr sz="1100" i="0" b="0">
+                <a:solidFill>
+                  <a:srgbClr val="DCDCAA"/>
+                </a:solidFill>
+                <a:latin typeface="Consolas"/>
+              </a:rPr>
+              <a:t>agenda.size</a:t>
+            </a:r>
+            <a:r>
+              <a:rPr sz="1100" i="0" b="0">
+                <a:solidFill>
+                  <a:srgbClr val="D4D4D4"/>
+                </a:solidFill>
+                <a:latin typeface="Consolas"/>
+              </a:rPr>
+              <a:t>() + </a:t>
+            </a:r>
+            <a:r>
+              <a:rPr sz="1100" i="0" b="0">
+                <a:solidFill>
+                  <a:srgbClr val="CE9178"/>
+                </a:solidFill>
+                <a:latin typeface="Consolas"/>
+              </a:rPr>
+              <a:t>" -&gt; la mascota nunca entro y nadie aviso."</a:t>
+            </a:r>
+            <a:r>
+              <a:rPr sz="1100" i="0" b="0">
+                <a:solidFill>
+                  <a:srgbClr val="D4D4D4"/>
+                </a:solidFill>
+                <a:latin typeface="Consolas"/>
+              </a:rPr>
+              <a:t>);</a:t>
+            </a:r>
+          </a:p>
+          <a:p>
+            <a:pPr>
+              <a:spcAft>
+                <a:spcPts val="235"/>
+              </a:spcAft>
+            </a:pPr>
+            <a:r>
+              <a:rPr sz="1100" i="0" b="0">
+                <a:solidFill>
+                  <a:srgbClr val="D4D4D4"/>
+                </a:solidFill>
+                <a:latin typeface="Consolas"/>
+              </a:rPr>
+              <a:t>}</a:t>
+            </a:r>
+          </a:p>
+        </p:txBody>
+      </p:sp>
+      <p:sp>
+        <p:nvSpPr>
+          <p:cNvPr id="13" name="TextBox 12"/>
+          <p:cNvSpPr txBox="1"/>
+          <p:nvPr/>
+        </p:nvSpPr>
+        <p:spPr>
+          <a:xfrm>
+            <a:off x="457200" y="6035040"/>
+            <a:ext cx="11277295" cy="365760"/>
+          </a:xfrm>
+          <a:prstGeom prst="rect">
+            <a:avLst/>
+          </a:prstGeom>
+          <a:noFill/>
+        </p:spPr>
+        <p:txBody>
+          <a:bodyPr wrap="square">
+            <a:spAutoFit/>
+          </a:bodyPr>
+          <a:lstStyle/>
+          <a:p>
             <a:pPr algn="ctr"/>
             <a:r>
               <a:rPr sz="1300" b="0" i="1">
@@ -10180,7 +10395,7 @@
       </p:sp>
       <p:sp>
         <p:nvSpPr>
-          <p:cNvPr id="13" name="TextBox 12"/>
+          <p:cNvPr id="14" name="TextBox 13"/>
           <p:cNvSpPr txBox="1"/>
           <p:nvPr/>
         </p:nvSpPr>
@@ -13234,7 +13449,7 @@
         <p:spPr>
           <a:xfrm>
             <a:off x="457200" y="1261872"/>
-            <a:ext cx="11277295" cy="3486308"/>
+            <a:ext cx="11277295" cy="2308086"/>
           </a:xfrm>
           <a:prstGeom prst="roundRect">
             <a:avLst>
@@ -13483,8 +13698,8 @@
         </p:nvSpPr>
         <p:spPr>
           <a:xfrm>
-            <a:off x="1188720" y="1719072"/>
-            <a:ext cx="10271455" cy="2891948"/>
+            <a:off x="685800" y="1719072"/>
+            <a:ext cx="502920" cy="1713726"/>
           </a:xfrm>
           <a:prstGeom prst="rect">
             <a:avLst/>
@@ -13497,322 +13712,115 @@
           </a:bodyPr>
           <a:lstStyle/>
           <a:p>
-            <a:pPr>
+            <a:pPr algn="r">
               <a:spcAft>
-                <a:spcPts val="428"/>
+                <a:spcPts val="257"/>
               </a:spcAft>
             </a:pPr>
             <a:r>
-              <a:rPr sz="2000" i="1" b="0">
-                <a:solidFill>
-                  <a:srgbClr val="6A9955"/>
-                </a:solidFill>
-                <a:latin typeface="Consolas"/>
-              </a:rPr>
-              <a:t>/** Excepcion CHECKED propia: al extender Exception el compilador obliga a capturarla o a declararla. */</a:t>
-            </a:r>
-          </a:p>
-          <a:p>
-            <a:pPr>
+              <a:rPr sz="1200" i="0" b="0">
+                <a:solidFill>
+                  <a:srgbClr val="858585"/>
+                </a:solidFill>
+                <a:latin typeface="Consolas"/>
+              </a:rPr>
+              <a:t>1</a:t>
+            </a:r>
+          </a:p>
+          <a:p>
+            <a:pPr algn="r">
               <a:spcAft>
-                <a:spcPts val="428"/>
+                <a:spcPts val="257"/>
               </a:spcAft>
             </a:pPr>
             <a:r>
-              <a:rPr sz="2000" i="0" b="0">
-                <a:solidFill>
-                  <a:srgbClr val="569CD6"/>
-                </a:solidFill>
-                <a:latin typeface="Consolas"/>
-              </a:rPr>
-              <a:t>public</a:t>
-            </a:r>
-            <a:r>
-              <a:rPr sz="2000" i="0" b="0">
-                <a:solidFill>
-                  <a:srgbClr val="D4D4D4"/>
-                </a:solidFill>
-                <a:latin typeface="Consolas"/>
-              </a:rPr>
-              <a:t> </a:t>
-            </a:r>
-            <a:r>
-              <a:rPr sz="2000" i="0" b="0">
-                <a:solidFill>
-                  <a:srgbClr val="569CD6"/>
-                </a:solidFill>
-                <a:latin typeface="Consolas"/>
-              </a:rPr>
-              <a:t>static</a:t>
-            </a:r>
-            <a:r>
-              <a:rPr sz="2000" i="0" b="0">
-                <a:solidFill>
-                  <a:srgbClr val="D4D4D4"/>
-                </a:solidFill>
-                <a:latin typeface="Consolas"/>
-              </a:rPr>
-              <a:t> </a:t>
-            </a:r>
-            <a:r>
-              <a:rPr sz="2000" i="0" b="0">
-                <a:solidFill>
-                  <a:srgbClr val="569CD6"/>
-                </a:solidFill>
-                <a:latin typeface="Consolas"/>
-              </a:rPr>
-              <a:t>class</a:t>
-            </a:r>
-            <a:r>
-              <a:rPr sz="2000" i="0" b="0">
-                <a:solidFill>
-                  <a:srgbClr val="D4D4D4"/>
-                </a:solidFill>
-                <a:latin typeface="Consolas"/>
-              </a:rPr>
-              <a:t> </a:t>
-            </a:r>
-            <a:r>
-              <a:rPr sz="2000" i="0" b="0">
-                <a:solidFill>
-                  <a:srgbClr val="4EC9B0"/>
-                </a:solidFill>
-                <a:latin typeface="Consolas"/>
-              </a:rPr>
-              <a:t>DatoInvalidoException</a:t>
-            </a:r>
-            <a:r>
-              <a:rPr sz="2000" i="0" b="0">
-                <a:solidFill>
-                  <a:srgbClr val="D4D4D4"/>
-                </a:solidFill>
-                <a:latin typeface="Consolas"/>
-              </a:rPr>
-              <a:t> </a:t>
-            </a:r>
-            <a:r>
-              <a:rPr sz="2000" i="0" b="0">
-                <a:solidFill>
-                  <a:srgbClr val="569CD6"/>
-                </a:solidFill>
-                <a:latin typeface="Consolas"/>
-              </a:rPr>
-              <a:t>extends</a:t>
-            </a:r>
-            <a:r>
-              <a:rPr sz="2000" i="0" b="0">
-                <a:solidFill>
-                  <a:srgbClr val="D4D4D4"/>
-                </a:solidFill>
-                <a:latin typeface="Consolas"/>
-              </a:rPr>
-              <a:t> </a:t>
-            </a:r>
-            <a:r>
-              <a:rPr sz="2000" i="0" b="0">
-                <a:solidFill>
-                  <a:srgbClr val="4EC9B0"/>
-                </a:solidFill>
-                <a:latin typeface="Consolas"/>
-              </a:rPr>
-              <a:t>Exception</a:t>
-            </a:r>
-            <a:r>
-              <a:rPr sz="2000" i="0" b="0">
-                <a:solidFill>
-                  <a:srgbClr val="D4D4D4"/>
-                </a:solidFill>
-                <a:latin typeface="Consolas"/>
-              </a:rPr>
-              <a:t> {</a:t>
-            </a:r>
-          </a:p>
-          <a:p>
-            <a:pPr>
+              <a:rPr sz="1200" i="0" b="0">
+                <a:solidFill>
+                  <a:srgbClr val="858585"/>
+                </a:solidFill>
+                <a:latin typeface="Consolas"/>
+              </a:rPr>
+              <a:t>2</a:t>
+            </a:r>
+          </a:p>
+          <a:p>
+            <a:pPr algn="r">
               <a:spcAft>
-                <a:spcPts val="428"/>
+                <a:spcPts val="257"/>
               </a:spcAft>
             </a:pPr>
             <a:r>
-              <a:rPr sz="2000" i="0" b="0">
-                <a:solidFill>
-                  <a:srgbClr val="D4D4D4"/>
-                </a:solidFill>
-                <a:latin typeface="Consolas"/>
-              </a:rPr>
-              <a:t/>
-            </a:r>
-          </a:p>
-          <a:p>
-            <a:pPr>
+              <a:rPr sz="1200" i="0" b="0">
+                <a:solidFill>
+                  <a:srgbClr val="858585"/>
+                </a:solidFill>
+                <a:latin typeface="Consolas"/>
+              </a:rPr>
+              <a:t>3</a:t>
+            </a:r>
+          </a:p>
+          <a:p>
+            <a:pPr algn="r">
               <a:spcAft>
-                <a:spcPts val="428"/>
+                <a:spcPts val="257"/>
               </a:spcAft>
             </a:pPr>
             <a:r>
-              <a:rPr sz="2000" i="0" b="0">
-                <a:solidFill>
-                  <a:srgbClr val="D4D4D4"/>
-                </a:solidFill>
-                <a:latin typeface="Consolas"/>
-              </a:rPr>
-              <a:t>    </a:t>
-            </a:r>
-            <a:r>
-              <a:rPr sz="2000" i="0" b="0">
-                <a:solidFill>
-                  <a:srgbClr val="569CD6"/>
-                </a:solidFill>
-                <a:latin typeface="Consolas"/>
-              </a:rPr>
-              <a:t>public</a:t>
-            </a:r>
-            <a:r>
-              <a:rPr sz="2000" i="0" b="0">
-                <a:solidFill>
-                  <a:srgbClr val="D4D4D4"/>
-                </a:solidFill>
-                <a:latin typeface="Consolas"/>
-              </a:rPr>
-              <a:t> </a:t>
-            </a:r>
-            <a:r>
-              <a:rPr sz="2000" i="0" b="0">
-                <a:solidFill>
-                  <a:srgbClr val="DCDCAA"/>
-                </a:solidFill>
-                <a:latin typeface="Consolas"/>
-              </a:rPr>
-              <a:t>DatoInvalidoException</a:t>
-            </a:r>
-            <a:r>
-              <a:rPr sz="2000" i="0" b="0">
-                <a:solidFill>
-                  <a:srgbClr val="D4D4D4"/>
-                </a:solidFill>
-                <a:latin typeface="Consolas"/>
-              </a:rPr>
-              <a:t>(</a:t>
-            </a:r>
-            <a:r>
-              <a:rPr sz="2000" i="0" b="0">
-                <a:solidFill>
-                  <a:srgbClr val="4EC9B0"/>
-                </a:solidFill>
-                <a:latin typeface="Consolas"/>
-              </a:rPr>
-              <a:t>String</a:t>
-            </a:r>
-            <a:r>
-              <a:rPr sz="2000" i="0" b="0">
-                <a:solidFill>
-                  <a:srgbClr val="D4D4D4"/>
-                </a:solidFill>
-                <a:latin typeface="Consolas"/>
-              </a:rPr>
-              <a:t> </a:t>
-            </a:r>
-            <a:r>
-              <a:rPr sz="2000" i="0" b="0">
-                <a:solidFill>
-                  <a:srgbClr val="D4D4D4"/>
-                </a:solidFill>
-                <a:latin typeface="Consolas"/>
-              </a:rPr>
-              <a:t>mensaje</a:t>
-            </a:r>
-            <a:r>
-              <a:rPr sz="2000" i="0" b="0">
-                <a:solidFill>
-                  <a:srgbClr val="D4D4D4"/>
-                </a:solidFill>
-                <a:latin typeface="Consolas"/>
-              </a:rPr>
-              <a:t>) {</a:t>
-            </a:r>
-          </a:p>
-          <a:p>
-            <a:pPr>
+              <a:rPr sz="1200" i="0" b="0">
+                <a:solidFill>
+                  <a:srgbClr val="858585"/>
+                </a:solidFill>
+                <a:latin typeface="Consolas"/>
+              </a:rPr>
+              <a:t>4</a:t>
+            </a:r>
+          </a:p>
+          <a:p>
+            <a:pPr algn="r">
               <a:spcAft>
-                <a:spcPts val="428"/>
+                <a:spcPts val="257"/>
               </a:spcAft>
             </a:pPr>
             <a:r>
-              <a:rPr sz="2000" i="0" b="0">
-                <a:solidFill>
-                  <a:srgbClr val="D4D4D4"/>
-                </a:solidFill>
-                <a:latin typeface="Consolas"/>
-              </a:rPr>
-              <a:t>        </a:t>
-            </a:r>
-            <a:r>
-              <a:rPr sz="2000" i="0" b="0">
-                <a:solidFill>
-                  <a:srgbClr val="569CD6"/>
-                </a:solidFill>
-                <a:latin typeface="Consolas"/>
-              </a:rPr>
-              <a:t>super</a:t>
-            </a:r>
-            <a:r>
-              <a:rPr sz="2000" i="0" b="0">
-                <a:solidFill>
-                  <a:srgbClr val="D4D4D4"/>
-                </a:solidFill>
-                <a:latin typeface="Consolas"/>
-              </a:rPr>
-              <a:t>(</a:t>
-            </a:r>
-            <a:r>
-              <a:rPr sz="2000" i="0" b="0">
-                <a:solidFill>
-                  <a:srgbClr val="D4D4D4"/>
-                </a:solidFill>
-                <a:latin typeface="Consolas"/>
-              </a:rPr>
-              <a:t>mensaje</a:t>
-            </a:r>
-            <a:r>
-              <a:rPr sz="2000" i="0" b="0">
-                <a:solidFill>
-                  <a:srgbClr val="D4D4D4"/>
-                </a:solidFill>
-                <a:latin typeface="Consolas"/>
-              </a:rPr>
-              <a:t>);</a:t>
-            </a:r>
-          </a:p>
-          <a:p>
-            <a:pPr>
+              <a:rPr sz="1200" i="0" b="0">
+                <a:solidFill>
+                  <a:srgbClr val="858585"/>
+                </a:solidFill>
+                <a:latin typeface="Consolas"/>
+              </a:rPr>
+              <a:t>5</a:t>
+            </a:r>
+          </a:p>
+          <a:p>
+            <a:pPr algn="r">
               <a:spcAft>
-                <a:spcPts val="428"/>
+                <a:spcPts val="257"/>
               </a:spcAft>
             </a:pPr>
             <a:r>
-              <a:rPr sz="2000" i="0" b="0">
-                <a:solidFill>
-                  <a:srgbClr val="D4D4D4"/>
-                </a:solidFill>
-                <a:latin typeface="Consolas"/>
-              </a:rPr>
-              <a:t>    }</a:t>
-            </a:r>
-          </a:p>
-          <a:p>
-            <a:pPr>
+              <a:rPr sz="1200" i="0" b="0">
+                <a:solidFill>
+                  <a:srgbClr val="858585"/>
+                </a:solidFill>
+                <a:latin typeface="Consolas"/>
+              </a:rPr>
+              <a:t>6</a:t>
+            </a:r>
+          </a:p>
+          <a:p>
+            <a:pPr algn="r">
               <a:spcAft>
-                <a:spcPts val="428"/>
+                <a:spcPts val="257"/>
               </a:spcAft>
             </a:pPr>
             <a:r>
-              <a:rPr sz="2000" i="0" b="0">
-                <a:solidFill>
-                  <a:srgbClr val="D4D4D4"/>
-                </a:solidFill>
-                <a:latin typeface="Consolas"/>
-              </a:rPr>
-              <a:t>}</a:t>
+              <a:rPr sz="1200" i="0" b="0">
+                <a:solidFill>
+                  <a:srgbClr val="858585"/>
+                </a:solidFill>
+                <a:latin typeface="Consolas"/>
+              </a:rPr>
+              <a:t>7</a:t>
             </a:r>
           </a:p>
         </p:txBody>
@@ -13825,8 +13833,8 @@
         </p:nvSpPr>
         <p:spPr>
           <a:xfrm>
-            <a:off x="457200" y="6035040"/>
-            <a:ext cx="11277295" cy="365760"/>
+            <a:off x="1188720" y="1719072"/>
+            <a:ext cx="10271455" cy="1713726"/>
           </a:xfrm>
           <a:prstGeom prst="rect">
             <a:avLst/>
@@ -13839,6 +13847,348 @@
           </a:bodyPr>
           <a:lstStyle/>
           <a:p>
+            <a:pPr>
+              <a:spcAft>
+                <a:spcPts val="257"/>
+              </a:spcAft>
+            </a:pPr>
+            <a:r>
+              <a:rPr sz="1200" i="1" b="0">
+                <a:solidFill>
+                  <a:srgbClr val="6A9955"/>
+                </a:solidFill>
+                <a:latin typeface="Consolas"/>
+              </a:rPr>
+              <a:t>/** Excepcion CHECKED propia: al extender Exception el compilador obliga a capturarla o a declararla. */</a:t>
+            </a:r>
+          </a:p>
+          <a:p>
+            <a:pPr>
+              <a:spcAft>
+                <a:spcPts val="257"/>
+              </a:spcAft>
+            </a:pPr>
+            <a:r>
+              <a:rPr sz="1200" i="0" b="0">
+                <a:solidFill>
+                  <a:srgbClr val="569CD6"/>
+                </a:solidFill>
+                <a:latin typeface="Consolas"/>
+              </a:rPr>
+              <a:t>public</a:t>
+            </a:r>
+            <a:r>
+              <a:rPr sz="1200" i="0" b="0">
+                <a:solidFill>
+                  <a:srgbClr val="D4D4D4"/>
+                </a:solidFill>
+                <a:latin typeface="Consolas"/>
+              </a:rPr>
+              <a:t> </a:t>
+            </a:r>
+            <a:r>
+              <a:rPr sz="1200" i="0" b="0">
+                <a:solidFill>
+                  <a:srgbClr val="569CD6"/>
+                </a:solidFill>
+                <a:latin typeface="Consolas"/>
+              </a:rPr>
+              <a:t>static</a:t>
+            </a:r>
+            <a:r>
+              <a:rPr sz="1200" i="0" b="0">
+                <a:solidFill>
+                  <a:srgbClr val="D4D4D4"/>
+                </a:solidFill>
+                <a:latin typeface="Consolas"/>
+              </a:rPr>
+              <a:t> </a:t>
+            </a:r>
+            <a:r>
+              <a:rPr sz="1200" i="0" b="0">
+                <a:solidFill>
+                  <a:srgbClr val="569CD6"/>
+                </a:solidFill>
+                <a:latin typeface="Consolas"/>
+              </a:rPr>
+              <a:t>class</a:t>
+            </a:r>
+            <a:r>
+              <a:rPr sz="1200" i="0" b="0">
+                <a:solidFill>
+                  <a:srgbClr val="D4D4D4"/>
+                </a:solidFill>
+                <a:latin typeface="Consolas"/>
+              </a:rPr>
+              <a:t> </a:t>
+            </a:r>
+            <a:r>
+              <a:rPr sz="1200" i="0" b="0">
+                <a:solidFill>
+                  <a:srgbClr val="4EC9B0"/>
+                </a:solidFill>
+                <a:latin typeface="Consolas"/>
+              </a:rPr>
+              <a:t>DatoInvalidoException</a:t>
+            </a:r>
+            <a:r>
+              <a:rPr sz="1200" i="0" b="0">
+                <a:solidFill>
+                  <a:srgbClr val="D4D4D4"/>
+                </a:solidFill>
+                <a:latin typeface="Consolas"/>
+              </a:rPr>
+              <a:t> </a:t>
+            </a:r>
+            <a:r>
+              <a:rPr sz="1200" i="0" b="0">
+                <a:solidFill>
+                  <a:srgbClr val="569CD6"/>
+                </a:solidFill>
+                <a:latin typeface="Consolas"/>
+              </a:rPr>
+              <a:t>extends</a:t>
+            </a:r>
+            <a:r>
+              <a:rPr sz="1200" i="0" b="0">
+                <a:solidFill>
+                  <a:srgbClr val="D4D4D4"/>
+                </a:solidFill>
+                <a:latin typeface="Consolas"/>
+              </a:rPr>
+              <a:t> </a:t>
+            </a:r>
+            <a:r>
+              <a:rPr sz="1200" i="0" b="0">
+                <a:solidFill>
+                  <a:srgbClr val="4EC9B0"/>
+                </a:solidFill>
+                <a:latin typeface="Consolas"/>
+              </a:rPr>
+              <a:t>Exception</a:t>
+            </a:r>
+            <a:r>
+              <a:rPr sz="1200" i="0" b="0">
+                <a:solidFill>
+                  <a:srgbClr val="D4D4D4"/>
+                </a:solidFill>
+                <a:latin typeface="Consolas"/>
+              </a:rPr>
+              <a:t> {</a:t>
+            </a:r>
+          </a:p>
+          <a:p>
+            <a:pPr>
+              <a:spcAft>
+                <a:spcPts val="257"/>
+              </a:spcAft>
+            </a:pPr>
+            <a:r>
+              <a:rPr sz="1200" i="0" b="0">
+                <a:solidFill>
+                  <a:srgbClr val="D4D4D4"/>
+                </a:solidFill>
+                <a:latin typeface="Consolas"/>
+              </a:rPr>
+              <a:t/>
+            </a:r>
+          </a:p>
+          <a:p>
+            <a:pPr>
+              <a:spcAft>
+                <a:spcPts val="257"/>
+              </a:spcAft>
+            </a:pPr>
+            <a:r>
+              <a:rPr sz="1200" i="0" b="0">
+                <a:solidFill>
+                  <a:srgbClr val="D4D4D4"/>
+                </a:solidFill>
+                <a:latin typeface="Consolas"/>
+              </a:rPr>
+              <a:t>    </a:t>
+            </a:r>
+            <a:r>
+              <a:rPr sz="1200" i="0" b="0">
+                <a:solidFill>
+                  <a:srgbClr val="569CD6"/>
+                </a:solidFill>
+                <a:latin typeface="Consolas"/>
+              </a:rPr>
+              <a:t>public</a:t>
+            </a:r>
+            <a:r>
+              <a:rPr sz="1200" i="0" b="0">
+                <a:solidFill>
+                  <a:srgbClr val="D4D4D4"/>
+                </a:solidFill>
+                <a:latin typeface="Consolas"/>
+              </a:rPr>
+              <a:t> </a:t>
+            </a:r>
+            <a:r>
+              <a:rPr sz="1200" i="0" b="0">
+                <a:solidFill>
+                  <a:srgbClr val="DCDCAA"/>
+                </a:solidFill>
+                <a:latin typeface="Consolas"/>
+              </a:rPr>
+              <a:t>DatoInvalidoException</a:t>
+            </a:r>
+            <a:r>
+              <a:rPr sz="1200" i="0" b="0">
+                <a:solidFill>
+                  <a:srgbClr val="D4D4D4"/>
+                </a:solidFill>
+                <a:latin typeface="Consolas"/>
+              </a:rPr>
+              <a:t>(</a:t>
+            </a:r>
+            <a:r>
+              <a:rPr sz="1200" i="0" b="0">
+                <a:solidFill>
+                  <a:srgbClr val="4EC9B0"/>
+                </a:solidFill>
+                <a:latin typeface="Consolas"/>
+              </a:rPr>
+              <a:t>String</a:t>
+            </a:r>
+            <a:r>
+              <a:rPr sz="1200" i="0" b="0">
+                <a:solidFill>
+                  <a:srgbClr val="D4D4D4"/>
+                </a:solidFill>
+                <a:latin typeface="Consolas"/>
+              </a:rPr>
+              <a:t> </a:t>
+            </a:r>
+            <a:r>
+              <a:rPr sz="1200" i="0" b="0">
+                <a:solidFill>
+                  <a:srgbClr val="D4D4D4"/>
+                </a:solidFill>
+                <a:latin typeface="Consolas"/>
+              </a:rPr>
+              <a:t>mensaje</a:t>
+            </a:r>
+            <a:r>
+              <a:rPr sz="1200" i="0" b="0">
+                <a:solidFill>
+                  <a:srgbClr val="D4D4D4"/>
+                </a:solidFill>
+                <a:latin typeface="Consolas"/>
+              </a:rPr>
+              <a:t>) {</a:t>
+            </a:r>
+          </a:p>
+          <a:p>
+            <a:pPr>
+              <a:spcAft>
+                <a:spcPts val="257"/>
+              </a:spcAft>
+            </a:pPr>
+            <a:r>
+              <a:rPr sz="1200" i="0" b="0">
+                <a:solidFill>
+                  <a:srgbClr val="D4D4D4"/>
+                </a:solidFill>
+                <a:latin typeface="Consolas"/>
+              </a:rPr>
+              <a:t>        </a:t>
+            </a:r>
+            <a:r>
+              <a:rPr sz="1200" i="0" b="0">
+                <a:solidFill>
+                  <a:srgbClr val="569CD6"/>
+                </a:solidFill>
+                <a:latin typeface="Consolas"/>
+              </a:rPr>
+              <a:t>super</a:t>
+            </a:r>
+            <a:r>
+              <a:rPr sz="1200" i="0" b="0">
+                <a:solidFill>
+                  <a:srgbClr val="D4D4D4"/>
+                </a:solidFill>
+                <a:latin typeface="Consolas"/>
+              </a:rPr>
+              <a:t>(</a:t>
+            </a:r>
+            <a:r>
+              <a:rPr sz="1200" i="0" b="0">
+                <a:solidFill>
+                  <a:srgbClr val="D4D4D4"/>
+                </a:solidFill>
+                <a:latin typeface="Consolas"/>
+              </a:rPr>
+              <a:t>mensaje</a:t>
+            </a:r>
+            <a:r>
+              <a:rPr sz="1200" i="0" b="0">
+                <a:solidFill>
+                  <a:srgbClr val="D4D4D4"/>
+                </a:solidFill>
+                <a:latin typeface="Consolas"/>
+              </a:rPr>
+              <a:t>);</a:t>
+            </a:r>
+          </a:p>
+          <a:p>
+            <a:pPr>
+              <a:spcAft>
+                <a:spcPts val="257"/>
+              </a:spcAft>
+            </a:pPr>
+            <a:r>
+              <a:rPr sz="1200" i="0" b="0">
+                <a:solidFill>
+                  <a:srgbClr val="D4D4D4"/>
+                </a:solidFill>
+                <a:latin typeface="Consolas"/>
+              </a:rPr>
+              <a:t>    }</a:t>
+            </a:r>
+          </a:p>
+          <a:p>
+            <a:pPr>
+              <a:spcAft>
+                <a:spcPts val="257"/>
+              </a:spcAft>
+            </a:pPr>
+            <a:r>
+              <a:rPr sz="1200" i="0" b="0">
+                <a:solidFill>
+                  <a:srgbClr val="D4D4D4"/>
+                </a:solidFill>
+                <a:latin typeface="Consolas"/>
+              </a:rPr>
+              <a:t>}</a:t>
+            </a:r>
+          </a:p>
+        </p:txBody>
+      </p:sp>
+      <p:sp>
+        <p:nvSpPr>
+          <p:cNvPr id="13" name="TextBox 12"/>
+          <p:cNvSpPr txBox="1"/>
+          <p:nvPr/>
+        </p:nvSpPr>
+        <p:spPr>
+          <a:xfrm>
+            <a:off x="457200" y="6035040"/>
+            <a:ext cx="11277295" cy="365760"/>
+          </a:xfrm>
+          <a:prstGeom prst="rect">
+            <a:avLst/>
+          </a:prstGeom>
+          <a:noFill/>
+        </p:spPr>
+        <p:txBody>
+          <a:bodyPr wrap="square">
+            <a:spAutoFit/>
+          </a:bodyPr>
+          <a:lstStyle/>
+          <a:p>
             <a:pPr algn="ctr"/>
             <a:r>
               <a:rPr sz="1300" b="0" i="1">
@@ -13854,7 +14204,7 @@
       </p:sp>
       <p:sp>
         <p:nvSpPr>
-          <p:cNvPr id="13" name="TextBox 12"/>
+          <p:cNvPr id="14" name="TextBox 13"/>
           <p:cNvSpPr txBox="1"/>
           <p:nvPr/>
         </p:nvSpPr>
@@ -14598,7 +14948,7 @@
         <p:spPr>
           <a:xfrm>
             <a:off x="457200" y="1261872"/>
-            <a:ext cx="11277295" cy="4535249"/>
+            <a:ext cx="11277295" cy="3868623"/>
           </a:xfrm>
           <a:prstGeom prst="roundRect">
             <a:avLst>
@@ -14847,8 +15197,8 @@
         </p:nvSpPr>
         <p:spPr>
           <a:xfrm>
-            <a:off x="1188720" y="1719072"/>
-            <a:ext cx="10271455" cy="3940889"/>
+            <a:off x="685800" y="1719072"/>
+            <a:ext cx="502920" cy="3274263"/>
           </a:xfrm>
           <a:prstGeom prst="rect">
             <a:avLst/>
@@ -14861,990 +15211,243 @@
           </a:bodyPr>
           <a:lstStyle/>
           <a:p>
-            <a:pPr>
+            <a:pPr algn="r">
               <a:spcAft>
-                <a:spcPts val="278"/>
+                <a:spcPts val="235"/>
               </a:spcAft>
             </a:pPr>
             <a:r>
-              <a:rPr sz="1300" i="1" b="0">
-                <a:solidFill>
-                  <a:srgbClr val="6A9955"/>
-                </a:solidFill>
-                <a:latin typeface="Consolas"/>
-              </a:rPr>
-              <a:t>/** Capa de aplicacion: aqui SI se captura, porque aqui se le habla al usuario. */</a:t>
-            </a:r>
-          </a:p>
-          <a:p>
-            <a:pPr>
+              <a:rPr sz="1100" i="0" b="0">
+                <a:solidFill>
+                  <a:srgbClr val="858585"/>
+                </a:solidFill>
+                <a:latin typeface="Consolas"/>
+              </a:rPr>
+              <a:t>1</a:t>
+            </a:r>
+          </a:p>
+          <a:p>
+            <a:pPr algn="r">
               <a:spcAft>
-                <a:spcPts val="278"/>
+                <a:spcPts val="235"/>
               </a:spcAft>
             </a:pPr>
             <a:r>
-              <a:rPr sz="1300" i="0" b="0">
-                <a:solidFill>
-                  <a:srgbClr val="569CD6"/>
-                </a:solidFill>
-                <a:latin typeface="Consolas"/>
-              </a:rPr>
-              <a:t>private</a:t>
-            </a:r>
-            <a:r>
-              <a:rPr sz="1300" i="0" b="0">
-                <a:solidFill>
-                  <a:srgbClr val="D4D4D4"/>
-                </a:solidFill>
-                <a:latin typeface="Consolas"/>
-              </a:rPr>
-              <a:t> </a:t>
-            </a:r>
-            <a:r>
-              <a:rPr sz="1300" i="0" b="0">
-                <a:solidFill>
-                  <a:srgbClr val="569CD6"/>
-                </a:solidFill>
-                <a:latin typeface="Consolas"/>
-              </a:rPr>
-              <a:t>static</a:t>
-            </a:r>
-            <a:r>
-              <a:rPr sz="1300" i="0" b="0">
-                <a:solidFill>
-                  <a:srgbClr val="D4D4D4"/>
-                </a:solidFill>
-                <a:latin typeface="Consolas"/>
-              </a:rPr>
-              <a:t> </a:t>
-            </a:r>
-            <a:r>
-              <a:rPr sz="1300" i="0" b="0">
-                <a:solidFill>
-                  <a:srgbClr val="569CD6"/>
-                </a:solidFill>
-                <a:latin typeface="Consolas"/>
-              </a:rPr>
-              <a:t>void</a:t>
-            </a:r>
-            <a:r>
-              <a:rPr sz="1300" i="0" b="0">
-                <a:solidFill>
-                  <a:srgbClr val="D4D4D4"/>
-                </a:solidFill>
-                <a:latin typeface="Consolas"/>
-              </a:rPr>
-              <a:t> </a:t>
-            </a:r>
-            <a:r>
-              <a:rPr sz="1300" i="0" b="0">
-                <a:solidFill>
-                  <a:srgbClr val="DCDCAA"/>
-                </a:solidFill>
-                <a:latin typeface="Consolas"/>
-              </a:rPr>
-              <a:t>registrar</a:t>
-            </a:r>
-            <a:r>
-              <a:rPr sz="1300" i="0" b="0">
-                <a:solidFill>
-                  <a:srgbClr val="D4D4D4"/>
-                </a:solidFill>
-                <a:latin typeface="Consolas"/>
-              </a:rPr>
-              <a:t>(</a:t>
-            </a:r>
-            <a:r>
-              <a:rPr sz="1300" i="0" b="0">
-                <a:solidFill>
-                  <a:srgbClr val="4EC9B0"/>
-                </a:solidFill>
-                <a:latin typeface="Consolas"/>
-              </a:rPr>
-              <a:t>List</a:t>
-            </a:r>
-            <a:r>
-              <a:rPr sz="1300" i="0" b="0">
-                <a:solidFill>
-                  <a:srgbClr val="D4D4D4"/>
-                </a:solidFill>
-                <a:latin typeface="Consolas"/>
-              </a:rPr>
-              <a:t>&lt;</a:t>
-            </a:r>
-            <a:r>
-              <a:rPr sz="1300" i="0" b="0">
-                <a:solidFill>
-                  <a:srgbClr val="D4D4D4"/>
-                </a:solidFill>
-                <a:latin typeface="Consolas"/>
-              </a:rPr>
-              <a:t>Mascota</a:t>
-            </a:r>
-            <a:r>
-              <a:rPr sz="1300" i="0" b="0">
-                <a:solidFill>
-                  <a:srgbClr val="D4D4D4"/>
-                </a:solidFill>
-                <a:latin typeface="Consolas"/>
-              </a:rPr>
-              <a:t>&gt; </a:t>
-            </a:r>
-            <a:r>
-              <a:rPr sz="1300" i="0" b="0">
-                <a:solidFill>
-                  <a:srgbClr val="D4D4D4"/>
-                </a:solidFill>
-                <a:latin typeface="Consolas"/>
-              </a:rPr>
-              <a:t>agenda</a:t>
-            </a:r>
-            <a:r>
-              <a:rPr sz="1300" i="0" b="0">
-                <a:solidFill>
-                  <a:srgbClr val="D4D4D4"/>
-                </a:solidFill>
-                <a:latin typeface="Consolas"/>
-              </a:rPr>
-              <a:t>, </a:t>
-            </a:r>
-            <a:r>
-              <a:rPr sz="1300" i="0" b="0">
-                <a:solidFill>
-                  <a:srgbClr val="4EC9B0"/>
-                </a:solidFill>
-                <a:latin typeface="Consolas"/>
-              </a:rPr>
-              <a:t>String</a:t>
-            </a:r>
-            <a:r>
-              <a:rPr sz="1300" i="0" b="0">
-                <a:solidFill>
-                  <a:srgbClr val="D4D4D4"/>
-                </a:solidFill>
-                <a:latin typeface="Consolas"/>
-              </a:rPr>
-              <a:t> </a:t>
-            </a:r>
-            <a:r>
-              <a:rPr sz="1300" i="0" b="0">
-                <a:solidFill>
-                  <a:srgbClr val="D4D4D4"/>
-                </a:solidFill>
-                <a:latin typeface="Consolas"/>
-              </a:rPr>
-              <a:t>id</a:t>
-            </a:r>
-            <a:r>
-              <a:rPr sz="1300" i="0" b="0">
-                <a:solidFill>
-                  <a:srgbClr val="D4D4D4"/>
-                </a:solidFill>
-                <a:latin typeface="Consolas"/>
-              </a:rPr>
-              <a:t>, </a:t>
-            </a:r>
-            <a:r>
-              <a:rPr sz="1300" i="0" b="0">
-                <a:solidFill>
-                  <a:srgbClr val="4EC9B0"/>
-                </a:solidFill>
-                <a:latin typeface="Consolas"/>
-              </a:rPr>
-              <a:t>String</a:t>
-            </a:r>
-            <a:r>
-              <a:rPr sz="1300" i="0" b="0">
-                <a:solidFill>
-                  <a:srgbClr val="D4D4D4"/>
-                </a:solidFill>
-                <a:latin typeface="Consolas"/>
-              </a:rPr>
-              <a:t> </a:t>
-            </a:r>
-            <a:r>
-              <a:rPr sz="1300" i="0" b="0">
-                <a:solidFill>
-                  <a:srgbClr val="D4D4D4"/>
-                </a:solidFill>
-                <a:latin typeface="Consolas"/>
-              </a:rPr>
-              <a:t>nombre</a:t>
-            </a:r>
-            <a:r>
-              <a:rPr sz="1300" i="0" b="0">
-                <a:solidFill>
-                  <a:srgbClr val="D4D4D4"/>
-                </a:solidFill>
-                <a:latin typeface="Consolas"/>
-              </a:rPr>
-              <a:t>, </a:t>
-            </a:r>
-            <a:r>
-              <a:rPr sz="1300" i="0" b="0">
-                <a:solidFill>
-                  <a:srgbClr val="4EC9B0"/>
-                </a:solidFill>
-                <a:latin typeface="Consolas"/>
-              </a:rPr>
-              <a:t>String</a:t>
-            </a:r>
-            <a:r>
-              <a:rPr sz="1300" i="0" b="0">
-                <a:solidFill>
-                  <a:srgbClr val="D4D4D4"/>
-                </a:solidFill>
-                <a:latin typeface="Consolas"/>
-              </a:rPr>
-              <a:t> </a:t>
-            </a:r>
-            <a:r>
-              <a:rPr sz="1300" i="0" b="0">
-                <a:solidFill>
-                  <a:srgbClr val="D4D4D4"/>
-                </a:solidFill>
-                <a:latin typeface="Consolas"/>
-              </a:rPr>
-              <a:t>edad</a:t>
-            </a:r>
-            <a:r>
-              <a:rPr sz="1300" i="0" b="0">
-                <a:solidFill>
-                  <a:srgbClr val="D4D4D4"/>
-                </a:solidFill>
-                <a:latin typeface="Consolas"/>
-              </a:rPr>
-              <a:t>, </a:t>
-            </a:r>
-            <a:r>
-              <a:rPr sz="1300" i="0" b="0">
-                <a:solidFill>
-                  <a:srgbClr val="4EC9B0"/>
-                </a:solidFill>
-                <a:latin typeface="Consolas"/>
-              </a:rPr>
-              <a:t>String</a:t>
-            </a:r>
-            <a:r>
-              <a:rPr sz="1300" i="0" b="0">
-                <a:solidFill>
-                  <a:srgbClr val="D4D4D4"/>
-                </a:solidFill>
-                <a:latin typeface="Consolas"/>
-              </a:rPr>
-              <a:t> </a:t>
-            </a:r>
-            <a:r>
-              <a:rPr sz="1300" i="0" b="0">
-                <a:solidFill>
-                  <a:srgbClr val="D4D4D4"/>
-                </a:solidFill>
-                <a:latin typeface="Consolas"/>
-              </a:rPr>
-              <a:t>peso</a:t>
-            </a:r>
-            <a:r>
-              <a:rPr sz="1300" i="0" b="0">
-                <a:solidFill>
-                  <a:srgbClr val="D4D4D4"/>
-                </a:solidFill>
-                <a:latin typeface="Consolas"/>
-              </a:rPr>
-              <a:t>) {</a:t>
-            </a:r>
-          </a:p>
-          <a:p>
-            <a:pPr>
+              <a:rPr sz="1100" i="0" b="0">
+                <a:solidFill>
+                  <a:srgbClr val="858585"/>
+                </a:solidFill>
+                <a:latin typeface="Consolas"/>
+              </a:rPr>
+              <a:t>2</a:t>
+            </a:r>
+          </a:p>
+          <a:p>
+            <a:pPr algn="r">
               <a:spcAft>
-                <a:spcPts val="278"/>
+                <a:spcPts val="235"/>
               </a:spcAft>
             </a:pPr>
             <a:r>
-              <a:rPr sz="1300" i="0" b="0">
-                <a:solidFill>
-                  <a:srgbClr val="D4D4D4"/>
-                </a:solidFill>
-                <a:latin typeface="Consolas"/>
-              </a:rPr>
-              <a:t>    </a:t>
-            </a:r>
-            <a:r>
-              <a:rPr sz="1300" i="0" b="0">
-                <a:solidFill>
-                  <a:srgbClr val="569CD6"/>
-                </a:solidFill>
-                <a:latin typeface="Consolas"/>
-              </a:rPr>
-              <a:t>try</a:t>
-            </a:r>
-            <a:r>
-              <a:rPr sz="1300" i="0" b="0">
-                <a:solidFill>
-                  <a:srgbClr val="D4D4D4"/>
-                </a:solidFill>
-                <a:latin typeface="Consolas"/>
-              </a:rPr>
-              <a:t> {</a:t>
-            </a:r>
-          </a:p>
-          <a:p>
-            <a:pPr>
+              <a:rPr sz="1100" i="0" b="0">
+                <a:solidFill>
+                  <a:srgbClr val="858585"/>
+                </a:solidFill>
+                <a:latin typeface="Consolas"/>
+              </a:rPr>
+              <a:t>3</a:t>
+            </a:r>
+          </a:p>
+          <a:p>
+            <a:pPr algn="r">
               <a:spcAft>
-                <a:spcPts val="278"/>
+                <a:spcPts val="235"/>
               </a:spcAft>
             </a:pPr>
             <a:r>
-              <a:rPr sz="1300" i="0" b="0">
-                <a:solidFill>
-                  <a:srgbClr val="D4D4D4"/>
-                </a:solidFill>
-                <a:latin typeface="Consolas"/>
-              </a:rPr>
-              <a:t>        </a:t>
-            </a:r>
-            <a:r>
-              <a:rPr sz="1300" i="0" b="0">
-                <a:solidFill>
-                  <a:srgbClr val="D4D4D4"/>
-                </a:solidFill>
-                <a:latin typeface="Consolas"/>
-              </a:rPr>
-              <a:t>Mascota</a:t>
-            </a:r>
-            <a:r>
-              <a:rPr sz="1300" i="0" b="0">
-                <a:solidFill>
-                  <a:srgbClr val="D4D4D4"/>
-                </a:solidFill>
-                <a:latin typeface="Consolas"/>
-              </a:rPr>
-              <a:t> </a:t>
-            </a:r>
-            <a:r>
-              <a:rPr sz="1300" i="0" b="0">
-                <a:solidFill>
-                  <a:srgbClr val="D4D4D4"/>
-                </a:solidFill>
-                <a:latin typeface="Consolas"/>
-              </a:rPr>
-              <a:t>m</a:t>
-            </a:r>
-            <a:r>
-              <a:rPr sz="1300" i="0" b="0">
-                <a:solidFill>
-                  <a:srgbClr val="D4D4D4"/>
-                </a:solidFill>
-                <a:latin typeface="Consolas"/>
-              </a:rPr>
-              <a:t> = </a:t>
-            </a:r>
-            <a:r>
-              <a:rPr sz="1300" i="0" b="0">
-                <a:solidFill>
-                  <a:srgbClr val="569CD6"/>
-                </a:solidFill>
-                <a:latin typeface="Consolas"/>
-              </a:rPr>
-              <a:t>new</a:t>
-            </a:r>
-            <a:r>
-              <a:rPr sz="1300" i="0" b="0">
-                <a:solidFill>
-                  <a:srgbClr val="D4D4D4"/>
-                </a:solidFill>
-                <a:latin typeface="Consolas"/>
-              </a:rPr>
-              <a:t> </a:t>
-            </a:r>
-            <a:r>
-              <a:rPr sz="1300" i="0" b="0">
-                <a:solidFill>
-                  <a:srgbClr val="4EC9B0"/>
-                </a:solidFill>
-                <a:latin typeface="Consolas"/>
-              </a:rPr>
-              <a:t>Mascota</a:t>
-            </a:r>
-            <a:r>
-              <a:rPr sz="1300" i="0" b="0">
-                <a:solidFill>
-                  <a:srgbClr val="D4D4D4"/>
-                </a:solidFill>
-                <a:latin typeface="Consolas"/>
-              </a:rPr>
-              <a:t>(</a:t>
-            </a:r>
-            <a:r>
-              <a:rPr sz="1300" i="0" b="0">
-                <a:solidFill>
-                  <a:srgbClr val="D4D4D4"/>
-                </a:solidFill>
-                <a:latin typeface="Consolas"/>
-              </a:rPr>
-              <a:t>id</a:t>
-            </a:r>
-            <a:r>
-              <a:rPr sz="1300" i="0" b="0">
-                <a:solidFill>
-                  <a:srgbClr val="D4D4D4"/>
-                </a:solidFill>
-                <a:latin typeface="Consolas"/>
-              </a:rPr>
-              <a:t>, </a:t>
-            </a:r>
-            <a:r>
-              <a:rPr sz="1300" i="0" b="0">
-                <a:solidFill>
-                  <a:srgbClr val="D4D4D4"/>
-                </a:solidFill>
-                <a:latin typeface="Consolas"/>
-              </a:rPr>
-              <a:t>nombre</a:t>
-            </a:r>
-            <a:r>
-              <a:rPr sz="1300" i="0" b="0">
-                <a:solidFill>
-                  <a:srgbClr val="D4D4D4"/>
-                </a:solidFill>
-                <a:latin typeface="Consolas"/>
-              </a:rPr>
-              <a:t>);</a:t>
-            </a:r>
-          </a:p>
-          <a:p>
-            <a:pPr>
+              <a:rPr sz="1100" i="0" b="0">
+                <a:solidFill>
+                  <a:srgbClr val="858585"/>
+                </a:solidFill>
+                <a:latin typeface="Consolas"/>
+              </a:rPr>
+              <a:t>4</a:t>
+            </a:r>
+          </a:p>
+          <a:p>
+            <a:pPr algn="r">
               <a:spcAft>
-                <a:spcPts val="278"/>
+                <a:spcPts val="235"/>
               </a:spcAft>
             </a:pPr>
             <a:r>
-              <a:rPr sz="1300" i="0" b="0">
-                <a:solidFill>
-                  <a:srgbClr val="D4D4D4"/>
-                </a:solidFill>
-                <a:latin typeface="Consolas"/>
-              </a:rPr>
-              <a:t>        </a:t>
-            </a:r>
-            <a:r>
-              <a:rPr sz="1300" i="0" b="0">
-                <a:solidFill>
-                  <a:srgbClr val="DCDCAA"/>
-                </a:solidFill>
-                <a:latin typeface="Consolas"/>
-              </a:rPr>
-              <a:t>m.setEdad</a:t>
-            </a:r>
-            <a:r>
-              <a:rPr sz="1300" i="0" b="0">
-                <a:solidFill>
-                  <a:srgbClr val="D4D4D4"/>
-                </a:solidFill>
-                <a:latin typeface="Consolas"/>
-              </a:rPr>
-              <a:t>(</a:t>
-            </a:r>
-            <a:r>
-              <a:rPr sz="1300" i="0" b="0">
-                <a:solidFill>
-                  <a:srgbClr val="D4D4D4"/>
-                </a:solidFill>
-                <a:latin typeface="Consolas"/>
-              </a:rPr>
-              <a:t>edad</a:t>
-            </a:r>
-            <a:r>
-              <a:rPr sz="1300" i="0" b="0">
-                <a:solidFill>
-                  <a:srgbClr val="D4D4D4"/>
-                </a:solidFill>
-                <a:latin typeface="Consolas"/>
-              </a:rPr>
-              <a:t>);</a:t>
-            </a:r>
-          </a:p>
-          <a:p>
-            <a:pPr>
+              <a:rPr sz="1100" i="0" b="0">
+                <a:solidFill>
+                  <a:srgbClr val="858585"/>
+                </a:solidFill>
+                <a:latin typeface="Consolas"/>
+              </a:rPr>
+              <a:t>5</a:t>
+            </a:r>
+          </a:p>
+          <a:p>
+            <a:pPr algn="r">
               <a:spcAft>
-                <a:spcPts val="278"/>
+                <a:spcPts val="235"/>
               </a:spcAft>
             </a:pPr>
             <a:r>
-              <a:rPr sz="1300" i="0" b="0">
-                <a:solidFill>
-                  <a:srgbClr val="D4D4D4"/>
-                </a:solidFill>
-                <a:latin typeface="Consolas"/>
-              </a:rPr>
-              <a:t>        </a:t>
-            </a:r>
-            <a:r>
-              <a:rPr sz="1300" i="0" b="0">
-                <a:solidFill>
-                  <a:srgbClr val="DCDCAA"/>
-                </a:solidFill>
-                <a:latin typeface="Consolas"/>
-              </a:rPr>
-              <a:t>m.setPeso</a:t>
-            </a:r>
-            <a:r>
-              <a:rPr sz="1300" i="0" b="0">
-                <a:solidFill>
-                  <a:srgbClr val="D4D4D4"/>
-                </a:solidFill>
-                <a:latin typeface="Consolas"/>
-              </a:rPr>
-              <a:t>(</a:t>
-            </a:r>
-            <a:r>
-              <a:rPr sz="1300" i="0" b="0">
-                <a:solidFill>
-                  <a:srgbClr val="D4D4D4"/>
-                </a:solidFill>
-                <a:latin typeface="Consolas"/>
-              </a:rPr>
-              <a:t>peso</a:t>
-            </a:r>
-            <a:r>
-              <a:rPr sz="1300" i="0" b="0">
-                <a:solidFill>
-                  <a:srgbClr val="D4D4D4"/>
-                </a:solidFill>
-                <a:latin typeface="Consolas"/>
-              </a:rPr>
-              <a:t>);</a:t>
-            </a:r>
-          </a:p>
-          <a:p>
-            <a:pPr>
+              <a:rPr sz="1100" i="0" b="0">
+                <a:solidFill>
+                  <a:srgbClr val="858585"/>
+                </a:solidFill>
+                <a:latin typeface="Consolas"/>
+              </a:rPr>
+              <a:t>6</a:t>
+            </a:r>
+          </a:p>
+          <a:p>
+            <a:pPr algn="r">
               <a:spcAft>
-                <a:spcPts val="278"/>
+                <a:spcPts val="235"/>
               </a:spcAft>
             </a:pPr>
             <a:r>
-              <a:rPr sz="1300" i="0" b="0">
-                <a:solidFill>
-                  <a:srgbClr val="D4D4D4"/>
-                </a:solidFill>
-                <a:latin typeface="Consolas"/>
-              </a:rPr>
-              <a:t>        </a:t>
-            </a:r>
-            <a:r>
-              <a:rPr sz="1300" i="0" b="0">
-                <a:solidFill>
-                  <a:srgbClr val="DCDCAA"/>
-                </a:solidFill>
-                <a:latin typeface="Consolas"/>
-              </a:rPr>
-              <a:t>agenda.add</a:t>
-            </a:r>
-            <a:r>
-              <a:rPr sz="1300" i="0" b="0">
-                <a:solidFill>
-                  <a:srgbClr val="D4D4D4"/>
-                </a:solidFill>
-                <a:latin typeface="Consolas"/>
-              </a:rPr>
-              <a:t>(</a:t>
-            </a:r>
-            <a:r>
-              <a:rPr sz="1300" i="0" b="0">
-                <a:solidFill>
-                  <a:srgbClr val="D4D4D4"/>
-                </a:solidFill>
-                <a:latin typeface="Consolas"/>
-              </a:rPr>
-              <a:t>m</a:t>
-            </a:r>
-            <a:r>
-              <a:rPr sz="1300" i="0" b="0">
-                <a:solidFill>
-                  <a:srgbClr val="D4D4D4"/>
-                </a:solidFill>
-                <a:latin typeface="Consolas"/>
-              </a:rPr>
-              <a:t>);   </a:t>
-            </a:r>
-            <a:r>
-              <a:rPr sz="1300" i="1" b="0">
-                <a:solidFill>
-                  <a:srgbClr val="6A9955"/>
-                </a:solidFill>
-                <a:latin typeface="Consolas"/>
-              </a:rPr>
-              <a:t>// el add va DESPUES de validar: nada incompleto entra a la coleccion</a:t>
-            </a:r>
-          </a:p>
-          <a:p>
-            <a:pPr>
+              <a:rPr sz="1100" i="0" b="0">
+                <a:solidFill>
+                  <a:srgbClr val="858585"/>
+                </a:solidFill>
+                <a:latin typeface="Consolas"/>
+              </a:rPr>
+              <a:t>7</a:t>
+            </a:r>
+          </a:p>
+          <a:p>
+            <a:pPr algn="r">
               <a:spcAft>
-                <a:spcPts val="278"/>
+                <a:spcPts val="235"/>
               </a:spcAft>
             </a:pPr>
             <a:r>
-              <a:rPr sz="1300" i="0" b="0">
-                <a:solidFill>
-                  <a:srgbClr val="D4D4D4"/>
-                </a:solidFill>
-                <a:latin typeface="Consolas"/>
-              </a:rPr>
-              <a:t>        </a:t>
-            </a:r>
-            <a:r>
-              <a:rPr sz="1300" i="0" b="0">
-                <a:solidFill>
-                  <a:srgbClr val="DCDCAA"/>
-                </a:solidFill>
-                <a:latin typeface="Consolas"/>
-              </a:rPr>
-              <a:t>System.out.println</a:t>
-            </a:r>
-            <a:r>
-              <a:rPr sz="1300" i="0" b="0">
-                <a:solidFill>
-                  <a:srgbClr val="D4D4D4"/>
-                </a:solidFill>
-                <a:latin typeface="Consolas"/>
-              </a:rPr>
-              <a:t>(</a:t>
-            </a:r>
-            <a:r>
-              <a:rPr sz="1300" i="0" b="0">
-                <a:solidFill>
-                  <a:srgbClr val="CE9178"/>
-                </a:solidFill>
-                <a:latin typeface="Consolas"/>
-              </a:rPr>
-              <a:t>"  [OK] Registrada: "</a:t>
-            </a:r>
-            <a:r>
-              <a:rPr sz="1300" i="0" b="0">
-                <a:solidFill>
-                  <a:srgbClr val="D4D4D4"/>
-                </a:solidFill>
-                <a:latin typeface="Consolas"/>
-              </a:rPr>
-              <a:t> + </a:t>
-            </a:r>
-            <a:r>
-              <a:rPr sz="1300" i="0" b="0">
-                <a:solidFill>
-                  <a:srgbClr val="D4D4D4"/>
-                </a:solidFill>
-                <a:latin typeface="Consolas"/>
-              </a:rPr>
-              <a:t>m</a:t>
-            </a:r>
-            <a:r>
-              <a:rPr sz="1300" i="0" b="0">
-                <a:solidFill>
-                  <a:srgbClr val="D4D4D4"/>
-                </a:solidFill>
-                <a:latin typeface="Consolas"/>
-              </a:rPr>
-              <a:t>);</a:t>
-            </a:r>
-          </a:p>
-          <a:p>
-            <a:pPr>
+              <a:rPr sz="1100" i="0" b="0">
+                <a:solidFill>
+                  <a:srgbClr val="858585"/>
+                </a:solidFill>
+                <a:latin typeface="Consolas"/>
+              </a:rPr>
+              <a:t>8</a:t>
+            </a:r>
+          </a:p>
+          <a:p>
+            <a:pPr algn="r">
               <a:spcAft>
-                <a:spcPts val="278"/>
+                <a:spcPts val="235"/>
               </a:spcAft>
             </a:pPr>
             <a:r>
-              <a:rPr sz="1300" i="0" b="0">
-                <a:solidFill>
-                  <a:srgbClr val="D4D4D4"/>
-                </a:solidFill>
-                <a:latin typeface="Consolas"/>
-              </a:rPr>
-              <a:t>    } </a:t>
-            </a:r>
-            <a:r>
-              <a:rPr sz="1300" i="0" b="0">
-                <a:solidFill>
-                  <a:srgbClr val="569CD6"/>
-                </a:solidFill>
-                <a:latin typeface="Consolas"/>
-              </a:rPr>
-              <a:t>catch</a:t>
-            </a:r>
-            <a:r>
-              <a:rPr sz="1300" i="0" b="0">
-                <a:solidFill>
-                  <a:srgbClr val="D4D4D4"/>
-                </a:solidFill>
-                <a:latin typeface="Consolas"/>
-              </a:rPr>
-              <a:t> (</a:t>
-            </a:r>
-            <a:r>
-              <a:rPr sz="1300" i="0" b="0">
-                <a:solidFill>
-                  <a:srgbClr val="D4D4D4"/>
-                </a:solidFill>
-                <a:latin typeface="Consolas"/>
-              </a:rPr>
-              <a:t>DatoInvalidoException</a:t>
-            </a:r>
-            <a:r>
-              <a:rPr sz="1300" i="0" b="0">
-                <a:solidFill>
-                  <a:srgbClr val="D4D4D4"/>
-                </a:solidFill>
-                <a:latin typeface="Consolas"/>
-              </a:rPr>
-              <a:t> </a:t>
-            </a:r>
-            <a:r>
-              <a:rPr sz="1300" i="0" b="0">
-                <a:solidFill>
-                  <a:srgbClr val="D4D4D4"/>
-                </a:solidFill>
-                <a:latin typeface="Consolas"/>
-              </a:rPr>
-              <a:t>e</a:t>
-            </a:r>
-            <a:r>
-              <a:rPr sz="1300" i="0" b="0">
-                <a:solidFill>
-                  <a:srgbClr val="D4D4D4"/>
-                </a:solidFill>
-                <a:latin typeface="Consolas"/>
-              </a:rPr>
-              <a:t>) {</a:t>
-            </a:r>
-          </a:p>
-          <a:p>
-            <a:pPr>
+              <a:rPr sz="1100" i="0" b="0">
+                <a:solidFill>
+                  <a:srgbClr val="858585"/>
+                </a:solidFill>
+                <a:latin typeface="Consolas"/>
+              </a:rPr>
+              <a:t>9</a:t>
+            </a:r>
+          </a:p>
+          <a:p>
+            <a:pPr algn="r">
               <a:spcAft>
-                <a:spcPts val="278"/>
+                <a:spcPts val="235"/>
               </a:spcAft>
             </a:pPr>
             <a:r>
-              <a:rPr sz="1300" i="0" b="0">
-                <a:solidFill>
-                  <a:srgbClr val="D4D4D4"/>
-                </a:solidFill>
-                <a:latin typeface="Consolas"/>
-              </a:rPr>
-              <a:t>        </a:t>
-            </a:r>
-            <a:r>
-              <a:rPr sz="1300" i="1" b="0">
-                <a:solidFill>
-                  <a:srgbClr val="6A9955"/>
-                </a:solidFill>
-                <a:latin typeface="Consolas"/>
-              </a:rPr>
-              <a:t>// En Swing seria: JOptionPane.showMessageDialog(this, e.getMessage(), "Dato invalido", JOptionPane.WARNING_MESSAGE);</a:t>
-            </a:r>
-          </a:p>
-          <a:p>
-            <a:pPr>
+              <a:rPr sz="1100" i="0" b="0">
+                <a:solidFill>
+                  <a:srgbClr val="858585"/>
+                </a:solidFill>
+                <a:latin typeface="Consolas"/>
+              </a:rPr>
+              <a:t>10</a:t>
+            </a:r>
+          </a:p>
+          <a:p>
+            <a:pPr algn="r">
               <a:spcAft>
-                <a:spcPts val="278"/>
+                <a:spcPts val="235"/>
               </a:spcAft>
             </a:pPr>
             <a:r>
-              <a:rPr sz="1300" i="0" b="0">
-                <a:solidFill>
-                  <a:srgbClr val="D4D4D4"/>
-                </a:solidFill>
-                <a:latin typeface="Consolas"/>
-              </a:rPr>
-              <a:t>        </a:t>
-            </a:r>
-            <a:r>
-              <a:rPr sz="1300" i="0" b="0">
-                <a:solidFill>
-                  <a:srgbClr val="DCDCAA"/>
-                </a:solidFill>
-                <a:latin typeface="Consolas"/>
-              </a:rPr>
-              <a:t>System.out.println</a:t>
-            </a:r>
-            <a:r>
-              <a:rPr sz="1300" i="0" b="0">
-                <a:solidFill>
-                  <a:srgbClr val="D4D4D4"/>
-                </a:solidFill>
-                <a:latin typeface="Consolas"/>
-              </a:rPr>
-              <a:t>(</a:t>
-            </a:r>
-            <a:r>
-              <a:rPr sz="1300" i="0" b="0">
-                <a:solidFill>
-                  <a:srgbClr val="CE9178"/>
-                </a:solidFill>
-                <a:latin typeface="Consolas"/>
-              </a:rPr>
-              <a:t>"  [AVISO AL USUARIO] "</a:t>
-            </a:r>
-            <a:r>
-              <a:rPr sz="1300" i="0" b="0">
-                <a:solidFill>
-                  <a:srgbClr val="D4D4D4"/>
-                </a:solidFill>
-                <a:latin typeface="Consolas"/>
-              </a:rPr>
-              <a:t> + </a:t>
-            </a:r>
-            <a:r>
-              <a:rPr sz="1300" i="0" b="0">
-                <a:solidFill>
-                  <a:srgbClr val="DCDCAA"/>
-                </a:solidFill>
-                <a:latin typeface="Consolas"/>
-              </a:rPr>
-              <a:t>e.getMessage</a:t>
-            </a:r>
-            <a:r>
-              <a:rPr sz="1300" i="0" b="0">
-                <a:solidFill>
-                  <a:srgbClr val="D4D4D4"/>
-                </a:solidFill>
-                <a:latin typeface="Consolas"/>
-              </a:rPr>
-              <a:t>());</a:t>
-            </a:r>
-          </a:p>
-          <a:p>
-            <a:pPr>
+              <a:rPr sz="1100" i="0" b="0">
+                <a:solidFill>
+                  <a:srgbClr val="858585"/>
+                </a:solidFill>
+                <a:latin typeface="Consolas"/>
+              </a:rPr>
+              <a:t>11</a:t>
+            </a:r>
+          </a:p>
+          <a:p>
+            <a:pPr algn="r">
               <a:spcAft>
-                <a:spcPts val="278"/>
+                <a:spcPts val="235"/>
               </a:spcAft>
             </a:pPr>
             <a:r>
-              <a:rPr sz="1300" i="0" b="0">
-                <a:solidFill>
-                  <a:srgbClr val="D4D4D4"/>
-                </a:solidFill>
-                <a:latin typeface="Consolas"/>
-              </a:rPr>
-              <a:t>    } </a:t>
-            </a:r>
-            <a:r>
-              <a:rPr sz="1300" i="0" b="0">
-                <a:solidFill>
-                  <a:srgbClr val="569CD6"/>
-                </a:solidFill>
-                <a:latin typeface="Consolas"/>
-              </a:rPr>
-              <a:t>finally</a:t>
-            </a:r>
-            <a:r>
-              <a:rPr sz="1300" i="0" b="0">
-                <a:solidFill>
-                  <a:srgbClr val="D4D4D4"/>
-                </a:solidFill>
-                <a:latin typeface="Consolas"/>
-              </a:rPr>
-              <a:t> {</a:t>
-            </a:r>
-          </a:p>
-          <a:p>
-            <a:pPr>
+              <a:rPr sz="1100" i="0" b="0">
+                <a:solidFill>
+                  <a:srgbClr val="858585"/>
+                </a:solidFill>
+                <a:latin typeface="Consolas"/>
+              </a:rPr>
+              <a:t>12</a:t>
+            </a:r>
+          </a:p>
+          <a:p>
+            <a:pPr algn="r">
               <a:spcAft>
-                <a:spcPts val="278"/>
+                <a:spcPts val="235"/>
               </a:spcAft>
             </a:pPr>
             <a:r>
-              <a:rPr sz="1300" i="0" b="0">
-                <a:solidFill>
-                  <a:srgbClr val="D4D4D4"/>
-                </a:solidFill>
-                <a:latin typeface="Consolas"/>
-              </a:rPr>
-              <a:t>        </a:t>
-            </a:r>
-            <a:r>
-              <a:rPr sz="1300" i="0" b="0">
-                <a:solidFill>
-                  <a:srgbClr val="DCDCAA"/>
-                </a:solidFill>
-                <a:latin typeface="Consolas"/>
-              </a:rPr>
-              <a:t>System.out.println</a:t>
-            </a:r>
-            <a:r>
-              <a:rPr sz="1300" i="0" b="0">
-                <a:solidFill>
-                  <a:srgbClr val="D4D4D4"/>
-                </a:solidFill>
-                <a:latin typeface="Consolas"/>
-              </a:rPr>
-              <a:t>(</a:t>
-            </a:r>
-            <a:r>
-              <a:rPr sz="1300" i="0" b="0">
-                <a:solidFill>
-                  <a:srgbClr val="CE9178"/>
-                </a:solidFill>
-                <a:latin typeface="Consolas"/>
-              </a:rPr>
-              <a:t>"  (finally) Intento terminado. Mascotas en memoria: "</a:t>
-            </a:r>
-            <a:r>
-              <a:rPr sz="1300" i="0" b="0">
-                <a:solidFill>
-                  <a:srgbClr val="D4D4D4"/>
-                </a:solidFill>
-                <a:latin typeface="Consolas"/>
-              </a:rPr>
-              <a:t> + </a:t>
-            </a:r>
-            <a:r>
-              <a:rPr sz="1300" i="0" b="0">
-                <a:solidFill>
-                  <a:srgbClr val="DCDCAA"/>
-                </a:solidFill>
-                <a:latin typeface="Consolas"/>
-              </a:rPr>
-              <a:t>agenda.size</a:t>
-            </a:r>
-            <a:r>
-              <a:rPr sz="1300" i="0" b="0">
-                <a:solidFill>
-                  <a:srgbClr val="D4D4D4"/>
-                </a:solidFill>
-                <a:latin typeface="Consolas"/>
-              </a:rPr>
-              <a:t>());</a:t>
-            </a:r>
-          </a:p>
-          <a:p>
-            <a:pPr>
+              <a:rPr sz="1100" i="0" b="0">
+                <a:solidFill>
+                  <a:srgbClr val="858585"/>
+                </a:solidFill>
+                <a:latin typeface="Consolas"/>
+              </a:rPr>
+              <a:t>13</a:t>
+            </a:r>
+          </a:p>
+          <a:p>
+            <a:pPr algn="r">
               <a:spcAft>
-                <a:spcPts val="278"/>
+                <a:spcPts val="235"/>
               </a:spcAft>
             </a:pPr>
             <a:r>
-              <a:rPr sz="1300" i="0" b="0">
-                <a:solidFill>
-                  <a:srgbClr val="D4D4D4"/>
-                </a:solidFill>
-                <a:latin typeface="Consolas"/>
-              </a:rPr>
-              <a:t>    }</a:t>
-            </a:r>
-          </a:p>
-          <a:p>
-            <a:pPr>
+              <a:rPr sz="1100" i="0" b="0">
+                <a:solidFill>
+                  <a:srgbClr val="858585"/>
+                </a:solidFill>
+                <a:latin typeface="Consolas"/>
+              </a:rPr>
+              <a:t>14</a:t>
+            </a:r>
+          </a:p>
+          <a:p>
+            <a:pPr algn="r">
               <a:spcAft>
-                <a:spcPts val="278"/>
+                <a:spcPts val="235"/>
               </a:spcAft>
             </a:pPr>
             <a:r>
-              <a:rPr sz="1300" i="0" b="0">
-                <a:solidFill>
-                  <a:srgbClr val="D4D4D4"/>
-                </a:solidFill>
-                <a:latin typeface="Consolas"/>
-              </a:rPr>
-              <a:t>}</a:t>
+              <a:rPr sz="1100" i="0" b="0">
+                <a:solidFill>
+                  <a:srgbClr val="858585"/>
+                </a:solidFill>
+                <a:latin typeface="Consolas"/>
+              </a:rPr>
+              <a:t>15</a:t>
             </a:r>
           </a:p>
         </p:txBody>
@@ -15857,8 +15460,8 @@
         </p:nvSpPr>
         <p:spPr>
           <a:xfrm>
-            <a:off x="457200" y="6035040"/>
-            <a:ext cx="11277295" cy="365760"/>
+            <a:off x="1188720" y="1719072"/>
+            <a:ext cx="10271455" cy="3274263"/>
           </a:xfrm>
           <a:prstGeom prst="rect">
             <a:avLst/>
@@ -15871,6 +15474,1016 @@
           </a:bodyPr>
           <a:lstStyle/>
           <a:p>
+            <a:pPr>
+              <a:spcAft>
+                <a:spcPts val="235"/>
+              </a:spcAft>
+            </a:pPr>
+            <a:r>
+              <a:rPr sz="1100" i="1" b="0">
+                <a:solidFill>
+                  <a:srgbClr val="6A9955"/>
+                </a:solidFill>
+                <a:latin typeface="Consolas"/>
+              </a:rPr>
+              <a:t>/** Capa de aplicacion: aqui SI se captura, porque aqui se le habla al usuario. */</a:t>
+            </a:r>
+          </a:p>
+          <a:p>
+            <a:pPr>
+              <a:spcAft>
+                <a:spcPts val="235"/>
+              </a:spcAft>
+            </a:pPr>
+            <a:r>
+              <a:rPr sz="1100" i="0" b="0">
+                <a:solidFill>
+                  <a:srgbClr val="569CD6"/>
+                </a:solidFill>
+                <a:latin typeface="Consolas"/>
+              </a:rPr>
+              <a:t>private</a:t>
+            </a:r>
+            <a:r>
+              <a:rPr sz="1100" i="0" b="0">
+                <a:solidFill>
+                  <a:srgbClr val="D4D4D4"/>
+                </a:solidFill>
+                <a:latin typeface="Consolas"/>
+              </a:rPr>
+              <a:t> </a:t>
+            </a:r>
+            <a:r>
+              <a:rPr sz="1100" i="0" b="0">
+                <a:solidFill>
+                  <a:srgbClr val="569CD6"/>
+                </a:solidFill>
+                <a:latin typeface="Consolas"/>
+              </a:rPr>
+              <a:t>static</a:t>
+            </a:r>
+            <a:r>
+              <a:rPr sz="1100" i="0" b="0">
+                <a:solidFill>
+                  <a:srgbClr val="D4D4D4"/>
+                </a:solidFill>
+                <a:latin typeface="Consolas"/>
+              </a:rPr>
+              <a:t> </a:t>
+            </a:r>
+            <a:r>
+              <a:rPr sz="1100" i="0" b="0">
+                <a:solidFill>
+                  <a:srgbClr val="569CD6"/>
+                </a:solidFill>
+                <a:latin typeface="Consolas"/>
+              </a:rPr>
+              <a:t>void</a:t>
+            </a:r>
+            <a:r>
+              <a:rPr sz="1100" i="0" b="0">
+                <a:solidFill>
+                  <a:srgbClr val="D4D4D4"/>
+                </a:solidFill>
+                <a:latin typeface="Consolas"/>
+              </a:rPr>
+              <a:t> </a:t>
+            </a:r>
+            <a:r>
+              <a:rPr sz="1100" i="0" b="0">
+                <a:solidFill>
+                  <a:srgbClr val="DCDCAA"/>
+                </a:solidFill>
+                <a:latin typeface="Consolas"/>
+              </a:rPr>
+              <a:t>registrar</a:t>
+            </a:r>
+            <a:r>
+              <a:rPr sz="1100" i="0" b="0">
+                <a:solidFill>
+                  <a:srgbClr val="D4D4D4"/>
+                </a:solidFill>
+                <a:latin typeface="Consolas"/>
+              </a:rPr>
+              <a:t>(</a:t>
+            </a:r>
+            <a:r>
+              <a:rPr sz="1100" i="0" b="0">
+                <a:solidFill>
+                  <a:srgbClr val="4EC9B0"/>
+                </a:solidFill>
+                <a:latin typeface="Consolas"/>
+              </a:rPr>
+              <a:t>List</a:t>
+            </a:r>
+            <a:r>
+              <a:rPr sz="1100" i="0" b="0">
+                <a:solidFill>
+                  <a:srgbClr val="D4D4D4"/>
+                </a:solidFill>
+                <a:latin typeface="Consolas"/>
+              </a:rPr>
+              <a:t>&lt;</a:t>
+            </a:r>
+            <a:r>
+              <a:rPr sz="1100" i="0" b="0">
+                <a:solidFill>
+                  <a:srgbClr val="D4D4D4"/>
+                </a:solidFill>
+                <a:latin typeface="Consolas"/>
+              </a:rPr>
+              <a:t>Mascota</a:t>
+            </a:r>
+            <a:r>
+              <a:rPr sz="1100" i="0" b="0">
+                <a:solidFill>
+                  <a:srgbClr val="D4D4D4"/>
+                </a:solidFill>
+                <a:latin typeface="Consolas"/>
+              </a:rPr>
+              <a:t>&gt; </a:t>
+            </a:r>
+            <a:r>
+              <a:rPr sz="1100" i="0" b="0">
+                <a:solidFill>
+                  <a:srgbClr val="D4D4D4"/>
+                </a:solidFill>
+                <a:latin typeface="Consolas"/>
+              </a:rPr>
+              <a:t>agenda</a:t>
+            </a:r>
+            <a:r>
+              <a:rPr sz="1100" i="0" b="0">
+                <a:solidFill>
+                  <a:srgbClr val="D4D4D4"/>
+                </a:solidFill>
+                <a:latin typeface="Consolas"/>
+              </a:rPr>
+              <a:t>, </a:t>
+            </a:r>
+            <a:r>
+              <a:rPr sz="1100" i="0" b="0">
+                <a:solidFill>
+                  <a:srgbClr val="4EC9B0"/>
+                </a:solidFill>
+                <a:latin typeface="Consolas"/>
+              </a:rPr>
+              <a:t>String</a:t>
+            </a:r>
+            <a:r>
+              <a:rPr sz="1100" i="0" b="0">
+                <a:solidFill>
+                  <a:srgbClr val="D4D4D4"/>
+                </a:solidFill>
+                <a:latin typeface="Consolas"/>
+              </a:rPr>
+              <a:t> </a:t>
+            </a:r>
+            <a:r>
+              <a:rPr sz="1100" i="0" b="0">
+                <a:solidFill>
+                  <a:srgbClr val="D4D4D4"/>
+                </a:solidFill>
+                <a:latin typeface="Consolas"/>
+              </a:rPr>
+              <a:t>id</a:t>
+            </a:r>
+            <a:r>
+              <a:rPr sz="1100" i="0" b="0">
+                <a:solidFill>
+                  <a:srgbClr val="D4D4D4"/>
+                </a:solidFill>
+                <a:latin typeface="Consolas"/>
+              </a:rPr>
+              <a:t>, </a:t>
+            </a:r>
+            <a:r>
+              <a:rPr sz="1100" i="0" b="0">
+                <a:solidFill>
+                  <a:srgbClr val="4EC9B0"/>
+                </a:solidFill>
+                <a:latin typeface="Consolas"/>
+              </a:rPr>
+              <a:t>String</a:t>
+            </a:r>
+            <a:r>
+              <a:rPr sz="1100" i="0" b="0">
+                <a:solidFill>
+                  <a:srgbClr val="D4D4D4"/>
+                </a:solidFill>
+                <a:latin typeface="Consolas"/>
+              </a:rPr>
+              <a:t> </a:t>
+            </a:r>
+            <a:r>
+              <a:rPr sz="1100" i="0" b="0">
+                <a:solidFill>
+                  <a:srgbClr val="D4D4D4"/>
+                </a:solidFill>
+                <a:latin typeface="Consolas"/>
+              </a:rPr>
+              <a:t>nombre</a:t>
+            </a:r>
+            <a:r>
+              <a:rPr sz="1100" i="0" b="0">
+                <a:solidFill>
+                  <a:srgbClr val="D4D4D4"/>
+                </a:solidFill>
+                <a:latin typeface="Consolas"/>
+              </a:rPr>
+              <a:t>, </a:t>
+            </a:r>
+            <a:r>
+              <a:rPr sz="1100" i="0" b="0">
+                <a:solidFill>
+                  <a:srgbClr val="4EC9B0"/>
+                </a:solidFill>
+                <a:latin typeface="Consolas"/>
+              </a:rPr>
+              <a:t>String</a:t>
+            </a:r>
+            <a:r>
+              <a:rPr sz="1100" i="0" b="0">
+                <a:solidFill>
+                  <a:srgbClr val="D4D4D4"/>
+                </a:solidFill>
+                <a:latin typeface="Consolas"/>
+              </a:rPr>
+              <a:t> </a:t>
+            </a:r>
+            <a:r>
+              <a:rPr sz="1100" i="0" b="0">
+                <a:solidFill>
+                  <a:srgbClr val="D4D4D4"/>
+                </a:solidFill>
+                <a:latin typeface="Consolas"/>
+              </a:rPr>
+              <a:t>edad</a:t>
+            </a:r>
+            <a:r>
+              <a:rPr sz="1100" i="0" b="0">
+                <a:solidFill>
+                  <a:srgbClr val="D4D4D4"/>
+                </a:solidFill>
+                <a:latin typeface="Consolas"/>
+              </a:rPr>
+              <a:t>, </a:t>
+            </a:r>
+            <a:r>
+              <a:rPr sz="1100" i="0" b="0">
+                <a:solidFill>
+                  <a:srgbClr val="4EC9B0"/>
+                </a:solidFill>
+                <a:latin typeface="Consolas"/>
+              </a:rPr>
+              <a:t>String</a:t>
+            </a:r>
+            <a:r>
+              <a:rPr sz="1100" i="0" b="0">
+                <a:solidFill>
+                  <a:srgbClr val="D4D4D4"/>
+                </a:solidFill>
+                <a:latin typeface="Consolas"/>
+              </a:rPr>
+              <a:t> </a:t>
+            </a:r>
+            <a:r>
+              <a:rPr sz="1100" i="0" b="0">
+                <a:solidFill>
+                  <a:srgbClr val="D4D4D4"/>
+                </a:solidFill>
+                <a:latin typeface="Consolas"/>
+              </a:rPr>
+              <a:t>peso</a:t>
+            </a:r>
+            <a:r>
+              <a:rPr sz="1100" i="0" b="0">
+                <a:solidFill>
+                  <a:srgbClr val="D4D4D4"/>
+                </a:solidFill>
+                <a:latin typeface="Consolas"/>
+              </a:rPr>
+              <a:t>) {</a:t>
+            </a:r>
+          </a:p>
+          <a:p>
+            <a:pPr>
+              <a:spcAft>
+                <a:spcPts val="235"/>
+              </a:spcAft>
+            </a:pPr>
+            <a:r>
+              <a:rPr sz="1100" i="0" b="0">
+                <a:solidFill>
+                  <a:srgbClr val="D4D4D4"/>
+                </a:solidFill>
+                <a:latin typeface="Consolas"/>
+              </a:rPr>
+              <a:t>    </a:t>
+            </a:r>
+            <a:r>
+              <a:rPr sz="1100" i="0" b="0">
+                <a:solidFill>
+                  <a:srgbClr val="569CD6"/>
+                </a:solidFill>
+                <a:latin typeface="Consolas"/>
+              </a:rPr>
+              <a:t>try</a:t>
+            </a:r>
+            <a:r>
+              <a:rPr sz="1100" i="0" b="0">
+                <a:solidFill>
+                  <a:srgbClr val="D4D4D4"/>
+                </a:solidFill>
+                <a:latin typeface="Consolas"/>
+              </a:rPr>
+              <a:t> {</a:t>
+            </a:r>
+          </a:p>
+          <a:p>
+            <a:pPr>
+              <a:spcAft>
+                <a:spcPts val="235"/>
+              </a:spcAft>
+            </a:pPr>
+            <a:r>
+              <a:rPr sz="1100" i="0" b="0">
+                <a:solidFill>
+                  <a:srgbClr val="D4D4D4"/>
+                </a:solidFill>
+                <a:latin typeface="Consolas"/>
+              </a:rPr>
+              <a:t>        </a:t>
+            </a:r>
+            <a:r>
+              <a:rPr sz="1100" i="0" b="0">
+                <a:solidFill>
+                  <a:srgbClr val="D4D4D4"/>
+                </a:solidFill>
+                <a:latin typeface="Consolas"/>
+              </a:rPr>
+              <a:t>Mascota</a:t>
+            </a:r>
+            <a:r>
+              <a:rPr sz="1100" i="0" b="0">
+                <a:solidFill>
+                  <a:srgbClr val="D4D4D4"/>
+                </a:solidFill>
+                <a:latin typeface="Consolas"/>
+              </a:rPr>
+              <a:t> </a:t>
+            </a:r>
+            <a:r>
+              <a:rPr sz="1100" i="0" b="0">
+                <a:solidFill>
+                  <a:srgbClr val="D4D4D4"/>
+                </a:solidFill>
+                <a:latin typeface="Consolas"/>
+              </a:rPr>
+              <a:t>m</a:t>
+            </a:r>
+            <a:r>
+              <a:rPr sz="1100" i="0" b="0">
+                <a:solidFill>
+                  <a:srgbClr val="D4D4D4"/>
+                </a:solidFill>
+                <a:latin typeface="Consolas"/>
+              </a:rPr>
+              <a:t> = </a:t>
+            </a:r>
+            <a:r>
+              <a:rPr sz="1100" i="0" b="0">
+                <a:solidFill>
+                  <a:srgbClr val="569CD6"/>
+                </a:solidFill>
+                <a:latin typeface="Consolas"/>
+              </a:rPr>
+              <a:t>new</a:t>
+            </a:r>
+            <a:r>
+              <a:rPr sz="1100" i="0" b="0">
+                <a:solidFill>
+                  <a:srgbClr val="D4D4D4"/>
+                </a:solidFill>
+                <a:latin typeface="Consolas"/>
+              </a:rPr>
+              <a:t> </a:t>
+            </a:r>
+            <a:r>
+              <a:rPr sz="1100" i="0" b="0">
+                <a:solidFill>
+                  <a:srgbClr val="4EC9B0"/>
+                </a:solidFill>
+                <a:latin typeface="Consolas"/>
+              </a:rPr>
+              <a:t>Mascota</a:t>
+            </a:r>
+            <a:r>
+              <a:rPr sz="1100" i="0" b="0">
+                <a:solidFill>
+                  <a:srgbClr val="D4D4D4"/>
+                </a:solidFill>
+                <a:latin typeface="Consolas"/>
+              </a:rPr>
+              <a:t>(</a:t>
+            </a:r>
+            <a:r>
+              <a:rPr sz="1100" i="0" b="0">
+                <a:solidFill>
+                  <a:srgbClr val="D4D4D4"/>
+                </a:solidFill>
+                <a:latin typeface="Consolas"/>
+              </a:rPr>
+              <a:t>id</a:t>
+            </a:r>
+            <a:r>
+              <a:rPr sz="1100" i="0" b="0">
+                <a:solidFill>
+                  <a:srgbClr val="D4D4D4"/>
+                </a:solidFill>
+                <a:latin typeface="Consolas"/>
+              </a:rPr>
+              <a:t>, </a:t>
+            </a:r>
+            <a:r>
+              <a:rPr sz="1100" i="0" b="0">
+                <a:solidFill>
+                  <a:srgbClr val="D4D4D4"/>
+                </a:solidFill>
+                <a:latin typeface="Consolas"/>
+              </a:rPr>
+              <a:t>nombre</a:t>
+            </a:r>
+            <a:r>
+              <a:rPr sz="1100" i="0" b="0">
+                <a:solidFill>
+                  <a:srgbClr val="D4D4D4"/>
+                </a:solidFill>
+                <a:latin typeface="Consolas"/>
+              </a:rPr>
+              <a:t>);</a:t>
+            </a:r>
+          </a:p>
+          <a:p>
+            <a:pPr>
+              <a:spcAft>
+                <a:spcPts val="235"/>
+              </a:spcAft>
+            </a:pPr>
+            <a:r>
+              <a:rPr sz="1100" i="0" b="0">
+                <a:solidFill>
+                  <a:srgbClr val="D4D4D4"/>
+                </a:solidFill>
+                <a:latin typeface="Consolas"/>
+              </a:rPr>
+              <a:t>        </a:t>
+            </a:r>
+            <a:r>
+              <a:rPr sz="1100" i="0" b="0">
+                <a:solidFill>
+                  <a:srgbClr val="DCDCAA"/>
+                </a:solidFill>
+                <a:latin typeface="Consolas"/>
+              </a:rPr>
+              <a:t>m.setEdad</a:t>
+            </a:r>
+            <a:r>
+              <a:rPr sz="1100" i="0" b="0">
+                <a:solidFill>
+                  <a:srgbClr val="D4D4D4"/>
+                </a:solidFill>
+                <a:latin typeface="Consolas"/>
+              </a:rPr>
+              <a:t>(</a:t>
+            </a:r>
+            <a:r>
+              <a:rPr sz="1100" i="0" b="0">
+                <a:solidFill>
+                  <a:srgbClr val="D4D4D4"/>
+                </a:solidFill>
+                <a:latin typeface="Consolas"/>
+              </a:rPr>
+              <a:t>edad</a:t>
+            </a:r>
+            <a:r>
+              <a:rPr sz="1100" i="0" b="0">
+                <a:solidFill>
+                  <a:srgbClr val="D4D4D4"/>
+                </a:solidFill>
+                <a:latin typeface="Consolas"/>
+              </a:rPr>
+              <a:t>);</a:t>
+            </a:r>
+          </a:p>
+          <a:p>
+            <a:pPr>
+              <a:spcAft>
+                <a:spcPts val="235"/>
+              </a:spcAft>
+            </a:pPr>
+            <a:r>
+              <a:rPr sz="1100" i="0" b="0">
+                <a:solidFill>
+                  <a:srgbClr val="D4D4D4"/>
+                </a:solidFill>
+                <a:latin typeface="Consolas"/>
+              </a:rPr>
+              <a:t>        </a:t>
+            </a:r>
+            <a:r>
+              <a:rPr sz="1100" i="0" b="0">
+                <a:solidFill>
+                  <a:srgbClr val="DCDCAA"/>
+                </a:solidFill>
+                <a:latin typeface="Consolas"/>
+              </a:rPr>
+              <a:t>m.setPeso</a:t>
+            </a:r>
+            <a:r>
+              <a:rPr sz="1100" i="0" b="0">
+                <a:solidFill>
+                  <a:srgbClr val="D4D4D4"/>
+                </a:solidFill>
+                <a:latin typeface="Consolas"/>
+              </a:rPr>
+              <a:t>(</a:t>
+            </a:r>
+            <a:r>
+              <a:rPr sz="1100" i="0" b="0">
+                <a:solidFill>
+                  <a:srgbClr val="D4D4D4"/>
+                </a:solidFill>
+                <a:latin typeface="Consolas"/>
+              </a:rPr>
+              <a:t>peso</a:t>
+            </a:r>
+            <a:r>
+              <a:rPr sz="1100" i="0" b="0">
+                <a:solidFill>
+                  <a:srgbClr val="D4D4D4"/>
+                </a:solidFill>
+                <a:latin typeface="Consolas"/>
+              </a:rPr>
+              <a:t>);</a:t>
+            </a:r>
+          </a:p>
+          <a:p>
+            <a:pPr>
+              <a:spcAft>
+                <a:spcPts val="235"/>
+              </a:spcAft>
+            </a:pPr>
+            <a:r>
+              <a:rPr sz="1100" i="0" b="0">
+                <a:solidFill>
+                  <a:srgbClr val="D4D4D4"/>
+                </a:solidFill>
+                <a:latin typeface="Consolas"/>
+              </a:rPr>
+              <a:t>        </a:t>
+            </a:r>
+            <a:r>
+              <a:rPr sz="1100" i="0" b="0">
+                <a:solidFill>
+                  <a:srgbClr val="DCDCAA"/>
+                </a:solidFill>
+                <a:latin typeface="Consolas"/>
+              </a:rPr>
+              <a:t>agenda.add</a:t>
+            </a:r>
+            <a:r>
+              <a:rPr sz="1100" i="0" b="0">
+                <a:solidFill>
+                  <a:srgbClr val="D4D4D4"/>
+                </a:solidFill>
+                <a:latin typeface="Consolas"/>
+              </a:rPr>
+              <a:t>(</a:t>
+            </a:r>
+            <a:r>
+              <a:rPr sz="1100" i="0" b="0">
+                <a:solidFill>
+                  <a:srgbClr val="D4D4D4"/>
+                </a:solidFill>
+                <a:latin typeface="Consolas"/>
+              </a:rPr>
+              <a:t>m</a:t>
+            </a:r>
+            <a:r>
+              <a:rPr sz="1100" i="0" b="0">
+                <a:solidFill>
+                  <a:srgbClr val="D4D4D4"/>
+                </a:solidFill>
+                <a:latin typeface="Consolas"/>
+              </a:rPr>
+              <a:t>);   </a:t>
+            </a:r>
+            <a:r>
+              <a:rPr sz="1100" i="1" b="0">
+                <a:solidFill>
+                  <a:srgbClr val="6A9955"/>
+                </a:solidFill>
+                <a:latin typeface="Consolas"/>
+              </a:rPr>
+              <a:t>// el add va DESPUES de validar: nada incompleto entra a la coleccion</a:t>
+            </a:r>
+          </a:p>
+          <a:p>
+            <a:pPr>
+              <a:spcAft>
+                <a:spcPts val="235"/>
+              </a:spcAft>
+            </a:pPr>
+            <a:r>
+              <a:rPr sz="1100" i="0" b="0">
+                <a:solidFill>
+                  <a:srgbClr val="D4D4D4"/>
+                </a:solidFill>
+                <a:latin typeface="Consolas"/>
+              </a:rPr>
+              <a:t>        </a:t>
+            </a:r>
+            <a:r>
+              <a:rPr sz="1100" i="0" b="0">
+                <a:solidFill>
+                  <a:srgbClr val="DCDCAA"/>
+                </a:solidFill>
+                <a:latin typeface="Consolas"/>
+              </a:rPr>
+              <a:t>System.out.println</a:t>
+            </a:r>
+            <a:r>
+              <a:rPr sz="1100" i="0" b="0">
+                <a:solidFill>
+                  <a:srgbClr val="D4D4D4"/>
+                </a:solidFill>
+                <a:latin typeface="Consolas"/>
+              </a:rPr>
+              <a:t>(</a:t>
+            </a:r>
+            <a:r>
+              <a:rPr sz="1100" i="0" b="0">
+                <a:solidFill>
+                  <a:srgbClr val="CE9178"/>
+                </a:solidFill>
+                <a:latin typeface="Consolas"/>
+              </a:rPr>
+              <a:t>"  [OK] Registrada: "</a:t>
+            </a:r>
+            <a:r>
+              <a:rPr sz="1100" i="0" b="0">
+                <a:solidFill>
+                  <a:srgbClr val="D4D4D4"/>
+                </a:solidFill>
+                <a:latin typeface="Consolas"/>
+              </a:rPr>
+              <a:t> + </a:t>
+            </a:r>
+            <a:r>
+              <a:rPr sz="1100" i="0" b="0">
+                <a:solidFill>
+                  <a:srgbClr val="D4D4D4"/>
+                </a:solidFill>
+                <a:latin typeface="Consolas"/>
+              </a:rPr>
+              <a:t>m</a:t>
+            </a:r>
+            <a:r>
+              <a:rPr sz="1100" i="0" b="0">
+                <a:solidFill>
+                  <a:srgbClr val="D4D4D4"/>
+                </a:solidFill>
+                <a:latin typeface="Consolas"/>
+              </a:rPr>
+              <a:t>);</a:t>
+            </a:r>
+          </a:p>
+          <a:p>
+            <a:pPr>
+              <a:spcAft>
+                <a:spcPts val="235"/>
+              </a:spcAft>
+            </a:pPr>
+            <a:r>
+              <a:rPr sz="1100" i="0" b="0">
+                <a:solidFill>
+                  <a:srgbClr val="D4D4D4"/>
+                </a:solidFill>
+                <a:latin typeface="Consolas"/>
+              </a:rPr>
+              <a:t>    } </a:t>
+            </a:r>
+            <a:r>
+              <a:rPr sz="1100" i="0" b="0">
+                <a:solidFill>
+                  <a:srgbClr val="569CD6"/>
+                </a:solidFill>
+                <a:latin typeface="Consolas"/>
+              </a:rPr>
+              <a:t>catch</a:t>
+            </a:r>
+            <a:r>
+              <a:rPr sz="1100" i="0" b="0">
+                <a:solidFill>
+                  <a:srgbClr val="D4D4D4"/>
+                </a:solidFill>
+                <a:latin typeface="Consolas"/>
+              </a:rPr>
+              <a:t> (</a:t>
+            </a:r>
+            <a:r>
+              <a:rPr sz="1100" i="0" b="0">
+                <a:solidFill>
+                  <a:srgbClr val="D4D4D4"/>
+                </a:solidFill>
+                <a:latin typeface="Consolas"/>
+              </a:rPr>
+              <a:t>DatoInvalidoException</a:t>
+            </a:r>
+            <a:r>
+              <a:rPr sz="1100" i="0" b="0">
+                <a:solidFill>
+                  <a:srgbClr val="D4D4D4"/>
+                </a:solidFill>
+                <a:latin typeface="Consolas"/>
+              </a:rPr>
+              <a:t> </a:t>
+            </a:r>
+            <a:r>
+              <a:rPr sz="1100" i="0" b="0">
+                <a:solidFill>
+                  <a:srgbClr val="D4D4D4"/>
+                </a:solidFill>
+                <a:latin typeface="Consolas"/>
+              </a:rPr>
+              <a:t>e</a:t>
+            </a:r>
+            <a:r>
+              <a:rPr sz="1100" i="0" b="0">
+                <a:solidFill>
+                  <a:srgbClr val="D4D4D4"/>
+                </a:solidFill>
+                <a:latin typeface="Consolas"/>
+              </a:rPr>
+              <a:t>) {</a:t>
+            </a:r>
+          </a:p>
+          <a:p>
+            <a:pPr>
+              <a:spcAft>
+                <a:spcPts val="235"/>
+              </a:spcAft>
+            </a:pPr>
+            <a:r>
+              <a:rPr sz="1100" i="0" b="0">
+                <a:solidFill>
+                  <a:srgbClr val="D4D4D4"/>
+                </a:solidFill>
+                <a:latin typeface="Consolas"/>
+              </a:rPr>
+              <a:t>        </a:t>
+            </a:r>
+            <a:r>
+              <a:rPr sz="1100" i="1" b="0">
+                <a:solidFill>
+                  <a:srgbClr val="6A9955"/>
+                </a:solidFill>
+                <a:latin typeface="Consolas"/>
+              </a:rPr>
+              <a:t>// En Swing seria: JOptionPane.showMessageDialog(this, e.getMessage(), "Dato invalido", JOptionPane.WARNING_MESSAGE);</a:t>
+            </a:r>
+          </a:p>
+          <a:p>
+            <a:pPr>
+              <a:spcAft>
+                <a:spcPts val="235"/>
+              </a:spcAft>
+            </a:pPr>
+            <a:r>
+              <a:rPr sz="1100" i="0" b="0">
+                <a:solidFill>
+                  <a:srgbClr val="D4D4D4"/>
+                </a:solidFill>
+                <a:latin typeface="Consolas"/>
+              </a:rPr>
+              <a:t>        </a:t>
+            </a:r>
+            <a:r>
+              <a:rPr sz="1100" i="0" b="0">
+                <a:solidFill>
+                  <a:srgbClr val="DCDCAA"/>
+                </a:solidFill>
+                <a:latin typeface="Consolas"/>
+              </a:rPr>
+              <a:t>System.out.println</a:t>
+            </a:r>
+            <a:r>
+              <a:rPr sz="1100" i="0" b="0">
+                <a:solidFill>
+                  <a:srgbClr val="D4D4D4"/>
+                </a:solidFill>
+                <a:latin typeface="Consolas"/>
+              </a:rPr>
+              <a:t>(</a:t>
+            </a:r>
+            <a:r>
+              <a:rPr sz="1100" i="0" b="0">
+                <a:solidFill>
+                  <a:srgbClr val="CE9178"/>
+                </a:solidFill>
+                <a:latin typeface="Consolas"/>
+              </a:rPr>
+              <a:t>"  [AVISO AL USUARIO] "</a:t>
+            </a:r>
+            <a:r>
+              <a:rPr sz="1100" i="0" b="0">
+                <a:solidFill>
+                  <a:srgbClr val="D4D4D4"/>
+                </a:solidFill>
+                <a:latin typeface="Consolas"/>
+              </a:rPr>
+              <a:t> + </a:t>
+            </a:r>
+            <a:r>
+              <a:rPr sz="1100" i="0" b="0">
+                <a:solidFill>
+                  <a:srgbClr val="DCDCAA"/>
+                </a:solidFill>
+                <a:latin typeface="Consolas"/>
+              </a:rPr>
+              <a:t>e.getMessage</a:t>
+            </a:r>
+            <a:r>
+              <a:rPr sz="1100" i="0" b="0">
+                <a:solidFill>
+                  <a:srgbClr val="D4D4D4"/>
+                </a:solidFill>
+                <a:latin typeface="Consolas"/>
+              </a:rPr>
+              <a:t>());</a:t>
+            </a:r>
+          </a:p>
+          <a:p>
+            <a:pPr>
+              <a:spcAft>
+                <a:spcPts val="235"/>
+              </a:spcAft>
+            </a:pPr>
+            <a:r>
+              <a:rPr sz="1100" i="0" b="0">
+                <a:solidFill>
+                  <a:srgbClr val="D4D4D4"/>
+                </a:solidFill>
+                <a:latin typeface="Consolas"/>
+              </a:rPr>
+              <a:t>    } </a:t>
+            </a:r>
+            <a:r>
+              <a:rPr sz="1100" i="0" b="0">
+                <a:solidFill>
+                  <a:srgbClr val="569CD6"/>
+                </a:solidFill>
+                <a:latin typeface="Consolas"/>
+              </a:rPr>
+              <a:t>finally</a:t>
+            </a:r>
+            <a:r>
+              <a:rPr sz="1100" i="0" b="0">
+                <a:solidFill>
+                  <a:srgbClr val="D4D4D4"/>
+                </a:solidFill>
+                <a:latin typeface="Consolas"/>
+              </a:rPr>
+              <a:t> {</a:t>
+            </a:r>
+          </a:p>
+          <a:p>
+            <a:pPr>
+              <a:spcAft>
+                <a:spcPts val="235"/>
+              </a:spcAft>
+            </a:pPr>
+            <a:r>
+              <a:rPr sz="1100" i="0" b="0">
+                <a:solidFill>
+                  <a:srgbClr val="D4D4D4"/>
+                </a:solidFill>
+                <a:latin typeface="Consolas"/>
+              </a:rPr>
+              <a:t>        </a:t>
+            </a:r>
+            <a:r>
+              <a:rPr sz="1100" i="0" b="0">
+                <a:solidFill>
+                  <a:srgbClr val="DCDCAA"/>
+                </a:solidFill>
+                <a:latin typeface="Consolas"/>
+              </a:rPr>
+              <a:t>System.out.println</a:t>
+            </a:r>
+            <a:r>
+              <a:rPr sz="1100" i="0" b="0">
+                <a:solidFill>
+                  <a:srgbClr val="D4D4D4"/>
+                </a:solidFill>
+                <a:latin typeface="Consolas"/>
+              </a:rPr>
+              <a:t>(</a:t>
+            </a:r>
+            <a:r>
+              <a:rPr sz="1100" i="0" b="0">
+                <a:solidFill>
+                  <a:srgbClr val="CE9178"/>
+                </a:solidFill>
+                <a:latin typeface="Consolas"/>
+              </a:rPr>
+              <a:t>"  (finally) Intento terminado. Mascotas en memoria: "</a:t>
+            </a:r>
+            <a:r>
+              <a:rPr sz="1100" i="0" b="0">
+                <a:solidFill>
+                  <a:srgbClr val="D4D4D4"/>
+                </a:solidFill>
+                <a:latin typeface="Consolas"/>
+              </a:rPr>
+              <a:t> + </a:t>
+            </a:r>
+            <a:r>
+              <a:rPr sz="1100" i="0" b="0">
+                <a:solidFill>
+                  <a:srgbClr val="DCDCAA"/>
+                </a:solidFill>
+                <a:latin typeface="Consolas"/>
+              </a:rPr>
+              <a:t>agenda.size</a:t>
+            </a:r>
+            <a:r>
+              <a:rPr sz="1100" i="0" b="0">
+                <a:solidFill>
+                  <a:srgbClr val="D4D4D4"/>
+                </a:solidFill>
+                <a:latin typeface="Consolas"/>
+              </a:rPr>
+              <a:t>());</a:t>
+            </a:r>
+          </a:p>
+          <a:p>
+            <a:pPr>
+              <a:spcAft>
+                <a:spcPts val="235"/>
+              </a:spcAft>
+            </a:pPr>
+            <a:r>
+              <a:rPr sz="1100" i="0" b="0">
+                <a:solidFill>
+                  <a:srgbClr val="D4D4D4"/>
+                </a:solidFill>
+                <a:latin typeface="Consolas"/>
+              </a:rPr>
+              <a:t>    }</a:t>
+            </a:r>
+          </a:p>
+          <a:p>
+            <a:pPr>
+              <a:spcAft>
+                <a:spcPts val="235"/>
+              </a:spcAft>
+            </a:pPr>
+            <a:r>
+              <a:rPr sz="1100" i="0" b="0">
+                <a:solidFill>
+                  <a:srgbClr val="D4D4D4"/>
+                </a:solidFill>
+                <a:latin typeface="Consolas"/>
+              </a:rPr>
+              <a:t>}</a:t>
+            </a:r>
+          </a:p>
+        </p:txBody>
+      </p:sp>
+      <p:sp>
+        <p:nvSpPr>
+          <p:cNvPr id="13" name="TextBox 12"/>
+          <p:cNvSpPr txBox="1"/>
+          <p:nvPr/>
+        </p:nvSpPr>
+        <p:spPr>
+          <a:xfrm>
+            <a:off x="457200" y="6035040"/>
+            <a:ext cx="11277295" cy="365760"/>
+          </a:xfrm>
+          <a:prstGeom prst="rect">
+            <a:avLst/>
+          </a:prstGeom>
+          <a:noFill/>
+        </p:spPr>
+        <p:txBody>
+          <a:bodyPr wrap="square">
+            <a:spAutoFit/>
+          </a:bodyPr>
+          <a:lstStyle/>
+          <a:p>
             <a:pPr algn="ctr"/>
             <a:r>
               <a:rPr sz="1300" b="0" i="1">
@@ -15886,7 +16499,7 @@
       </p:sp>
       <p:sp>
         <p:nvSpPr>
-          <p:cNvPr id="13" name="TextBox 12"/>
+          <p:cNvPr id="14" name="TextBox 13"/>
           <p:cNvSpPr txBox="1"/>
           <p:nvPr/>
         </p:nvSpPr>
@@ -16074,7 +16687,7 @@
         <p:spPr>
           <a:xfrm>
             <a:off x="457200" y="1261872"/>
-            <a:ext cx="11277295" cy="4459049"/>
+            <a:ext cx="11277295" cy="4257511"/>
           </a:xfrm>
           <a:prstGeom prst="roundRect">
             <a:avLst>
@@ -16324,7 +16937,7 @@
         <p:spPr>
           <a:xfrm>
             <a:off x="685800" y="1719072"/>
-            <a:ext cx="502920" cy="3864689"/>
+            <a:ext cx="502920" cy="3663151"/>
           </a:xfrm>
           <a:prstGeom prst="rect">
             <a:avLst/>
@@ -16339,11 +16952,11 @@
           <a:p>
             <a:pPr algn="r">
               <a:spcAft>
-                <a:spcPts val="342"/>
+                <a:spcPts val="321"/>
               </a:spcAft>
             </a:pPr>
             <a:r>
-              <a:rPr sz="1600" i="0" b="0">
+              <a:rPr sz="1500" i="0" b="0">
                 <a:solidFill>
                   <a:srgbClr val="858585"/>
                 </a:solidFill>
@@ -16355,11 +16968,11 @@
           <a:p>
             <a:pPr algn="r">
               <a:spcAft>
-                <a:spcPts val="342"/>
+                <a:spcPts val="321"/>
               </a:spcAft>
             </a:pPr>
             <a:r>
-              <a:rPr sz="1600" i="0" b="0">
+              <a:rPr sz="1500" i="0" b="0">
                 <a:solidFill>
                   <a:srgbClr val="858585"/>
                 </a:solidFill>
@@ -16371,11 +16984,11 @@
           <a:p>
             <a:pPr algn="r">
               <a:spcAft>
-                <a:spcPts val="342"/>
+                <a:spcPts val="321"/>
               </a:spcAft>
             </a:pPr>
             <a:r>
-              <a:rPr sz="1600" i="0" b="0">
+              <a:rPr sz="1500" i="0" b="0">
                 <a:solidFill>
                   <a:srgbClr val="858585"/>
                 </a:solidFill>
@@ -16387,11 +17000,11 @@
           <a:p>
             <a:pPr algn="r">
               <a:spcAft>
-                <a:spcPts val="342"/>
+                <a:spcPts val="321"/>
               </a:spcAft>
             </a:pPr>
             <a:r>
-              <a:rPr sz="1600" i="0" b="0">
+              <a:rPr sz="1500" i="0" b="0">
                 <a:solidFill>
                   <a:srgbClr val="858585"/>
                 </a:solidFill>
@@ -16403,11 +17016,11 @@
           <a:p>
             <a:pPr algn="r">
               <a:spcAft>
-                <a:spcPts val="342"/>
+                <a:spcPts val="321"/>
               </a:spcAft>
             </a:pPr>
             <a:r>
-              <a:rPr sz="1600" i="0" b="0">
+              <a:rPr sz="1500" i="0" b="0">
                 <a:solidFill>
                   <a:srgbClr val="858585"/>
                 </a:solidFill>
@@ -16419,11 +17032,11 @@
           <a:p>
             <a:pPr algn="r">
               <a:spcAft>
-                <a:spcPts val="342"/>
+                <a:spcPts val="321"/>
               </a:spcAft>
             </a:pPr>
             <a:r>
-              <a:rPr sz="1600" i="0" b="0">
+              <a:rPr sz="1500" i="0" b="0">
                 <a:solidFill>
                   <a:srgbClr val="858585"/>
                 </a:solidFill>
@@ -16435,11 +17048,11 @@
           <a:p>
             <a:pPr algn="r">
               <a:spcAft>
-                <a:spcPts val="342"/>
+                <a:spcPts val="321"/>
               </a:spcAft>
             </a:pPr>
             <a:r>
-              <a:rPr sz="1600" i="0" b="0">
+              <a:rPr sz="1500" i="0" b="0">
                 <a:solidFill>
                   <a:srgbClr val="858585"/>
                 </a:solidFill>
@@ -16451,11 +17064,11 @@
           <a:p>
             <a:pPr algn="r">
               <a:spcAft>
-                <a:spcPts val="342"/>
+                <a:spcPts val="321"/>
               </a:spcAft>
             </a:pPr>
             <a:r>
-              <a:rPr sz="1600" i="0" b="0">
+              <a:rPr sz="1500" i="0" b="0">
                 <a:solidFill>
                   <a:srgbClr val="858585"/>
                 </a:solidFill>
@@ -16467,11 +17080,11 @@
           <a:p>
             <a:pPr algn="r">
               <a:spcAft>
-                <a:spcPts val="342"/>
+                <a:spcPts val="321"/>
               </a:spcAft>
             </a:pPr>
             <a:r>
-              <a:rPr sz="1600" i="0" b="0">
+              <a:rPr sz="1500" i="0" b="0">
                 <a:solidFill>
                   <a:srgbClr val="858585"/>
                 </a:solidFill>
@@ -16483,11 +17096,11 @@
           <a:p>
             <a:pPr algn="r">
               <a:spcAft>
-                <a:spcPts val="342"/>
+                <a:spcPts val="321"/>
               </a:spcAft>
             </a:pPr>
             <a:r>
-              <a:rPr sz="1600" i="0" b="0">
+              <a:rPr sz="1500" i="0" b="0">
                 <a:solidFill>
                   <a:srgbClr val="858585"/>
                 </a:solidFill>
@@ -16499,11 +17112,11 @@
           <a:p>
             <a:pPr algn="r">
               <a:spcAft>
-                <a:spcPts val="342"/>
+                <a:spcPts val="321"/>
               </a:spcAft>
             </a:pPr>
             <a:r>
-              <a:rPr sz="1600" i="0" b="0">
+              <a:rPr sz="1500" i="0" b="0">
                 <a:solidFill>
                   <a:srgbClr val="858585"/>
                 </a:solidFill>
@@ -16515,11 +17128,11 @@
           <a:p>
             <a:pPr algn="r">
               <a:spcAft>
-                <a:spcPts val="342"/>
+                <a:spcPts val="321"/>
               </a:spcAft>
             </a:pPr>
             <a:r>
-              <a:rPr sz="1600" i="0" b="0">
+              <a:rPr sz="1500" i="0" b="0">
                 <a:solidFill>
                   <a:srgbClr val="858585"/>
                 </a:solidFill>
@@ -16531,11 +17144,11 @@
           <a:p>
             <a:pPr algn="r">
               <a:spcAft>
-                <a:spcPts val="342"/>
+                <a:spcPts val="321"/>
               </a:spcAft>
             </a:pPr>
             <a:r>
-              <a:rPr sz="1600" i="0" b="0">
+              <a:rPr sz="1500" i="0" b="0">
                 <a:solidFill>
                   <a:srgbClr val="858585"/>
                 </a:solidFill>
@@ -16555,7 +17168,7 @@
         <p:spPr>
           <a:xfrm>
             <a:off x="1188720" y="1719072"/>
-            <a:ext cx="10271455" cy="3864689"/>
+            <a:ext cx="10271455" cy="3663151"/>
           </a:xfrm>
           <a:prstGeom prst="rect">
             <a:avLst/>
@@ -16570,11 +17183,11 @@
           <a:p>
             <a:pPr>
               <a:spcAft>
-                <a:spcPts val="342"/>
+                <a:spcPts val="321"/>
               </a:spcAft>
             </a:pPr>
             <a:r>
-              <a:rPr sz="1600" i="1" b="0">
+              <a:rPr sz="1500" i="1" b="0">
                 <a:solidFill>
                   <a:srgbClr val="6A9955"/>
                 </a:solidFill>
@@ -16586,11 +17199,11 @@
           <a:p>
             <a:pPr>
               <a:spcAft>
-                <a:spcPts val="342"/>
+                <a:spcPts val="321"/>
               </a:spcAft>
             </a:pPr>
             <a:r>
-              <a:rPr sz="1600" i="0" b="0">
+              <a:rPr sz="1500" i="0" b="0">
                 <a:solidFill>
                   <a:srgbClr val="569CD6"/>
                 </a:solidFill>
@@ -16599,7 +17212,7 @@
               <a:t>private</a:t>
             </a:r>
             <a:r>
-              <a:rPr sz="1600" i="0" b="0">
+              <a:rPr sz="1500" i="0" b="0">
                 <a:solidFill>
                   <a:srgbClr val="D4D4D4"/>
                 </a:solidFill>
@@ -16608,7 +17221,7 @@
               <a:t> </a:t>
             </a:r>
             <a:r>
-              <a:rPr sz="1600" i="0" b="0">
+              <a:rPr sz="1500" i="0" b="0">
                 <a:solidFill>
                   <a:srgbClr val="569CD6"/>
                 </a:solidFill>
@@ -16617,7 +17230,7 @@
               <a:t>static</a:t>
             </a:r>
             <a:r>
-              <a:rPr sz="1600" i="0" b="0">
+              <a:rPr sz="1500" i="0" b="0">
                 <a:solidFill>
                   <a:srgbClr val="D4D4D4"/>
                 </a:solidFill>
@@ -16626,7 +17239,7 @@
               <a:t> </a:t>
             </a:r>
             <a:r>
-              <a:rPr sz="1600" i="0" b="0">
+              <a:rPr sz="1500" i="0" b="0">
                 <a:solidFill>
                   <a:srgbClr val="4EC9B0"/>
                 </a:solidFill>
@@ -16635,7 +17248,7 @@
               <a:t>String</a:t>
             </a:r>
             <a:r>
-              <a:rPr sz="1600" i="0" b="0">
+              <a:rPr sz="1500" i="0" b="0">
                 <a:solidFill>
                   <a:srgbClr val="D4D4D4"/>
                 </a:solidFill>
@@ -16644,7 +17257,7 @@
               <a:t> </a:t>
             </a:r>
             <a:r>
-              <a:rPr sz="1600" i="0" b="0">
+              <a:rPr sz="1500" i="0" b="0">
                 <a:solidFill>
                   <a:srgbClr val="DCDCAA"/>
                 </a:solidFill>
@@ -16653,7 +17266,7 @@
               <a:t>buscarNombrePorId</a:t>
             </a:r>
             <a:r>
-              <a:rPr sz="1600" i="0" b="0">
+              <a:rPr sz="1500" i="0" b="0">
                 <a:solidFill>
                   <a:srgbClr val="D4D4D4"/>
                 </a:solidFill>
@@ -16662,7 +17275,7 @@
               <a:t>(</a:t>
             </a:r>
             <a:r>
-              <a:rPr sz="1600" i="0" b="0">
+              <a:rPr sz="1500" i="0" b="0">
                 <a:solidFill>
                   <a:srgbClr val="4EC9B0"/>
                 </a:solidFill>
@@ -16671,7 +17284,7 @@
               <a:t>List</a:t>
             </a:r>
             <a:r>
-              <a:rPr sz="1600" i="0" b="0">
+              <a:rPr sz="1500" i="0" b="0">
                 <a:solidFill>
                   <a:srgbClr val="D4D4D4"/>
                 </a:solidFill>
@@ -16680,7 +17293,7 @@
               <a:t>&lt;</a:t>
             </a:r>
             <a:r>
-              <a:rPr sz="1600" i="0" b="0">
+              <a:rPr sz="1500" i="0" b="0">
                 <a:solidFill>
                   <a:srgbClr val="D4D4D4"/>
                 </a:solidFill>
@@ -16689,7 +17302,7 @@
               <a:t>Mascota</a:t>
             </a:r>
             <a:r>
-              <a:rPr sz="1600" i="0" b="0">
+              <a:rPr sz="1500" i="0" b="0">
                 <a:solidFill>
                   <a:srgbClr val="D4D4D4"/>
                 </a:solidFill>
@@ -16698,7 +17311,7 @@
               <a:t>&gt; </a:t>
             </a:r>
             <a:r>
-              <a:rPr sz="1600" i="0" b="0">
+              <a:rPr sz="1500" i="0" b="0">
                 <a:solidFill>
                   <a:srgbClr val="D4D4D4"/>
                 </a:solidFill>
@@ -16707,7 +17320,7 @@
               <a:t>agenda</a:t>
             </a:r>
             <a:r>
-              <a:rPr sz="1600" i="0" b="0">
+              <a:rPr sz="1500" i="0" b="0">
                 <a:solidFill>
                   <a:srgbClr val="D4D4D4"/>
                 </a:solidFill>
@@ -16716,7 +17329,7 @@
               <a:t>, </a:t>
             </a:r>
             <a:r>
-              <a:rPr sz="1600" i="0" b="0">
+              <a:rPr sz="1500" i="0" b="0">
                 <a:solidFill>
                   <a:srgbClr val="4EC9B0"/>
                 </a:solidFill>
@@ -16725,7 +17338,7 @@
               <a:t>String</a:t>
             </a:r>
             <a:r>
-              <a:rPr sz="1600" i="0" b="0">
+              <a:rPr sz="1500" i="0" b="0">
                 <a:solidFill>
                   <a:srgbClr val="D4D4D4"/>
                 </a:solidFill>
@@ -16734,7 +17347,7 @@
               <a:t> </a:t>
             </a:r>
             <a:r>
-              <a:rPr sz="1600" i="0" b="0">
+              <a:rPr sz="1500" i="0" b="0">
                 <a:solidFill>
                   <a:srgbClr val="D4D4D4"/>
                 </a:solidFill>
@@ -16743,7 +17356,7 @@
               <a:t>id</a:t>
             </a:r>
             <a:r>
-              <a:rPr sz="1600" i="0" b="0">
+              <a:rPr sz="1500" i="0" b="0">
                 <a:solidFill>
                   <a:srgbClr val="D4D4D4"/>
                 </a:solidFill>
@@ -16755,11 +17368,11 @@
           <a:p>
             <a:pPr>
               <a:spcAft>
-                <a:spcPts val="342"/>
+                <a:spcPts val="321"/>
               </a:spcAft>
             </a:pPr>
             <a:r>
-              <a:rPr sz="1600" i="0" b="0">
+              <a:rPr sz="1500" i="0" b="0">
                 <a:solidFill>
                   <a:srgbClr val="D4D4D4"/>
                 </a:solidFill>
@@ -16768,7 +17381,7 @@
               <a:t>    </a:t>
             </a:r>
             <a:r>
-              <a:rPr sz="1600" i="0" b="0">
+              <a:rPr sz="1500" i="0" b="0">
                 <a:solidFill>
                   <a:srgbClr val="569CD6"/>
                 </a:solidFill>
@@ -16777,7 +17390,7 @@
               <a:t>try</a:t>
             </a:r>
             <a:r>
-              <a:rPr sz="1600" i="0" b="0">
+              <a:rPr sz="1500" i="0" b="0">
                 <a:solidFill>
                   <a:srgbClr val="D4D4D4"/>
                 </a:solidFill>
@@ -16789,11 +17402,11 @@
           <a:p>
             <a:pPr>
               <a:spcAft>
-                <a:spcPts val="342"/>
+                <a:spcPts val="321"/>
               </a:spcAft>
             </a:pPr>
             <a:r>
-              <a:rPr sz="1600" i="0" b="0">
+              <a:rPr sz="1500" i="0" b="0">
                 <a:solidFill>
                   <a:srgbClr val="D4D4D4"/>
                 </a:solidFill>
@@ -16802,7 +17415,7 @@
               <a:t>        </a:t>
             </a:r>
             <a:r>
-              <a:rPr sz="1600" i="0" b="0">
+              <a:rPr sz="1500" i="0" b="0">
                 <a:solidFill>
                   <a:srgbClr val="569CD6"/>
                 </a:solidFill>
@@ -16811,7 +17424,7 @@
               <a:t>for</a:t>
             </a:r>
             <a:r>
-              <a:rPr sz="1600" i="0" b="0">
+              <a:rPr sz="1500" i="0" b="0">
                 <a:solidFill>
                   <a:srgbClr val="D4D4D4"/>
                 </a:solidFill>
@@ -16820,7 +17433,7 @@
               <a:t> (</a:t>
             </a:r>
             <a:r>
-              <a:rPr sz="1600" i="0" b="0">
+              <a:rPr sz="1500" i="0" b="0">
                 <a:solidFill>
                   <a:srgbClr val="D4D4D4"/>
                 </a:solidFill>
@@ -16829,7 +17442,7 @@
               <a:t>Mascota</a:t>
             </a:r>
             <a:r>
-              <a:rPr sz="1600" i="0" b="0">
+              <a:rPr sz="1500" i="0" b="0">
                 <a:solidFill>
                   <a:srgbClr val="D4D4D4"/>
                 </a:solidFill>
@@ -16838,7 +17451,7 @@
               <a:t> </a:t>
             </a:r>
             <a:r>
-              <a:rPr sz="1600" i="0" b="0">
+              <a:rPr sz="1500" i="0" b="0">
                 <a:solidFill>
                   <a:srgbClr val="D4D4D4"/>
                 </a:solidFill>
@@ -16847,7 +17460,7 @@
               <a:t>m</a:t>
             </a:r>
             <a:r>
-              <a:rPr sz="1600" i="0" b="0">
+              <a:rPr sz="1500" i="0" b="0">
                 <a:solidFill>
                   <a:srgbClr val="D4D4D4"/>
                 </a:solidFill>
@@ -16856,7 +17469,7 @@
               <a:t> : </a:t>
             </a:r>
             <a:r>
-              <a:rPr sz="1600" i="0" b="0">
+              <a:rPr sz="1500" i="0" b="0">
                 <a:solidFill>
                   <a:srgbClr val="D4D4D4"/>
                 </a:solidFill>
@@ -16865,7 +17478,7 @@
               <a:t>agenda</a:t>
             </a:r>
             <a:r>
-              <a:rPr sz="1600" i="0" b="0">
+              <a:rPr sz="1500" i="0" b="0">
                 <a:solidFill>
                   <a:srgbClr val="D4D4D4"/>
                 </a:solidFill>
@@ -16877,11 +17490,11 @@
           <a:p>
             <a:pPr>
               <a:spcAft>
-                <a:spcPts val="342"/>
+                <a:spcPts val="321"/>
               </a:spcAft>
             </a:pPr>
             <a:r>
-              <a:rPr sz="1600" i="0" b="0">
+              <a:rPr sz="1500" i="0" b="0">
                 <a:solidFill>
                   <a:srgbClr val="D4D4D4"/>
                 </a:solidFill>
@@ -16890,7 +17503,7 @@
               <a:t>            </a:t>
             </a:r>
             <a:r>
-              <a:rPr sz="1600" i="0" b="0">
+              <a:rPr sz="1500" i="0" b="0">
                 <a:solidFill>
                   <a:srgbClr val="569CD6"/>
                 </a:solidFill>
@@ -16899,7 +17512,7 @@
               <a:t>if</a:t>
             </a:r>
             <a:r>
-              <a:rPr sz="1600" i="0" b="0">
+              <a:rPr sz="1500" i="0" b="0">
                 <a:solidFill>
                   <a:srgbClr val="D4D4D4"/>
                 </a:solidFill>
@@ -16908,7 +17521,7 @@
               <a:t> (</a:t>
             </a:r>
             <a:r>
-              <a:rPr sz="1600" i="0" b="0">
+              <a:rPr sz="1500" i="0" b="0">
                 <a:solidFill>
                   <a:srgbClr val="DCDCAA"/>
                 </a:solidFill>
@@ -16917,7 +17530,7 @@
               <a:t>m.getId</a:t>
             </a:r>
             <a:r>
-              <a:rPr sz="1600" i="0" b="0">
+              <a:rPr sz="1500" i="0" b="0">
                 <a:solidFill>
                   <a:srgbClr val="D4D4D4"/>
                 </a:solidFill>
@@ -16926,7 +17539,7 @@
               <a:t>().</a:t>
             </a:r>
             <a:r>
-              <a:rPr sz="1600" i="0" b="0">
+              <a:rPr sz="1500" i="0" b="0">
                 <a:solidFill>
                   <a:srgbClr val="DCDCAA"/>
                 </a:solidFill>
@@ -16935,7 +17548,7 @@
               <a:t>equalsIgnoreCase</a:t>
             </a:r>
             <a:r>
-              <a:rPr sz="1600" i="0" b="0">
+              <a:rPr sz="1500" i="0" b="0">
                 <a:solidFill>
                   <a:srgbClr val="D4D4D4"/>
                 </a:solidFill>
@@ -16944,7 +17557,7 @@
               <a:t>(</a:t>
             </a:r>
             <a:r>
-              <a:rPr sz="1600" i="0" b="0">
+              <a:rPr sz="1500" i="0" b="0">
                 <a:solidFill>
                   <a:srgbClr val="D4D4D4"/>
                 </a:solidFill>
@@ -16953,7 +17566,7 @@
               <a:t>id</a:t>
             </a:r>
             <a:r>
-              <a:rPr sz="1600" i="0" b="0">
+              <a:rPr sz="1500" i="0" b="0">
                 <a:solidFill>
                   <a:srgbClr val="D4D4D4"/>
                 </a:solidFill>
@@ -16965,11 +17578,11 @@
           <a:p>
             <a:pPr>
               <a:spcAft>
-                <a:spcPts val="342"/>
+                <a:spcPts val="321"/>
               </a:spcAft>
             </a:pPr>
             <a:r>
-              <a:rPr sz="1600" i="0" b="0">
+              <a:rPr sz="1500" i="0" b="0">
                 <a:solidFill>
                   <a:srgbClr val="D4D4D4"/>
                 </a:solidFill>
@@ -16978,7 +17591,7 @@
               <a:t>                </a:t>
             </a:r>
             <a:r>
-              <a:rPr sz="1600" i="0" b="0">
+              <a:rPr sz="1500" i="0" b="0">
                 <a:solidFill>
                   <a:srgbClr val="569CD6"/>
                 </a:solidFill>
@@ -16987,7 +17600,7 @@
               <a:t>return</a:t>
             </a:r>
             <a:r>
-              <a:rPr sz="1600" i="0" b="0">
+              <a:rPr sz="1500" i="0" b="0">
                 <a:solidFill>
                   <a:srgbClr val="D4D4D4"/>
                 </a:solidFill>
@@ -16996,7 +17609,7 @@
               <a:t> </a:t>
             </a:r>
             <a:r>
-              <a:rPr sz="1600" i="0" b="0">
+              <a:rPr sz="1500" i="0" b="0">
                 <a:solidFill>
                   <a:srgbClr val="DCDCAA"/>
                 </a:solidFill>
@@ -17005,7 +17618,7 @@
               <a:t>m.getNombre</a:t>
             </a:r>
             <a:r>
-              <a:rPr sz="1600" i="0" b="0">
+              <a:rPr sz="1500" i="0" b="0">
                 <a:solidFill>
                   <a:srgbClr val="D4D4D4"/>
                 </a:solidFill>
@@ -17014,7 +17627,7 @@
               <a:t>();   </a:t>
             </a:r>
             <a:r>
-              <a:rPr sz="1600" i="1" b="0">
+              <a:rPr sz="1500" i="1" b="0">
                 <a:solidFill>
                   <a:srgbClr val="6A9955"/>
                 </a:solidFill>
@@ -17026,11 +17639,11 @@
           <a:p>
             <a:pPr>
               <a:spcAft>
-                <a:spcPts val="342"/>
+                <a:spcPts val="321"/>
               </a:spcAft>
             </a:pPr>
             <a:r>
-              <a:rPr sz="1600" i="0" b="0">
+              <a:rPr sz="1500" i="0" b="0">
                 <a:solidFill>
                   <a:srgbClr val="D4D4D4"/>
                 </a:solidFill>
@@ -17042,11 +17655,11 @@
           <a:p>
             <a:pPr>
               <a:spcAft>
-                <a:spcPts val="342"/>
+                <a:spcPts val="321"/>
               </a:spcAft>
             </a:pPr>
             <a:r>
-              <a:rPr sz="1600" i="0" b="0">
+              <a:rPr sz="1500" i="0" b="0">
                 <a:solidFill>
                   <a:srgbClr val="D4D4D4"/>
                 </a:solidFill>
@@ -17058,11 +17671,11 @@
           <a:p>
             <a:pPr>
               <a:spcAft>
-                <a:spcPts val="342"/>
+                <a:spcPts val="321"/>
               </a:spcAft>
             </a:pPr>
             <a:r>
-              <a:rPr sz="1600" i="0" b="0">
+              <a:rPr sz="1500" i="0" b="0">
                 <a:solidFill>
                   <a:srgbClr val="D4D4D4"/>
                 </a:solidFill>
@@ -17071,7 +17684,7 @@
               <a:t>        </a:t>
             </a:r>
             <a:r>
-              <a:rPr sz="1600" i="0" b="0">
+              <a:rPr sz="1500" i="0" b="0">
                 <a:solidFill>
                   <a:srgbClr val="569CD6"/>
                 </a:solidFill>
@@ -17080,7 +17693,7 @@
               <a:t>return</a:t>
             </a:r>
             <a:r>
-              <a:rPr sz="1600" i="0" b="0">
+              <a:rPr sz="1500" i="0" b="0">
                 <a:solidFill>
                   <a:srgbClr val="D4D4D4"/>
                 </a:solidFill>
@@ -17089,7 +17702,7 @@
               <a:t> </a:t>
             </a:r>
             <a:r>
-              <a:rPr sz="1600" i="0" b="0">
+              <a:rPr sz="1500" i="0" b="0">
                 <a:solidFill>
                   <a:srgbClr val="CE9178"/>
                 </a:solidFill>
@@ -17098,7 +17711,7 @@
               <a:t>"(no esta en la agenda)"</a:t>
             </a:r>
             <a:r>
-              <a:rPr sz="1600" i="0" b="0">
+              <a:rPr sz="1500" i="0" b="0">
                 <a:solidFill>
                   <a:srgbClr val="D4D4D4"/>
                 </a:solidFill>
@@ -17110,11 +17723,11 @@
           <a:p>
             <a:pPr>
               <a:spcAft>
-                <a:spcPts val="342"/>
+                <a:spcPts val="321"/>
               </a:spcAft>
             </a:pPr>
             <a:r>
-              <a:rPr sz="1600" i="0" b="0">
+              <a:rPr sz="1500" i="0" b="0">
                 <a:solidFill>
                   <a:srgbClr val="D4D4D4"/>
                 </a:solidFill>
@@ -17123,7 +17736,7 @@
               <a:t>    } </a:t>
             </a:r>
             <a:r>
-              <a:rPr sz="1600" i="0" b="0">
+              <a:rPr sz="1500" i="0" b="0">
                 <a:solidFill>
                   <a:srgbClr val="569CD6"/>
                 </a:solidFill>
@@ -17132,7 +17745,7 @@
               <a:t>finally</a:t>
             </a:r>
             <a:r>
-              <a:rPr sz="1600" i="0" b="0">
+              <a:rPr sz="1500" i="0" b="0">
                 <a:solidFill>
                   <a:srgbClr val="D4D4D4"/>
                 </a:solidFill>
@@ -17144,11 +17757,11 @@
           <a:p>
             <a:pPr>
               <a:spcAft>
-                <a:spcPts val="342"/>
+                <a:spcPts val="321"/>
               </a:spcAft>
             </a:pPr>
             <a:r>
-              <a:rPr sz="1600" i="0" b="0">
+              <a:rPr sz="1500" i="0" b="0">
                 <a:solidFill>
                   <a:srgbClr val="D4D4D4"/>
                 </a:solidFill>
@@ -17157,7 +17770,7 @@
               <a:t>        </a:t>
             </a:r>
             <a:r>
-              <a:rPr sz="1600" i="0" b="0">
+              <a:rPr sz="1500" i="0" b="0">
                 <a:solidFill>
                   <a:srgbClr val="DCDCAA"/>
                 </a:solidFill>
@@ -17166,7 +17779,7 @@
               <a:t>System.out.println</a:t>
             </a:r>
             <a:r>
-              <a:rPr sz="1600" i="0" b="0">
+              <a:rPr sz="1500" i="0" b="0">
                 <a:solidFill>
                   <a:srgbClr val="D4D4D4"/>
                 </a:solidFill>
@@ -17175,7 +17788,7 @@
               <a:t>(</a:t>
             </a:r>
             <a:r>
-              <a:rPr sz="1600" i="0" b="0">
+              <a:rPr sz="1500" i="0" b="0">
                 <a:solidFill>
                   <a:srgbClr val="CE9178"/>
                 </a:solidFill>
@@ -17184,7 +17797,7 @@
               <a:t>"  (finally) Busqueda de "</a:t>
             </a:r>
             <a:r>
-              <a:rPr sz="1600" i="0" b="0">
+              <a:rPr sz="1500" i="0" b="0">
                 <a:solidFill>
                   <a:srgbClr val="D4D4D4"/>
                 </a:solidFill>
@@ -17193,7 +17806,7 @@
               <a:t> + </a:t>
             </a:r>
             <a:r>
-              <a:rPr sz="1600" i="0" b="0">
+              <a:rPr sz="1500" i="0" b="0">
                 <a:solidFill>
                   <a:srgbClr val="D4D4D4"/>
                 </a:solidFill>
@@ -17202,7 +17815,7 @@
               <a:t>id</a:t>
             </a:r>
             <a:r>
-              <a:rPr sz="1600" i="0" b="0">
+              <a:rPr sz="1500" i="0" b="0">
                 <a:solidFill>
                   <a:srgbClr val="D4D4D4"/>
                 </a:solidFill>
@@ -17211,7 +17824,7 @@
               <a:t> + </a:t>
             </a:r>
             <a:r>
-              <a:rPr sz="1600" i="0" b="0">
+              <a:rPr sz="1500" i="0" b="0">
                 <a:solidFill>
                   <a:srgbClr val="CE9178"/>
                 </a:solidFill>
@@ -17220,7 +17833,7 @@
               <a:t>" terminada, con return y todo."</a:t>
             </a:r>
             <a:r>
-              <a:rPr sz="1600" i="0" b="0">
+              <a:rPr sz="1500" i="0" b="0">
                 <a:solidFill>
                   <a:srgbClr val="D4D4D4"/>
                 </a:solidFill>
@@ -17232,11 +17845,11 @@
           <a:p>
             <a:pPr>
               <a:spcAft>
-                <a:spcPts val="342"/>
+                <a:spcPts val="321"/>
               </a:spcAft>
             </a:pPr>
             <a:r>
-              <a:rPr sz="1600" i="0" b="0">
+              <a:rPr sz="1500" i="0" b="0">
                 <a:solidFill>
                   <a:srgbClr val="D4D4D4"/>
                 </a:solidFill>
@@ -17248,11 +17861,11 @@
           <a:p>
             <a:pPr>
               <a:spcAft>
-                <a:spcPts val="342"/>
+                <a:spcPts val="321"/>
               </a:spcAft>
             </a:pPr>
             <a:r>
-              <a:rPr sz="1600" i="0" b="0">
+              <a:rPr sz="1500" i="0" b="0">
                 <a:solidFill>
                   <a:srgbClr val="D4D4D4"/>
                 </a:solidFill>
